--- a/docs/presentation/HiddenWatts-Prototype-I.pptx
+++ b/docs/presentation/HiddenWatts-Prototype-I.pptx
@@ -2,20 +2,20 @@
 <file path=ppt/presentation.xml><?xml version="1.0" encoding="utf-8"?>
 <p:presentation xmlns:p="http://schemas.openxmlformats.org/presentationml/2006/main">
   <p:sldMasterIdLst>
-    <p:sldMasterId xmlns:r="http://schemas.openxmlformats.org/officeDocument/2006/relationships" id="2147483648" r:id="Rc9cc17dede8747a2"/>
+    <p:sldMasterId xmlns:r="http://schemas.openxmlformats.org/officeDocument/2006/relationships" id="2147483648" r:id="Rbeb8658c207b406c"/>
   </p:sldMasterIdLst>
   <p:notesMasterIdLst>
-    <p:notesMasterId xmlns:r="http://schemas.openxmlformats.org/officeDocument/2006/relationships" r:id="Rc47d0716387c4fb9"/>
+    <p:notesMasterId xmlns:r="http://schemas.openxmlformats.org/officeDocument/2006/relationships" r:id="R71403d4320714e09"/>
   </p:notesMasterIdLst>
   <p:sldIdLst>
-    <p:sldId xmlns:r="http://schemas.openxmlformats.org/officeDocument/2006/relationships" id="256" r:id="R69e08d02a9024acc"/>
-    <p:sldId xmlns:r="http://schemas.openxmlformats.org/officeDocument/2006/relationships" id="257" r:id="R9a3b8ff7eaf74a2f"/>
-    <p:sldId xmlns:r="http://schemas.openxmlformats.org/officeDocument/2006/relationships" id="258" r:id="Rf4ee756328d2421d"/>
-    <p:sldId xmlns:r="http://schemas.openxmlformats.org/officeDocument/2006/relationships" id="259" r:id="R090a4cba7ad047fa"/>
-    <p:sldId xmlns:r="http://schemas.openxmlformats.org/officeDocument/2006/relationships" id="260" r:id="Rc8191888c336433c"/>
-    <p:sldId xmlns:r="http://schemas.openxmlformats.org/officeDocument/2006/relationships" id="261" r:id="Rd17db4b12e3a4cc7"/>
-    <p:sldId xmlns:r="http://schemas.openxmlformats.org/officeDocument/2006/relationships" id="262" r:id="R2a548046cd324e9e"/>
-    <p:sldId xmlns:r="http://schemas.openxmlformats.org/officeDocument/2006/relationships" id="263" r:id="Rb5c4161898d3434c"/>
+    <p:sldId xmlns:r="http://schemas.openxmlformats.org/officeDocument/2006/relationships" id="256" r:id="R87772b955b1e45bb"/>
+    <p:sldId xmlns:r="http://schemas.openxmlformats.org/officeDocument/2006/relationships" id="257" r:id="R55addca3b5db4702"/>
+    <p:sldId xmlns:r="http://schemas.openxmlformats.org/officeDocument/2006/relationships" id="258" r:id="R82ef83680038479b"/>
+    <p:sldId xmlns:r="http://schemas.openxmlformats.org/officeDocument/2006/relationships" id="259" r:id="Rc8c61550c29e4345"/>
+    <p:sldId xmlns:r="http://schemas.openxmlformats.org/officeDocument/2006/relationships" id="260" r:id="R3389541d59b54637"/>
+    <p:sldId xmlns:r="http://schemas.openxmlformats.org/officeDocument/2006/relationships" id="261" r:id="R38133fefcdbe4b1f"/>
+    <p:sldId xmlns:r="http://schemas.openxmlformats.org/officeDocument/2006/relationships" id="262" r:id="R2b0833d8502e4771"/>
+    <p:sldId xmlns:r="http://schemas.openxmlformats.org/officeDocument/2006/relationships" id="263" r:id="Rfc421dc3cabb4e46"/>
   </p:sldIdLst>
   <p:sldSz cx="12192000" cy="6858000"/>
   <p:notesSz cx="6858000" cy="9144000"/>
@@ -939,7 +939,7 @@
           <a:lstStyle xmlns:a="http://schemas.openxmlformats.org/drawingml/2006/main"/>
           <a:p xmlns:a="http://schemas.openxmlformats.org/drawingml/2006/main">
             <a:r>
-              <a:t>Repository URL verified public through the GitHub repository API. Godot project version and C# target checked against src/project.godot and src/HiddenWatts.csproj. Run instructions target Windows PC. Opening the editor imports assets before running the main menu.</a:t>
+              <a:t>Repository URL verified public through the GitHub repository API. Godot project version and C# target checked against src/project.godot and src/HiddenWatts.csproj. The primary play instructions use the standalone Windows x64 release with its bundled runtime. Godot and the .NET SDK are needed only for source development. The README links to the release download.</a:t>
             </a:r>
           </a:p>
         </p:txBody>
@@ -986,7 +986,7 @@
           <p:cNvPr id="3" name="Title">
             <a:extLst xmlns:a="http://schemas.openxmlformats.org/drawingml/2006/main">
               <a:ext uri="{FF2B5EF4-FFF2-40B4-BE49-F238E27FC236}">
-                <a16:creationId xmlns:a16="http://schemas.microsoft.com/office/drawing/2014/main" id="{33DAADFF-8DA0-47F6-BF3A-CCC903551099}"/>
+                <a16:creationId xmlns:a16="http://schemas.microsoft.com/office/drawing/2014/main" id="{E64B7825-54F1-47BE-B39D-9D388B876256}"/>
               </a:ext>
             </a:extLst>
           </p:cNvPr>
@@ -1215,7 +1215,7 @@
           <p:cNvPr id="2" name="Subtitle">
             <a:extLst xmlns:a="http://schemas.openxmlformats.org/drawingml/2006/main">
               <a:ext uri="{FF2B5EF4-FFF2-40B4-BE49-F238E27FC236}">
-                <a16:creationId xmlns:a16="http://schemas.microsoft.com/office/drawing/2014/main" id="{7129A641-4415-4742-A981-FB7FA0233D9D}"/>
+                <a16:creationId xmlns:a16="http://schemas.microsoft.com/office/drawing/2014/main" id="{BA84A903-944B-42EF-AA53-849465585908}"/>
               </a:ext>
             </a:extLst>
           </p:cNvPr>
@@ -1461,7 +1461,7 @@
           <p:cNvPr id="2" name="Section title">
             <a:extLst xmlns:a="http://schemas.openxmlformats.org/drawingml/2006/main">
               <a:ext uri="{FF2B5EF4-FFF2-40B4-BE49-F238E27FC236}">
-                <a16:creationId xmlns:a16="http://schemas.microsoft.com/office/drawing/2014/main" id="{C8909D43-7966-42B9-AF5B-1EE4FA5DCA96}"/>
+                <a16:creationId xmlns:a16="http://schemas.microsoft.com/office/drawing/2014/main" id="{96EAA281-A432-4B52-8F3B-17CC67DAACD0}"/>
               </a:ext>
             </a:extLst>
           </p:cNvPr>
@@ -1707,7 +1707,7 @@
           <p:cNvPr id="3" name="Title">
             <a:extLst xmlns:a="http://schemas.openxmlformats.org/drawingml/2006/main">
               <a:ext uri="{FF2B5EF4-FFF2-40B4-BE49-F238E27FC236}">
-                <a16:creationId xmlns:a16="http://schemas.microsoft.com/office/drawing/2014/main" id="{1E92BE37-1D02-4D57-81FC-A672C1AED4EE}"/>
+                <a16:creationId xmlns:a16="http://schemas.microsoft.com/office/drawing/2014/main" id="{D138B7D4-568E-4761-BB99-48325C4417B3}"/>
               </a:ext>
             </a:extLst>
           </p:cNvPr>
@@ -1936,7 +1936,7 @@
           <p:cNvPr id="2" name="Body">
             <a:extLst xmlns:a="http://schemas.openxmlformats.org/drawingml/2006/main">
               <a:ext uri="{FF2B5EF4-FFF2-40B4-BE49-F238E27FC236}">
-                <a16:creationId xmlns:a16="http://schemas.microsoft.com/office/drawing/2014/main" id="{A7035998-CA6B-4C91-AEB7-00127AB10E2A}"/>
+                <a16:creationId xmlns:a16="http://schemas.microsoft.com/office/drawing/2014/main" id="{65ABBD41-88EA-4C6C-AE03-446153E7DE6E}"/>
               </a:ext>
             </a:extLst>
           </p:cNvPr>
@@ -2182,7 +2182,7 @@
           <p:cNvPr id="4" name="Title">
             <a:extLst xmlns:a="http://schemas.openxmlformats.org/drawingml/2006/main">
               <a:ext uri="{FF2B5EF4-FFF2-40B4-BE49-F238E27FC236}">
-                <a16:creationId xmlns:a16="http://schemas.microsoft.com/office/drawing/2014/main" id="{CAFF306D-4C2E-43A9-9FFC-FF633CBE8CD2}"/>
+                <a16:creationId xmlns:a16="http://schemas.microsoft.com/office/drawing/2014/main" id="{8BA4B4FD-A9BB-4119-AEA2-EAEE8642C43A}"/>
               </a:ext>
             </a:extLst>
           </p:cNvPr>
@@ -2411,7 +2411,7 @@
           <p:cNvPr id="2" name="Left column">
             <a:extLst xmlns:a="http://schemas.openxmlformats.org/drawingml/2006/main">
               <a:ext uri="{FF2B5EF4-FFF2-40B4-BE49-F238E27FC236}">
-                <a16:creationId xmlns:a16="http://schemas.microsoft.com/office/drawing/2014/main" id="{E239E387-5BA1-4181-9414-B4FB042465B8}"/>
+                <a16:creationId xmlns:a16="http://schemas.microsoft.com/office/drawing/2014/main" id="{7D56248A-972F-4693-BEC4-6EC7EE06D335}"/>
               </a:ext>
             </a:extLst>
           </p:cNvPr>
@@ -2640,7 +2640,7 @@
           <p:cNvPr id="3" name="Right column">
             <a:extLst xmlns:a="http://schemas.openxmlformats.org/drawingml/2006/main">
               <a:ext uri="{FF2B5EF4-FFF2-40B4-BE49-F238E27FC236}">
-                <a16:creationId xmlns:a16="http://schemas.microsoft.com/office/drawing/2014/main" id="{0C9D5E35-B9F7-43A4-A27D-A8E816B66ED3}"/>
+                <a16:creationId xmlns:a16="http://schemas.microsoft.com/office/drawing/2014/main" id="{5CC3F447-20B0-495A-9412-3C246DB9BEE1}"/>
               </a:ext>
             </a:extLst>
           </p:cNvPr>
@@ -2886,7 +2886,7 @@
           <p:cNvPr id="3" name="Title">
             <a:extLst xmlns:a="http://schemas.openxmlformats.org/drawingml/2006/main">
               <a:ext uri="{FF2B5EF4-FFF2-40B4-BE49-F238E27FC236}">
-                <a16:creationId xmlns:a16="http://schemas.microsoft.com/office/drawing/2014/main" id="{BDC1C905-BB83-42DE-ABD4-45889408B3D5}"/>
+                <a16:creationId xmlns:a16="http://schemas.microsoft.com/office/drawing/2014/main" id="{A829AD02-3DF1-4459-8885-BAA0C6E31757}"/>
               </a:ext>
             </a:extLst>
           </p:cNvPr>
@@ -3115,7 +3115,7 @@
           <p:cNvPr id="2" name="Left column">
             <a:extLst xmlns:a="http://schemas.openxmlformats.org/drawingml/2006/main">
               <a:ext uri="{FF2B5EF4-FFF2-40B4-BE49-F238E27FC236}">
-                <a16:creationId xmlns:a16="http://schemas.microsoft.com/office/drawing/2014/main" id="{22CD942A-3EE8-4E6A-8931-9A051DBDCA6C}"/>
+                <a16:creationId xmlns:a16="http://schemas.microsoft.com/office/drawing/2014/main" id="{5273E3E7-467A-46E6-82E7-6200F022675F}"/>
               </a:ext>
             </a:extLst>
           </p:cNvPr>
@@ -3382,12 +3382,12 @@
   </p:cSld>
   <p:clrMap bg1="lt1" tx1="dk1" bg2="lt2" tx2="dk2" accent1="accent1" accent2="accent2" accent3="accent3" accent4="accent4" accent5="accent5" accent6="accent6" hlink="hlink" folHlink="folHlink"/>
   <p:sldLayoutIdLst>
-    <p:sldLayoutId xmlns:r="http://schemas.openxmlformats.org/officeDocument/2006/relationships" id="2147483649" r:id="R51214d6b39784674"/>
-    <p:sldLayoutId xmlns:r="http://schemas.openxmlformats.org/officeDocument/2006/relationships" id="2147483650" r:id="Recfee2fa56704e3f"/>
-    <p:sldLayoutId xmlns:r="http://schemas.openxmlformats.org/officeDocument/2006/relationships" id="2147483651" r:id="R9fc664ad87ab4f5c"/>
-    <p:sldLayoutId xmlns:r="http://schemas.openxmlformats.org/officeDocument/2006/relationships" id="2147483652" r:id="R957626cd7d13485e"/>
-    <p:sldLayoutId xmlns:r="http://schemas.openxmlformats.org/officeDocument/2006/relationships" id="2147483653" r:id="R142152d6075d415c"/>
-    <p:sldLayoutId xmlns:r="http://schemas.openxmlformats.org/officeDocument/2006/relationships" id="2147483654" r:id="R5cda4f93e4ec40d2"/>
+    <p:sldLayoutId xmlns:r="http://schemas.openxmlformats.org/officeDocument/2006/relationships" id="2147483649" r:id="Rc3f1bb6da9f648a2"/>
+    <p:sldLayoutId xmlns:r="http://schemas.openxmlformats.org/officeDocument/2006/relationships" id="2147483650" r:id="R0e862283cb364852"/>
+    <p:sldLayoutId xmlns:r="http://schemas.openxmlformats.org/officeDocument/2006/relationships" id="2147483651" r:id="Rdb9ef25e2d97438c"/>
+    <p:sldLayoutId xmlns:r="http://schemas.openxmlformats.org/officeDocument/2006/relationships" id="2147483652" r:id="R49a7eac4dfb2495f"/>
+    <p:sldLayoutId xmlns:r="http://schemas.openxmlformats.org/officeDocument/2006/relationships" id="2147483653" r:id="Ree731c08be4f461d"/>
+    <p:sldLayoutId xmlns:r="http://schemas.openxmlformats.org/officeDocument/2006/relationships" id="2147483654" r:id="R5521da537ffd4ff2"/>
   </p:sldLayoutIdLst>
   <p:txStyles>
     <p:titleStyle>
@@ -3938,7 +3938,7 @@
           <p:cNvPr id="7" name="">
             <a:extLst xmlns:a="http://schemas.openxmlformats.org/drawingml/2006/main">
               <a:ext uri="{FF2B5EF4-FFF2-40B4-BE49-F238E27FC236}">
-                <a16:creationId xmlns:a16="http://schemas.microsoft.com/office/drawing/2014/main" id="{949B2E7E-F76C-4FC8-9CEC-737F65B20ABB}"/>
+                <a16:creationId xmlns:a16="http://schemas.microsoft.com/office/drawing/2014/main" id="{7D383BCD-4723-4B7B-BCB8-6DE8CA46500D}"/>
               </a:ext>
             </a:extLst>
           </p:cNvPr>
@@ -4094,7 +4094,7 @@
           <p:cNvPr id="2" name="">
             <a:extLst xmlns:a="http://schemas.openxmlformats.org/drawingml/2006/main">
               <a:ext uri="{FF2B5EF4-FFF2-40B4-BE49-F238E27FC236}">
-                <a16:creationId xmlns:a16="http://schemas.microsoft.com/office/drawing/2014/main" id="{CE4C288D-44DA-46DE-8C97-CA0423F31640}"/>
+                <a16:creationId xmlns:a16="http://schemas.microsoft.com/office/drawing/2014/main" id="{741EB5F5-8BD1-4975-806D-6E3CB3AE0688}"/>
               </a:ext>
             </a:extLst>
           </p:cNvPr>
@@ -4250,7 +4250,7 @@
           <p:cNvPr id="3" name="">
             <a:extLst xmlns:a="http://schemas.openxmlformats.org/drawingml/2006/main">
               <a:ext uri="{FF2B5EF4-FFF2-40B4-BE49-F238E27FC236}">
-                <a16:creationId xmlns:a16="http://schemas.microsoft.com/office/drawing/2014/main" id="{DE8B3842-2393-4093-B7FC-94C303345939}"/>
+                <a16:creationId xmlns:a16="http://schemas.microsoft.com/office/drawing/2014/main" id="{281AEB5B-D3E0-472E-80CD-28B366EF98C7}"/>
               </a:ext>
             </a:extLst>
           </p:cNvPr>
@@ -4429,7 +4429,7 @@
           <p:cNvPr id="4" name="">
             <a:extLst xmlns:a="http://schemas.openxmlformats.org/drawingml/2006/main">
               <a:ext uri="{FF2B5EF4-FFF2-40B4-BE49-F238E27FC236}">
-                <a16:creationId xmlns:a16="http://schemas.microsoft.com/office/drawing/2014/main" id="{E5229F3F-BBB3-484F-A4BE-FF12CA387371}"/>
+                <a16:creationId xmlns:a16="http://schemas.microsoft.com/office/drawing/2014/main" id="{6D3858FF-4282-45AE-A281-4FB0240DB2BB}"/>
               </a:ext>
             </a:extLst>
           </p:cNvPr>
@@ -4585,7 +4585,7 @@
           <p:cNvPr id="5" name="">
             <a:extLst xmlns:a="http://schemas.openxmlformats.org/drawingml/2006/main">
               <a:ext uri="{FF2B5EF4-FFF2-40B4-BE49-F238E27FC236}">
-                <a16:creationId xmlns:a16="http://schemas.microsoft.com/office/drawing/2014/main" id="{2656FC2A-5C29-4BCD-9D3A-DE9A2ADB9C3B}"/>
+                <a16:creationId xmlns:a16="http://schemas.microsoft.com/office/drawing/2014/main" id="{3A886012-D0A1-441E-88FF-C985CF2758E6}"/>
               </a:ext>
             </a:extLst>
           </p:cNvPr>
@@ -4764,7 +4764,7 @@
           <p:cNvPr id="6" name="">
             <a:extLst xmlns:a="http://schemas.openxmlformats.org/drawingml/2006/main">
               <a:ext uri="{FF2B5EF4-FFF2-40B4-BE49-F238E27FC236}">
-                <a16:creationId xmlns:a16="http://schemas.microsoft.com/office/drawing/2014/main" id="{03B52137-3F42-4B26-9232-062A26E8B40D}"/>
+                <a16:creationId xmlns:a16="http://schemas.microsoft.com/office/drawing/2014/main" id="{48B3B1A4-4FD3-4017-98C2-02346DD1C466}"/>
               </a:ext>
             </a:extLst>
           </p:cNvPr>
@@ -4774,7 +4774,7 @@
           <p:nvPr/>
         </p:nvPicPr>
         <p:blipFill>
-          <a:blip xmlns:r="http://schemas.openxmlformats.org/officeDocument/2006/relationships" xmlns:a="http://schemas.openxmlformats.org/drawingml/2006/main" r:embed="R61f20677e6ce4ccd"/>
+          <a:blip xmlns:r="http://schemas.openxmlformats.org/officeDocument/2006/relationships" xmlns:a="http://schemas.openxmlformats.org/drawingml/2006/main" r:embed="R6aa3e059449242e4"/>
           <a:stretch xmlns:a="http://schemas.openxmlformats.org/drawingml/2006/main"/>
         </p:blipFill>
         <p:spPr>
@@ -4790,7 +4790,7 @@
     </p:spTree>
     <p:extLst>
       <p:ext uri="{BB962C8B-B14F-4D97-AF65-F5344CB8AC3E}">
-        <p14:creationId xmlns:p14="http://schemas.microsoft.com/office/powerpoint/2010/main" val="1345718107"/>
+        <p14:creationId xmlns:p14="http://schemas.microsoft.com/office/powerpoint/2010/main" val="913135595"/>
       </p:ext>
     </p:extLst>
   </p:cSld>
@@ -4821,7 +4821,7 @@
           <p:cNvPr id="7" name="">
             <a:extLst xmlns:a="http://schemas.openxmlformats.org/drawingml/2006/main">
               <a:ext uri="{FF2B5EF4-FFF2-40B4-BE49-F238E27FC236}">
-                <a16:creationId xmlns:a16="http://schemas.microsoft.com/office/drawing/2014/main" id="{6A0A9D22-E152-4BEA-A3E4-F37457FF9390}"/>
+                <a16:creationId xmlns:a16="http://schemas.microsoft.com/office/drawing/2014/main" id="{3536AD22-75AA-477C-9A7F-E99D174086C3}"/>
               </a:ext>
             </a:extLst>
           </p:cNvPr>
@@ -4977,7 +4977,7 @@
           <p:cNvPr id="2" name="">
             <a:extLst xmlns:a="http://schemas.openxmlformats.org/drawingml/2006/main">
               <a:ext uri="{FF2B5EF4-FFF2-40B4-BE49-F238E27FC236}">
-                <a16:creationId xmlns:a16="http://schemas.microsoft.com/office/drawing/2014/main" id="{0B8F6E91-2375-41B5-9FB4-E34A1C577191}"/>
+                <a16:creationId xmlns:a16="http://schemas.microsoft.com/office/drawing/2014/main" id="{7B2F3916-7EB6-41BF-808B-F0FF7DA0EDD9}"/>
               </a:ext>
             </a:extLst>
           </p:cNvPr>
@@ -5133,7 +5133,7 @@
           <p:cNvPr id="3" name="">
             <a:extLst xmlns:a="http://schemas.openxmlformats.org/drawingml/2006/main">
               <a:ext uri="{FF2B5EF4-FFF2-40B4-BE49-F238E27FC236}">
-                <a16:creationId xmlns:a16="http://schemas.microsoft.com/office/drawing/2014/main" id="{18FF6926-AE86-4520-940D-D7990CD01A2E}"/>
+                <a16:creationId xmlns:a16="http://schemas.microsoft.com/office/drawing/2014/main" id="{2033DD41-763C-4D09-9B89-0C35A3BA4780}"/>
               </a:ext>
             </a:extLst>
           </p:cNvPr>
@@ -5289,7 +5289,7 @@
           <p:cNvPr id="4" name="">
             <a:extLst xmlns:a="http://schemas.openxmlformats.org/drawingml/2006/main">
               <a:ext uri="{FF2B5EF4-FFF2-40B4-BE49-F238E27FC236}">
-                <a16:creationId xmlns:a16="http://schemas.microsoft.com/office/drawing/2014/main" id="{610D673F-8FDD-4699-8735-47BB325D407F}"/>
+                <a16:creationId xmlns:a16="http://schemas.microsoft.com/office/drawing/2014/main" id="{60F35BDB-D800-4DD2-9919-29468FCFE4C2}"/>
               </a:ext>
             </a:extLst>
           </p:cNvPr>
@@ -5445,7 +5445,7 @@
           <p:cNvPr id="5" name="">
             <a:extLst xmlns:a="http://schemas.openxmlformats.org/drawingml/2006/main">
               <a:ext uri="{FF2B5EF4-FFF2-40B4-BE49-F238E27FC236}">
-                <a16:creationId xmlns:a16="http://schemas.microsoft.com/office/drawing/2014/main" id="{4420450D-4BE1-4AC9-B4C1-4397814540AA}"/>
+                <a16:creationId xmlns:a16="http://schemas.microsoft.com/office/drawing/2014/main" id="{DA226BFF-7FBB-4C57-BCEE-B7E6BD44CD44}"/>
               </a:ext>
             </a:extLst>
           </p:cNvPr>
@@ -5455,7 +5455,7 @@
           <p:nvPr/>
         </p:nvPicPr>
         <p:blipFill>
-          <a:blip xmlns:r="http://schemas.openxmlformats.org/officeDocument/2006/relationships" xmlns:a="http://schemas.openxmlformats.org/drawingml/2006/main" r:embed="R28184a1a73e743c1"/>
+          <a:blip xmlns:r="http://schemas.openxmlformats.org/officeDocument/2006/relationships" xmlns:a="http://schemas.openxmlformats.org/drawingml/2006/main" r:embed="Rd8080fdf6e7b415e"/>
           <a:stretch xmlns:a="http://schemas.openxmlformats.org/drawingml/2006/main"/>
         </p:blipFill>
         <p:spPr>
@@ -5473,7 +5473,7 @@
           <p:cNvPr id="6" name="">
             <a:extLst xmlns:a="http://schemas.openxmlformats.org/drawingml/2006/main">
               <a:ext uri="{FF2B5EF4-FFF2-40B4-BE49-F238E27FC236}">
-                <a16:creationId xmlns:a16="http://schemas.microsoft.com/office/drawing/2014/main" id="{30148033-78CF-481B-812B-974864694E61}"/>
+                <a16:creationId xmlns:a16="http://schemas.microsoft.com/office/drawing/2014/main" id="{4699AEE5-95F7-408E-853A-E8869585B30E}"/>
               </a:ext>
             </a:extLst>
           </p:cNvPr>
@@ -5650,7 +5650,7 @@
     </p:spTree>
     <p:extLst>
       <p:ext uri="{BB962C8B-B14F-4D97-AF65-F5344CB8AC3E}">
-        <p14:creationId xmlns:p14="http://schemas.microsoft.com/office/powerpoint/2010/main" val="903911790"/>
+        <p14:creationId xmlns:p14="http://schemas.microsoft.com/office/powerpoint/2010/main" val="992685707"/>
       </p:ext>
     </p:extLst>
   </p:cSld>
@@ -5681,7 +5681,7 @@
           <p:cNvPr id="6" name="">
             <a:extLst xmlns:a="http://schemas.openxmlformats.org/drawingml/2006/main">
               <a:ext uri="{FF2B5EF4-FFF2-40B4-BE49-F238E27FC236}">
-                <a16:creationId xmlns:a16="http://schemas.microsoft.com/office/drawing/2014/main" id="{DD4A2B96-A23E-42C8-A1F9-FEB9233752DA}"/>
+                <a16:creationId xmlns:a16="http://schemas.microsoft.com/office/drawing/2014/main" id="{85CDD6CF-DE03-46E6-B7CD-71CAD5B8D5E7}"/>
               </a:ext>
             </a:extLst>
           </p:cNvPr>
@@ -5837,7 +5837,7 @@
           <p:cNvPr id="2" name="">
             <a:extLst xmlns:a="http://schemas.openxmlformats.org/drawingml/2006/main">
               <a:ext uri="{FF2B5EF4-FFF2-40B4-BE49-F238E27FC236}">
-                <a16:creationId xmlns:a16="http://schemas.microsoft.com/office/drawing/2014/main" id="{DB9EB2D5-B8F8-4569-9AA1-8436A97C27B9}"/>
+                <a16:creationId xmlns:a16="http://schemas.microsoft.com/office/drawing/2014/main" id="{CD63B7CE-ABC0-42FD-ABA8-886CBCB793CF}"/>
               </a:ext>
             </a:extLst>
           </p:cNvPr>
@@ -5993,7 +5993,7 @@
           <p:cNvPr id="3" name="">
             <a:extLst xmlns:a="http://schemas.openxmlformats.org/drawingml/2006/main">
               <a:ext uri="{FF2B5EF4-FFF2-40B4-BE49-F238E27FC236}">
-                <a16:creationId xmlns:a16="http://schemas.microsoft.com/office/drawing/2014/main" id="{2FA5F956-A9C0-4F48-9D89-55BC6911E2E6}"/>
+                <a16:creationId xmlns:a16="http://schemas.microsoft.com/office/drawing/2014/main" id="{52B0C037-750B-474C-811B-470C22E66044}"/>
               </a:ext>
             </a:extLst>
           </p:cNvPr>
@@ -6149,7 +6149,7 @@
           <p:cNvPr id="4" name="">
             <a:extLst xmlns:a="http://schemas.openxmlformats.org/drawingml/2006/main">
               <a:ext uri="{FF2B5EF4-FFF2-40B4-BE49-F238E27FC236}">
-                <a16:creationId xmlns:a16="http://schemas.microsoft.com/office/drawing/2014/main" id="{5A8B2BBC-64DD-4F77-9FAD-57AA0182440A}"/>
+                <a16:creationId xmlns:a16="http://schemas.microsoft.com/office/drawing/2014/main" id="{0C86947C-593B-4F3F-9B6F-A4490A8A1362}"/>
               </a:ext>
             </a:extLst>
           </p:cNvPr>
@@ -6305,7 +6305,7 @@
           <p:cNvPr id="5" name="">
             <a:extLst xmlns:a="http://schemas.openxmlformats.org/drawingml/2006/main">
               <a:ext uri="{FF2B5EF4-FFF2-40B4-BE49-F238E27FC236}">
-                <a16:creationId xmlns:a16="http://schemas.microsoft.com/office/drawing/2014/main" id="{B6534822-B8CA-4C7B-B31B-1F065701E42F}"/>
+                <a16:creationId xmlns:a16="http://schemas.microsoft.com/office/drawing/2014/main" id="{21E69E15-DA58-4E2A-B2D3-411B4B3C282F}"/>
               </a:ext>
             </a:extLst>
           </p:cNvPr>
@@ -6315,7 +6315,7 @@
           <p:nvPr/>
         </p:nvPicPr>
         <p:blipFill>
-          <a:blip xmlns:r="http://schemas.openxmlformats.org/officeDocument/2006/relationships" xmlns:a="http://schemas.openxmlformats.org/drawingml/2006/main" r:embed="R793641548f92440c"/>
+          <a:blip xmlns:r="http://schemas.openxmlformats.org/officeDocument/2006/relationships" xmlns:a="http://schemas.openxmlformats.org/drawingml/2006/main" r:embed="Rde2d46c187ea4ab3"/>
           <a:srcRect xmlns:a="http://schemas.openxmlformats.org/drawingml/2006/main" l="19618" t="6481" r="19618" b="6481"/>
           <a:stretch xmlns:a="http://schemas.openxmlformats.org/drawingml/2006/main"/>
         </p:blipFill>
@@ -6332,7 +6332,7 @@
     </p:spTree>
     <p:extLst>
       <p:ext uri="{BB962C8B-B14F-4D97-AF65-F5344CB8AC3E}">
-        <p14:creationId xmlns:p14="http://schemas.microsoft.com/office/powerpoint/2010/main" val="1762782744"/>
+        <p14:creationId xmlns:p14="http://schemas.microsoft.com/office/powerpoint/2010/main" val="577499230"/>
       </p:ext>
     </p:extLst>
   </p:cSld>
@@ -6363,7 +6363,7 @@
           <p:cNvPr id="6" name="">
             <a:extLst xmlns:a="http://schemas.openxmlformats.org/drawingml/2006/main">
               <a:ext uri="{FF2B5EF4-FFF2-40B4-BE49-F238E27FC236}">
-                <a16:creationId xmlns:a16="http://schemas.microsoft.com/office/drawing/2014/main" id="{BBBFE5A5-C007-4EA0-901E-99E58DD5A58A}"/>
+                <a16:creationId xmlns:a16="http://schemas.microsoft.com/office/drawing/2014/main" id="{960CB9F9-5DAB-4513-890D-6CD14D60A6E1}"/>
               </a:ext>
             </a:extLst>
           </p:cNvPr>
@@ -6519,7 +6519,7 @@
           <p:cNvPr id="2" name="">
             <a:extLst xmlns:a="http://schemas.openxmlformats.org/drawingml/2006/main">
               <a:ext uri="{FF2B5EF4-FFF2-40B4-BE49-F238E27FC236}">
-                <a16:creationId xmlns:a16="http://schemas.microsoft.com/office/drawing/2014/main" id="{27C6F1C7-DF21-4A06-9EC4-4A91ACBEBD48}"/>
+                <a16:creationId xmlns:a16="http://schemas.microsoft.com/office/drawing/2014/main" id="{FEC5E536-FD3F-4017-B581-BBA92A78E403}"/>
               </a:ext>
             </a:extLst>
           </p:cNvPr>
@@ -6675,7 +6675,7 @@
           <p:cNvPr id="3" name="">
             <a:extLst xmlns:a="http://schemas.openxmlformats.org/drawingml/2006/main">
               <a:ext uri="{FF2B5EF4-FFF2-40B4-BE49-F238E27FC236}">
-                <a16:creationId xmlns:a16="http://schemas.microsoft.com/office/drawing/2014/main" id="{71619628-AF4E-49C0-9F6F-DB88EDCE3B62}"/>
+                <a16:creationId xmlns:a16="http://schemas.microsoft.com/office/drawing/2014/main" id="{B060537A-2073-4BE3-A92F-04C31EEA824D}"/>
               </a:ext>
             </a:extLst>
           </p:cNvPr>
@@ -6831,7 +6831,7 @@
           <p:cNvPr id="4" name="">
             <a:extLst xmlns:a="http://schemas.openxmlformats.org/drawingml/2006/main">
               <a:ext uri="{FF2B5EF4-FFF2-40B4-BE49-F238E27FC236}">
-                <a16:creationId xmlns:a16="http://schemas.microsoft.com/office/drawing/2014/main" id="{2CF8B8E9-0F61-4EF6-BB1A-8C0AD0EDE300}"/>
+                <a16:creationId xmlns:a16="http://schemas.microsoft.com/office/drawing/2014/main" id="{97DB904D-4EE4-435D-8744-18D8A5E17093}"/>
               </a:ext>
             </a:extLst>
           </p:cNvPr>
@@ -6987,7 +6987,7 @@
           <p:cNvPr id="5" name="">
             <a:extLst xmlns:a="http://schemas.openxmlformats.org/drawingml/2006/main">
               <a:ext uri="{FF2B5EF4-FFF2-40B4-BE49-F238E27FC236}">
-                <a16:creationId xmlns:a16="http://schemas.microsoft.com/office/drawing/2014/main" id="{687EAE4A-CD12-4A01-999C-7D94FE38FCE1}"/>
+                <a16:creationId xmlns:a16="http://schemas.microsoft.com/office/drawing/2014/main" id="{E8C8BB8A-DC1A-4075-A81D-C6D8E33A7DD7}"/>
               </a:ext>
             </a:extLst>
           </p:cNvPr>
@@ -6997,7 +6997,7 @@
           <p:nvPr/>
         </p:nvPicPr>
         <p:blipFill>
-          <a:blip xmlns:r="http://schemas.openxmlformats.org/officeDocument/2006/relationships" xmlns:a="http://schemas.openxmlformats.org/drawingml/2006/main" r:embed="Rc8b7653e9d964fd0"/>
+          <a:blip xmlns:r="http://schemas.openxmlformats.org/officeDocument/2006/relationships" xmlns:a="http://schemas.openxmlformats.org/drawingml/2006/main" r:embed="R75d7b0efec304e12"/>
           <a:srcRect xmlns:a="http://schemas.openxmlformats.org/drawingml/2006/main" l="19618" t="6481" r="19618" b="6481"/>
           <a:stretch xmlns:a="http://schemas.openxmlformats.org/drawingml/2006/main"/>
         </p:blipFill>
@@ -7014,7 +7014,7 @@
     </p:spTree>
     <p:extLst>
       <p:ext uri="{BB962C8B-B14F-4D97-AF65-F5344CB8AC3E}">
-        <p14:creationId xmlns:p14="http://schemas.microsoft.com/office/powerpoint/2010/main" val="1451803924"/>
+        <p14:creationId xmlns:p14="http://schemas.microsoft.com/office/powerpoint/2010/main" val="2133582795"/>
       </p:ext>
     </p:extLst>
   </p:cSld>
@@ -7045,7 +7045,7 @@
           <p:cNvPr id="6" name="">
             <a:extLst xmlns:a="http://schemas.openxmlformats.org/drawingml/2006/main">
               <a:ext uri="{FF2B5EF4-FFF2-40B4-BE49-F238E27FC236}">
-                <a16:creationId xmlns:a16="http://schemas.microsoft.com/office/drawing/2014/main" id="{8FB0A08D-5CF3-464F-8FEC-A360B04057A9}"/>
+                <a16:creationId xmlns:a16="http://schemas.microsoft.com/office/drawing/2014/main" id="{9A20F115-A731-4D53-AE2B-16090076C379}"/>
               </a:ext>
             </a:extLst>
           </p:cNvPr>
@@ -7201,7 +7201,7 @@
           <p:cNvPr id="2" name="">
             <a:extLst xmlns:a="http://schemas.openxmlformats.org/drawingml/2006/main">
               <a:ext uri="{FF2B5EF4-FFF2-40B4-BE49-F238E27FC236}">
-                <a16:creationId xmlns:a16="http://schemas.microsoft.com/office/drawing/2014/main" id="{B4D990B3-F34E-4B62-A810-1831E1859FD3}"/>
+                <a16:creationId xmlns:a16="http://schemas.microsoft.com/office/drawing/2014/main" id="{076E258F-EB04-432C-8CBA-7939946C8D40}"/>
               </a:ext>
             </a:extLst>
           </p:cNvPr>
@@ -7380,7 +7380,7 @@
           <p:cNvPr id="3" name="">
             <a:extLst xmlns:a="http://schemas.openxmlformats.org/drawingml/2006/main">
               <a:ext uri="{FF2B5EF4-FFF2-40B4-BE49-F238E27FC236}">
-                <a16:creationId xmlns:a16="http://schemas.microsoft.com/office/drawing/2014/main" id="{E8D805D5-ED54-4C2A-9C31-40C2E77EA97D}"/>
+                <a16:creationId xmlns:a16="http://schemas.microsoft.com/office/drawing/2014/main" id="{AEDF78F7-B5CF-460F-A4E6-3F12D6A9A974}"/>
               </a:ext>
             </a:extLst>
           </p:cNvPr>
@@ -7559,7 +7559,7 @@
           <p:cNvPr id="4" name="">
             <a:extLst xmlns:a="http://schemas.openxmlformats.org/drawingml/2006/main">
               <a:ext uri="{FF2B5EF4-FFF2-40B4-BE49-F238E27FC236}">
-                <a16:creationId xmlns:a16="http://schemas.microsoft.com/office/drawing/2014/main" id="{77CB3772-BF48-41EC-9A7C-00B597B57500}"/>
+                <a16:creationId xmlns:a16="http://schemas.microsoft.com/office/drawing/2014/main" id="{A5CBE070-85EE-4ED7-A1E4-992FED5FCAFC}"/>
               </a:ext>
             </a:extLst>
           </p:cNvPr>
@@ -7715,7 +7715,7 @@
           <p:cNvPr id="5" name="">
             <a:extLst xmlns:a="http://schemas.openxmlformats.org/drawingml/2006/main">
               <a:ext uri="{FF2B5EF4-FFF2-40B4-BE49-F238E27FC236}">
-                <a16:creationId xmlns:a16="http://schemas.microsoft.com/office/drawing/2014/main" id="{14E5F27D-7FE9-4E01-98A0-8A51F0731FAB}"/>
+                <a16:creationId xmlns:a16="http://schemas.microsoft.com/office/drawing/2014/main" id="{7F9036E4-0F47-461B-8B97-26F78E2BDC21}"/>
               </a:ext>
             </a:extLst>
           </p:cNvPr>
@@ -7725,7 +7725,7 @@
           <p:nvPr/>
         </p:nvPicPr>
         <p:blipFill>
-          <a:blip xmlns:r="http://schemas.openxmlformats.org/officeDocument/2006/relationships" xmlns:a="http://schemas.openxmlformats.org/drawingml/2006/main" r:embed="Rf112dd6e398645d0"/>
+          <a:blip xmlns:r="http://schemas.openxmlformats.org/officeDocument/2006/relationships" xmlns:a="http://schemas.openxmlformats.org/drawingml/2006/main" r:embed="R68510fab55084813"/>
           <a:srcRect xmlns:a="http://schemas.openxmlformats.org/drawingml/2006/main" l="19618" t="6481" r="19618" b="6481"/>
           <a:stretch xmlns:a="http://schemas.openxmlformats.org/drawingml/2006/main"/>
         </p:blipFill>
@@ -7742,7 +7742,7 @@
     </p:spTree>
     <p:extLst>
       <p:ext uri="{BB962C8B-B14F-4D97-AF65-F5344CB8AC3E}">
-        <p14:creationId xmlns:p14="http://schemas.microsoft.com/office/powerpoint/2010/main" val="1783498666"/>
+        <p14:creationId xmlns:p14="http://schemas.microsoft.com/office/powerpoint/2010/main" val="1324733478"/>
       </p:ext>
     </p:extLst>
   </p:cSld>
@@ -7773,7 +7773,7 @@
           <p:cNvPr id="10" name="">
             <a:extLst xmlns:a="http://schemas.openxmlformats.org/drawingml/2006/main">
               <a:ext uri="{FF2B5EF4-FFF2-40B4-BE49-F238E27FC236}">
-                <a16:creationId xmlns:a16="http://schemas.microsoft.com/office/drawing/2014/main" id="{84AFB034-6594-4B58-90DC-9EB65F071F57}"/>
+                <a16:creationId xmlns:a16="http://schemas.microsoft.com/office/drawing/2014/main" id="{FE9D33A3-4DBF-4B2C-A328-2D9F8ED39F19}"/>
               </a:ext>
             </a:extLst>
           </p:cNvPr>
@@ -7929,7 +7929,7 @@
           <p:cNvPr id="2" name="">
             <a:extLst xmlns:a="http://schemas.openxmlformats.org/drawingml/2006/main">
               <a:ext uri="{FF2B5EF4-FFF2-40B4-BE49-F238E27FC236}">
-                <a16:creationId xmlns:a16="http://schemas.microsoft.com/office/drawing/2014/main" id="{DF905961-A75A-4898-8016-DB4A3A29EDEA}"/>
+                <a16:creationId xmlns:a16="http://schemas.microsoft.com/office/drawing/2014/main" id="{21DC23E0-563F-41A3-A5A3-E3BD4677941B}"/>
               </a:ext>
             </a:extLst>
           </p:cNvPr>
@@ -8085,7 +8085,7 @@
           <p:cNvPr id="3" name="">
             <a:extLst xmlns:a="http://schemas.openxmlformats.org/drawingml/2006/main">
               <a:ext uri="{FF2B5EF4-FFF2-40B4-BE49-F238E27FC236}">
-                <a16:creationId xmlns:a16="http://schemas.microsoft.com/office/drawing/2014/main" id="{86281183-FFB0-46B7-B11B-ED75598D4D67}"/>
+                <a16:creationId xmlns:a16="http://schemas.microsoft.com/office/drawing/2014/main" id="{A7151ECD-1641-40CE-8091-88FB31759684}"/>
               </a:ext>
             </a:extLst>
           </p:cNvPr>
@@ -8241,7 +8241,7 @@
           <p:cNvPr id="4" name="">
             <a:extLst xmlns:a="http://schemas.openxmlformats.org/drawingml/2006/main">
               <a:ext uri="{FF2B5EF4-FFF2-40B4-BE49-F238E27FC236}">
-                <a16:creationId xmlns:a16="http://schemas.microsoft.com/office/drawing/2014/main" id="{76F1189A-FE7E-40F3-B06F-9A105BE42D84}"/>
+                <a16:creationId xmlns:a16="http://schemas.microsoft.com/office/drawing/2014/main" id="{3D2FE0B8-4DB9-4504-ABC8-8485B0273882}"/>
               </a:ext>
             </a:extLst>
           </p:cNvPr>
@@ -8397,7 +8397,7 @@
           <p:cNvPr id="5" name="">
             <a:extLst xmlns:a="http://schemas.openxmlformats.org/drawingml/2006/main">
               <a:ext uri="{FF2B5EF4-FFF2-40B4-BE49-F238E27FC236}">
-                <a16:creationId xmlns:a16="http://schemas.microsoft.com/office/drawing/2014/main" id="{8B9E4215-8252-4DD2-B5B6-C23E840F97D6}"/>
+                <a16:creationId xmlns:a16="http://schemas.microsoft.com/office/drawing/2014/main" id="{C3C4ABAF-9451-4C58-B4E4-C6DE7010C6F8}"/>
               </a:ext>
             </a:extLst>
           </p:cNvPr>
@@ -8553,7 +8553,7 @@
           <p:cNvPr id="6" name="">
             <a:extLst xmlns:a="http://schemas.openxmlformats.org/drawingml/2006/main">
               <a:ext uri="{FF2B5EF4-FFF2-40B4-BE49-F238E27FC236}">
-                <a16:creationId xmlns:a16="http://schemas.microsoft.com/office/drawing/2014/main" id="{C6867539-BE16-4806-A2CA-A8CFE94991EB}"/>
+                <a16:creationId xmlns:a16="http://schemas.microsoft.com/office/drawing/2014/main" id="{3BD8C399-07D1-45F4-8273-9AD28A1C11CB}"/>
               </a:ext>
             </a:extLst>
           </p:cNvPr>
@@ -8709,7 +8709,7 @@
           <p:cNvPr id="7" name="">
             <a:extLst xmlns:a="http://schemas.openxmlformats.org/drawingml/2006/main">
               <a:ext uri="{FF2B5EF4-FFF2-40B4-BE49-F238E27FC236}">
-                <a16:creationId xmlns:a16="http://schemas.microsoft.com/office/drawing/2014/main" id="{09F445F0-8169-4541-AEF8-2197DA80CFB6}"/>
+                <a16:creationId xmlns:a16="http://schemas.microsoft.com/office/drawing/2014/main" id="{E039CAB7-D609-4B48-A894-A9802066B2B1}"/>
               </a:ext>
             </a:extLst>
           </p:cNvPr>
@@ -8865,7 +8865,7 @@
           <p:cNvPr id="8" name="">
             <a:extLst xmlns:a="http://schemas.openxmlformats.org/drawingml/2006/main">
               <a:ext uri="{FF2B5EF4-FFF2-40B4-BE49-F238E27FC236}">
-                <a16:creationId xmlns:a16="http://schemas.microsoft.com/office/drawing/2014/main" id="{FAD509F8-FACE-4969-8285-C9421F709541}"/>
+                <a16:creationId xmlns:a16="http://schemas.microsoft.com/office/drawing/2014/main" id="{62940D55-036B-4350-A697-0C6E9F610008}"/>
               </a:ext>
             </a:extLst>
           </p:cNvPr>
@@ -9021,7 +9021,7 @@
           <p:cNvPr id="9" name="">
             <a:extLst xmlns:a="http://schemas.openxmlformats.org/drawingml/2006/main">
               <a:ext uri="{FF2B5EF4-FFF2-40B4-BE49-F238E27FC236}">
-                <a16:creationId xmlns:a16="http://schemas.microsoft.com/office/drawing/2014/main" id="{D6B057E9-AE4B-4248-AF9C-8C00518DC11F}"/>
+                <a16:creationId xmlns:a16="http://schemas.microsoft.com/office/drawing/2014/main" id="{9CAC2DAF-B868-443A-9BE1-212BB7004004}"/>
               </a:ext>
             </a:extLst>
           </p:cNvPr>
@@ -9175,7 +9175,7 @@
     </p:spTree>
     <p:extLst>
       <p:ext uri="{BB962C8B-B14F-4D97-AF65-F5344CB8AC3E}">
-        <p14:creationId xmlns:p14="http://schemas.microsoft.com/office/powerpoint/2010/main" val="1311949541"/>
+        <p14:creationId xmlns:p14="http://schemas.microsoft.com/office/powerpoint/2010/main" val="1192454381"/>
       </p:ext>
     </p:extLst>
   </p:cSld>
@@ -9206,7 +9206,7 @@
           <p:cNvPr id="11" name="">
             <a:extLst xmlns:a="http://schemas.openxmlformats.org/drawingml/2006/main">
               <a:ext uri="{FF2B5EF4-FFF2-40B4-BE49-F238E27FC236}">
-                <a16:creationId xmlns:a16="http://schemas.microsoft.com/office/drawing/2014/main" id="{6BA5850C-968F-427D-9C56-410A206463C6}"/>
+                <a16:creationId xmlns:a16="http://schemas.microsoft.com/office/drawing/2014/main" id="{D1AC9840-3941-4A26-B746-DCB29DC4B41A}"/>
               </a:ext>
             </a:extLst>
           </p:cNvPr>
@@ -9362,7 +9362,7 @@
           <p:cNvPr id="2" name="">
             <a:extLst xmlns:a="http://schemas.openxmlformats.org/drawingml/2006/main">
               <a:ext uri="{FF2B5EF4-FFF2-40B4-BE49-F238E27FC236}">
-                <a16:creationId xmlns:a16="http://schemas.microsoft.com/office/drawing/2014/main" id="{FA7725EF-2200-4A63-8583-8AF61745EB3B}"/>
+                <a16:creationId xmlns:a16="http://schemas.microsoft.com/office/drawing/2014/main" id="{6F05D278-8B37-4CD5-A7C6-AC80A874365E}"/>
               </a:ext>
             </a:extLst>
           </p:cNvPr>
@@ -9518,7 +9518,7 @@
           <p:cNvPr id="3" name="">
             <a:extLst xmlns:a="http://schemas.openxmlformats.org/drawingml/2006/main">
               <a:ext uri="{FF2B5EF4-FFF2-40B4-BE49-F238E27FC236}">
-                <a16:creationId xmlns:a16="http://schemas.microsoft.com/office/drawing/2014/main" id="{0FE06797-F32D-45B2-BBD1-6C75E701C68F}"/>
+                <a16:creationId xmlns:a16="http://schemas.microsoft.com/office/drawing/2014/main" id="{2184BBFA-B5DC-4F17-94CE-5C1E5A02EB5B}"/>
               </a:ext>
             </a:extLst>
           </p:cNvPr>
@@ -9674,7 +9674,7 @@
           <p:cNvPr id="4" name="">
             <a:extLst xmlns:a="http://schemas.openxmlformats.org/drawingml/2006/main">
               <a:ext uri="{FF2B5EF4-FFF2-40B4-BE49-F238E27FC236}">
-                <a16:creationId xmlns:a16="http://schemas.microsoft.com/office/drawing/2014/main" id="{3CA2AD14-53CC-49AF-8BA7-95B5DB74B203}"/>
+                <a16:creationId xmlns:a16="http://schemas.microsoft.com/office/drawing/2014/main" id="{47130F15-3C91-4CB6-A4C4-19E7791213DC}"/>
               </a:ext>
             </a:extLst>
           </p:cNvPr>
@@ -9830,7 +9830,7 @@
           <p:cNvPr id="5" name="">
             <a:extLst xmlns:a="http://schemas.openxmlformats.org/drawingml/2006/main">
               <a:ext uri="{FF2B5EF4-FFF2-40B4-BE49-F238E27FC236}">
-                <a16:creationId xmlns:a16="http://schemas.microsoft.com/office/drawing/2014/main" id="{9465CC34-8F51-4345-9A1A-07EC0A360BFB}"/>
+                <a16:creationId xmlns:a16="http://schemas.microsoft.com/office/drawing/2014/main" id="{502ED3A6-52DD-4D74-A21F-3AA8E556B613}"/>
               </a:ext>
             </a:extLst>
           </p:cNvPr>
@@ -9986,7 +9986,7 @@
           <p:cNvPr id="6" name="">
             <a:extLst xmlns:a="http://schemas.openxmlformats.org/drawingml/2006/main">
               <a:ext uri="{FF2B5EF4-FFF2-40B4-BE49-F238E27FC236}">
-                <a16:creationId xmlns:a16="http://schemas.microsoft.com/office/drawing/2014/main" id="{EBEEE588-A71C-4550-A4A6-88AFC20E6F5B}"/>
+                <a16:creationId xmlns:a16="http://schemas.microsoft.com/office/drawing/2014/main" id="{7F7890FD-F66E-4F3F-BCC5-D89BDB1273AD}"/>
               </a:ext>
             </a:extLst>
           </p:cNvPr>
@@ -10142,7 +10142,7 @@
           <p:cNvPr id="7" name="">
             <a:extLst xmlns:a="http://schemas.openxmlformats.org/drawingml/2006/main">
               <a:ext uri="{FF2B5EF4-FFF2-40B4-BE49-F238E27FC236}">
-                <a16:creationId xmlns:a16="http://schemas.microsoft.com/office/drawing/2014/main" id="{F844B39E-0396-4327-8033-364502FFF9E8}"/>
+                <a16:creationId xmlns:a16="http://schemas.microsoft.com/office/drawing/2014/main" id="{8C4C6A8F-BD4C-45CC-873B-24AB0E86C556}"/>
               </a:ext>
             </a:extLst>
           </p:cNvPr>
@@ -10298,7 +10298,7 @@
           <p:cNvPr id="8" name="">
             <a:extLst xmlns:a="http://schemas.openxmlformats.org/drawingml/2006/main">
               <a:ext uri="{FF2B5EF4-FFF2-40B4-BE49-F238E27FC236}">
-                <a16:creationId xmlns:a16="http://schemas.microsoft.com/office/drawing/2014/main" id="{97E1A0EF-DE51-4424-9A46-0B34C53245A3}"/>
+                <a16:creationId xmlns:a16="http://schemas.microsoft.com/office/drawing/2014/main" id="{D8775DE6-0B0E-4EA0-B7AC-0B2FAEF28CA3}"/>
               </a:ext>
             </a:extLst>
           </p:cNvPr>
@@ -10454,7 +10454,7 @@
           <p:cNvPr id="9" name="">
             <a:extLst xmlns:a="http://schemas.openxmlformats.org/drawingml/2006/main">
               <a:ext uri="{FF2B5EF4-FFF2-40B4-BE49-F238E27FC236}">
-                <a16:creationId xmlns:a16="http://schemas.microsoft.com/office/drawing/2014/main" id="{1C53A5A6-E52F-4E9C-8E9B-D2D38EF0E797}"/>
+                <a16:creationId xmlns:a16="http://schemas.microsoft.com/office/drawing/2014/main" id="{62863F89-D50F-4EB7-A460-178FA54A6572}"/>
               </a:ext>
             </a:extLst>
           </p:cNvPr>
@@ -10610,7 +10610,7 @@
           <p:cNvPr id="10" name="">
             <a:extLst xmlns:a="http://schemas.openxmlformats.org/drawingml/2006/main">
               <a:ext uri="{FF2B5EF4-FFF2-40B4-BE49-F238E27FC236}">
-                <a16:creationId xmlns:a16="http://schemas.microsoft.com/office/drawing/2014/main" id="{EF2F07E1-1BC2-4087-85E1-CE4D14958940}"/>
+                <a16:creationId xmlns:a16="http://schemas.microsoft.com/office/drawing/2014/main" id="{D89CBFE2-79B6-4A06-BC67-B20C9FBC8E82}"/>
               </a:ext>
             </a:extLst>
           </p:cNvPr>
@@ -10764,7 +10764,7 @@
     </p:spTree>
     <p:extLst>
       <p:ext uri="{BB962C8B-B14F-4D97-AF65-F5344CB8AC3E}">
-        <p14:creationId xmlns:p14="http://schemas.microsoft.com/office/powerpoint/2010/main" val="1636309643"/>
+        <p14:creationId xmlns:p14="http://schemas.microsoft.com/office/powerpoint/2010/main" val="1717973470"/>
       </p:ext>
     </p:extLst>
   </p:cSld>
@@ -10795,7 +10795,7 @@
           <p:cNvPr id="8" name="">
             <a:extLst xmlns:a="http://schemas.openxmlformats.org/drawingml/2006/main">
               <a:ext uri="{FF2B5EF4-FFF2-40B4-BE49-F238E27FC236}">
-                <a16:creationId xmlns:a16="http://schemas.microsoft.com/office/drawing/2014/main" id="{86AC5738-DC00-416D-AA54-0C85E4995033}"/>
+                <a16:creationId xmlns:a16="http://schemas.microsoft.com/office/drawing/2014/main" id="{64ABE960-ABEB-4887-B015-63B03AF01588}"/>
               </a:ext>
             </a:extLst>
           </p:cNvPr>
@@ -10951,7 +10951,7 @@
           <p:cNvPr id="2" name="">
             <a:extLst xmlns:a="http://schemas.openxmlformats.org/drawingml/2006/main">
               <a:ext uri="{FF2B5EF4-FFF2-40B4-BE49-F238E27FC236}">
-                <a16:creationId xmlns:a16="http://schemas.microsoft.com/office/drawing/2014/main" id="{6563C567-D269-4807-9CDE-F0919442ED29}"/>
+                <a16:creationId xmlns:a16="http://schemas.microsoft.com/office/drawing/2014/main" id="{AE55E582-386C-4EC5-84F3-0FD992D9B589}"/>
               </a:ext>
             </a:extLst>
           </p:cNvPr>
@@ -11107,7 +11107,7 @@
           <p:cNvPr id="3" name="">
             <a:extLst xmlns:a="http://schemas.openxmlformats.org/drawingml/2006/main">
               <a:ext uri="{FF2B5EF4-FFF2-40B4-BE49-F238E27FC236}">
-                <a16:creationId xmlns:a16="http://schemas.microsoft.com/office/drawing/2014/main" id="{7F2FE56F-665D-4205-B862-5EA2A3A55C3B}"/>
+                <a16:creationId xmlns:a16="http://schemas.microsoft.com/office/drawing/2014/main" id="{2F2914D3-E9B3-47E3-B573-64609524307B}"/>
               </a:ext>
             </a:extLst>
           </p:cNvPr>
@@ -11253,7 +11253,7 @@
                 <a:ea typeface="Arial"/>
                 <a:cs typeface="Arial"/>
               </a:rPr>
-              <a:t>1. Download or clone the public repository.</a:t>
+              <a:t>1. Open Releases and download the Windows x64 ZIP.</a:t>
             </a:r>
           </a:p>
         </p:txBody>
@@ -11263,7 +11263,7 @@
           <p:cNvPr id="4" name="">
             <a:extLst xmlns:a="http://schemas.openxmlformats.org/drawingml/2006/main">
               <a:ext uri="{FF2B5EF4-FFF2-40B4-BE49-F238E27FC236}">
-                <a16:creationId xmlns:a16="http://schemas.microsoft.com/office/drawing/2014/main" id="{1106F75E-FF9B-4F19-AF8E-6CDC668C10D1}"/>
+                <a16:creationId xmlns:a16="http://schemas.microsoft.com/office/drawing/2014/main" id="{9643013C-1785-440B-BD1A-AB36EBE34314}"/>
               </a:ext>
             </a:extLst>
           </p:cNvPr>
@@ -11409,7 +11409,7 @@
                 <a:ea typeface="Arial"/>
                 <a:cs typeface="Arial"/>
               </a:rPr>
-              <a:t>2. Install Godot 4.7.2 .NET and the .NET 8 SDK.</a:t>
+              <a:t>2. Extract the whole ZIP into a folder.</a:t>
             </a:r>
           </a:p>
         </p:txBody>
@@ -11419,7 +11419,7 @@
           <p:cNvPr id="5" name="">
             <a:extLst xmlns:a="http://schemas.openxmlformats.org/drawingml/2006/main">
               <a:ext uri="{FF2B5EF4-FFF2-40B4-BE49-F238E27FC236}">
-                <a16:creationId xmlns:a16="http://schemas.microsoft.com/office/drawing/2014/main" id="{D8FB3D41-F566-4AFE-9401-96C01F8C8087}"/>
+                <a16:creationId xmlns:a16="http://schemas.microsoft.com/office/drawing/2014/main" id="{030A7BBE-8D91-4540-B379-99788903FA34}"/>
               </a:ext>
             </a:extLst>
           </p:cNvPr>
@@ -11565,7 +11565,7 @@
                 <a:ea typeface="Arial"/>
                 <a:cs typeface="Arial"/>
               </a:rPr>
-              <a:t>3. Import src/project.godot in Godot and build the C# project.</a:t>
+              <a:t>3. Launch HiddenWatts.exe and choose Begin investigation.</a:t>
             </a:r>
           </a:p>
         </p:txBody>
@@ -11575,7 +11575,7 @@
           <p:cNvPr id="6" name="">
             <a:extLst xmlns:a="http://schemas.openxmlformats.org/drawingml/2006/main">
               <a:ext uri="{FF2B5EF4-FFF2-40B4-BE49-F238E27FC236}">
-                <a16:creationId xmlns:a16="http://schemas.microsoft.com/office/drawing/2014/main" id="{785B9253-83B4-4FBD-82CA-A3067094C9AA}"/>
+                <a16:creationId xmlns:a16="http://schemas.microsoft.com/office/drawing/2014/main" id="{2E8E86BE-609F-4935-8422-5A3505C1BFB2}"/>
               </a:ext>
             </a:extLst>
           </p:cNvPr>
@@ -11721,7 +11721,7 @@
                 <a:ea typeface="Arial"/>
                 <a:cs typeface="Arial"/>
               </a:rPr>
-              <a:t>4. Press F5, then choose Begin investigation.</a:t>
+              <a:t>4. Keep the executable, PCK and data folder together.</a:t>
             </a:r>
           </a:p>
         </p:txBody>
@@ -11731,7 +11731,7 @@
           <p:cNvPr id="7" name="">
             <a:extLst xmlns:a="http://schemas.openxmlformats.org/drawingml/2006/main">
               <a:ext uri="{FF2B5EF4-FFF2-40B4-BE49-F238E27FC236}">
-                <a16:creationId xmlns:a16="http://schemas.microsoft.com/office/drawing/2014/main" id="{6A1DE878-139A-4CB1-A22F-38E1BD19BC7C}"/>
+                <a16:creationId xmlns:a16="http://schemas.microsoft.com/office/drawing/2014/main" id="{47DD91B1-DD5D-4EC8-91FD-A8EDA5032038}"/>
               </a:ext>
             </a:extLst>
           </p:cNvPr>
@@ -11877,7 +11877,7 @@
                 <a:ea typeface="Arial"/>
                 <a:cs typeface="Arial"/>
               </a:rPr>
-              <a:t>The README includes build commands, controls and a short demo walkthrough.</a:t>
+              <a:t>No Godot or .NET installation needed. The download includes the runtime.</a:t>
             </a:r>
           </a:p>
         </p:txBody>
@@ -11885,7 +11885,7 @@
     </p:spTree>
     <p:extLst>
       <p:ext uri="{BB962C8B-B14F-4D97-AF65-F5344CB8AC3E}">
-        <p14:creationId xmlns:p14="http://schemas.microsoft.com/office/powerpoint/2010/main" val="1468585455"/>
+        <p14:creationId xmlns:p14="http://schemas.microsoft.com/office/powerpoint/2010/main" val="1182762445"/>
       </p:ext>
     </p:extLst>
   </p:cSld>

--- a/docs/presentation/HiddenWatts-Prototype-I.pptx
+++ b/docs/presentation/HiddenWatts-Prototype-I.pptx
@@ -1,33 +1,127 @@
 
 <file path=ppt/presentation.xml><?xml version="1.0" encoding="utf-8"?>
-<p:presentation xmlns:p="http://schemas.openxmlformats.org/presentationml/2006/main">
+<p:presentation xmlns:a="http://schemas.openxmlformats.org/drawingml/2006/main" xmlns:r="http://schemas.openxmlformats.org/officeDocument/2006/relationships" xmlns:p="http://schemas.openxmlformats.org/presentationml/2006/main">
   <p:sldMasterIdLst>
-    <p:sldMasterId xmlns:r="http://schemas.openxmlformats.org/officeDocument/2006/relationships" id="2147483648" r:id="Rbeb8658c207b406c"/>
+    <p:sldMasterId id="2147483648" r:id="rId1"/>
   </p:sldMasterIdLst>
   <p:notesMasterIdLst>
-    <p:notesMasterId xmlns:r="http://schemas.openxmlformats.org/officeDocument/2006/relationships" r:id="R71403d4320714e09"/>
+    <p:notesMasterId r:id="rId9"/>
   </p:notesMasterIdLst>
   <p:sldIdLst>
-    <p:sldId xmlns:r="http://schemas.openxmlformats.org/officeDocument/2006/relationships" id="256" r:id="R87772b955b1e45bb"/>
-    <p:sldId xmlns:r="http://schemas.openxmlformats.org/officeDocument/2006/relationships" id="257" r:id="R55addca3b5db4702"/>
-    <p:sldId xmlns:r="http://schemas.openxmlformats.org/officeDocument/2006/relationships" id="258" r:id="R82ef83680038479b"/>
-    <p:sldId xmlns:r="http://schemas.openxmlformats.org/officeDocument/2006/relationships" id="259" r:id="Rc8c61550c29e4345"/>
-    <p:sldId xmlns:r="http://schemas.openxmlformats.org/officeDocument/2006/relationships" id="260" r:id="R3389541d59b54637"/>
-    <p:sldId xmlns:r="http://schemas.openxmlformats.org/officeDocument/2006/relationships" id="261" r:id="R38133fefcdbe4b1f"/>
-    <p:sldId xmlns:r="http://schemas.openxmlformats.org/officeDocument/2006/relationships" id="262" r:id="R2b0833d8502e4771"/>
-    <p:sldId xmlns:r="http://schemas.openxmlformats.org/officeDocument/2006/relationships" id="263" r:id="Rfc421dc3cabb4e46"/>
+    <p:sldId id="256" r:id="rId2"/>
+    <p:sldId id="257" r:id="rId3"/>
+    <p:sldId id="258" r:id="rId4"/>
+    <p:sldId id="259" r:id="rId5"/>
+    <p:sldId id="260" r:id="rId6"/>
+    <p:sldId id="261" r:id="rId7"/>
+    <p:sldId id="262" r:id="rId8"/>
   </p:sldIdLst>
   <p:sldSz cx="12192000" cy="6858000"/>
   <p:notesSz cx="6858000" cy="9144000"/>
+  <p:defaultTextStyle>
+    <a:defPPr>
+      <a:defRPr lang="en-US"/>
+    </a:defPPr>
+    <a:lvl1pPr marL="0" algn="l" defTabSz="914400" rtl="0" eaLnBrk="1" latinLnBrk="0" hangingPunct="1">
+      <a:defRPr sz="1800" kern="1200">
+        <a:solidFill>
+          <a:schemeClr val="tx1"/>
+        </a:solidFill>
+        <a:latin typeface="+mn-lt"/>
+        <a:ea typeface="+mn-ea"/>
+        <a:cs typeface="+mn-cs"/>
+      </a:defRPr>
+    </a:lvl1pPr>
+    <a:lvl2pPr marL="457200" algn="l" defTabSz="914400" rtl="0" eaLnBrk="1" latinLnBrk="0" hangingPunct="1">
+      <a:defRPr sz="1800" kern="1200">
+        <a:solidFill>
+          <a:schemeClr val="tx1"/>
+        </a:solidFill>
+        <a:latin typeface="+mn-lt"/>
+        <a:ea typeface="+mn-ea"/>
+        <a:cs typeface="+mn-cs"/>
+      </a:defRPr>
+    </a:lvl2pPr>
+    <a:lvl3pPr marL="914400" algn="l" defTabSz="914400" rtl="0" eaLnBrk="1" latinLnBrk="0" hangingPunct="1">
+      <a:defRPr sz="1800" kern="1200">
+        <a:solidFill>
+          <a:schemeClr val="tx1"/>
+        </a:solidFill>
+        <a:latin typeface="+mn-lt"/>
+        <a:ea typeface="+mn-ea"/>
+        <a:cs typeface="+mn-cs"/>
+      </a:defRPr>
+    </a:lvl3pPr>
+    <a:lvl4pPr marL="1371600" algn="l" defTabSz="914400" rtl="0" eaLnBrk="1" latinLnBrk="0" hangingPunct="1">
+      <a:defRPr sz="1800" kern="1200">
+        <a:solidFill>
+          <a:schemeClr val="tx1"/>
+        </a:solidFill>
+        <a:latin typeface="+mn-lt"/>
+        <a:ea typeface="+mn-ea"/>
+        <a:cs typeface="+mn-cs"/>
+      </a:defRPr>
+    </a:lvl4pPr>
+    <a:lvl5pPr marL="1828800" algn="l" defTabSz="914400" rtl="0" eaLnBrk="1" latinLnBrk="0" hangingPunct="1">
+      <a:defRPr sz="1800" kern="1200">
+        <a:solidFill>
+          <a:schemeClr val="tx1"/>
+        </a:solidFill>
+        <a:latin typeface="+mn-lt"/>
+        <a:ea typeface="+mn-ea"/>
+        <a:cs typeface="+mn-cs"/>
+      </a:defRPr>
+    </a:lvl5pPr>
+    <a:lvl6pPr marL="2286000" algn="l" defTabSz="914400" rtl="0" eaLnBrk="1" latinLnBrk="0" hangingPunct="1">
+      <a:defRPr sz="1800" kern="1200">
+        <a:solidFill>
+          <a:schemeClr val="tx1"/>
+        </a:solidFill>
+        <a:latin typeface="+mn-lt"/>
+        <a:ea typeface="+mn-ea"/>
+        <a:cs typeface="+mn-cs"/>
+      </a:defRPr>
+    </a:lvl6pPr>
+    <a:lvl7pPr marL="2743200" algn="l" defTabSz="914400" rtl="0" eaLnBrk="1" latinLnBrk="0" hangingPunct="1">
+      <a:defRPr sz="1800" kern="1200">
+        <a:solidFill>
+          <a:schemeClr val="tx1"/>
+        </a:solidFill>
+        <a:latin typeface="+mn-lt"/>
+        <a:ea typeface="+mn-ea"/>
+        <a:cs typeface="+mn-cs"/>
+      </a:defRPr>
+    </a:lvl7pPr>
+    <a:lvl8pPr marL="3200400" algn="l" defTabSz="914400" rtl="0" eaLnBrk="1" latinLnBrk="0" hangingPunct="1">
+      <a:defRPr sz="1800" kern="1200">
+        <a:solidFill>
+          <a:schemeClr val="tx1"/>
+        </a:solidFill>
+        <a:latin typeface="+mn-lt"/>
+        <a:ea typeface="+mn-ea"/>
+        <a:cs typeface="+mn-cs"/>
+      </a:defRPr>
+    </a:lvl8pPr>
+    <a:lvl9pPr marL="3657600" algn="l" defTabSz="914400" rtl="0" eaLnBrk="1" latinLnBrk="0" hangingPunct="1">
+      <a:defRPr sz="1800" kern="1200">
+        <a:solidFill>
+          <a:schemeClr val="tx1"/>
+        </a:solidFill>
+        <a:latin typeface="+mn-lt"/>
+        <a:ea typeface="+mn-ea"/>
+        <a:cs typeface="+mn-cs"/>
+      </a:defRPr>
+    </a:lvl9pPr>
+  </p:defaultTextStyle>
 </p:presentation>
 </file>
 
 <file path=ppt/notesMasters/notesMaster1.xml><?xml version="1.0" encoding="utf-8"?>
-<p:notesMaster xmlns:p="http://schemas.openxmlformats.org/presentationml/2006/main">
+<p:notesMaster xmlns:a="http://schemas.openxmlformats.org/drawingml/2006/main" xmlns:r="http://schemas.openxmlformats.org/officeDocument/2006/relationships" xmlns:p="http://schemas.openxmlformats.org/presentationml/2006/main">
   <p:cSld>
     <p:bg>
       <p:bgRef idx="1001">
-        <a:schemeClr xmlns:a="http://schemas.openxmlformats.org/drawingml/2006/main" val="bg1"/>
+        <a:schemeClr val="bg1"/>
       </p:bgRef>
     </p:bg>
     <p:spTree>
@@ -37,380 +131,164 @@
         <p:nvPr/>
       </p:nvGrpSpPr>
       <p:grpSpPr>
-        <a:xfrm xmlns:a="http://schemas.openxmlformats.org/drawingml/2006/main"/>
+        <a:xfrm>
+          <a:off x="0" y="0"/>
+          <a:ext cx="0" cy="0"/>
+          <a:chOff x="0" y="0"/>
+          <a:chExt cx="0" cy="0"/>
+        </a:xfrm>
       </p:grpSpPr>
       <p:sp>
         <p:nvSpPr>
           <p:cNvPr id="2" name="Header Placeholder"/>
-          <p:cNvSpPr/>
+          <p:cNvSpPr>
+            <a:spLocks noGrp="1"/>
+          </p:cNvSpPr>
           <p:nvPr>
             <p:ph type="hdr" sz="quarter"/>
           </p:nvPr>
         </p:nvSpPr>
         <p:spPr>
-          <a:prstGeom xmlns:a="http://schemas.openxmlformats.org/drawingml/2006/main" prst="rect">
+          <a:prstGeom prst="rect">
             <a:avLst/>
           </a:prstGeom>
         </p:spPr>
         <p:txBody>
-          <a:bodyPr xmlns:a="http://schemas.openxmlformats.org/drawingml/2006/main"/>
-          <a:lstStyle xmlns:a="http://schemas.openxmlformats.org/drawingml/2006/main"/>
-          <a:p xmlns:a="http://schemas.openxmlformats.org/drawingml/2006/main"/>
+          <a:bodyPr/>
+          <a:lstStyle/>
+          <a:p>
+            <a:endParaRPr/>
+          </a:p>
         </p:txBody>
       </p:sp>
       <p:sp>
         <p:nvSpPr>
           <p:cNvPr id="3" name="Date Placeholder"/>
-          <p:cNvSpPr/>
+          <p:cNvSpPr>
+            <a:spLocks noGrp="1"/>
+          </p:cNvSpPr>
           <p:nvPr>
             <p:ph type="dt" sz="quarter" idx="1"/>
           </p:nvPr>
         </p:nvSpPr>
         <p:spPr>
-          <a:prstGeom xmlns:a="http://schemas.openxmlformats.org/drawingml/2006/main" prst="rect">
+          <a:prstGeom prst="rect">
             <a:avLst/>
           </a:prstGeom>
         </p:spPr>
         <p:txBody>
-          <a:bodyPr xmlns:a="http://schemas.openxmlformats.org/drawingml/2006/main"/>
-          <a:lstStyle xmlns:a="http://schemas.openxmlformats.org/drawingml/2006/main"/>
-          <a:p xmlns:a="http://schemas.openxmlformats.org/drawingml/2006/main"/>
+          <a:bodyPr/>
+          <a:lstStyle/>
+          <a:p>
+            <a:endParaRPr/>
+          </a:p>
         </p:txBody>
       </p:sp>
       <p:sp>
         <p:nvSpPr>
           <p:cNvPr id="4" name="Slide Image Placeholder"/>
-          <p:cNvSpPr/>
+          <p:cNvSpPr>
+            <a:spLocks noGrp="1" noRot="1" noChangeAspect="1"/>
+          </p:cNvSpPr>
           <p:nvPr>
             <p:ph type="sldImg" idx="2"/>
           </p:nvPr>
         </p:nvSpPr>
         <p:spPr>
-          <a:prstGeom xmlns:a="http://schemas.openxmlformats.org/drawingml/2006/main" prst="rect">
+          <a:prstGeom prst="rect">
             <a:avLst/>
           </a:prstGeom>
         </p:spPr>
         <p:txBody>
-          <a:bodyPr xmlns:a="http://schemas.openxmlformats.org/drawingml/2006/main"/>
-          <a:lstStyle xmlns:a="http://schemas.openxmlformats.org/drawingml/2006/main"/>
-          <a:p xmlns:a="http://schemas.openxmlformats.org/drawingml/2006/main"/>
+          <a:bodyPr/>
+          <a:lstStyle/>
+          <a:p>
+            <a:endParaRPr/>
+          </a:p>
         </p:txBody>
       </p:sp>
       <p:sp>
         <p:nvSpPr>
           <p:cNvPr id="5" name="Notes Placeholder"/>
-          <p:cNvSpPr/>
+          <p:cNvSpPr>
+            <a:spLocks noGrp="1"/>
+          </p:cNvSpPr>
           <p:nvPr>
             <p:ph type="body" sz="quarter" idx="3"/>
           </p:nvPr>
         </p:nvSpPr>
         <p:spPr>
-          <a:prstGeom xmlns:a="http://schemas.openxmlformats.org/drawingml/2006/main" prst="rect">
+          <a:prstGeom prst="rect">
             <a:avLst/>
           </a:prstGeom>
         </p:spPr>
         <p:txBody>
-          <a:bodyPr xmlns:a="http://schemas.openxmlformats.org/drawingml/2006/main"/>
-          <a:lstStyle xmlns:a="http://schemas.openxmlformats.org/drawingml/2006/main"/>
-          <a:p xmlns:a="http://schemas.openxmlformats.org/drawingml/2006/main"/>
+          <a:bodyPr/>
+          <a:lstStyle/>
+          <a:p>
+            <a:endParaRPr/>
+          </a:p>
         </p:txBody>
       </p:sp>
       <p:sp>
         <p:nvSpPr>
           <p:cNvPr id="6" name="Footer Placeholder"/>
-          <p:cNvSpPr/>
+          <p:cNvSpPr>
+            <a:spLocks noGrp="1"/>
+          </p:cNvSpPr>
           <p:nvPr>
             <p:ph type="ftr" sz="quarter" idx="4"/>
           </p:nvPr>
         </p:nvSpPr>
         <p:spPr>
-          <a:prstGeom xmlns:a="http://schemas.openxmlformats.org/drawingml/2006/main" prst="rect">
+          <a:prstGeom prst="rect">
             <a:avLst/>
           </a:prstGeom>
         </p:spPr>
         <p:txBody>
-          <a:bodyPr xmlns:a="http://schemas.openxmlformats.org/drawingml/2006/main"/>
-          <a:lstStyle xmlns:a="http://schemas.openxmlformats.org/drawingml/2006/main"/>
-          <a:p xmlns:a="http://schemas.openxmlformats.org/drawingml/2006/main"/>
+          <a:bodyPr/>
+          <a:lstStyle/>
+          <a:p>
+            <a:endParaRPr/>
+          </a:p>
         </p:txBody>
       </p:sp>
       <p:sp>
         <p:nvSpPr>
           <p:cNvPr id="7" name="Slide Number Placeholder"/>
-          <p:cNvSpPr/>
+          <p:cNvSpPr>
+            <a:spLocks noGrp="1"/>
+          </p:cNvSpPr>
           <p:nvPr>
             <p:ph type="sldNum" sz="quarter" idx="5"/>
           </p:nvPr>
         </p:nvSpPr>
         <p:spPr>
-          <a:prstGeom xmlns:a="http://schemas.openxmlformats.org/drawingml/2006/main" prst="rect">
+          <a:prstGeom prst="rect">
             <a:avLst/>
           </a:prstGeom>
         </p:spPr>
         <p:txBody>
-          <a:bodyPr xmlns:a="http://schemas.openxmlformats.org/drawingml/2006/main"/>
-          <a:lstStyle xmlns:a="http://schemas.openxmlformats.org/drawingml/2006/main"/>
-          <a:p xmlns:a="http://schemas.openxmlformats.org/drawingml/2006/main"/>
+          <a:bodyPr/>
+          <a:lstStyle/>
+          <a:p>
+            <a:endParaRPr/>
+          </a:p>
         </p:txBody>
       </p:sp>
     </p:spTree>
   </p:cSld>
   <p:clrMap bg1="lt1" tx1="dk1" bg2="lt2" tx2="dk2" accent1="accent1" accent2="accent2" accent3="accent3" accent4="accent4" accent5="accent5" accent6="accent6" hlink="hlink" folHlink="folHlink"/>
   <p:notesStyle>
-    <a:lvl1pPr xmlns:a="http://schemas.openxmlformats.org/drawingml/2006/main" marL="0" algn="l" defTabSz="914400" rtl="0" eaLnBrk="1" latinLnBrk="0" hangingPunct="1">
+    <a:lvl1pPr marL="0" algn="l" defTabSz="914400" rtl="0" eaLnBrk="1" latinLnBrk="0" hangingPunct="1">
       <a:defRPr sz="1200" kern="1200"/>
     </a:lvl1pPr>
   </p:notesStyle>
 </p:notesMaster>
 </file>
 
-<file path=ppt/notesMasters/theme/theme3.xml><?xml version="1.0" encoding="utf-8"?>
-<a:theme xmlns:a="http://schemas.openxmlformats.org/drawingml/2006/main" name="ChatGPT">
-  <a:themeElements>
-    <a:clrScheme name="ChatGPT">
-      <a:dk1>
-        <a:srgbClr val="000000"/>
-      </a:dk1>
-      <a:lt1>
-        <a:srgbClr val="FFFFFF"/>
-      </a:lt1>
-      <a:dk2>
-        <a:srgbClr val="0E2841"/>
-      </a:dk2>
-      <a:lt2>
-        <a:srgbClr val="E8E8E8"/>
-      </a:lt2>
-      <a:accent1>
-        <a:srgbClr val="156082"/>
-      </a:accent1>
-      <a:accent2>
-        <a:srgbClr val="E97132"/>
-      </a:accent2>
-      <a:accent3>
-        <a:srgbClr val="196B24"/>
-      </a:accent3>
-      <a:accent4>
-        <a:srgbClr val="0F9ED5"/>
-      </a:accent4>
-      <a:accent5>
-        <a:srgbClr val="A02B93"/>
-      </a:accent5>
-      <a:accent6>
-        <a:srgbClr val="4EA72E"/>
-      </a:accent6>
-      <a:hlink>
-        <a:srgbClr val="467886"/>
-      </a:hlink>
-      <a:folHlink>
-        <a:srgbClr val="96607D"/>
-      </a:folHlink>
-    </a:clrScheme>
-    <a:fontScheme name="">
-      <a:majorFont>
-        <a:latin typeface="Aptos"/>
-        <a:ea typeface=""/>
-        <a:cs typeface=""/>
-      </a:majorFont>
-      <a:minorFont>
-        <a:latin typeface="Aptos"/>
-        <a:ea typeface=""/>
-        <a:cs typeface=""/>
-      </a:minorFont>
-    </a:fontScheme>
-    <a:fmtScheme name="ChatGPT">
-      <a:fillStyleLst>
-        <a:solidFill>
-          <a:schemeClr val="phClr"/>
-        </a:solidFill>
-        <a:gradFill>
-          <a:gsLst>
-            <a:gs pos="0">
-              <a:schemeClr val="phClr">
-                <a:tint val="67000"/>
-                <a:lumMod val="110000"/>
-                <a:satMod val="105000"/>
-              </a:schemeClr>
-            </a:gs>
-            <a:gs pos="50000">
-              <a:schemeClr val="phClr">
-                <a:tint val="73000"/>
-                <a:lumMod val="105000"/>
-                <a:satMod val="103000"/>
-              </a:schemeClr>
-            </a:gs>
-            <a:gs pos="100000">
-              <a:schemeClr val="phClr">
-                <a:tint val="81000"/>
-                <a:lumMod val="105000"/>
-                <a:satMod val="109000"/>
-              </a:schemeClr>
-            </a:gs>
-          </a:gsLst>
-          <a:lin ang="5400000" scaled="0"/>
-        </a:gradFill>
-        <a:gradFill>
-          <a:gsLst>
-            <a:gs pos="0">
-              <a:schemeClr val="phClr">
-                <a:tint val="94000"/>
-                <a:lumMod val="102000"/>
-                <a:satMod val="103000"/>
-              </a:schemeClr>
-            </a:gs>
-            <a:gs pos="50000">
-              <a:schemeClr val="phClr">
-                <a:shade val="100000"/>
-                <a:lumMod val="100000"/>
-                <a:satMod val="110000"/>
-              </a:schemeClr>
-            </a:gs>
-            <a:gs pos="100000">
-              <a:schemeClr val="phClr">
-                <a:shade val="78000"/>
-                <a:lumMod val="99000"/>
-                <a:satMod val="120000"/>
-              </a:schemeClr>
-            </a:gs>
-          </a:gsLst>
-          <a:lin ang="5400000" scaled="0"/>
-        </a:gradFill>
-      </a:fillStyleLst>
-      <a:lnStyleLst>
-        <a:ln w="12700">
-          <a:solidFill>
-            <a:schemeClr val="phClr"/>
-          </a:solidFill>
-          <a:prstDash val="solid"/>
-        </a:ln>
-        <a:ln w="19050">
-          <a:solidFill>
-            <a:schemeClr val="phClr"/>
-          </a:solidFill>
-          <a:prstDash val="solid"/>
-        </a:ln>
-        <a:ln w="25400">
-          <a:solidFill>
-            <a:schemeClr val="phClr"/>
-          </a:solidFill>
-          <a:prstDash val="solid"/>
-        </a:ln>
-      </a:lnStyleLst>
-      <a:effectStyleLst>
-        <a:effectStyle>
-          <a:effectLst/>
-        </a:effectStyle>
-        <a:effectStyle>
-          <a:effectLst/>
-        </a:effectStyle>
-        <a:effectStyle>
-          <a:effectLst>
-            <a:outerShdw blurRad="57150" dist="19050" dir="5400000">
-              <a:srgbClr val="000000">
-                <a:alpha val="16000"/>
-              </a:srgbClr>
-            </a:outerShdw>
-          </a:effectLst>
-        </a:effectStyle>
-        <a:effectStyle>
-          <a:effectLst>
-            <a:outerShdw blurRad="19050" dist="9525" dir="5400000">
-              <a:srgbClr val="000000">
-                <a:alpha val="6000"/>
-              </a:srgbClr>
-            </a:outerShdw>
-          </a:effectLst>
-        </a:effectStyle>
-        <a:effectStyle>
-          <a:effectLst>
-            <a:outerShdw blurRad="28575" dist="9525" dir="5400000">
-              <a:srgbClr val="000000">
-                <a:alpha val="8000"/>
-              </a:srgbClr>
-            </a:outerShdw>
-          </a:effectLst>
-        </a:effectStyle>
-        <a:effectStyle>
-          <a:effectLst>
-            <a:outerShdw blurRad="57150" dist="19050" dir="5400000">
-              <a:srgbClr val="000000">
-                <a:alpha val="10000"/>
-              </a:srgbClr>
-            </a:outerShdw>
-          </a:effectLst>
-        </a:effectStyle>
-        <a:effectStyle>
-          <a:effectLst>
-            <a:outerShdw blurRad="114300" dist="38100" dir="5400000">
-              <a:srgbClr val="000000">
-                <a:alpha val="12000"/>
-              </a:srgbClr>
-            </a:outerShdw>
-          </a:effectLst>
-        </a:effectStyle>
-        <a:effectStyle>
-          <a:effectLst>
-            <a:outerShdw blurRad="171450" dist="57150" dir="5400000">
-              <a:srgbClr val="000000">
-                <a:alpha val="16000"/>
-              </a:srgbClr>
-            </a:outerShdw>
-          </a:effectLst>
-        </a:effectStyle>
-        <a:effectStyle>
-          <a:effectLst>
-            <a:outerShdw blurRad="266700" dist="95250" dir="5400000">
-              <a:srgbClr val="000000">
-                <a:alpha val="24000"/>
-              </a:srgbClr>
-            </a:outerShdw>
-          </a:effectLst>
-        </a:effectStyle>
-      </a:effectStyleLst>
-      <a:bgFillStyleLst>
-        <a:solidFill>
-          <a:schemeClr val="phClr"/>
-        </a:solidFill>
-        <a:solidFill>
-          <a:schemeClr val="phClr">
-            <a:tint val="95000"/>
-            <a:satMod val="170000"/>
-          </a:schemeClr>
-        </a:solidFill>
-        <a:gradFill>
-          <a:gsLst>
-            <a:gs pos="0">
-              <a:schemeClr val="phClr">
-                <a:tint val="93000"/>
-                <a:shade val="98000"/>
-                <a:lumMod val="102000"/>
-                <a:satMod val="150000"/>
-              </a:schemeClr>
-            </a:gs>
-            <a:gs pos="50000">
-              <a:schemeClr val="phClr">
-                <a:tint val="98000"/>
-                <a:shade val="90000"/>
-                <a:lumMod val="103000"/>
-                <a:satMod val="130000"/>
-              </a:schemeClr>
-            </a:gs>
-            <a:gs pos="100000">
-              <a:schemeClr val="phClr">
-                <a:shade val="63000"/>
-                <a:satMod val="120000"/>
-              </a:schemeClr>
-            </a:gs>
-          </a:gsLst>
-          <a:lin ang="5400000" scaled="0"/>
-        </a:gradFill>
-      </a:bgFillStyleLst>
-    </a:fmtScheme>
-  </a:themeElements>
-</a:theme>
-</file>
-
 <file path=ppt/notesSlides/notesSlide1.xml><?xml version="1.0" encoding="utf-8"?>
-<p:notes xmlns:p="http://schemas.openxmlformats.org/presentationml/2006/main">
+<p:notes xmlns:a="http://schemas.openxmlformats.org/drawingml/2006/main" xmlns:r="http://schemas.openxmlformats.org/officeDocument/2006/relationships" xmlns:p="http://schemas.openxmlformats.org/presentationml/2006/main">
   <p:cSld>
     <p:spTree>
       <p:nvGrpSpPr>
@@ -419,16 +297,21 @@
         <p:nvPr/>
       </p:nvGrpSpPr>
       <p:grpSpPr>
-        <a:xfrm xmlns:a="http://schemas.openxmlformats.org/drawingml/2006/main"/>
+        <a:xfrm>
+          <a:off x="0" y="0"/>
+          <a:ext cx="0" cy="0"/>
+          <a:chOff x="0" y="0"/>
+          <a:chExt cx="0" cy="0"/>
+        </a:xfrm>
       </p:grpSpPr>
       <p:sp>
         <p:nvSpPr>
           <p:cNvPr id="2" name="Slide Image Placeholder 1"/>
           <p:cNvSpPr>
-            <a:spLocks xmlns:a="http://schemas.openxmlformats.org/drawingml/2006/main" noGrp="1"/>
+            <a:spLocks noGrp="1" noRot="1" noChangeAspect="1"/>
           </p:cNvSpPr>
           <p:nvPr>
-            <p:ph type="sldImg" idx="0"/>
+            <p:ph type="sldImg"/>
           </p:nvPr>
         </p:nvSpPr>
         <p:spPr/>
@@ -437,7 +320,7 @@
         <p:nvSpPr>
           <p:cNvPr id="3" name="Notes Placeholder 2"/>
           <p:cNvSpPr>
-            <a:spLocks xmlns:a="http://schemas.openxmlformats.org/drawingml/2006/main" noGrp="1"/>
+            <a:spLocks noGrp="1"/>
           </p:cNvSpPr>
           <p:nvPr>
             <p:ph type="body" idx="1"/>
@@ -445,9 +328,9 @@
         </p:nvSpPr>
         <p:spPr/>
         <p:txBody>
-          <a:bodyPr xmlns:a="http://schemas.openxmlformats.org/drawingml/2006/main"/>
-          <a:lstStyle xmlns:a="http://schemas.openxmlformats.org/drawingml/2006/main"/>
-          <a:p xmlns:a="http://schemas.openxmlformats.org/drawingml/2006/main">
+          <a:bodyPr/>
+          <a:lstStyle/>
+          <a:p>
             <a:r>
               <a:t>Developer identity and concept: supplied game proposal. Screenshot captured from the running local Godot project. This is a solo project with AI-assisted implementation, disclosed on slide 7.</a:t>
             </a:r>
@@ -458,7 +341,7 @@
         <p:nvSpPr>
           <p:cNvPr id="4" name="Slide Number Placeholder 3"/>
           <p:cNvSpPr>
-            <a:spLocks xmlns:a="http://schemas.openxmlformats.org/drawingml/2006/main" noGrp="1"/>
+            <a:spLocks noGrp="1"/>
           </p:cNvSpPr>
           <p:nvPr>
             <p:ph type="sldNum" idx="5"/>
@@ -466,21 +349,23 @@
         </p:nvSpPr>
         <p:spPr/>
         <p:txBody>
-          <a:bodyPr xmlns:a="http://schemas.openxmlformats.org/drawingml/2006/main"/>
-          <a:lstStyle xmlns:a="http://schemas.openxmlformats.org/drawingml/2006/main"/>
-          <a:p xmlns:a="http://schemas.openxmlformats.org/drawingml/2006/main"/>
+          <a:bodyPr/>
+          <a:lstStyle/>
+          <a:p>
+            <a:endParaRPr/>
+          </a:p>
         </p:txBody>
       </p:sp>
     </p:spTree>
   </p:cSld>
   <p:clrMapOvr>
-    <a:masterClrMapping xmlns:a="http://schemas.openxmlformats.org/drawingml/2006/main"/>
+    <a:masterClrMapping/>
   </p:clrMapOvr>
 </p:notes>
 </file>
 
 <file path=ppt/notesSlides/notesSlide2.xml><?xml version="1.0" encoding="utf-8"?>
-<p:notes xmlns:p="http://schemas.openxmlformats.org/presentationml/2006/main">
+<p:notes xmlns:a="http://schemas.openxmlformats.org/drawingml/2006/main" xmlns:r="http://schemas.openxmlformats.org/officeDocument/2006/relationships" xmlns:p="http://schemas.openxmlformats.org/presentationml/2006/main">
   <p:cSld>
     <p:spTree>
       <p:nvGrpSpPr>
@@ -489,16 +374,21 @@
         <p:nvPr/>
       </p:nvGrpSpPr>
       <p:grpSpPr>
-        <a:xfrm xmlns:a="http://schemas.openxmlformats.org/drawingml/2006/main"/>
+        <a:xfrm>
+          <a:off x="0" y="0"/>
+          <a:ext cx="0" cy="0"/>
+          <a:chOff x="0" y="0"/>
+          <a:chExt cx="0" cy="0"/>
+        </a:xfrm>
       </p:grpSpPr>
       <p:sp>
         <p:nvSpPr>
           <p:cNvPr id="2" name="Slide Image Placeholder 1"/>
           <p:cNvSpPr>
-            <a:spLocks xmlns:a="http://schemas.openxmlformats.org/drawingml/2006/main" noGrp="1"/>
+            <a:spLocks noGrp="1" noRot="1" noChangeAspect="1"/>
           </p:cNvSpPr>
           <p:nvPr>
-            <p:ph type="sldImg" idx="0"/>
+            <p:ph type="sldImg"/>
           </p:nvPr>
         </p:nvSpPr>
         <p:spPr/>
@@ -507,7 +397,7 @@
         <p:nvSpPr>
           <p:cNvPr id="3" name="Notes Placeholder 2"/>
           <p:cNvSpPr>
-            <a:spLocks xmlns:a="http://schemas.openxmlformats.org/drawingml/2006/main" noGrp="1"/>
+            <a:spLocks noGrp="1"/>
           </p:cNvSpPr>
           <p:nvPr>
             <p:ph type="body" idx="1"/>
@@ -515,9 +405,9 @@
         </p:nvSpPr>
         <p:spPr/>
         <p:txBody>
-          <a:bodyPr xmlns:a="http://schemas.openxmlformats.org/drawingml/2006/main"/>
-          <a:lstStyle xmlns:a="http://schemas.openxmlformats.org/drawingml/2006/main"/>
-          <a:p xmlns:a="http://schemas.openxmlformats.org/drawingml/2006/main">
+          <a:bodyPr/>
+          <a:lstStyle/>
+          <a:p>
             <a:r>
               <a:t>Implemented features checked against Player.cs, Investigation.cs, MainMenu.cs, house.tscn and scenarios.json. Screenshot shows the current playable household.</a:t>
             </a:r>
@@ -528,7 +418,7 @@
         <p:nvSpPr>
           <p:cNvPr id="4" name="Slide Number Placeholder 3"/>
           <p:cNvSpPr>
-            <a:spLocks xmlns:a="http://schemas.openxmlformats.org/drawingml/2006/main" noGrp="1"/>
+            <a:spLocks noGrp="1"/>
           </p:cNvSpPr>
           <p:nvPr>
             <p:ph type="sldNum" idx="5"/>
@@ -536,21 +426,23 @@
         </p:nvSpPr>
         <p:spPr/>
         <p:txBody>
-          <a:bodyPr xmlns:a="http://schemas.openxmlformats.org/drawingml/2006/main"/>
-          <a:lstStyle xmlns:a="http://schemas.openxmlformats.org/drawingml/2006/main"/>
-          <a:p xmlns:a="http://schemas.openxmlformats.org/drawingml/2006/main"/>
+          <a:bodyPr/>
+          <a:lstStyle/>
+          <a:p>
+            <a:endParaRPr/>
+          </a:p>
         </p:txBody>
       </p:sp>
     </p:spTree>
   </p:cSld>
   <p:clrMapOvr>
-    <a:masterClrMapping xmlns:a="http://schemas.openxmlformats.org/drawingml/2006/main"/>
+    <a:masterClrMapping/>
   </p:clrMapOvr>
 </p:notes>
 </file>
 
 <file path=ppt/notesSlides/notesSlide3.xml><?xml version="1.0" encoding="utf-8"?>
-<p:notes xmlns:p="http://schemas.openxmlformats.org/presentationml/2006/main">
+<p:notes xmlns:a="http://schemas.openxmlformats.org/drawingml/2006/main" xmlns:r="http://schemas.openxmlformats.org/officeDocument/2006/relationships" xmlns:p="http://schemas.openxmlformats.org/presentationml/2006/main">
   <p:cSld>
     <p:spTree>
       <p:nvGrpSpPr>
@@ -559,16 +451,21 @@
         <p:nvPr/>
       </p:nvGrpSpPr>
       <p:grpSpPr>
-        <a:xfrm xmlns:a="http://schemas.openxmlformats.org/drawingml/2006/main"/>
+        <a:xfrm>
+          <a:off x="0" y="0"/>
+          <a:ext cx="0" cy="0"/>
+          <a:chOff x="0" y="0"/>
+          <a:chExt cx="0" cy="0"/>
+        </a:xfrm>
       </p:grpSpPr>
       <p:sp>
         <p:nvSpPr>
           <p:cNvPr id="2" name="Slide Image Placeholder 1"/>
           <p:cNvSpPr>
-            <a:spLocks xmlns:a="http://schemas.openxmlformats.org/drawingml/2006/main" noGrp="1"/>
+            <a:spLocks noGrp="1" noRot="1" noChangeAspect="1"/>
           </p:cNvSpPr>
           <p:nvPr>
-            <p:ph type="sldImg" idx="0"/>
+            <p:ph type="sldImg"/>
           </p:nvPr>
         </p:nvSpPr>
         <p:spPr/>
@@ -577,7 +474,7 @@
         <p:nvSpPr>
           <p:cNvPr id="3" name="Notes Placeholder 2"/>
           <p:cNvSpPr>
-            <a:spLocks xmlns:a="http://schemas.openxmlformats.org/drawingml/2006/main" noGrp="1"/>
+            <a:spLocks noGrp="1"/>
           </p:cNvSpPr>
           <p:nvPr>
             <p:ph type="body" idx="1"/>
@@ -585,9 +482,9 @@
         </p:nvSpPr>
         <p:spPr/>
         <p:txBody>
-          <a:bodyPr xmlns:a="http://schemas.openxmlformats.org/drawingml/2006/main"/>
-          <a:lstStyle xmlns:a="http://schemas.openxmlformats.org/drawingml/2006/main"/>
-          <a:p xmlns:a="http://schemas.openxmlformats.org/drawingml/2006/main">
+          <a:bodyPr/>
+          <a:lstStyle/>
+          <a:p>
             <a:r>
               <a:t>The free PreInspectionHint comes from scenarios.json and appears before the Inspect button. Reading it does not reduce the inspection budget. The hint guides a decision without displaying a good/bad label.</a:t>
             </a:r>
@@ -598,7 +495,7 @@
         <p:nvSpPr>
           <p:cNvPr id="4" name="Slide Number Placeholder 3"/>
           <p:cNvSpPr>
-            <a:spLocks xmlns:a="http://schemas.openxmlformats.org/drawingml/2006/main" noGrp="1"/>
+            <a:spLocks noGrp="1"/>
           </p:cNvSpPr>
           <p:nvPr>
             <p:ph type="sldNum" idx="5"/>
@@ -606,21 +503,23 @@
         </p:nvSpPr>
         <p:spPr/>
         <p:txBody>
-          <a:bodyPr xmlns:a="http://schemas.openxmlformats.org/drawingml/2006/main"/>
-          <a:lstStyle xmlns:a="http://schemas.openxmlformats.org/drawingml/2006/main"/>
-          <a:p xmlns:a="http://schemas.openxmlformats.org/drawingml/2006/main"/>
+          <a:bodyPr/>
+          <a:lstStyle/>
+          <a:p>
+            <a:endParaRPr/>
+          </a:p>
         </p:txBody>
       </p:sp>
     </p:spTree>
   </p:cSld>
   <p:clrMapOvr>
-    <a:masterClrMapping xmlns:a="http://schemas.openxmlformats.org/drawingml/2006/main"/>
+    <a:masterClrMapping/>
   </p:clrMapOvr>
 </p:notes>
 </file>
 
 <file path=ppt/notesSlides/notesSlide4.xml><?xml version="1.0" encoding="utf-8"?>
-<p:notes xmlns:p="http://schemas.openxmlformats.org/presentationml/2006/main">
+<p:notes xmlns:a="http://schemas.openxmlformats.org/drawingml/2006/main" xmlns:r="http://schemas.openxmlformats.org/officeDocument/2006/relationships" xmlns:p="http://schemas.openxmlformats.org/presentationml/2006/main">
   <p:cSld>
     <p:spTree>
       <p:nvGrpSpPr>
@@ -629,16 +528,21 @@
         <p:nvPr/>
       </p:nvGrpSpPr>
       <p:grpSpPr>
-        <a:xfrm xmlns:a="http://schemas.openxmlformats.org/drawingml/2006/main"/>
+        <a:xfrm>
+          <a:off x="0" y="0"/>
+          <a:ext cx="0" cy="0"/>
+          <a:chOff x="0" y="0"/>
+          <a:chExt cx="0" cy="0"/>
+        </a:xfrm>
       </p:grpSpPr>
       <p:sp>
         <p:nvSpPr>
           <p:cNvPr id="2" name="Slide Image Placeholder 1"/>
           <p:cNvSpPr>
-            <a:spLocks xmlns:a="http://schemas.openxmlformats.org/drawingml/2006/main" noGrp="1"/>
+            <a:spLocks noGrp="1" noRot="1" noChangeAspect="1"/>
           </p:cNvSpPr>
           <p:nvPr>
-            <p:ph type="sldImg" idx="0"/>
+            <p:ph type="sldImg"/>
           </p:nvPr>
         </p:nvSpPr>
         <p:spPr/>
@@ -647,7 +551,7 @@
         <p:nvSpPr>
           <p:cNvPr id="3" name="Notes Placeholder 2"/>
           <p:cNvSpPr>
-            <a:spLocks xmlns:a="http://schemas.openxmlformats.org/drawingml/2006/main" noGrp="1"/>
+            <a:spLocks noGrp="1"/>
           </p:cNvSpPr>
           <p:nvPr>
             <p:ph type="body" idx="1"/>
@@ -655,9 +559,9 @@
         </p:nvSpPr>
         <p:spPr/>
         <p:txBody>
-          <a:bodyPr xmlns:a="http://schemas.openxmlformats.org/drawingml/2006/main"/>
-          <a:lstStyle xmlns:a="http://schemas.openxmlformats.org/drawingml/2006/main"/>
-          <a:p xmlns:a="http://schemas.openxmlformats.org/drawingml/2006/main">
+          <a:bodyPr/>
+          <a:lstStyle/>
+          <a:p>
             <a:r>
               <a:t>The Readings, History and Take action tabs are implemented in GameHud.cs. A correct action resolves a major problem or clears a normal device. Incorrect actions reduce the score.</a:t>
             </a:r>
@@ -668,7 +572,7 @@
         <p:nvSpPr>
           <p:cNvPr id="4" name="Slide Number Placeholder 3"/>
           <p:cNvSpPr>
-            <a:spLocks xmlns:a="http://schemas.openxmlformats.org/drawingml/2006/main" noGrp="1"/>
+            <a:spLocks noGrp="1"/>
           </p:cNvSpPr>
           <p:nvPr>
             <p:ph type="sldNum" idx="5"/>
@@ -676,21 +580,23 @@
         </p:nvSpPr>
         <p:spPr/>
         <p:txBody>
-          <a:bodyPr xmlns:a="http://schemas.openxmlformats.org/drawingml/2006/main"/>
-          <a:lstStyle xmlns:a="http://schemas.openxmlformats.org/drawingml/2006/main"/>
-          <a:p xmlns:a="http://schemas.openxmlformats.org/drawingml/2006/main"/>
+          <a:bodyPr/>
+          <a:lstStyle/>
+          <a:p>
+            <a:endParaRPr/>
+          </a:p>
         </p:txBody>
       </p:sp>
     </p:spTree>
   </p:cSld>
   <p:clrMapOvr>
-    <a:masterClrMapping xmlns:a="http://schemas.openxmlformats.org/drawingml/2006/main"/>
+    <a:masterClrMapping/>
   </p:clrMapOvr>
 </p:notes>
 </file>
 
 <file path=ppt/notesSlides/notesSlide5.xml><?xml version="1.0" encoding="utf-8"?>
-<p:notes xmlns:p="http://schemas.openxmlformats.org/presentationml/2006/main">
+<p:notes xmlns:a="http://schemas.openxmlformats.org/drawingml/2006/main" xmlns:r="http://schemas.openxmlformats.org/officeDocument/2006/relationships" xmlns:p="http://schemas.openxmlformats.org/presentationml/2006/main">
   <p:cSld>
     <p:spTree>
       <p:nvGrpSpPr>
@@ -699,16 +605,21 @@
         <p:nvPr/>
       </p:nvGrpSpPr>
       <p:grpSpPr>
-        <a:xfrm xmlns:a="http://schemas.openxmlformats.org/drawingml/2006/main"/>
+        <a:xfrm>
+          <a:off x="0" y="0"/>
+          <a:ext cx="0" cy="0"/>
+          <a:chOff x="0" y="0"/>
+          <a:chExt cx="0" cy="0"/>
+        </a:xfrm>
       </p:grpSpPr>
       <p:sp>
         <p:nvSpPr>
           <p:cNvPr id="2" name="Slide Image Placeholder 1"/>
           <p:cNvSpPr>
-            <a:spLocks xmlns:a="http://schemas.openxmlformats.org/drawingml/2006/main" noGrp="1"/>
+            <a:spLocks noGrp="1" noRot="1" noChangeAspect="1"/>
           </p:cNvSpPr>
           <p:nvPr>
-            <p:ph type="sldImg" idx="0"/>
+            <p:ph type="sldImg"/>
           </p:nvPr>
         </p:nvSpPr>
         <p:spPr/>
@@ -717,7 +628,7 @@
         <p:nvSpPr>
           <p:cNvPr id="3" name="Notes Placeholder 2"/>
           <p:cNvSpPr>
-            <a:spLocks xmlns:a="http://schemas.openxmlformats.org/drawingml/2006/main" noGrp="1"/>
+            <a:spLocks noGrp="1"/>
           </p:cNvSpPr>
           <p:nvPr>
             <p:ph type="body" idx="1"/>
@@ -725,9 +636,9 @@
         </p:nvSpPr>
         <p:spPr/>
         <p:txBody>
-          <a:bodyPr xmlns:a="http://schemas.openxmlformats.org/drawingml/2006/main"/>
-          <a:lstStyle xmlns:a="http://schemas.openxmlformats.org/drawingml/2006/main"/>
-          <a:p xmlns:a="http://schemas.openxmlformats.org/drawingml/2006/main">
+          <a:bodyPr/>
+          <a:lstStyle/>
+          <a:p>
             <a:r>
               <a:t>SDG 7 and SDG 13 are the themes selected in the supplied proposal. The result screen implements energy, money and emissions savings. Values are illustrative scenario estimates, not measurements or verified learning outcomes. Calculations use 30 days, EUR 0.25/kWh and 0.20 kg CO2/kWh, stored per case in JSON. Scoring: +100 per major problem, +10 per unused inspection after a finding, -50 per incorrect action, -10 per non-major inspection, minimum zero.</a:t>
             </a:r>
@@ -738,7 +649,7 @@
         <p:nvSpPr>
           <p:cNvPr id="4" name="Slide Number Placeholder 3"/>
           <p:cNvSpPr>
-            <a:spLocks xmlns:a="http://schemas.openxmlformats.org/drawingml/2006/main" noGrp="1"/>
+            <a:spLocks noGrp="1"/>
           </p:cNvSpPr>
           <p:nvPr>
             <p:ph type="sldNum" idx="5"/>
@@ -746,21 +657,23 @@
         </p:nvSpPr>
         <p:spPr/>
         <p:txBody>
-          <a:bodyPr xmlns:a="http://schemas.openxmlformats.org/drawingml/2006/main"/>
-          <a:lstStyle xmlns:a="http://schemas.openxmlformats.org/drawingml/2006/main"/>
-          <a:p xmlns:a="http://schemas.openxmlformats.org/drawingml/2006/main"/>
+          <a:bodyPr/>
+          <a:lstStyle/>
+          <a:p>
+            <a:endParaRPr/>
+          </a:p>
         </p:txBody>
       </p:sp>
     </p:spTree>
   </p:cSld>
   <p:clrMapOvr>
-    <a:masterClrMapping xmlns:a="http://schemas.openxmlformats.org/drawingml/2006/main"/>
+    <a:masterClrMapping/>
   </p:clrMapOvr>
 </p:notes>
 </file>
 
 <file path=ppt/notesSlides/notesSlide6.xml><?xml version="1.0" encoding="utf-8"?>
-<p:notes xmlns:p="http://schemas.openxmlformats.org/presentationml/2006/main">
+<p:notes xmlns:a="http://schemas.openxmlformats.org/drawingml/2006/main" xmlns:r="http://schemas.openxmlformats.org/officeDocument/2006/relationships" xmlns:p="http://schemas.openxmlformats.org/presentationml/2006/main">
   <p:cSld>
     <p:spTree>
       <p:nvGrpSpPr>
@@ -769,16 +682,21 @@
         <p:nvPr/>
       </p:nvGrpSpPr>
       <p:grpSpPr>
-        <a:xfrm xmlns:a="http://schemas.openxmlformats.org/drawingml/2006/main"/>
+        <a:xfrm>
+          <a:off x="0" y="0"/>
+          <a:ext cx="0" cy="0"/>
+          <a:chOff x="0" y="0"/>
+          <a:chExt cx="0" cy="0"/>
+        </a:xfrm>
       </p:grpSpPr>
       <p:sp>
         <p:nvSpPr>
           <p:cNvPr id="2" name="Slide Image Placeholder 1"/>
           <p:cNvSpPr>
-            <a:spLocks xmlns:a="http://schemas.openxmlformats.org/drawingml/2006/main" noGrp="1"/>
+            <a:spLocks noGrp="1" noRot="1" noChangeAspect="1"/>
           </p:cNvSpPr>
           <p:nvPr>
-            <p:ph type="sldImg" idx="0"/>
+            <p:ph type="sldImg"/>
           </p:nvPr>
         </p:nvSpPr>
         <p:spPr/>
@@ -787,7 +705,7 @@
         <p:nvSpPr>
           <p:cNvPr id="3" name="Notes Placeholder 2"/>
           <p:cNvSpPr>
-            <a:spLocks xmlns:a="http://schemas.openxmlformats.org/drawingml/2006/main" noGrp="1"/>
+            <a:spLocks noGrp="1"/>
           </p:cNvSpPr>
           <p:nvPr>
             <p:ph type="body" idx="1"/>
@@ -795,9 +713,9 @@
         </p:nvSpPr>
         <p:spPr/>
         <p:txBody>
-          <a:bodyPr xmlns:a="http://schemas.openxmlformats.org/drawingml/2006/main"/>
-          <a:lstStyle xmlns:a="http://schemas.openxmlformats.org/drawingml/2006/main"/>
-          <a:p xmlns:a="http://schemas.openxmlformats.org/drawingml/2006/main">
+          <a:bodyPr/>
+          <a:lstStyle/>
+          <a:p>
             <a:r>
               <a:t>Proposed Prototype II priorities based on the current implementation. These are future work, not claims of working features. The prototype currently has one house, three data-driven cases, static result feedback and no persistence system.</a:t>
             </a:r>
@@ -808,7 +726,7 @@
         <p:nvSpPr>
           <p:cNvPr id="4" name="Slide Number Placeholder 3"/>
           <p:cNvSpPr>
-            <a:spLocks xmlns:a="http://schemas.openxmlformats.org/drawingml/2006/main" noGrp="1"/>
+            <a:spLocks noGrp="1"/>
           </p:cNvSpPr>
           <p:nvPr>
             <p:ph type="sldNum" idx="5"/>
@@ -816,21 +734,23 @@
         </p:nvSpPr>
         <p:spPr/>
         <p:txBody>
-          <a:bodyPr xmlns:a="http://schemas.openxmlformats.org/drawingml/2006/main"/>
-          <a:lstStyle xmlns:a="http://schemas.openxmlformats.org/drawingml/2006/main"/>
-          <a:p xmlns:a="http://schemas.openxmlformats.org/drawingml/2006/main"/>
+          <a:bodyPr/>
+          <a:lstStyle/>
+          <a:p>
+            <a:endParaRPr/>
+          </a:p>
         </p:txBody>
       </p:sp>
     </p:spTree>
   </p:cSld>
   <p:clrMapOvr>
-    <a:masterClrMapping xmlns:a="http://schemas.openxmlformats.org/drawingml/2006/main"/>
+    <a:masterClrMapping/>
   </p:clrMapOvr>
 </p:notes>
 </file>
 
 <file path=ppt/notesSlides/notesSlide7.xml><?xml version="1.0" encoding="utf-8"?>
-<p:notes xmlns:p="http://schemas.openxmlformats.org/presentationml/2006/main">
+<p:notes xmlns:a="http://schemas.openxmlformats.org/drawingml/2006/main" xmlns:r="http://schemas.openxmlformats.org/officeDocument/2006/relationships" xmlns:p="http://schemas.openxmlformats.org/presentationml/2006/main">
   <p:cSld>
     <p:spTree>
       <p:nvGrpSpPr>
@@ -839,16 +759,21 @@
         <p:nvPr/>
       </p:nvGrpSpPr>
       <p:grpSpPr>
-        <a:xfrm xmlns:a="http://schemas.openxmlformats.org/drawingml/2006/main"/>
+        <a:xfrm>
+          <a:off x="0" y="0"/>
+          <a:ext cx="0" cy="0"/>
+          <a:chOff x="0" y="0"/>
+          <a:chExt cx="0" cy="0"/>
+        </a:xfrm>
       </p:grpSpPr>
       <p:sp>
         <p:nvSpPr>
           <p:cNvPr id="2" name="Slide Image Placeholder 1"/>
           <p:cNvSpPr>
-            <a:spLocks xmlns:a="http://schemas.openxmlformats.org/drawingml/2006/main" noGrp="1"/>
+            <a:spLocks noGrp="1" noRot="1" noChangeAspect="1"/>
           </p:cNvSpPr>
           <p:nvPr>
-            <p:ph type="sldImg" idx="0"/>
+            <p:ph type="sldImg"/>
           </p:nvPr>
         </p:nvSpPr>
         <p:spPr/>
@@ -857,7 +782,7 @@
         <p:nvSpPr>
           <p:cNvPr id="3" name="Notes Placeholder 2"/>
           <p:cNvSpPr>
-            <a:spLocks xmlns:a="http://schemas.openxmlformats.org/drawingml/2006/main" noGrp="1"/>
+            <a:spLocks noGrp="1"/>
           </p:cNvSpPr>
           <p:nvPr>
             <p:ph type="body" idx="1"/>
@@ -865,9 +790,9 @@
         </p:nvSpPr>
         <p:spPr/>
         <p:txBody>
-          <a:bodyPr xmlns:a="http://schemas.openxmlformats.org/drawingml/2006/main"/>
-          <a:lstStyle xmlns:a="http://schemas.openxmlformats.org/drawingml/2006/main"/>
-          <a:p xmlns:a="http://schemas.openxmlformats.org/drawingml/2006/main">
+          <a:bodyPr/>
+          <a:lstStyle/>
+          <a:p>
             <a:r>
               <a:t>AI disclosure based on the development conversation: Codex assisted implementation, scenarios, UI, collision fixes, refactoring, documentation and presentation preparation. Human contributions reflect the supplied concept and the developer scene edits, testing and design direction. Sprite artwork comes from the supplied game assets. Other tools used for earlier proposal illustrations were not confirmed and are not attributed here.</a:t>
             </a:r>
@@ -878,7 +803,7 @@
         <p:nvSpPr>
           <p:cNvPr id="4" name="Slide Number Placeholder 3"/>
           <p:cNvSpPr>
-            <a:spLocks xmlns:a="http://schemas.openxmlformats.org/drawingml/2006/main" noGrp="1"/>
+            <a:spLocks noGrp="1"/>
           </p:cNvSpPr>
           <p:nvPr>
             <p:ph type="sldNum" idx="5"/>
@@ -886,91 +811,23 @@
         </p:nvSpPr>
         <p:spPr/>
         <p:txBody>
-          <a:bodyPr xmlns:a="http://schemas.openxmlformats.org/drawingml/2006/main"/>
-          <a:lstStyle xmlns:a="http://schemas.openxmlformats.org/drawingml/2006/main"/>
-          <a:p xmlns:a="http://schemas.openxmlformats.org/drawingml/2006/main"/>
+          <a:bodyPr/>
+          <a:lstStyle/>
+          <a:p>
+            <a:endParaRPr/>
+          </a:p>
         </p:txBody>
       </p:sp>
     </p:spTree>
   </p:cSld>
   <p:clrMapOvr>
-    <a:masterClrMapping xmlns:a="http://schemas.openxmlformats.org/drawingml/2006/main"/>
-  </p:clrMapOvr>
-</p:notes>
-</file>
-
-<file path=ppt/notesSlides/notesSlide8.xml><?xml version="1.0" encoding="utf-8"?>
-<p:notes xmlns:p="http://schemas.openxmlformats.org/presentationml/2006/main">
-  <p:cSld>
-    <p:spTree>
-      <p:nvGrpSpPr>
-        <p:cNvPr id="1" name=""/>
-        <p:cNvGrpSpPr/>
-        <p:nvPr/>
-      </p:nvGrpSpPr>
-      <p:grpSpPr>
-        <a:xfrm xmlns:a="http://schemas.openxmlformats.org/drawingml/2006/main"/>
-      </p:grpSpPr>
-      <p:sp>
-        <p:nvSpPr>
-          <p:cNvPr id="2" name="Slide Image Placeholder 1"/>
-          <p:cNvSpPr>
-            <a:spLocks xmlns:a="http://schemas.openxmlformats.org/drawingml/2006/main" noGrp="1"/>
-          </p:cNvSpPr>
-          <p:nvPr>
-            <p:ph type="sldImg" idx="0"/>
-          </p:nvPr>
-        </p:nvSpPr>
-        <p:spPr/>
-      </p:sp>
-      <p:sp>
-        <p:nvSpPr>
-          <p:cNvPr id="3" name="Notes Placeholder 2"/>
-          <p:cNvSpPr>
-            <a:spLocks xmlns:a="http://schemas.openxmlformats.org/drawingml/2006/main" noGrp="1"/>
-          </p:cNvSpPr>
-          <p:nvPr>
-            <p:ph type="body" idx="1"/>
-          </p:nvPr>
-        </p:nvSpPr>
-        <p:spPr/>
-        <p:txBody>
-          <a:bodyPr xmlns:a="http://schemas.openxmlformats.org/drawingml/2006/main"/>
-          <a:lstStyle xmlns:a="http://schemas.openxmlformats.org/drawingml/2006/main"/>
-          <a:p xmlns:a="http://schemas.openxmlformats.org/drawingml/2006/main">
-            <a:r>
-              <a:t>Repository URL verified public through the GitHub repository API. Godot project version and C# target checked against src/project.godot and src/HiddenWatts.csproj. The primary play instructions use the standalone Windows x64 release with its bundled runtime. Godot and the .NET SDK are needed only for source development. The README links to the release download.</a:t>
-            </a:r>
-          </a:p>
-        </p:txBody>
-      </p:sp>
-      <p:sp>
-        <p:nvSpPr>
-          <p:cNvPr id="4" name="Slide Number Placeholder 3"/>
-          <p:cNvSpPr>
-            <a:spLocks xmlns:a="http://schemas.openxmlformats.org/drawingml/2006/main" noGrp="1"/>
-          </p:cNvSpPr>
-          <p:nvPr>
-            <p:ph type="sldNum" idx="5"/>
-          </p:nvPr>
-        </p:nvSpPr>
-        <p:spPr/>
-        <p:txBody>
-          <a:bodyPr xmlns:a="http://schemas.openxmlformats.org/drawingml/2006/main"/>
-          <a:lstStyle xmlns:a="http://schemas.openxmlformats.org/drawingml/2006/main"/>
-          <a:p xmlns:a="http://schemas.openxmlformats.org/drawingml/2006/main"/>
-        </p:txBody>
-      </p:sp>
-    </p:spTree>
-  </p:cSld>
-  <p:clrMapOvr>
-    <a:masterClrMapping xmlns:a="http://schemas.openxmlformats.org/drawingml/2006/main"/>
+    <a:masterClrMapping/>
   </p:clrMapOvr>
 </p:notes>
 </file>
 
 <file path=ppt/slideLayouts/slideLayout1.xml><?xml version="1.0" encoding="utf-8"?>
-<p:sldLayout xmlns:p="http://schemas.openxmlformats.org/presentationml/2006/main" type="title">
+<p:sldLayout xmlns:a="http://schemas.openxmlformats.org/drawingml/2006/main" xmlns:r="http://schemas.openxmlformats.org/officeDocument/2006/relationships" xmlns:p="http://schemas.openxmlformats.org/presentationml/2006/main" type="title">
   <p:cSld name="Title Slide">
     <p:spTree>
       <p:nvGrpSpPr>
@@ -979,43 +836,48 @@
         <p:nvPr/>
       </p:nvGrpSpPr>
       <p:grpSpPr>
-        <a:xfrm xmlns:a="http://schemas.openxmlformats.org/drawingml/2006/main"/>
+        <a:xfrm>
+          <a:off x="0" y="0"/>
+          <a:ext cx="0" cy="0"/>
+          <a:chOff x="0" y="0"/>
+          <a:chExt cx="0" cy="0"/>
+        </a:xfrm>
       </p:grpSpPr>
       <p:sp>
         <p:nvSpPr>
           <p:cNvPr id="3" name="Title">
-            <a:extLst xmlns:a="http://schemas.openxmlformats.org/drawingml/2006/main">
+            <a:extLst>
               <a:ext uri="{FF2B5EF4-FFF2-40B4-BE49-F238E27FC236}">
                 <a16:creationId xmlns:a16="http://schemas.microsoft.com/office/drawing/2014/main" id="{E64B7825-54F1-47BE-B39D-9D388B876256}"/>
               </a:ext>
             </a:extLst>
           </p:cNvPr>
           <p:cNvSpPr>
-            <a:spLocks xmlns:a="http://schemas.openxmlformats.org/drawingml/2006/main" noGrp="1"/>
+            <a:spLocks noGrp="1"/>
           </p:cNvSpPr>
           <p:nvPr>
-            <p:ph type="title" idx="0"/>
+            <p:ph type="title"/>
           </p:nvPr>
         </p:nvSpPr>
         <p:spPr>
-          <a:xfrm xmlns:a="http://schemas.openxmlformats.org/drawingml/2006/main">
+          <a:xfrm>
             <a:off x="1219200" y="2590800"/>
             <a:ext cx="9753600" cy="990600"/>
           </a:xfrm>
-          <a:prstGeom xmlns:a="http://schemas.openxmlformats.org/drawingml/2006/main" prst="rect">
+          <a:prstGeom prst="rect">
             <a:avLst/>
           </a:prstGeom>
-          <a:noFill xmlns:a="http://schemas.openxmlformats.org/drawingml/2006/main"/>
-          <a:ln xmlns:a="http://schemas.openxmlformats.org/drawingml/2006/main">
+          <a:noFill/>
+          <a:ln>
             <a:noFill/>
             <a:prstDash val="solid"/>
           </a:ln>
         </p:spPr>
         <p:txBody>
-          <a:bodyPr xmlns:a="http://schemas.openxmlformats.org/drawingml/2006/main" wrap="square" lIns="0" tIns="0" rIns="0" bIns="0" anchor="ctr">
+          <a:bodyPr wrap="square" lIns="0" tIns="0" rIns="0" bIns="0" anchor="ctr">
             <a:normAutofit/>
           </a:bodyPr>
-          <a:lstStyle xmlns:a="http://schemas.openxmlformats.org/drawingml/2006/main">
+          <a:lstStyle>
             <a:defPPr algn="ctr">
               <a:defRPr sz="4800" b="1">
                 <a:solidFill>
@@ -1207,44 +1069,46 @@
               </a:defRPr>
             </a:lvl9pPr>
           </a:lstStyle>
-          <a:p xmlns:a="http://schemas.openxmlformats.org/drawingml/2006/main"/>
+          <a:p>
+            <a:endParaRPr/>
+          </a:p>
         </p:txBody>
       </p:sp>
       <p:sp>
         <p:nvSpPr>
           <p:cNvPr id="2" name="Subtitle">
-            <a:extLst xmlns:a="http://schemas.openxmlformats.org/drawingml/2006/main">
+            <a:extLst>
               <a:ext uri="{FF2B5EF4-FFF2-40B4-BE49-F238E27FC236}">
                 <a16:creationId xmlns:a16="http://schemas.microsoft.com/office/drawing/2014/main" id="{BA84A903-944B-42EF-AA53-849465585908}"/>
               </a:ext>
             </a:extLst>
           </p:cNvPr>
           <p:cNvSpPr>
-            <a:spLocks xmlns:a="http://schemas.openxmlformats.org/drawingml/2006/main" noGrp="1"/>
+            <a:spLocks noGrp="1"/>
           </p:cNvSpPr>
           <p:nvPr>
             <p:ph type="subTitle" idx="1"/>
           </p:nvPr>
         </p:nvSpPr>
         <p:spPr>
-          <a:xfrm xmlns:a="http://schemas.openxmlformats.org/drawingml/2006/main">
+          <a:xfrm>
             <a:off x="1828800" y="3771900"/>
             <a:ext cx="8534400" cy="762000"/>
           </a:xfrm>
-          <a:prstGeom xmlns:a="http://schemas.openxmlformats.org/drawingml/2006/main" prst="rect">
+          <a:prstGeom prst="rect">
             <a:avLst/>
           </a:prstGeom>
-          <a:noFill xmlns:a="http://schemas.openxmlformats.org/drawingml/2006/main"/>
-          <a:ln xmlns:a="http://schemas.openxmlformats.org/drawingml/2006/main">
+          <a:noFill/>
+          <a:ln>
             <a:noFill/>
             <a:prstDash val="solid"/>
           </a:ln>
         </p:spPr>
         <p:txBody>
-          <a:bodyPr xmlns:a="http://schemas.openxmlformats.org/drawingml/2006/main" wrap="square" lIns="0" tIns="0" rIns="0" bIns="0" anchor="ctr">
+          <a:bodyPr wrap="square" lIns="0" tIns="0" rIns="0" bIns="0" anchor="ctr">
             <a:normAutofit/>
           </a:bodyPr>
-          <a:lstStyle xmlns:a="http://schemas.openxmlformats.org/drawingml/2006/main">
+          <a:lstStyle>
             <a:defPPr algn="ctr">
               <a:defRPr sz="2100" b="0">
                 <a:solidFill>
@@ -1436,16 +1300,21 @@
               </a:defRPr>
             </a:lvl9pPr>
           </a:lstStyle>
-          <a:p xmlns:a="http://schemas.openxmlformats.org/drawingml/2006/main"/>
+          <a:p>
+            <a:endParaRPr/>
+          </a:p>
         </p:txBody>
       </p:sp>
     </p:spTree>
   </p:cSld>
+  <p:clrMapOvr>
+    <a:masterClrMapping/>
+  </p:clrMapOvr>
 </p:sldLayout>
 </file>
 
 <file path=ppt/slideLayouts/slideLayout2.xml><?xml version="1.0" encoding="utf-8"?>
-<p:sldLayout xmlns:p="http://schemas.openxmlformats.org/presentationml/2006/main">
+<p:sldLayout xmlns:a="http://schemas.openxmlformats.org/drawingml/2006/main" xmlns:r="http://schemas.openxmlformats.org/officeDocument/2006/relationships" xmlns:p="http://schemas.openxmlformats.org/presentationml/2006/main">
   <p:cSld name="Section Header">
     <p:spTree>
       <p:nvGrpSpPr>
@@ -1454,43 +1323,48 @@
         <p:nvPr/>
       </p:nvGrpSpPr>
       <p:grpSpPr>
-        <a:xfrm xmlns:a="http://schemas.openxmlformats.org/drawingml/2006/main"/>
+        <a:xfrm>
+          <a:off x="0" y="0"/>
+          <a:ext cx="0" cy="0"/>
+          <a:chOff x="0" y="0"/>
+          <a:chExt cx="0" cy="0"/>
+        </a:xfrm>
       </p:grpSpPr>
       <p:sp>
         <p:nvSpPr>
           <p:cNvPr id="2" name="Section title">
-            <a:extLst xmlns:a="http://schemas.openxmlformats.org/drawingml/2006/main">
+            <a:extLst>
               <a:ext uri="{FF2B5EF4-FFF2-40B4-BE49-F238E27FC236}">
                 <a16:creationId xmlns:a16="http://schemas.microsoft.com/office/drawing/2014/main" id="{96EAA281-A432-4B52-8F3B-17CC67DAACD0}"/>
               </a:ext>
             </a:extLst>
           </p:cNvPr>
           <p:cNvSpPr>
-            <a:spLocks xmlns:a="http://schemas.openxmlformats.org/drawingml/2006/main" noGrp="1"/>
+            <a:spLocks noGrp="1"/>
           </p:cNvSpPr>
           <p:nvPr>
-            <p:ph type="title" idx="0"/>
+            <p:ph type="title"/>
           </p:nvPr>
         </p:nvSpPr>
         <p:spPr>
-          <a:xfrm xmlns:a="http://schemas.openxmlformats.org/drawingml/2006/main">
+          <a:xfrm>
             <a:off x="1219200" y="2857500"/>
             <a:ext cx="9753600" cy="1143000"/>
           </a:xfrm>
-          <a:prstGeom xmlns:a="http://schemas.openxmlformats.org/drawingml/2006/main" prst="rect">
+          <a:prstGeom prst="rect">
             <a:avLst/>
           </a:prstGeom>
-          <a:noFill xmlns:a="http://schemas.openxmlformats.org/drawingml/2006/main"/>
-          <a:ln xmlns:a="http://schemas.openxmlformats.org/drawingml/2006/main">
+          <a:noFill/>
+          <a:ln>
             <a:noFill/>
             <a:prstDash val="solid"/>
           </a:ln>
         </p:spPr>
         <p:txBody>
-          <a:bodyPr xmlns:a="http://schemas.openxmlformats.org/drawingml/2006/main" wrap="square" lIns="0" tIns="0" rIns="0" bIns="0" anchor="ctr">
+          <a:bodyPr wrap="square" lIns="0" tIns="0" rIns="0" bIns="0" anchor="ctr">
             <a:normAutofit/>
           </a:bodyPr>
-          <a:lstStyle xmlns:a="http://schemas.openxmlformats.org/drawingml/2006/main">
+          <a:lstStyle>
             <a:defPPr algn="ctr">
               <a:defRPr sz="4200" b="1">
                 <a:solidFill>
@@ -1682,16 +1556,21 @@
               </a:defRPr>
             </a:lvl9pPr>
           </a:lstStyle>
-          <a:p xmlns:a="http://schemas.openxmlformats.org/drawingml/2006/main"/>
+          <a:p>
+            <a:endParaRPr/>
+          </a:p>
         </p:txBody>
       </p:sp>
     </p:spTree>
   </p:cSld>
+  <p:clrMapOvr>
+    <a:masterClrMapping/>
+  </p:clrMapOvr>
 </p:sldLayout>
 </file>
 
 <file path=ppt/slideLayouts/slideLayout3.xml><?xml version="1.0" encoding="utf-8"?>
-<p:sldLayout xmlns:p="http://schemas.openxmlformats.org/presentationml/2006/main">
+<p:sldLayout xmlns:a="http://schemas.openxmlformats.org/drawingml/2006/main" xmlns:r="http://schemas.openxmlformats.org/officeDocument/2006/relationships" xmlns:p="http://schemas.openxmlformats.org/presentationml/2006/main">
   <p:cSld name="Title and Body">
     <p:spTree>
       <p:nvGrpSpPr>
@@ -1700,43 +1579,48 @@
         <p:nvPr/>
       </p:nvGrpSpPr>
       <p:grpSpPr>
-        <a:xfrm xmlns:a="http://schemas.openxmlformats.org/drawingml/2006/main"/>
+        <a:xfrm>
+          <a:off x="0" y="0"/>
+          <a:ext cx="0" cy="0"/>
+          <a:chOff x="0" y="0"/>
+          <a:chExt cx="0" cy="0"/>
+        </a:xfrm>
       </p:grpSpPr>
       <p:sp>
         <p:nvSpPr>
           <p:cNvPr id="3" name="Title">
-            <a:extLst xmlns:a="http://schemas.openxmlformats.org/drawingml/2006/main">
+            <a:extLst>
               <a:ext uri="{FF2B5EF4-FFF2-40B4-BE49-F238E27FC236}">
                 <a16:creationId xmlns:a16="http://schemas.microsoft.com/office/drawing/2014/main" id="{D138B7D4-568E-4761-BB99-48325C4417B3}"/>
               </a:ext>
             </a:extLst>
           </p:cNvPr>
           <p:cNvSpPr>
-            <a:spLocks xmlns:a="http://schemas.openxmlformats.org/drawingml/2006/main" noGrp="1"/>
+            <a:spLocks noGrp="1"/>
           </p:cNvSpPr>
           <p:nvPr>
-            <p:ph type="title" idx="0"/>
+            <p:ph type="title"/>
           </p:nvPr>
         </p:nvSpPr>
         <p:spPr>
-          <a:xfrm xmlns:a="http://schemas.openxmlformats.org/drawingml/2006/main">
+          <a:xfrm>
             <a:off x="685800" y="533400"/>
             <a:ext cx="10820400" cy="838200"/>
           </a:xfrm>
-          <a:prstGeom xmlns:a="http://schemas.openxmlformats.org/drawingml/2006/main" prst="rect">
+          <a:prstGeom prst="rect">
             <a:avLst/>
           </a:prstGeom>
-          <a:noFill xmlns:a="http://schemas.openxmlformats.org/drawingml/2006/main"/>
-          <a:ln xmlns:a="http://schemas.openxmlformats.org/drawingml/2006/main">
+          <a:noFill/>
+          <a:ln>
             <a:noFill/>
             <a:prstDash val="solid"/>
           </a:ln>
         </p:spPr>
         <p:txBody>
-          <a:bodyPr xmlns:a="http://schemas.openxmlformats.org/drawingml/2006/main" wrap="square" lIns="0" tIns="0" rIns="0" bIns="0" anchor="t">
+          <a:bodyPr wrap="square" lIns="0" tIns="0" rIns="0" bIns="0" anchor="t">
             <a:normAutofit/>
           </a:bodyPr>
-          <a:lstStyle xmlns:a="http://schemas.openxmlformats.org/drawingml/2006/main">
+          <a:lstStyle>
             <a:defPPr algn="l">
               <a:defRPr sz="3300" b="1">
                 <a:solidFill>
@@ -1928,44 +1812,46 @@
               </a:defRPr>
             </a:lvl9pPr>
           </a:lstStyle>
-          <a:p xmlns:a="http://schemas.openxmlformats.org/drawingml/2006/main"/>
+          <a:p>
+            <a:endParaRPr/>
+          </a:p>
         </p:txBody>
       </p:sp>
       <p:sp>
         <p:nvSpPr>
           <p:cNvPr id="2" name="Body">
-            <a:extLst xmlns:a="http://schemas.openxmlformats.org/drawingml/2006/main">
+            <a:extLst>
               <a:ext uri="{FF2B5EF4-FFF2-40B4-BE49-F238E27FC236}">
                 <a16:creationId xmlns:a16="http://schemas.microsoft.com/office/drawing/2014/main" id="{65ABBD41-88EA-4C6C-AE03-446153E7DE6E}"/>
               </a:ext>
             </a:extLst>
           </p:cNvPr>
           <p:cNvSpPr>
-            <a:spLocks xmlns:a="http://schemas.openxmlformats.org/drawingml/2006/main" noGrp="1"/>
+            <a:spLocks noGrp="1"/>
           </p:cNvSpPr>
           <p:nvPr>
             <p:ph type="body" idx="1"/>
           </p:nvPr>
         </p:nvSpPr>
         <p:spPr>
-          <a:xfrm xmlns:a="http://schemas.openxmlformats.org/drawingml/2006/main">
+          <a:xfrm>
             <a:off x="685800" y="1905000"/>
             <a:ext cx="10820400" cy="4267200"/>
           </a:xfrm>
-          <a:prstGeom xmlns:a="http://schemas.openxmlformats.org/drawingml/2006/main" prst="rect">
+          <a:prstGeom prst="rect">
             <a:avLst/>
           </a:prstGeom>
-          <a:noFill xmlns:a="http://schemas.openxmlformats.org/drawingml/2006/main"/>
-          <a:ln xmlns:a="http://schemas.openxmlformats.org/drawingml/2006/main">
+          <a:noFill/>
+          <a:ln>
             <a:noFill/>
             <a:prstDash val="solid"/>
           </a:ln>
         </p:spPr>
         <p:txBody>
-          <a:bodyPr xmlns:a="http://schemas.openxmlformats.org/drawingml/2006/main" wrap="square" lIns="0" tIns="0" rIns="0" bIns="0" anchor="t">
+          <a:bodyPr wrap="square" lIns="0" tIns="0" rIns="0" bIns="0" anchor="t">
             <a:normAutofit/>
           </a:bodyPr>
-          <a:lstStyle xmlns:a="http://schemas.openxmlformats.org/drawingml/2006/main">
+          <a:lstStyle>
             <a:defPPr algn="l">
               <a:defRPr sz="2250" b="0">
                 <a:solidFill>
@@ -2157,16 +2043,21 @@
               </a:defRPr>
             </a:lvl9pPr>
           </a:lstStyle>
-          <a:p xmlns:a="http://schemas.openxmlformats.org/drawingml/2006/main"/>
+          <a:p>
+            <a:endParaRPr/>
+          </a:p>
         </p:txBody>
       </p:sp>
     </p:spTree>
   </p:cSld>
+  <p:clrMapOvr>
+    <a:masterClrMapping/>
+  </p:clrMapOvr>
 </p:sldLayout>
 </file>
 
 <file path=ppt/slideLayouts/slideLayout4.xml><?xml version="1.0" encoding="utf-8"?>
-<p:sldLayout xmlns:p="http://schemas.openxmlformats.org/presentationml/2006/main">
+<p:sldLayout xmlns:a="http://schemas.openxmlformats.org/drawingml/2006/main" xmlns:r="http://schemas.openxmlformats.org/officeDocument/2006/relationships" xmlns:p="http://schemas.openxmlformats.org/presentationml/2006/main">
   <p:cSld name="Title and Two Column">
     <p:spTree>
       <p:nvGrpSpPr>
@@ -2175,43 +2066,48 @@
         <p:nvPr/>
       </p:nvGrpSpPr>
       <p:grpSpPr>
-        <a:xfrm xmlns:a="http://schemas.openxmlformats.org/drawingml/2006/main"/>
+        <a:xfrm>
+          <a:off x="0" y="0"/>
+          <a:ext cx="0" cy="0"/>
+          <a:chOff x="0" y="0"/>
+          <a:chExt cx="0" cy="0"/>
+        </a:xfrm>
       </p:grpSpPr>
       <p:sp>
         <p:nvSpPr>
           <p:cNvPr id="4" name="Title">
-            <a:extLst xmlns:a="http://schemas.openxmlformats.org/drawingml/2006/main">
+            <a:extLst>
               <a:ext uri="{FF2B5EF4-FFF2-40B4-BE49-F238E27FC236}">
                 <a16:creationId xmlns:a16="http://schemas.microsoft.com/office/drawing/2014/main" id="{8BA4B4FD-A9BB-4119-AEA2-EAEE8642C43A}"/>
               </a:ext>
             </a:extLst>
           </p:cNvPr>
           <p:cNvSpPr>
-            <a:spLocks xmlns:a="http://schemas.openxmlformats.org/drawingml/2006/main" noGrp="1"/>
+            <a:spLocks noGrp="1"/>
           </p:cNvSpPr>
           <p:nvPr>
-            <p:ph type="title" idx="0"/>
+            <p:ph type="title"/>
           </p:nvPr>
         </p:nvSpPr>
         <p:spPr>
-          <a:xfrm xmlns:a="http://schemas.openxmlformats.org/drawingml/2006/main">
+          <a:xfrm>
             <a:off x="685800" y="533400"/>
             <a:ext cx="10820400" cy="838200"/>
           </a:xfrm>
-          <a:prstGeom xmlns:a="http://schemas.openxmlformats.org/drawingml/2006/main" prst="rect">
+          <a:prstGeom prst="rect">
             <a:avLst/>
           </a:prstGeom>
-          <a:noFill xmlns:a="http://schemas.openxmlformats.org/drawingml/2006/main"/>
-          <a:ln xmlns:a="http://schemas.openxmlformats.org/drawingml/2006/main">
+          <a:noFill/>
+          <a:ln>
             <a:noFill/>
             <a:prstDash val="solid"/>
           </a:ln>
         </p:spPr>
         <p:txBody>
-          <a:bodyPr xmlns:a="http://schemas.openxmlformats.org/drawingml/2006/main" wrap="square" lIns="0" tIns="0" rIns="0" bIns="0" anchor="t">
+          <a:bodyPr wrap="square" lIns="0" tIns="0" rIns="0" bIns="0" anchor="t">
             <a:normAutofit/>
           </a:bodyPr>
-          <a:lstStyle xmlns:a="http://schemas.openxmlformats.org/drawingml/2006/main">
+          <a:lstStyle>
             <a:defPPr algn="l">
               <a:defRPr sz="3300" b="1">
                 <a:solidFill>
@@ -2403,44 +2299,46 @@
               </a:defRPr>
             </a:lvl9pPr>
           </a:lstStyle>
-          <a:p xmlns:a="http://schemas.openxmlformats.org/drawingml/2006/main"/>
+          <a:p>
+            <a:endParaRPr/>
+          </a:p>
         </p:txBody>
       </p:sp>
       <p:sp>
         <p:nvSpPr>
           <p:cNvPr id="2" name="Left column">
-            <a:extLst xmlns:a="http://schemas.openxmlformats.org/drawingml/2006/main">
+            <a:extLst>
               <a:ext uri="{FF2B5EF4-FFF2-40B4-BE49-F238E27FC236}">
                 <a16:creationId xmlns:a16="http://schemas.microsoft.com/office/drawing/2014/main" id="{7D56248A-972F-4693-BEC4-6EC7EE06D335}"/>
               </a:ext>
             </a:extLst>
           </p:cNvPr>
           <p:cNvSpPr>
-            <a:spLocks xmlns:a="http://schemas.openxmlformats.org/drawingml/2006/main" noGrp="1"/>
+            <a:spLocks noGrp="1"/>
           </p:cNvSpPr>
           <p:nvPr>
             <p:ph type="body" idx="1"/>
           </p:nvPr>
         </p:nvSpPr>
         <p:spPr>
-          <a:xfrm xmlns:a="http://schemas.openxmlformats.org/drawingml/2006/main">
+          <a:xfrm>
             <a:off x="685800" y="1905000"/>
             <a:ext cx="5029200" cy="4267200"/>
           </a:xfrm>
-          <a:prstGeom xmlns:a="http://schemas.openxmlformats.org/drawingml/2006/main" prst="rect">
+          <a:prstGeom prst="rect">
             <a:avLst/>
           </a:prstGeom>
-          <a:noFill xmlns:a="http://schemas.openxmlformats.org/drawingml/2006/main"/>
-          <a:ln xmlns:a="http://schemas.openxmlformats.org/drawingml/2006/main">
+          <a:noFill/>
+          <a:ln>
             <a:noFill/>
             <a:prstDash val="solid"/>
           </a:ln>
         </p:spPr>
         <p:txBody>
-          <a:bodyPr xmlns:a="http://schemas.openxmlformats.org/drawingml/2006/main" wrap="square" lIns="0" tIns="0" rIns="0" bIns="0" anchor="t">
+          <a:bodyPr wrap="square" lIns="0" tIns="0" rIns="0" bIns="0" anchor="t">
             <a:normAutofit/>
           </a:bodyPr>
-          <a:lstStyle xmlns:a="http://schemas.openxmlformats.org/drawingml/2006/main">
+          <a:lstStyle>
             <a:defPPr algn="l">
               <a:defRPr sz="2100" b="0">
                 <a:solidFill>
@@ -2632,44 +2530,46 @@
               </a:defRPr>
             </a:lvl9pPr>
           </a:lstStyle>
-          <a:p xmlns:a="http://schemas.openxmlformats.org/drawingml/2006/main"/>
+          <a:p>
+            <a:endParaRPr/>
+          </a:p>
         </p:txBody>
       </p:sp>
       <p:sp>
         <p:nvSpPr>
           <p:cNvPr id="3" name="Right column">
-            <a:extLst xmlns:a="http://schemas.openxmlformats.org/drawingml/2006/main">
+            <a:extLst>
               <a:ext uri="{FF2B5EF4-FFF2-40B4-BE49-F238E27FC236}">
                 <a16:creationId xmlns:a16="http://schemas.microsoft.com/office/drawing/2014/main" id="{5CC3F447-20B0-495A-9412-3C246DB9BEE1}"/>
               </a:ext>
             </a:extLst>
           </p:cNvPr>
           <p:cNvSpPr>
-            <a:spLocks xmlns:a="http://schemas.openxmlformats.org/drawingml/2006/main" noGrp="1"/>
+            <a:spLocks noGrp="1"/>
           </p:cNvSpPr>
           <p:nvPr>
             <p:ph type="body" idx="2"/>
           </p:nvPr>
         </p:nvSpPr>
         <p:spPr>
-          <a:xfrm xmlns:a="http://schemas.openxmlformats.org/drawingml/2006/main">
+          <a:xfrm>
             <a:off x="6477000" y="1905000"/>
             <a:ext cx="5029200" cy="4267200"/>
           </a:xfrm>
-          <a:prstGeom xmlns:a="http://schemas.openxmlformats.org/drawingml/2006/main" prst="rect">
+          <a:prstGeom prst="rect">
             <a:avLst/>
           </a:prstGeom>
-          <a:noFill xmlns:a="http://schemas.openxmlformats.org/drawingml/2006/main"/>
-          <a:ln xmlns:a="http://schemas.openxmlformats.org/drawingml/2006/main">
+          <a:noFill/>
+          <a:ln>
             <a:noFill/>
             <a:prstDash val="solid"/>
           </a:ln>
         </p:spPr>
         <p:txBody>
-          <a:bodyPr xmlns:a="http://schemas.openxmlformats.org/drawingml/2006/main" wrap="square" lIns="0" tIns="0" rIns="0" bIns="0" anchor="t">
+          <a:bodyPr wrap="square" lIns="0" tIns="0" rIns="0" bIns="0" anchor="t">
             <a:normAutofit/>
           </a:bodyPr>
-          <a:lstStyle xmlns:a="http://schemas.openxmlformats.org/drawingml/2006/main">
+          <a:lstStyle>
             <a:defPPr algn="l">
               <a:defRPr sz="2100" b="0">
                 <a:solidFill>
@@ -2861,16 +2761,21 @@
               </a:defRPr>
             </a:lvl9pPr>
           </a:lstStyle>
-          <a:p xmlns:a="http://schemas.openxmlformats.org/drawingml/2006/main"/>
+          <a:p>
+            <a:endParaRPr/>
+          </a:p>
         </p:txBody>
       </p:sp>
     </p:spTree>
   </p:cSld>
+  <p:clrMapOvr>
+    <a:masterClrMapping/>
+  </p:clrMapOvr>
 </p:sldLayout>
 </file>
 
 <file path=ppt/slideLayouts/slideLayout5.xml><?xml version="1.0" encoding="utf-8"?>
-<p:sldLayout xmlns:p="http://schemas.openxmlformats.org/presentationml/2006/main">
+<p:sldLayout xmlns:a="http://schemas.openxmlformats.org/drawingml/2006/main" xmlns:r="http://schemas.openxmlformats.org/officeDocument/2006/relationships" xmlns:p="http://schemas.openxmlformats.org/presentationml/2006/main">
   <p:cSld name="Title and One Column">
     <p:spTree>
       <p:nvGrpSpPr>
@@ -2879,43 +2784,48 @@
         <p:nvPr/>
       </p:nvGrpSpPr>
       <p:grpSpPr>
-        <a:xfrm xmlns:a="http://schemas.openxmlformats.org/drawingml/2006/main"/>
+        <a:xfrm>
+          <a:off x="0" y="0"/>
+          <a:ext cx="0" cy="0"/>
+          <a:chOff x="0" y="0"/>
+          <a:chExt cx="0" cy="0"/>
+        </a:xfrm>
       </p:grpSpPr>
       <p:sp>
         <p:nvSpPr>
           <p:cNvPr id="3" name="Title">
-            <a:extLst xmlns:a="http://schemas.openxmlformats.org/drawingml/2006/main">
+            <a:extLst>
               <a:ext uri="{FF2B5EF4-FFF2-40B4-BE49-F238E27FC236}">
                 <a16:creationId xmlns:a16="http://schemas.microsoft.com/office/drawing/2014/main" id="{A829AD02-3DF1-4459-8885-BAA0C6E31757}"/>
               </a:ext>
             </a:extLst>
           </p:cNvPr>
           <p:cNvSpPr>
-            <a:spLocks xmlns:a="http://schemas.openxmlformats.org/drawingml/2006/main" noGrp="1"/>
+            <a:spLocks noGrp="1"/>
           </p:cNvSpPr>
           <p:nvPr>
-            <p:ph type="title" idx="0"/>
+            <p:ph type="title"/>
           </p:nvPr>
         </p:nvSpPr>
         <p:spPr>
-          <a:xfrm xmlns:a="http://schemas.openxmlformats.org/drawingml/2006/main">
+          <a:xfrm>
             <a:off x="685800" y="533400"/>
             <a:ext cx="10820400" cy="838200"/>
           </a:xfrm>
-          <a:prstGeom xmlns:a="http://schemas.openxmlformats.org/drawingml/2006/main" prst="rect">
+          <a:prstGeom prst="rect">
             <a:avLst/>
           </a:prstGeom>
-          <a:noFill xmlns:a="http://schemas.openxmlformats.org/drawingml/2006/main"/>
-          <a:ln xmlns:a="http://schemas.openxmlformats.org/drawingml/2006/main">
+          <a:noFill/>
+          <a:ln>
             <a:noFill/>
             <a:prstDash val="solid"/>
           </a:ln>
         </p:spPr>
         <p:txBody>
-          <a:bodyPr xmlns:a="http://schemas.openxmlformats.org/drawingml/2006/main" wrap="square" lIns="0" tIns="0" rIns="0" bIns="0" anchor="t">
+          <a:bodyPr wrap="square" lIns="0" tIns="0" rIns="0" bIns="0" anchor="t">
             <a:normAutofit/>
           </a:bodyPr>
-          <a:lstStyle xmlns:a="http://schemas.openxmlformats.org/drawingml/2006/main">
+          <a:lstStyle>
             <a:defPPr algn="l">
               <a:defRPr sz="3300" b="1">
                 <a:solidFill>
@@ -3107,44 +3017,46 @@
               </a:defRPr>
             </a:lvl9pPr>
           </a:lstStyle>
-          <a:p xmlns:a="http://schemas.openxmlformats.org/drawingml/2006/main"/>
+          <a:p>
+            <a:endParaRPr/>
+          </a:p>
         </p:txBody>
       </p:sp>
       <p:sp>
         <p:nvSpPr>
           <p:cNvPr id="2" name="Left column">
-            <a:extLst xmlns:a="http://schemas.openxmlformats.org/drawingml/2006/main">
+            <a:extLst>
               <a:ext uri="{FF2B5EF4-FFF2-40B4-BE49-F238E27FC236}">
                 <a16:creationId xmlns:a16="http://schemas.microsoft.com/office/drawing/2014/main" id="{5273E3E7-467A-46E6-82E7-6200F022675F}"/>
               </a:ext>
             </a:extLst>
           </p:cNvPr>
           <p:cNvSpPr>
-            <a:spLocks xmlns:a="http://schemas.openxmlformats.org/drawingml/2006/main" noGrp="1"/>
+            <a:spLocks noGrp="1"/>
           </p:cNvSpPr>
           <p:nvPr>
             <p:ph type="body" idx="1"/>
           </p:nvPr>
         </p:nvSpPr>
         <p:spPr>
-          <a:xfrm xmlns:a="http://schemas.openxmlformats.org/drawingml/2006/main">
+          <a:xfrm>
             <a:off x="685800" y="1905000"/>
             <a:ext cx="5029200" cy="4267200"/>
           </a:xfrm>
-          <a:prstGeom xmlns:a="http://schemas.openxmlformats.org/drawingml/2006/main" prst="rect">
+          <a:prstGeom prst="rect">
             <a:avLst/>
           </a:prstGeom>
-          <a:noFill xmlns:a="http://schemas.openxmlformats.org/drawingml/2006/main"/>
-          <a:ln xmlns:a="http://schemas.openxmlformats.org/drawingml/2006/main">
+          <a:noFill/>
+          <a:ln>
             <a:noFill/>
             <a:prstDash val="solid"/>
           </a:ln>
         </p:spPr>
         <p:txBody>
-          <a:bodyPr xmlns:a="http://schemas.openxmlformats.org/drawingml/2006/main" wrap="square" lIns="0" tIns="0" rIns="0" bIns="0" anchor="t">
+          <a:bodyPr wrap="square" lIns="0" tIns="0" rIns="0" bIns="0" anchor="t">
             <a:normAutofit/>
           </a:bodyPr>
-          <a:lstStyle xmlns:a="http://schemas.openxmlformats.org/drawingml/2006/main">
+          <a:lstStyle>
             <a:defPPr algn="l">
               <a:defRPr sz="2250" b="0">
                 <a:solidFill>
@@ -3336,16 +3248,21 @@
               </a:defRPr>
             </a:lvl9pPr>
           </a:lstStyle>
-          <a:p xmlns:a="http://schemas.openxmlformats.org/drawingml/2006/main"/>
+          <a:p>
+            <a:endParaRPr/>
+          </a:p>
         </p:txBody>
       </p:sp>
     </p:spTree>
   </p:cSld>
+  <p:clrMapOvr>
+    <a:masterClrMapping/>
+  </p:clrMapOvr>
 </p:sldLayout>
 </file>
 
 <file path=ppt/slideLayouts/slideLayout6.xml><?xml version="1.0" encoding="utf-8"?>
-<p:sldLayout xmlns:p="http://schemas.openxmlformats.org/presentationml/2006/main" type="blank">
+<p:sldLayout xmlns:a="http://schemas.openxmlformats.org/drawingml/2006/main" xmlns:r="http://schemas.openxmlformats.org/officeDocument/2006/relationships" xmlns:p="http://schemas.openxmlformats.org/presentationml/2006/main" type="blank">
   <p:cSld name="Blank">
     <p:spTree>
       <p:nvGrpSpPr>
@@ -3354,19 +3271,27 @@
         <p:nvPr/>
       </p:nvGrpSpPr>
       <p:grpSpPr>
-        <a:xfrm xmlns:a="http://schemas.openxmlformats.org/drawingml/2006/main"/>
+        <a:xfrm>
+          <a:off x="0" y="0"/>
+          <a:ext cx="0" cy="0"/>
+          <a:chOff x="0" y="0"/>
+          <a:chExt cx="0" cy="0"/>
+        </a:xfrm>
       </p:grpSpPr>
     </p:spTree>
   </p:cSld>
+  <p:clrMapOvr>
+    <a:masterClrMapping/>
+  </p:clrMapOvr>
 </p:sldLayout>
 </file>
 
 <file path=ppt/slideMasters/slideMaster1.xml><?xml version="1.0" encoding="utf-8"?>
-<p:sldMaster xmlns:p="http://schemas.openxmlformats.org/presentationml/2006/main">
+<p:sldMaster xmlns:a="http://schemas.openxmlformats.org/drawingml/2006/main" xmlns:r="http://schemas.openxmlformats.org/officeDocument/2006/relationships" xmlns:p="http://schemas.openxmlformats.org/presentationml/2006/main">
   <p:cSld name="Master">
     <p:bg>
       <p:bgRef idx="1001">
-        <a:schemeClr xmlns:a="http://schemas.openxmlformats.org/drawingml/2006/main" val="bg1"/>
+        <a:schemeClr val="bg1"/>
       </p:bgRef>
     </p:bg>
     <p:spTree>
@@ -3376,22 +3301,27 @@
         <p:nvPr/>
       </p:nvGrpSpPr>
       <p:grpSpPr>
-        <a:xfrm xmlns:a="http://schemas.openxmlformats.org/drawingml/2006/main"/>
+        <a:xfrm>
+          <a:off x="0" y="0"/>
+          <a:ext cx="0" cy="0"/>
+          <a:chOff x="0" y="0"/>
+          <a:chExt cx="0" cy="0"/>
+        </a:xfrm>
       </p:grpSpPr>
     </p:spTree>
   </p:cSld>
   <p:clrMap bg1="lt1" tx1="dk1" bg2="lt2" tx2="dk2" accent1="accent1" accent2="accent2" accent3="accent3" accent4="accent4" accent5="accent5" accent6="accent6" hlink="hlink" folHlink="folHlink"/>
   <p:sldLayoutIdLst>
-    <p:sldLayoutId xmlns:r="http://schemas.openxmlformats.org/officeDocument/2006/relationships" id="2147483649" r:id="Rc3f1bb6da9f648a2"/>
-    <p:sldLayoutId xmlns:r="http://schemas.openxmlformats.org/officeDocument/2006/relationships" id="2147483650" r:id="R0e862283cb364852"/>
-    <p:sldLayoutId xmlns:r="http://schemas.openxmlformats.org/officeDocument/2006/relationships" id="2147483651" r:id="Rdb9ef25e2d97438c"/>
-    <p:sldLayoutId xmlns:r="http://schemas.openxmlformats.org/officeDocument/2006/relationships" id="2147483652" r:id="R49a7eac4dfb2495f"/>
-    <p:sldLayoutId xmlns:r="http://schemas.openxmlformats.org/officeDocument/2006/relationships" id="2147483653" r:id="Ree731c08be4f461d"/>
-    <p:sldLayoutId xmlns:r="http://schemas.openxmlformats.org/officeDocument/2006/relationships" id="2147483654" r:id="R5521da537ffd4ff2"/>
+    <p:sldLayoutId id="2147483649" r:id="rId1"/>
+    <p:sldLayoutId id="2147483650" r:id="rId2"/>
+    <p:sldLayoutId id="2147483651" r:id="rId3"/>
+    <p:sldLayoutId id="2147483652" r:id="rId4"/>
+    <p:sldLayoutId id="2147483653" r:id="rId5"/>
+    <p:sldLayoutId id="2147483654" r:id="rId6"/>
   </p:sldLayoutIdLst>
   <p:txStyles>
     <p:titleStyle>
-      <a:lvl1pPr xmlns:a="http://schemas.openxmlformats.org/drawingml/2006/main" algn="l">
+      <a:lvl1pPr algn="l">
         <a:lnSpc>
           <a:spcPct val="90000"/>
         </a:lnSpc>
@@ -3410,7 +3340,7 @@
       </a:lvl1pPr>
     </p:titleStyle>
     <p:bodyStyle>
-      <a:lvl1pPr xmlns:a="http://schemas.openxmlformats.org/drawingml/2006/main" marL="228600" indent="-228600" algn="l">
+      <a:lvl1pPr marL="228600" indent="-228600" algn="l">
         <a:lnSpc>
           <a:spcPct val="90000"/>
         </a:lnSpc>
@@ -3427,7 +3357,7 @@
           <a:cs typeface="+mn-lt"/>
         </a:defRPr>
       </a:lvl1pPr>
-      <a:lvl2pPr xmlns:a="http://schemas.openxmlformats.org/drawingml/2006/main" marL="685800" indent="-228600" algn="l">
+      <a:lvl2pPr marL="685800" indent="-228600" algn="l">
         <a:lnSpc>
           <a:spcPct val="90000"/>
         </a:lnSpc>
@@ -3444,7 +3374,7 @@
           <a:cs typeface="+mn-lt"/>
         </a:defRPr>
       </a:lvl2pPr>
-      <a:lvl3pPr xmlns:a="http://schemas.openxmlformats.org/drawingml/2006/main" marL="1143000" indent="-228600" algn="l">
+      <a:lvl3pPr marL="1143000" indent="-228600" algn="l">
         <a:lnSpc>
           <a:spcPct val="90000"/>
         </a:lnSpc>
@@ -3461,7 +3391,7 @@
           <a:cs typeface="+mn-lt"/>
         </a:defRPr>
       </a:lvl3pPr>
-      <a:lvl4pPr xmlns:a="http://schemas.openxmlformats.org/drawingml/2006/main" marL="1600200" indent="-228600" algn="l">
+      <a:lvl4pPr marL="1600200" indent="-228600" algn="l">
         <a:lnSpc>
           <a:spcPct val="90000"/>
         </a:lnSpc>
@@ -3478,7 +3408,7 @@
           <a:cs typeface="+mn-lt"/>
         </a:defRPr>
       </a:lvl4pPr>
-      <a:lvl5pPr xmlns:a="http://schemas.openxmlformats.org/drawingml/2006/main" marL="2057400" indent="-228600" algn="l">
+      <a:lvl5pPr marL="2057400" indent="-228600" algn="l">
         <a:lnSpc>
           <a:spcPct val="90000"/>
         </a:lnSpc>
@@ -3495,7 +3425,7 @@
           <a:cs typeface="+mn-lt"/>
         </a:defRPr>
       </a:lvl5pPr>
-      <a:lvl6pPr xmlns:a="http://schemas.openxmlformats.org/drawingml/2006/main" marL="2514600" indent="-228600" algn="l">
+      <a:lvl6pPr marL="2514600" indent="-228600" algn="l">
         <a:lnSpc>
           <a:spcPct val="90000"/>
         </a:lnSpc>
@@ -3512,7 +3442,7 @@
           <a:cs typeface="+mn-lt"/>
         </a:defRPr>
       </a:lvl6pPr>
-      <a:lvl7pPr xmlns:a="http://schemas.openxmlformats.org/drawingml/2006/main" marL="2971800" indent="-228600" algn="l">
+      <a:lvl7pPr marL="2971800" indent="-228600" algn="l">
         <a:lnSpc>
           <a:spcPct val="90000"/>
         </a:lnSpc>
@@ -3529,7 +3459,7 @@
           <a:cs typeface="+mn-lt"/>
         </a:defRPr>
       </a:lvl7pPr>
-      <a:lvl8pPr xmlns:a="http://schemas.openxmlformats.org/drawingml/2006/main" marL="3429000" indent="-228600" algn="l">
+      <a:lvl8pPr marL="3429000" indent="-228600" algn="l">
         <a:lnSpc>
           <a:spcPct val="90000"/>
         </a:lnSpc>
@@ -3546,7 +3476,7 @@
           <a:cs typeface="+mn-lt"/>
         </a:defRPr>
       </a:lvl8pPr>
-      <a:lvl9pPr xmlns:a="http://schemas.openxmlformats.org/drawingml/2006/main" marL="3886200" indent="-228600" algn="l">
+      <a:lvl9pPr marL="3886200" indent="-228600" algn="l">
         <a:lnSpc>
           <a:spcPct val="90000"/>
         </a:lnSpc>
@@ -3565,7 +3495,7 @@
       </a:lvl9pPr>
     </p:bodyStyle>
     <p:otherStyle>
-      <a:lvl1pPr xmlns:a="http://schemas.openxmlformats.org/drawingml/2006/main" marL="0" algn="l">
+      <a:lvl1pPr marL="0" algn="l">
         <a:buNone/>
         <a:defRPr sz="1800">
           <a:solidFill>
@@ -3576,7 +3506,7 @@
           <a:cs typeface="+mn-lt"/>
         </a:defRPr>
       </a:lvl1pPr>
-      <a:lvl2pPr xmlns:a="http://schemas.openxmlformats.org/drawingml/2006/main" marL="457200" algn="l">
+      <a:lvl2pPr marL="457200" algn="l">
         <a:buNone/>
         <a:defRPr sz="1800">
           <a:solidFill>
@@ -3587,7 +3517,7 @@
           <a:cs typeface="+mn-lt"/>
         </a:defRPr>
       </a:lvl2pPr>
-      <a:lvl3pPr xmlns:a="http://schemas.openxmlformats.org/drawingml/2006/main" marL="914400" algn="l">
+      <a:lvl3pPr marL="914400" algn="l">
         <a:buNone/>
         <a:defRPr sz="1800">
           <a:solidFill>
@@ -3598,7 +3528,7 @@
           <a:cs typeface="+mn-lt"/>
         </a:defRPr>
       </a:lvl3pPr>
-      <a:lvl4pPr xmlns:a="http://schemas.openxmlformats.org/drawingml/2006/main" marL="1371600" algn="l">
+      <a:lvl4pPr marL="1371600" algn="l">
         <a:buNone/>
         <a:defRPr sz="1800">
           <a:solidFill>
@@ -3609,7 +3539,7 @@
           <a:cs typeface="+mn-lt"/>
         </a:defRPr>
       </a:lvl4pPr>
-      <a:lvl5pPr xmlns:a="http://schemas.openxmlformats.org/drawingml/2006/main" marL="1828800" algn="l">
+      <a:lvl5pPr marL="1828800" algn="l">
         <a:buNone/>
         <a:defRPr sz="1800">
           <a:solidFill>
@@ -3620,7 +3550,7 @@
           <a:cs typeface="+mn-lt"/>
         </a:defRPr>
       </a:lvl5pPr>
-      <a:lvl6pPr xmlns:a="http://schemas.openxmlformats.org/drawingml/2006/main" marL="2286000" algn="l">
+      <a:lvl6pPr marL="2286000" algn="l">
         <a:buNone/>
         <a:defRPr sz="1800">
           <a:solidFill>
@@ -3631,7 +3561,7 @@
           <a:cs typeface="+mn-lt"/>
         </a:defRPr>
       </a:lvl6pPr>
-      <a:lvl7pPr xmlns:a="http://schemas.openxmlformats.org/drawingml/2006/main" marL="2743200" algn="l">
+      <a:lvl7pPr marL="2743200" algn="l">
         <a:buNone/>
         <a:defRPr sz="1800">
           <a:solidFill>
@@ -3642,7 +3572,7 @@
           <a:cs typeface="+mn-lt"/>
         </a:defRPr>
       </a:lvl7pPr>
-      <a:lvl8pPr xmlns:a="http://schemas.openxmlformats.org/drawingml/2006/main" marL="3200400" algn="l">
+      <a:lvl8pPr marL="3200400" algn="l">
         <a:buNone/>
         <a:defRPr sz="1800">
           <a:solidFill>
@@ -3653,7 +3583,7 @@
           <a:cs typeface="+mn-lt"/>
         </a:defRPr>
       </a:lvl8pPr>
-      <a:lvl9pPr xmlns:a="http://schemas.openxmlformats.org/drawingml/2006/main" marL="3657600" algn="l">
+      <a:lvl9pPr marL="3657600" algn="l">
         <a:buNone/>
         <a:defRPr sz="1800">
           <a:solidFill>
@@ -3669,259 +3599,15 @@
 </p:sldMaster>
 </file>
 
-<file path=ppt/slideMasters/theme/theme2.xml><?xml version="1.0" encoding="utf-8"?>
-<a:theme xmlns:a="http://schemas.openxmlformats.org/drawingml/2006/main" name="ChatGPT">
-  <a:themeElements>
-    <a:clrScheme name="ChatGPT">
-      <a:dk1>
-        <a:srgbClr val="000000"/>
-      </a:dk1>
-      <a:lt1>
-        <a:srgbClr val="FFFFFF"/>
-      </a:lt1>
-      <a:dk2>
-        <a:srgbClr val="0E2841"/>
-      </a:dk2>
-      <a:lt2>
-        <a:srgbClr val="E8E8E8"/>
-      </a:lt2>
-      <a:accent1>
-        <a:srgbClr val="156082"/>
-      </a:accent1>
-      <a:accent2>
-        <a:srgbClr val="E97132"/>
-      </a:accent2>
-      <a:accent3>
-        <a:srgbClr val="196B24"/>
-      </a:accent3>
-      <a:accent4>
-        <a:srgbClr val="0F9ED5"/>
-      </a:accent4>
-      <a:accent5>
-        <a:srgbClr val="A02B93"/>
-      </a:accent5>
-      <a:accent6>
-        <a:srgbClr val="4EA72E"/>
-      </a:accent6>
-      <a:hlink>
-        <a:srgbClr val="467886"/>
-      </a:hlink>
-      <a:folHlink>
-        <a:srgbClr val="96607D"/>
-      </a:folHlink>
-    </a:clrScheme>
-    <a:fontScheme name="">
-      <a:majorFont>
-        <a:latin typeface="Aptos"/>
-        <a:ea typeface=""/>
-        <a:cs typeface=""/>
-      </a:majorFont>
-      <a:minorFont>
-        <a:latin typeface="Aptos"/>
-        <a:ea typeface=""/>
-        <a:cs typeface=""/>
-      </a:minorFont>
-    </a:fontScheme>
-    <a:fmtScheme name="ChatGPT">
-      <a:fillStyleLst>
-        <a:solidFill>
-          <a:schemeClr val="phClr"/>
-        </a:solidFill>
-        <a:gradFill>
-          <a:gsLst>
-            <a:gs pos="0">
-              <a:schemeClr val="phClr">
-                <a:tint val="67000"/>
-                <a:lumMod val="110000"/>
-                <a:satMod val="105000"/>
-              </a:schemeClr>
-            </a:gs>
-            <a:gs pos="50000">
-              <a:schemeClr val="phClr">
-                <a:tint val="73000"/>
-                <a:lumMod val="105000"/>
-                <a:satMod val="103000"/>
-              </a:schemeClr>
-            </a:gs>
-            <a:gs pos="100000">
-              <a:schemeClr val="phClr">
-                <a:tint val="81000"/>
-                <a:lumMod val="105000"/>
-                <a:satMod val="109000"/>
-              </a:schemeClr>
-            </a:gs>
-          </a:gsLst>
-          <a:lin ang="5400000" scaled="0"/>
-        </a:gradFill>
-        <a:gradFill>
-          <a:gsLst>
-            <a:gs pos="0">
-              <a:schemeClr val="phClr">
-                <a:tint val="94000"/>
-                <a:lumMod val="102000"/>
-                <a:satMod val="103000"/>
-              </a:schemeClr>
-            </a:gs>
-            <a:gs pos="50000">
-              <a:schemeClr val="phClr">
-                <a:shade val="100000"/>
-                <a:lumMod val="100000"/>
-                <a:satMod val="110000"/>
-              </a:schemeClr>
-            </a:gs>
-            <a:gs pos="100000">
-              <a:schemeClr val="phClr">
-                <a:shade val="78000"/>
-                <a:lumMod val="99000"/>
-                <a:satMod val="120000"/>
-              </a:schemeClr>
-            </a:gs>
-          </a:gsLst>
-          <a:lin ang="5400000" scaled="0"/>
-        </a:gradFill>
-      </a:fillStyleLst>
-      <a:lnStyleLst>
-        <a:ln w="12700">
-          <a:solidFill>
-            <a:schemeClr val="phClr"/>
-          </a:solidFill>
-          <a:prstDash val="solid"/>
-        </a:ln>
-        <a:ln w="19050">
-          <a:solidFill>
-            <a:schemeClr val="phClr"/>
-          </a:solidFill>
-          <a:prstDash val="solid"/>
-        </a:ln>
-        <a:ln w="25400">
-          <a:solidFill>
-            <a:schemeClr val="phClr"/>
-          </a:solidFill>
-          <a:prstDash val="solid"/>
-        </a:ln>
-      </a:lnStyleLst>
-      <a:effectStyleLst>
-        <a:effectStyle>
-          <a:effectLst/>
-        </a:effectStyle>
-        <a:effectStyle>
-          <a:effectLst/>
-        </a:effectStyle>
-        <a:effectStyle>
-          <a:effectLst>
-            <a:outerShdw blurRad="57150" dist="19050" dir="5400000">
-              <a:srgbClr val="000000">
-                <a:alpha val="16000"/>
-              </a:srgbClr>
-            </a:outerShdw>
-          </a:effectLst>
-        </a:effectStyle>
-        <a:effectStyle>
-          <a:effectLst>
-            <a:outerShdw blurRad="19050" dist="9525" dir="5400000">
-              <a:srgbClr val="000000">
-                <a:alpha val="6000"/>
-              </a:srgbClr>
-            </a:outerShdw>
-          </a:effectLst>
-        </a:effectStyle>
-        <a:effectStyle>
-          <a:effectLst>
-            <a:outerShdw blurRad="28575" dist="9525" dir="5400000">
-              <a:srgbClr val="000000">
-                <a:alpha val="8000"/>
-              </a:srgbClr>
-            </a:outerShdw>
-          </a:effectLst>
-        </a:effectStyle>
-        <a:effectStyle>
-          <a:effectLst>
-            <a:outerShdw blurRad="57150" dist="19050" dir="5400000">
-              <a:srgbClr val="000000">
-                <a:alpha val="10000"/>
-              </a:srgbClr>
-            </a:outerShdw>
-          </a:effectLst>
-        </a:effectStyle>
-        <a:effectStyle>
-          <a:effectLst>
-            <a:outerShdw blurRad="114300" dist="38100" dir="5400000">
-              <a:srgbClr val="000000">
-                <a:alpha val="12000"/>
-              </a:srgbClr>
-            </a:outerShdw>
-          </a:effectLst>
-        </a:effectStyle>
-        <a:effectStyle>
-          <a:effectLst>
-            <a:outerShdw blurRad="171450" dist="57150" dir="5400000">
-              <a:srgbClr val="000000">
-                <a:alpha val="16000"/>
-              </a:srgbClr>
-            </a:outerShdw>
-          </a:effectLst>
-        </a:effectStyle>
-        <a:effectStyle>
-          <a:effectLst>
-            <a:outerShdw blurRad="266700" dist="95250" dir="5400000">
-              <a:srgbClr val="000000">
-                <a:alpha val="24000"/>
-              </a:srgbClr>
-            </a:outerShdw>
-          </a:effectLst>
-        </a:effectStyle>
-      </a:effectStyleLst>
-      <a:bgFillStyleLst>
-        <a:solidFill>
-          <a:schemeClr val="phClr"/>
-        </a:solidFill>
-        <a:solidFill>
-          <a:schemeClr val="phClr">
-            <a:tint val="95000"/>
-            <a:satMod val="170000"/>
-          </a:schemeClr>
-        </a:solidFill>
-        <a:gradFill>
-          <a:gsLst>
-            <a:gs pos="0">
-              <a:schemeClr val="phClr">
-                <a:tint val="93000"/>
-                <a:shade val="98000"/>
-                <a:lumMod val="102000"/>
-                <a:satMod val="150000"/>
-              </a:schemeClr>
-            </a:gs>
-            <a:gs pos="50000">
-              <a:schemeClr val="phClr">
-                <a:tint val="98000"/>
-                <a:shade val="90000"/>
-                <a:lumMod val="103000"/>
-                <a:satMod val="130000"/>
-              </a:schemeClr>
-            </a:gs>
-            <a:gs pos="100000">
-              <a:schemeClr val="phClr">
-                <a:shade val="63000"/>
-                <a:satMod val="120000"/>
-              </a:schemeClr>
-            </a:gs>
-          </a:gsLst>
-          <a:lin ang="5400000" scaled="0"/>
-        </a:gradFill>
-      </a:bgFillStyleLst>
-    </a:fmtScheme>
-  </a:themeElements>
-</a:theme>
-</file>
-
 <file path=ppt/slides/slide1.xml><?xml version="1.0" encoding="utf-8"?>
-<p:sld xmlns:p="http://schemas.openxmlformats.org/presentationml/2006/main">
+<p:sld xmlns:a="http://schemas.openxmlformats.org/drawingml/2006/main" xmlns:r="http://schemas.openxmlformats.org/officeDocument/2006/relationships" xmlns:p="http://schemas.openxmlformats.org/presentationml/2006/main">
   <p:cSld>
     <p:bg>
       <p:bgPr>
-        <a:solidFill xmlns:a="http://schemas.openxmlformats.org/drawingml/2006/main">
+        <a:solidFill>
           <a:srgbClr val="F0E9D7"/>
         </a:solidFill>
+        <a:effectLst/>
       </p:bgPr>
     </p:bg>
     <p:spTree>
@@ -3931,38 +3617,43 @@
         <p:nvPr/>
       </p:nvGrpSpPr>
       <p:grpSpPr>
-        <a:xfrm xmlns:a="http://schemas.openxmlformats.org/drawingml/2006/main"/>
+        <a:xfrm>
+          <a:off x="0" y="0"/>
+          <a:ext cx="0" cy="0"/>
+          <a:chOff x="0" y="0"/>
+          <a:chExt cx="0" cy="0"/>
+        </a:xfrm>
       </p:grpSpPr>
       <p:sp>
         <p:nvSpPr>
-          <p:cNvPr id="7" name="">
-            <a:extLst xmlns:a="http://schemas.openxmlformats.org/drawingml/2006/main">
+          <p:cNvPr id="7" name="Rectangle 6">
+            <a:extLst>
               <a:ext uri="{FF2B5EF4-FFF2-40B4-BE49-F238E27FC236}">
                 <a16:creationId xmlns:a16="http://schemas.microsoft.com/office/drawing/2014/main" id="{7D383BCD-4723-4B7B-BCB8-6DE8CA46500D}"/>
               </a:ext>
             </a:extLst>
           </p:cNvPr>
           <p:cNvSpPr>
-            <a:spLocks xmlns:a="http://schemas.openxmlformats.org/drawingml/2006/main" noGrp="1"/>
+            <a:spLocks noGrp="1"/>
           </p:cNvSpPr>
           <p:nvPr/>
         </p:nvSpPr>
         <p:spPr>
-          <a:xfrm xmlns:a="http://schemas.openxmlformats.org/drawingml/2006/main">
+          <a:xfrm>
             <a:off x="609600" y="438150"/>
             <a:ext cx="10972800" cy="685800"/>
           </a:xfrm>
-          <a:prstGeom xmlns:a="http://schemas.openxmlformats.org/drawingml/2006/main" prst="rect">
+          <a:prstGeom prst="rect">
             <a:avLst/>
           </a:prstGeom>
-          <a:noFill xmlns:a="http://schemas.openxmlformats.org/drawingml/2006/main"/>
-          <a:ln xmlns:a="http://schemas.openxmlformats.org/drawingml/2006/main" w="0">
+          <a:noFill/>
+          <a:ln w="0">
             <a:noFill/>
           </a:ln>
         </p:spPr>
         <p:txBody>
-          <a:bodyPr xmlns:a="http://schemas.openxmlformats.org/drawingml/2006/main" anchor="t"/>
-          <a:lstStyle xmlns:a="http://schemas.openxmlformats.org/drawingml/2006/main">
+          <a:bodyPr anchor="t"/>
+          <a:lstStyle>
             <a:defPPr>
               <a:defRPr sz="3300" b="1">
                 <a:solidFill>
@@ -4064,7 +3755,7 @@
               </a:defRPr>
             </a:lvl9pPr>
           </a:lstStyle>
-          <a:p xmlns:a="http://schemas.openxmlformats.org/drawingml/2006/main">
+          <a:p>
             <a:pPr>
               <a:defRPr sz="3300" b="1">
                 <a:solidFill>
@@ -4091,34 +3782,34 @@
       </p:sp>
       <p:sp>
         <p:nvSpPr>
-          <p:cNvPr id="2" name="">
-            <a:extLst xmlns:a="http://schemas.openxmlformats.org/drawingml/2006/main">
+          <p:cNvPr id="2" name="Rectangle 1">
+            <a:extLst>
               <a:ext uri="{FF2B5EF4-FFF2-40B4-BE49-F238E27FC236}">
                 <a16:creationId xmlns:a16="http://schemas.microsoft.com/office/drawing/2014/main" id="{741EB5F5-8BD1-4975-806D-6E3CB3AE0688}"/>
               </a:ext>
             </a:extLst>
           </p:cNvPr>
           <p:cNvSpPr>
-            <a:spLocks xmlns:a="http://schemas.openxmlformats.org/drawingml/2006/main" noGrp="1"/>
+            <a:spLocks noGrp="1"/>
           </p:cNvSpPr>
           <p:nvPr/>
         </p:nvSpPr>
         <p:spPr>
-          <a:xfrm xmlns:a="http://schemas.openxmlformats.org/drawingml/2006/main">
+          <a:xfrm>
             <a:off x="609600" y="1285875"/>
             <a:ext cx="4095750" cy="571500"/>
           </a:xfrm>
-          <a:prstGeom xmlns:a="http://schemas.openxmlformats.org/drawingml/2006/main" prst="rect">
+          <a:prstGeom prst="rect">
             <a:avLst/>
           </a:prstGeom>
-          <a:noFill xmlns:a="http://schemas.openxmlformats.org/drawingml/2006/main"/>
-          <a:ln xmlns:a="http://schemas.openxmlformats.org/drawingml/2006/main" w="0">
+          <a:noFill/>
+          <a:ln w="0">
             <a:noFill/>
           </a:ln>
         </p:spPr>
         <p:txBody>
-          <a:bodyPr xmlns:a="http://schemas.openxmlformats.org/drawingml/2006/main" anchor="t"/>
-          <a:lstStyle xmlns:a="http://schemas.openxmlformats.org/drawingml/2006/main">
+          <a:bodyPr anchor="t"/>
+          <a:lstStyle>
             <a:defPPr>
               <a:defRPr sz="2400" b="0">
                 <a:solidFill>
@@ -4220,7 +3911,7 @@
               </a:defRPr>
             </a:lvl9pPr>
           </a:lstStyle>
-          <a:p xmlns:a="http://schemas.openxmlformats.org/drawingml/2006/main">
+          <a:p>
             <a:pPr>
               <a:defRPr sz="2400" b="0">
                 <a:solidFill>
@@ -4232,7 +3923,7 @@
               </a:defRPr>
             </a:pPr>
             <a:r>
-              <a:rPr sz="2400" b="0">
+              <a:rPr sz="2400" b="0" dirty="0">
                 <a:solidFill>
                   <a:srgbClr val="342E25"/>
                 </a:solidFill>
@@ -4240,220 +3931,41 @@
                 <a:ea typeface="Arial"/>
                 <a:cs typeface="Arial"/>
               </a:rPr>
-              <a:t>Playable Prototype I</a:t>
+              <a:t>Prototype I</a:t>
             </a:r>
           </a:p>
         </p:txBody>
       </p:sp>
       <p:sp>
         <p:nvSpPr>
-          <p:cNvPr id="3" name="">
-            <a:extLst xmlns:a="http://schemas.openxmlformats.org/drawingml/2006/main">
-              <a:ext uri="{FF2B5EF4-FFF2-40B4-BE49-F238E27FC236}">
-                <a16:creationId xmlns:a16="http://schemas.microsoft.com/office/drawing/2014/main" id="{281AEB5B-D3E0-472E-80CD-28B366EF98C7}"/>
-              </a:ext>
-            </a:extLst>
-          </p:cNvPr>
-          <p:cNvSpPr>
-            <a:spLocks xmlns:a="http://schemas.openxmlformats.org/drawingml/2006/main" noGrp="1"/>
-          </p:cNvSpPr>
-          <p:nvPr/>
-        </p:nvSpPr>
-        <p:spPr>
-          <a:xfrm xmlns:a="http://schemas.openxmlformats.org/drawingml/2006/main">
-            <a:off x="609600" y="2238375"/>
-            <a:ext cx="3810000" cy="857250"/>
-          </a:xfrm>
-          <a:prstGeom xmlns:a="http://schemas.openxmlformats.org/drawingml/2006/main" prst="rect">
-            <a:avLst/>
-          </a:prstGeom>
-          <a:noFill xmlns:a="http://schemas.openxmlformats.org/drawingml/2006/main"/>
-          <a:ln xmlns:a="http://schemas.openxmlformats.org/drawingml/2006/main" w="0">
-            <a:noFill/>
-          </a:ln>
-        </p:spPr>
-        <p:txBody>
-          <a:bodyPr xmlns:a="http://schemas.openxmlformats.org/drawingml/2006/main" anchor="t"/>
-          <a:lstStyle xmlns:a="http://schemas.openxmlformats.org/drawingml/2006/main">
-            <a:defPPr>
-              <a:defRPr sz="1875" b="0">
-                <a:solidFill>
-                  <a:srgbClr val="342E25"/>
-                </a:solidFill>
-                <a:latin typeface="Arial"/>
-                <a:ea typeface="Arial"/>
-                <a:cs typeface="Arial"/>
-              </a:defRPr>
-            </a:defPPr>
-            <a:lvl1pPr>
-              <a:defRPr sz="1875" b="0">
-                <a:solidFill>
-                  <a:srgbClr val="342E25"/>
-                </a:solidFill>
-                <a:latin typeface="Arial"/>
-                <a:ea typeface="Arial"/>
-                <a:cs typeface="Arial"/>
-              </a:defRPr>
-            </a:lvl1pPr>
-            <a:lvl2pPr>
-              <a:defRPr sz="1875" b="0">
-                <a:solidFill>
-                  <a:srgbClr val="342E25"/>
-                </a:solidFill>
-                <a:latin typeface="Arial"/>
-                <a:ea typeface="Arial"/>
-                <a:cs typeface="Arial"/>
-              </a:defRPr>
-            </a:lvl2pPr>
-            <a:lvl3pPr>
-              <a:defRPr sz="1875" b="0">
-                <a:solidFill>
-                  <a:srgbClr val="342E25"/>
-                </a:solidFill>
-                <a:latin typeface="Arial"/>
-                <a:ea typeface="Arial"/>
-                <a:cs typeface="Arial"/>
-              </a:defRPr>
-            </a:lvl3pPr>
-            <a:lvl4pPr>
-              <a:defRPr sz="1875" b="0">
-                <a:solidFill>
-                  <a:srgbClr val="342E25"/>
-                </a:solidFill>
-                <a:latin typeface="Arial"/>
-                <a:ea typeface="Arial"/>
-                <a:cs typeface="Arial"/>
-              </a:defRPr>
-            </a:lvl4pPr>
-            <a:lvl5pPr>
-              <a:defRPr sz="1875" b="0">
-                <a:solidFill>
-                  <a:srgbClr val="342E25"/>
-                </a:solidFill>
-                <a:latin typeface="Arial"/>
-                <a:ea typeface="Arial"/>
-                <a:cs typeface="Arial"/>
-              </a:defRPr>
-            </a:lvl5pPr>
-            <a:lvl6pPr>
-              <a:defRPr sz="1875" b="0">
-                <a:solidFill>
-                  <a:srgbClr val="342E25"/>
-                </a:solidFill>
-                <a:latin typeface="Arial"/>
-                <a:ea typeface="Arial"/>
-                <a:cs typeface="Arial"/>
-              </a:defRPr>
-            </a:lvl6pPr>
-            <a:lvl7pPr>
-              <a:defRPr sz="1875" b="0">
-                <a:solidFill>
-                  <a:srgbClr val="342E25"/>
-                </a:solidFill>
-                <a:latin typeface="Arial"/>
-                <a:ea typeface="Arial"/>
-                <a:cs typeface="Arial"/>
-              </a:defRPr>
-            </a:lvl7pPr>
-            <a:lvl8pPr>
-              <a:defRPr sz="1875" b="0">
-                <a:solidFill>
-                  <a:srgbClr val="342E25"/>
-                </a:solidFill>
-                <a:latin typeface="Arial"/>
-                <a:ea typeface="Arial"/>
-                <a:cs typeface="Arial"/>
-              </a:defRPr>
-            </a:lvl8pPr>
-            <a:lvl9pPr>
-              <a:defRPr sz="1875" b="0">
-                <a:solidFill>
-                  <a:srgbClr val="342E25"/>
-                </a:solidFill>
-                <a:latin typeface="Arial"/>
-                <a:ea typeface="Arial"/>
-                <a:cs typeface="Arial"/>
-              </a:defRPr>
-            </a:lvl9pPr>
-          </a:lstStyle>
-          <a:p xmlns:a="http://schemas.openxmlformats.org/drawingml/2006/main">
-            <a:pPr>
-              <a:defRPr sz="1875" b="0">
-                <a:solidFill>
-                  <a:srgbClr val="342E25"/>
-                </a:solidFill>
-                <a:latin typeface="Arial"/>
-                <a:ea typeface="Arial"/>
-                <a:cs typeface="Arial"/>
-              </a:defRPr>
-            </a:pPr>
-            <a:r>
-              <a:rPr sz="1875" b="0">
-                <a:solidFill>
-                  <a:srgbClr val="342E25"/>
-                </a:solidFill>
-                <a:latin typeface="Arial"/>
-                <a:ea typeface="Arial"/>
-                <a:cs typeface="Arial"/>
-              </a:rPr>
-              <a:t>Rolands Leja</a:t>
-            </a:r>
-          </a:p>
-          <a:p xmlns:a="http://schemas.openxmlformats.org/drawingml/2006/main">
-            <a:pPr>
-              <a:defRPr sz="1875" b="0">
-                <a:solidFill>
-                  <a:srgbClr val="342E25"/>
-                </a:solidFill>
-                <a:latin typeface="Arial"/>
-                <a:ea typeface="Arial"/>
-                <a:cs typeface="Arial"/>
-              </a:defRPr>
-            </a:pPr>
-            <a:r>
-              <a:rPr sz="1875" b="0">
-                <a:solidFill>
-                  <a:srgbClr val="342E25"/>
-                </a:solidFill>
-                <a:latin typeface="Arial"/>
-                <a:ea typeface="Arial"/>
-                <a:cs typeface="Arial"/>
-              </a:rPr>
-              <a:t>rl23030</a:t>
-            </a:r>
-          </a:p>
-        </p:txBody>
-      </p:sp>
-      <p:sp>
-        <p:nvSpPr>
-          <p:cNvPr id="4" name="">
-            <a:extLst xmlns:a="http://schemas.openxmlformats.org/drawingml/2006/main">
+          <p:cNvPr id="4" name="Rectangle 3">
+            <a:extLst>
               <a:ext uri="{FF2B5EF4-FFF2-40B4-BE49-F238E27FC236}">
                 <a16:creationId xmlns:a16="http://schemas.microsoft.com/office/drawing/2014/main" id="{6D3858FF-4282-45AE-A281-4FB0240DB2BB}"/>
               </a:ext>
             </a:extLst>
           </p:cNvPr>
           <p:cNvSpPr>
-            <a:spLocks xmlns:a="http://schemas.openxmlformats.org/drawingml/2006/main" noGrp="1"/>
+            <a:spLocks noGrp="1"/>
           </p:cNvSpPr>
           <p:nvPr/>
         </p:nvSpPr>
         <p:spPr>
-          <a:xfrm xmlns:a="http://schemas.openxmlformats.org/drawingml/2006/main">
-            <a:off x="609600" y="3524250"/>
-            <a:ext cx="3810000" cy="1381125"/>
+          <a:xfrm>
+            <a:off x="609599" y="2019300"/>
+            <a:ext cx="4036541" cy="3343275"/>
           </a:xfrm>
-          <a:prstGeom xmlns:a="http://schemas.openxmlformats.org/drawingml/2006/main" prst="rect">
+          <a:prstGeom prst="rect">
             <a:avLst/>
           </a:prstGeom>
-          <a:noFill xmlns:a="http://schemas.openxmlformats.org/drawingml/2006/main"/>
-          <a:ln xmlns:a="http://schemas.openxmlformats.org/drawingml/2006/main" w="0">
+          <a:noFill/>
+          <a:ln w="0">
             <a:noFill/>
           </a:ln>
         </p:spPr>
         <p:txBody>
-          <a:bodyPr xmlns:a="http://schemas.openxmlformats.org/drawingml/2006/main" anchor="t"/>
-          <a:lstStyle xmlns:a="http://schemas.openxmlformats.org/drawingml/2006/main">
+          <a:bodyPr anchor="t"/>
+          <a:lstStyle>
             <a:defPPr>
               <a:defRPr sz="2175" b="0">
                 <a:solidFill>
@@ -4555,7 +4067,7 @@
               </a:defRPr>
             </a:lvl9pPr>
           </a:lstStyle>
-          <a:p xmlns:a="http://schemas.openxmlformats.org/drawingml/2006/main">
+          <a:p>
             <a:pPr>
               <a:defRPr sz="2175" b="0">
                 <a:solidFill>
@@ -4567,7 +4079,7 @@
               </a:defRPr>
             </a:pPr>
             <a:r>
-              <a:rPr sz="2175" b="0">
+              <a:rPr sz="2175" b="0" dirty="0">
                 <a:solidFill>
                   <a:srgbClr val="342E25"/>
                 </a:solidFill>
@@ -4580,209 +4092,30 @@
           </a:p>
         </p:txBody>
       </p:sp>
-      <p:sp>
-        <p:nvSpPr>
-          <p:cNvPr id="5" name="">
-            <a:extLst xmlns:a="http://schemas.openxmlformats.org/drawingml/2006/main">
-              <a:ext uri="{FF2B5EF4-FFF2-40B4-BE49-F238E27FC236}">
-                <a16:creationId xmlns:a16="http://schemas.microsoft.com/office/drawing/2014/main" id="{3A886012-D0A1-441E-88FF-C985CF2758E6}"/>
-              </a:ext>
-            </a:extLst>
-          </p:cNvPr>
-          <p:cNvSpPr>
-            <a:spLocks xmlns:a="http://schemas.openxmlformats.org/drawingml/2006/main" noGrp="1"/>
-          </p:cNvSpPr>
-          <p:nvPr/>
-        </p:nvSpPr>
-        <p:spPr>
-          <a:xfrm xmlns:a="http://schemas.openxmlformats.org/drawingml/2006/main">
-            <a:off x="609600" y="5562600"/>
-            <a:ext cx="3810000" cy="714375"/>
-          </a:xfrm>
-          <a:prstGeom xmlns:a="http://schemas.openxmlformats.org/drawingml/2006/main" prst="rect">
-            <a:avLst/>
-          </a:prstGeom>
-          <a:noFill xmlns:a="http://schemas.openxmlformats.org/drawingml/2006/main"/>
-          <a:ln xmlns:a="http://schemas.openxmlformats.org/drawingml/2006/main" w="0">
-            <a:noFill/>
-          </a:ln>
-        </p:spPr>
-        <p:txBody>
-          <a:bodyPr xmlns:a="http://schemas.openxmlformats.org/drawingml/2006/main" anchor="t"/>
-          <a:lstStyle xmlns:a="http://schemas.openxmlformats.org/drawingml/2006/main">
-            <a:defPPr>
-              <a:defRPr sz="1575" b="0">
-                <a:solidFill>
-                  <a:srgbClr val="756D5D"/>
-                </a:solidFill>
-                <a:latin typeface="Arial"/>
-                <a:ea typeface="Arial"/>
-                <a:cs typeface="Arial"/>
-              </a:defRPr>
-            </a:defPPr>
-            <a:lvl1pPr>
-              <a:defRPr sz="1575" b="0">
-                <a:solidFill>
-                  <a:srgbClr val="756D5D"/>
-                </a:solidFill>
-                <a:latin typeface="Arial"/>
-                <a:ea typeface="Arial"/>
-                <a:cs typeface="Arial"/>
-              </a:defRPr>
-            </a:lvl1pPr>
-            <a:lvl2pPr>
-              <a:defRPr sz="1575" b="0">
-                <a:solidFill>
-                  <a:srgbClr val="756D5D"/>
-                </a:solidFill>
-                <a:latin typeface="Arial"/>
-                <a:ea typeface="Arial"/>
-                <a:cs typeface="Arial"/>
-              </a:defRPr>
-            </a:lvl2pPr>
-            <a:lvl3pPr>
-              <a:defRPr sz="1575" b="0">
-                <a:solidFill>
-                  <a:srgbClr val="756D5D"/>
-                </a:solidFill>
-                <a:latin typeface="Arial"/>
-                <a:ea typeface="Arial"/>
-                <a:cs typeface="Arial"/>
-              </a:defRPr>
-            </a:lvl3pPr>
-            <a:lvl4pPr>
-              <a:defRPr sz="1575" b="0">
-                <a:solidFill>
-                  <a:srgbClr val="756D5D"/>
-                </a:solidFill>
-                <a:latin typeface="Arial"/>
-                <a:ea typeface="Arial"/>
-                <a:cs typeface="Arial"/>
-              </a:defRPr>
-            </a:lvl4pPr>
-            <a:lvl5pPr>
-              <a:defRPr sz="1575" b="0">
-                <a:solidFill>
-                  <a:srgbClr val="756D5D"/>
-                </a:solidFill>
-                <a:latin typeface="Arial"/>
-                <a:ea typeface="Arial"/>
-                <a:cs typeface="Arial"/>
-              </a:defRPr>
-            </a:lvl5pPr>
-            <a:lvl6pPr>
-              <a:defRPr sz="1575" b="0">
-                <a:solidFill>
-                  <a:srgbClr val="756D5D"/>
-                </a:solidFill>
-                <a:latin typeface="Arial"/>
-                <a:ea typeface="Arial"/>
-                <a:cs typeface="Arial"/>
-              </a:defRPr>
-            </a:lvl6pPr>
-            <a:lvl7pPr>
-              <a:defRPr sz="1575" b="0">
-                <a:solidFill>
-                  <a:srgbClr val="756D5D"/>
-                </a:solidFill>
-                <a:latin typeface="Arial"/>
-                <a:ea typeface="Arial"/>
-                <a:cs typeface="Arial"/>
-              </a:defRPr>
-            </a:lvl7pPr>
-            <a:lvl8pPr>
-              <a:defRPr sz="1575" b="0">
-                <a:solidFill>
-                  <a:srgbClr val="756D5D"/>
-                </a:solidFill>
-                <a:latin typeface="Arial"/>
-                <a:ea typeface="Arial"/>
-                <a:cs typeface="Arial"/>
-              </a:defRPr>
-            </a:lvl8pPr>
-            <a:lvl9pPr>
-              <a:defRPr sz="1575" b="0">
-                <a:solidFill>
-                  <a:srgbClr val="756D5D"/>
-                </a:solidFill>
-                <a:latin typeface="Arial"/>
-                <a:ea typeface="Arial"/>
-                <a:cs typeface="Arial"/>
-              </a:defRPr>
-            </a:lvl9pPr>
-          </a:lstStyle>
-          <a:p xmlns:a="http://schemas.openxmlformats.org/drawingml/2006/main">
-            <a:pPr>
-              <a:defRPr sz="1575" b="0">
-                <a:solidFill>
-                  <a:srgbClr val="756D5D"/>
-                </a:solidFill>
-                <a:latin typeface="Arial"/>
-                <a:ea typeface="Arial"/>
-                <a:cs typeface="Arial"/>
-              </a:defRPr>
-            </a:pPr>
-            <a:r>
-              <a:rPr sz="1575" b="0">
-                <a:solidFill>
-                  <a:srgbClr val="756D5D"/>
-                </a:solidFill>
-                <a:latin typeface="Arial"/>
-                <a:ea typeface="Arial"/>
-                <a:cs typeface="Arial"/>
-              </a:rPr>
-              <a:t>Windows PC</a:t>
-            </a:r>
-          </a:p>
-          <a:p xmlns:a="http://schemas.openxmlformats.org/drawingml/2006/main">
-            <a:pPr>
-              <a:defRPr sz="1575" b="0">
-                <a:solidFill>
-                  <a:srgbClr val="756D5D"/>
-                </a:solidFill>
-                <a:latin typeface="Arial"/>
-                <a:ea typeface="Arial"/>
-                <a:cs typeface="Arial"/>
-              </a:defRPr>
-            </a:pPr>
-            <a:r>
-              <a:rPr sz="1575" b="0">
-                <a:solidFill>
-                  <a:srgbClr val="756D5D"/>
-                </a:solidFill>
-                <a:latin typeface="Arial"/>
-                <a:ea typeface="Arial"/>
-                <a:cs typeface="Arial"/>
-              </a:rPr>
-              <a:t>Godot .NET and C#</a:t>
-            </a:r>
-          </a:p>
-        </p:txBody>
-      </p:sp>
       <p:pic>
         <p:nvPicPr>
-          <p:cNvPr id="6" name="">
-            <a:extLst xmlns:a="http://schemas.openxmlformats.org/drawingml/2006/main">
+          <p:cNvPr id="6" name="Picture 5">
+            <a:extLst>
               <a:ext uri="{FF2B5EF4-FFF2-40B4-BE49-F238E27FC236}">
                 <a16:creationId xmlns:a16="http://schemas.microsoft.com/office/drawing/2014/main" id="{48B3B1A4-4FD3-4017-98C2-02346DD1C466}"/>
               </a:ext>
             </a:extLst>
           </p:cNvPr>
           <p:cNvPicPr>
-            <a:picLocks xmlns:a="http://schemas.openxmlformats.org/drawingml/2006/main" noChangeAspect="1"/>
+            <a:picLocks noChangeAspect="1"/>
           </p:cNvPicPr>
           <p:nvPr/>
         </p:nvPicPr>
         <p:blipFill>
-          <a:blip xmlns:r="http://schemas.openxmlformats.org/officeDocument/2006/relationships" xmlns:a="http://schemas.openxmlformats.org/drawingml/2006/main" r:embed="R6aa3e059449242e4"/>
-          <a:stretch xmlns:a="http://schemas.openxmlformats.org/drawingml/2006/main"/>
+          <a:blip r:embed="rId3"/>
+          <a:stretch/>
         </p:blipFill>
         <p:spPr>
-          <a:xfrm xmlns:a="http://schemas.openxmlformats.org/drawingml/2006/main">
+          <a:xfrm>
             <a:off x="4857750" y="1504950"/>
             <a:ext cx="6858000" cy="3857625"/>
           </a:xfrm>
-          <a:prstGeom xmlns:a="http://schemas.openxmlformats.org/drawingml/2006/main" prst="rect">
+          <a:prstGeom prst="rect">
             <a:avLst/>
           </a:prstGeom>
         </p:spPr>
@@ -4794,17 +4127,21 @@
       </p:ext>
     </p:extLst>
   </p:cSld>
+  <p:clrMapOvr>
+    <a:masterClrMapping/>
+  </p:clrMapOvr>
 </p:sld>
 </file>
 
 <file path=ppt/slides/slide2.xml><?xml version="1.0" encoding="utf-8"?>
-<p:sld xmlns:p="http://schemas.openxmlformats.org/presentationml/2006/main">
+<p:sld xmlns:a="http://schemas.openxmlformats.org/drawingml/2006/main" xmlns:r="http://schemas.openxmlformats.org/officeDocument/2006/relationships" xmlns:p="http://schemas.openxmlformats.org/presentationml/2006/main">
   <p:cSld>
     <p:bg>
       <p:bgPr>
-        <a:solidFill xmlns:a="http://schemas.openxmlformats.org/drawingml/2006/main">
+        <a:solidFill>
           <a:srgbClr val="F0E9D7"/>
         </a:solidFill>
+        <a:effectLst/>
       </p:bgPr>
     </p:bg>
     <p:spTree>
@@ -4814,38 +4151,43 @@
         <p:nvPr/>
       </p:nvGrpSpPr>
       <p:grpSpPr>
-        <a:xfrm xmlns:a="http://schemas.openxmlformats.org/drawingml/2006/main"/>
+        <a:xfrm>
+          <a:off x="0" y="0"/>
+          <a:ext cx="0" cy="0"/>
+          <a:chOff x="0" y="0"/>
+          <a:chExt cx="0" cy="0"/>
+        </a:xfrm>
       </p:grpSpPr>
       <p:sp>
         <p:nvSpPr>
-          <p:cNvPr id="7" name="">
-            <a:extLst xmlns:a="http://schemas.openxmlformats.org/drawingml/2006/main">
+          <p:cNvPr id="7" name="Rectangle 6">
+            <a:extLst>
               <a:ext uri="{FF2B5EF4-FFF2-40B4-BE49-F238E27FC236}">
                 <a16:creationId xmlns:a16="http://schemas.microsoft.com/office/drawing/2014/main" id="{3536AD22-75AA-477C-9A7F-E99D174086C3}"/>
               </a:ext>
             </a:extLst>
           </p:cNvPr>
           <p:cNvSpPr>
-            <a:spLocks xmlns:a="http://schemas.openxmlformats.org/drawingml/2006/main" noGrp="1"/>
+            <a:spLocks noGrp="1"/>
           </p:cNvSpPr>
           <p:nvPr/>
         </p:nvSpPr>
         <p:spPr>
-          <a:xfrm xmlns:a="http://schemas.openxmlformats.org/drawingml/2006/main">
+          <a:xfrm>
             <a:off x="609600" y="438150"/>
             <a:ext cx="10972800" cy="685800"/>
           </a:xfrm>
-          <a:prstGeom xmlns:a="http://schemas.openxmlformats.org/drawingml/2006/main" prst="rect">
+          <a:prstGeom prst="rect">
             <a:avLst/>
           </a:prstGeom>
-          <a:noFill xmlns:a="http://schemas.openxmlformats.org/drawingml/2006/main"/>
-          <a:ln xmlns:a="http://schemas.openxmlformats.org/drawingml/2006/main" w="0">
+          <a:noFill/>
+          <a:ln w="0">
             <a:noFill/>
           </a:ln>
         </p:spPr>
         <p:txBody>
-          <a:bodyPr xmlns:a="http://schemas.openxmlformats.org/drawingml/2006/main" anchor="t"/>
-          <a:lstStyle xmlns:a="http://schemas.openxmlformats.org/drawingml/2006/main">
+          <a:bodyPr anchor="t"/>
+          <a:lstStyle>
             <a:defPPr>
               <a:defRPr sz="3300" b="1">
                 <a:solidFill>
@@ -4947,7 +4289,7 @@
               </a:defRPr>
             </a:lvl9pPr>
           </a:lstStyle>
-          <a:p xmlns:a="http://schemas.openxmlformats.org/drawingml/2006/main">
+          <a:p>
             <a:pPr>
               <a:defRPr sz="3300" b="1">
                 <a:solidFill>
@@ -4974,34 +4316,34 @@
       </p:sp>
       <p:sp>
         <p:nvSpPr>
-          <p:cNvPr id="2" name="">
-            <a:extLst xmlns:a="http://schemas.openxmlformats.org/drawingml/2006/main">
+          <p:cNvPr id="2" name="Rectangle 1">
+            <a:extLst>
               <a:ext uri="{FF2B5EF4-FFF2-40B4-BE49-F238E27FC236}">
                 <a16:creationId xmlns:a16="http://schemas.microsoft.com/office/drawing/2014/main" id="{7B2F3916-7EB6-41BF-808B-F0FF7DA0EDD9}"/>
               </a:ext>
             </a:extLst>
           </p:cNvPr>
           <p:cNvSpPr>
-            <a:spLocks xmlns:a="http://schemas.openxmlformats.org/drawingml/2006/main" noGrp="1"/>
+            <a:spLocks noGrp="1"/>
           </p:cNvSpPr>
           <p:nvPr/>
         </p:nvSpPr>
         <p:spPr>
-          <a:xfrm xmlns:a="http://schemas.openxmlformats.org/drawingml/2006/main">
+          <a:xfrm>
             <a:off x="609600" y="1476375"/>
             <a:ext cx="4095750" cy="1123950"/>
           </a:xfrm>
-          <a:prstGeom xmlns:a="http://schemas.openxmlformats.org/drawingml/2006/main" prst="rect">
+          <a:prstGeom prst="rect">
             <a:avLst/>
           </a:prstGeom>
-          <a:noFill xmlns:a="http://schemas.openxmlformats.org/drawingml/2006/main"/>
-          <a:ln xmlns:a="http://schemas.openxmlformats.org/drawingml/2006/main" w="0">
+          <a:noFill/>
+          <a:ln w="0">
             <a:noFill/>
           </a:ln>
         </p:spPr>
         <p:txBody>
-          <a:bodyPr xmlns:a="http://schemas.openxmlformats.org/drawingml/2006/main" anchor="t"/>
-          <a:lstStyle xmlns:a="http://schemas.openxmlformats.org/drawingml/2006/main">
+          <a:bodyPr anchor="t"/>
+          <a:lstStyle>
             <a:defPPr>
               <a:defRPr sz="1875" b="0">
                 <a:solidFill>
@@ -5103,7 +4445,7 @@
               </a:defRPr>
             </a:lvl9pPr>
           </a:lstStyle>
-          <a:p xmlns:a="http://schemas.openxmlformats.org/drawingml/2006/main">
+          <a:p>
             <a:pPr>
               <a:defRPr sz="1875" b="0">
                 <a:solidFill>
@@ -5115,7 +4457,7 @@
               </a:defRPr>
             </a:pPr>
             <a:r>
-              <a:rPr sz="1875" b="0">
+              <a:rPr sz="1875" b="0" dirty="0">
                 <a:solidFill>
                   <a:srgbClr val="342E25"/>
                 </a:solidFill>
@@ -5130,34 +4472,34 @@
       </p:sp>
       <p:sp>
         <p:nvSpPr>
-          <p:cNvPr id="3" name="">
-            <a:extLst xmlns:a="http://schemas.openxmlformats.org/drawingml/2006/main">
+          <p:cNvPr id="3" name="Rectangle 2">
+            <a:extLst>
               <a:ext uri="{FF2B5EF4-FFF2-40B4-BE49-F238E27FC236}">
                 <a16:creationId xmlns:a16="http://schemas.microsoft.com/office/drawing/2014/main" id="{2033DD41-763C-4D09-9B89-0C35A3BA4780}"/>
               </a:ext>
             </a:extLst>
           </p:cNvPr>
           <p:cNvSpPr>
-            <a:spLocks xmlns:a="http://schemas.openxmlformats.org/drawingml/2006/main" noGrp="1"/>
+            <a:spLocks noGrp="1"/>
           </p:cNvSpPr>
           <p:nvPr/>
         </p:nvSpPr>
         <p:spPr>
-          <a:xfrm xmlns:a="http://schemas.openxmlformats.org/drawingml/2006/main">
+          <a:xfrm>
             <a:off x="609600" y="2733675"/>
             <a:ext cx="4095750" cy="1123950"/>
           </a:xfrm>
-          <a:prstGeom xmlns:a="http://schemas.openxmlformats.org/drawingml/2006/main" prst="rect">
+          <a:prstGeom prst="rect">
             <a:avLst/>
           </a:prstGeom>
-          <a:noFill xmlns:a="http://schemas.openxmlformats.org/drawingml/2006/main"/>
-          <a:ln xmlns:a="http://schemas.openxmlformats.org/drawingml/2006/main" w="0">
+          <a:noFill/>
+          <a:ln w="0">
             <a:noFill/>
           </a:ln>
         </p:spPr>
         <p:txBody>
-          <a:bodyPr xmlns:a="http://schemas.openxmlformats.org/drawingml/2006/main" anchor="t"/>
-          <a:lstStyle xmlns:a="http://schemas.openxmlformats.org/drawingml/2006/main">
+          <a:bodyPr anchor="t"/>
+          <a:lstStyle>
             <a:defPPr>
               <a:defRPr sz="1875" b="0">
                 <a:solidFill>
@@ -5259,7 +4601,7 @@
               </a:defRPr>
             </a:lvl9pPr>
           </a:lstStyle>
-          <a:p xmlns:a="http://schemas.openxmlformats.org/drawingml/2006/main">
+          <a:p>
             <a:pPr>
               <a:defRPr sz="1875" b="0">
                 <a:solidFill>
@@ -5271,7 +4613,7 @@
               </a:defRPr>
             </a:pPr>
             <a:r>
-              <a:rPr sz="1875" b="0">
+              <a:rPr sz="1875" b="0" dirty="0">
                 <a:solidFill>
                   <a:srgbClr val="342E25"/>
                 </a:solidFill>
@@ -5286,34 +4628,34 @@
       </p:sp>
       <p:sp>
         <p:nvSpPr>
-          <p:cNvPr id="4" name="">
-            <a:extLst xmlns:a="http://schemas.openxmlformats.org/drawingml/2006/main">
+          <p:cNvPr id="4" name="Rectangle 3">
+            <a:extLst>
               <a:ext uri="{FF2B5EF4-FFF2-40B4-BE49-F238E27FC236}">
                 <a16:creationId xmlns:a16="http://schemas.microsoft.com/office/drawing/2014/main" id="{60F35BDB-D800-4DD2-9919-29468FCFE4C2}"/>
               </a:ext>
             </a:extLst>
           </p:cNvPr>
           <p:cNvSpPr>
-            <a:spLocks xmlns:a="http://schemas.openxmlformats.org/drawingml/2006/main" noGrp="1"/>
+            <a:spLocks noGrp="1"/>
           </p:cNvSpPr>
           <p:nvPr/>
         </p:nvSpPr>
         <p:spPr>
-          <a:xfrm xmlns:a="http://schemas.openxmlformats.org/drawingml/2006/main">
+          <a:xfrm>
             <a:off x="609600" y="3990975"/>
             <a:ext cx="4095750" cy="1123950"/>
           </a:xfrm>
-          <a:prstGeom xmlns:a="http://schemas.openxmlformats.org/drawingml/2006/main" prst="rect">
+          <a:prstGeom prst="rect">
             <a:avLst/>
           </a:prstGeom>
-          <a:noFill xmlns:a="http://schemas.openxmlformats.org/drawingml/2006/main"/>
-          <a:ln xmlns:a="http://schemas.openxmlformats.org/drawingml/2006/main" w="0">
+          <a:noFill/>
+          <a:ln w="0">
             <a:noFill/>
           </a:ln>
         </p:spPr>
         <p:txBody>
-          <a:bodyPr xmlns:a="http://schemas.openxmlformats.org/drawingml/2006/main" anchor="t"/>
-          <a:lstStyle xmlns:a="http://schemas.openxmlformats.org/drawingml/2006/main">
+          <a:bodyPr anchor="t"/>
+          <a:lstStyle>
             <a:defPPr>
               <a:defRPr sz="1875" b="0">
                 <a:solidFill>
@@ -5415,7 +4757,7 @@
               </a:defRPr>
             </a:lvl9pPr>
           </a:lstStyle>
-          <a:p xmlns:a="http://schemas.openxmlformats.org/drawingml/2006/main">
+          <a:p>
             <a:pPr>
               <a:defRPr sz="1875" b="0">
                 <a:solidFill>
@@ -5427,7 +4769,7 @@
               </a:defRPr>
             </a:pPr>
             <a:r>
-              <a:rPr sz="1875" b="0">
+              <a:rPr sz="1875" b="0" dirty="0">
                 <a:solidFill>
                   <a:srgbClr val="342E25"/>
                 </a:solidFill>
@@ -5442,211 +4784,32 @@
       </p:sp>
       <p:pic>
         <p:nvPicPr>
-          <p:cNvPr id="5" name="">
-            <a:extLst xmlns:a="http://schemas.openxmlformats.org/drawingml/2006/main">
+          <p:cNvPr id="5" name="Picture 4">
+            <a:extLst>
               <a:ext uri="{FF2B5EF4-FFF2-40B4-BE49-F238E27FC236}">
                 <a16:creationId xmlns:a16="http://schemas.microsoft.com/office/drawing/2014/main" id="{DA226BFF-7FBB-4C57-BCEE-B7E6BD44CD44}"/>
               </a:ext>
             </a:extLst>
           </p:cNvPr>
           <p:cNvPicPr>
-            <a:picLocks xmlns:a="http://schemas.openxmlformats.org/drawingml/2006/main" noChangeAspect="1"/>
+            <a:picLocks noChangeAspect="1"/>
           </p:cNvPicPr>
           <p:nvPr/>
         </p:nvPicPr>
         <p:blipFill>
-          <a:blip xmlns:r="http://schemas.openxmlformats.org/officeDocument/2006/relationships" xmlns:a="http://schemas.openxmlformats.org/drawingml/2006/main" r:embed="Rd8080fdf6e7b415e"/>
-          <a:stretch xmlns:a="http://schemas.openxmlformats.org/drawingml/2006/main"/>
+          <a:blip r:embed="rId3"/>
+          <a:stretch/>
         </p:blipFill>
         <p:spPr>
-          <a:xfrm xmlns:a="http://schemas.openxmlformats.org/drawingml/2006/main">
+          <a:xfrm>
             <a:off x="5067300" y="1585317"/>
             <a:ext cx="6572250" cy="3696891"/>
           </a:xfrm>
-          <a:prstGeom xmlns:a="http://schemas.openxmlformats.org/drawingml/2006/main" prst="rect">
+          <a:prstGeom prst="rect">
             <a:avLst/>
           </a:prstGeom>
         </p:spPr>
       </p:pic>
-      <p:sp>
-        <p:nvSpPr>
-          <p:cNvPr id="6" name="">
-            <a:extLst xmlns:a="http://schemas.openxmlformats.org/drawingml/2006/main">
-              <a:ext uri="{FF2B5EF4-FFF2-40B4-BE49-F238E27FC236}">
-                <a16:creationId xmlns:a16="http://schemas.microsoft.com/office/drawing/2014/main" id="{4699AEE5-95F7-408E-853A-E8869585B30E}"/>
-              </a:ext>
-            </a:extLst>
-          </p:cNvPr>
-          <p:cNvSpPr>
-            <a:spLocks xmlns:a="http://schemas.openxmlformats.org/drawingml/2006/main" noGrp="1"/>
-          </p:cNvSpPr>
-          <p:nvPr/>
-        </p:nvSpPr>
-        <p:spPr>
-          <a:xfrm xmlns:a="http://schemas.openxmlformats.org/drawingml/2006/main">
-            <a:off x="5238750" y="5600700"/>
-            <a:ext cx="6191250" cy="666750"/>
-          </a:xfrm>
-          <a:prstGeom xmlns:a="http://schemas.openxmlformats.org/drawingml/2006/main" prst="rect">
-            <a:avLst/>
-          </a:prstGeom>
-          <a:noFill xmlns:a="http://schemas.openxmlformats.org/drawingml/2006/main"/>
-          <a:ln xmlns:a="http://schemas.openxmlformats.org/drawingml/2006/main" w="0">
-            <a:noFill/>
-          </a:ln>
-        </p:spPr>
-        <p:txBody>
-          <a:bodyPr xmlns:a="http://schemas.openxmlformats.org/drawingml/2006/main" anchor="t"/>
-          <a:lstStyle xmlns:a="http://schemas.openxmlformats.org/drawingml/2006/main">
-            <a:defPPr>
-              <a:defRPr sz="1650" b="0">
-                <a:solidFill>
-                  <a:srgbClr val="342E25"/>
-                </a:solidFill>
-                <a:latin typeface="Arial"/>
-                <a:ea typeface="Arial"/>
-                <a:cs typeface="Arial"/>
-              </a:defRPr>
-            </a:defPPr>
-            <a:lvl1pPr>
-              <a:defRPr sz="1650" b="0">
-                <a:solidFill>
-                  <a:srgbClr val="342E25"/>
-                </a:solidFill>
-                <a:latin typeface="Arial"/>
-                <a:ea typeface="Arial"/>
-                <a:cs typeface="Arial"/>
-              </a:defRPr>
-            </a:lvl1pPr>
-            <a:lvl2pPr>
-              <a:defRPr sz="1650" b="0">
-                <a:solidFill>
-                  <a:srgbClr val="342E25"/>
-                </a:solidFill>
-                <a:latin typeface="Arial"/>
-                <a:ea typeface="Arial"/>
-                <a:cs typeface="Arial"/>
-              </a:defRPr>
-            </a:lvl2pPr>
-            <a:lvl3pPr>
-              <a:defRPr sz="1650" b="0">
-                <a:solidFill>
-                  <a:srgbClr val="342E25"/>
-                </a:solidFill>
-                <a:latin typeface="Arial"/>
-                <a:ea typeface="Arial"/>
-                <a:cs typeface="Arial"/>
-              </a:defRPr>
-            </a:lvl3pPr>
-            <a:lvl4pPr>
-              <a:defRPr sz="1650" b="0">
-                <a:solidFill>
-                  <a:srgbClr val="342E25"/>
-                </a:solidFill>
-                <a:latin typeface="Arial"/>
-                <a:ea typeface="Arial"/>
-                <a:cs typeface="Arial"/>
-              </a:defRPr>
-            </a:lvl4pPr>
-            <a:lvl5pPr>
-              <a:defRPr sz="1650" b="0">
-                <a:solidFill>
-                  <a:srgbClr val="342E25"/>
-                </a:solidFill>
-                <a:latin typeface="Arial"/>
-                <a:ea typeface="Arial"/>
-                <a:cs typeface="Arial"/>
-              </a:defRPr>
-            </a:lvl5pPr>
-            <a:lvl6pPr>
-              <a:defRPr sz="1650" b="0">
-                <a:solidFill>
-                  <a:srgbClr val="342E25"/>
-                </a:solidFill>
-                <a:latin typeface="Arial"/>
-                <a:ea typeface="Arial"/>
-                <a:cs typeface="Arial"/>
-              </a:defRPr>
-            </a:lvl6pPr>
-            <a:lvl7pPr>
-              <a:defRPr sz="1650" b="0">
-                <a:solidFill>
-                  <a:srgbClr val="342E25"/>
-                </a:solidFill>
-                <a:latin typeface="Arial"/>
-                <a:ea typeface="Arial"/>
-                <a:cs typeface="Arial"/>
-              </a:defRPr>
-            </a:lvl7pPr>
-            <a:lvl8pPr>
-              <a:defRPr sz="1650" b="0">
-                <a:solidFill>
-                  <a:srgbClr val="342E25"/>
-                </a:solidFill>
-                <a:latin typeface="Arial"/>
-                <a:ea typeface="Arial"/>
-                <a:cs typeface="Arial"/>
-              </a:defRPr>
-            </a:lvl8pPr>
-            <a:lvl9pPr>
-              <a:defRPr sz="1650" b="0">
-                <a:solidFill>
-                  <a:srgbClr val="342E25"/>
-                </a:solidFill>
-                <a:latin typeface="Arial"/>
-                <a:ea typeface="Arial"/>
-                <a:cs typeface="Arial"/>
-              </a:defRPr>
-            </a:lvl9pPr>
-          </a:lstStyle>
-          <a:p xmlns:a="http://schemas.openxmlformats.org/drawingml/2006/main">
-            <a:pPr>
-              <a:defRPr sz="1650" b="0">
-                <a:solidFill>
-                  <a:srgbClr val="342E25"/>
-                </a:solidFill>
-                <a:latin typeface="Arial"/>
-                <a:ea typeface="Arial"/>
-                <a:cs typeface="Arial"/>
-              </a:defRPr>
-            </a:pPr>
-            <a:r>
-              <a:rPr sz="1650" b="0">
-                <a:solidFill>
-                  <a:srgbClr val="342E25"/>
-                </a:solidFill>
-                <a:latin typeface="Arial"/>
-                <a:ea typeface="Arial"/>
-                <a:cs typeface="Arial"/>
-              </a:rPr>
-              <a:t>WASD / arrows: move     E: examine</a:t>
-            </a:r>
-          </a:p>
-          <a:p xmlns:a="http://schemas.openxmlformats.org/drawingml/2006/main">
-            <a:pPr>
-              <a:defRPr sz="1650" b="0">
-                <a:solidFill>
-                  <a:srgbClr val="342E25"/>
-                </a:solidFill>
-                <a:latin typeface="Arial"/>
-                <a:ea typeface="Arial"/>
-                <a:cs typeface="Arial"/>
-              </a:defRPr>
-            </a:pPr>
-            <a:r>
-              <a:rPr sz="1650" b="0">
-                <a:solidFill>
-                  <a:srgbClr val="342E25"/>
-                </a:solidFill>
-                <a:latin typeface="Arial"/>
-                <a:ea typeface="Arial"/>
-                <a:cs typeface="Arial"/>
-              </a:rPr>
-              <a:t>N: case notes     Esc: close or pause</a:t>
-            </a:r>
-          </a:p>
-        </p:txBody>
-      </p:sp>
     </p:spTree>
     <p:extLst>
       <p:ext uri="{BB962C8B-B14F-4D97-AF65-F5344CB8AC3E}">
@@ -5654,17 +4817,21 @@
       </p:ext>
     </p:extLst>
   </p:cSld>
+  <p:clrMapOvr>
+    <a:masterClrMapping/>
+  </p:clrMapOvr>
 </p:sld>
 </file>
 
 <file path=ppt/slides/slide3.xml><?xml version="1.0" encoding="utf-8"?>
-<p:sld xmlns:p="http://schemas.openxmlformats.org/presentationml/2006/main">
+<p:sld xmlns:a="http://schemas.openxmlformats.org/drawingml/2006/main" xmlns:r="http://schemas.openxmlformats.org/officeDocument/2006/relationships" xmlns:p="http://schemas.openxmlformats.org/presentationml/2006/main">
   <p:cSld>
     <p:bg>
       <p:bgPr>
-        <a:solidFill xmlns:a="http://schemas.openxmlformats.org/drawingml/2006/main">
+        <a:solidFill>
           <a:srgbClr val="F0E9D7"/>
         </a:solidFill>
+        <a:effectLst/>
       </p:bgPr>
     </p:bg>
     <p:spTree>
@@ -5674,38 +4841,43 @@
         <p:nvPr/>
       </p:nvGrpSpPr>
       <p:grpSpPr>
-        <a:xfrm xmlns:a="http://schemas.openxmlformats.org/drawingml/2006/main"/>
+        <a:xfrm>
+          <a:off x="0" y="0"/>
+          <a:ext cx="0" cy="0"/>
+          <a:chOff x="0" y="0"/>
+          <a:chExt cx="0" cy="0"/>
+        </a:xfrm>
       </p:grpSpPr>
       <p:sp>
         <p:nvSpPr>
-          <p:cNvPr id="6" name="">
-            <a:extLst xmlns:a="http://schemas.openxmlformats.org/drawingml/2006/main">
+          <p:cNvPr id="6" name="Rectangle 5">
+            <a:extLst>
               <a:ext uri="{FF2B5EF4-FFF2-40B4-BE49-F238E27FC236}">
                 <a16:creationId xmlns:a16="http://schemas.microsoft.com/office/drawing/2014/main" id="{85CDD6CF-DE03-46E6-B7CD-71CAD5B8D5E7}"/>
               </a:ext>
             </a:extLst>
           </p:cNvPr>
           <p:cNvSpPr>
-            <a:spLocks xmlns:a="http://schemas.openxmlformats.org/drawingml/2006/main" noGrp="1"/>
+            <a:spLocks noGrp="1"/>
           </p:cNvSpPr>
           <p:nvPr/>
         </p:nvSpPr>
         <p:spPr>
-          <a:xfrm xmlns:a="http://schemas.openxmlformats.org/drawingml/2006/main">
+          <a:xfrm>
             <a:off x="609600" y="438150"/>
             <a:ext cx="10972800" cy="685800"/>
           </a:xfrm>
-          <a:prstGeom xmlns:a="http://schemas.openxmlformats.org/drawingml/2006/main" prst="rect">
+          <a:prstGeom prst="rect">
             <a:avLst/>
           </a:prstGeom>
-          <a:noFill xmlns:a="http://schemas.openxmlformats.org/drawingml/2006/main"/>
-          <a:ln xmlns:a="http://schemas.openxmlformats.org/drawingml/2006/main" w="0">
+          <a:noFill/>
+          <a:ln w="0">
             <a:noFill/>
           </a:ln>
         </p:spPr>
         <p:txBody>
-          <a:bodyPr xmlns:a="http://schemas.openxmlformats.org/drawingml/2006/main" anchor="t"/>
-          <a:lstStyle xmlns:a="http://schemas.openxmlformats.org/drawingml/2006/main">
+          <a:bodyPr anchor="t"/>
+          <a:lstStyle>
             <a:defPPr>
               <a:defRPr sz="3300" b="1">
                 <a:solidFill>
@@ -5807,7 +4979,7 @@
               </a:defRPr>
             </a:lvl9pPr>
           </a:lstStyle>
-          <a:p xmlns:a="http://schemas.openxmlformats.org/drawingml/2006/main">
+          <a:p>
             <a:pPr>
               <a:defRPr sz="3300" b="1">
                 <a:solidFill>
@@ -5834,34 +5006,34 @@
       </p:sp>
       <p:sp>
         <p:nvSpPr>
-          <p:cNvPr id="2" name="">
-            <a:extLst xmlns:a="http://schemas.openxmlformats.org/drawingml/2006/main">
+          <p:cNvPr id="2" name="Rectangle 1">
+            <a:extLst>
               <a:ext uri="{FF2B5EF4-FFF2-40B4-BE49-F238E27FC236}">
                 <a16:creationId xmlns:a16="http://schemas.microsoft.com/office/drawing/2014/main" id="{CD63B7CE-ABC0-42FD-ABA8-886CBCB793CF}"/>
               </a:ext>
             </a:extLst>
           </p:cNvPr>
           <p:cNvSpPr>
-            <a:spLocks xmlns:a="http://schemas.openxmlformats.org/drawingml/2006/main" noGrp="1"/>
+            <a:spLocks noGrp="1"/>
           </p:cNvSpPr>
           <p:nvPr/>
         </p:nvSpPr>
         <p:spPr>
-          <a:xfrm xmlns:a="http://schemas.openxmlformats.org/drawingml/2006/main">
+          <a:xfrm>
             <a:off x="609600" y="1476375"/>
             <a:ext cx="3905250" cy="1200150"/>
           </a:xfrm>
-          <a:prstGeom xmlns:a="http://schemas.openxmlformats.org/drawingml/2006/main" prst="rect">
+          <a:prstGeom prst="rect">
             <a:avLst/>
           </a:prstGeom>
-          <a:noFill xmlns:a="http://schemas.openxmlformats.org/drawingml/2006/main"/>
-          <a:ln xmlns:a="http://schemas.openxmlformats.org/drawingml/2006/main" w="0">
+          <a:noFill/>
+          <a:ln w="0">
             <a:noFill/>
           </a:ln>
         </p:spPr>
         <p:txBody>
-          <a:bodyPr xmlns:a="http://schemas.openxmlformats.org/drawingml/2006/main" anchor="t"/>
-          <a:lstStyle xmlns:a="http://schemas.openxmlformats.org/drawingml/2006/main">
+          <a:bodyPr anchor="t"/>
+          <a:lstStyle>
             <a:defPPr>
               <a:defRPr sz="2025" b="0">
                 <a:solidFill>
@@ -5963,7 +5135,7 @@
               </a:defRPr>
             </a:lvl9pPr>
           </a:lstStyle>
-          <a:p xmlns:a="http://schemas.openxmlformats.org/drawingml/2006/main">
+          <a:p>
             <a:pPr>
               <a:defRPr sz="2025" b="0">
                 <a:solidFill>
@@ -5975,7 +5147,7 @@
               </a:defRPr>
             </a:pPr>
             <a:r>
-              <a:rPr sz="2025" b="0">
+              <a:rPr sz="2025" b="0" dirty="0">
                 <a:solidFill>
                   <a:srgbClr val="342E25"/>
                 </a:solidFill>
@@ -5990,34 +5162,34 @@
       </p:sp>
       <p:sp>
         <p:nvSpPr>
-          <p:cNvPr id="3" name="">
-            <a:extLst xmlns:a="http://schemas.openxmlformats.org/drawingml/2006/main">
+          <p:cNvPr id="3" name="Rectangle 2">
+            <a:extLst>
               <a:ext uri="{FF2B5EF4-FFF2-40B4-BE49-F238E27FC236}">
                 <a16:creationId xmlns:a16="http://schemas.microsoft.com/office/drawing/2014/main" id="{52B0C037-750B-474C-811B-470C22E66044}"/>
               </a:ext>
             </a:extLst>
           </p:cNvPr>
           <p:cNvSpPr>
-            <a:spLocks xmlns:a="http://schemas.openxmlformats.org/drawingml/2006/main" noGrp="1"/>
+            <a:spLocks noGrp="1"/>
           </p:cNvSpPr>
           <p:nvPr/>
         </p:nvSpPr>
         <p:spPr>
-          <a:xfrm xmlns:a="http://schemas.openxmlformats.org/drawingml/2006/main">
-            <a:off x="609600" y="2809875"/>
+          <a:xfrm>
+            <a:off x="609600" y="2714625"/>
             <a:ext cx="3905250" cy="1200150"/>
           </a:xfrm>
-          <a:prstGeom xmlns:a="http://schemas.openxmlformats.org/drawingml/2006/main" prst="rect">
+          <a:prstGeom prst="rect">
             <a:avLst/>
           </a:prstGeom>
-          <a:noFill xmlns:a="http://schemas.openxmlformats.org/drawingml/2006/main"/>
-          <a:ln xmlns:a="http://schemas.openxmlformats.org/drawingml/2006/main" w="0">
+          <a:noFill/>
+          <a:ln w="0">
             <a:noFill/>
           </a:ln>
         </p:spPr>
         <p:txBody>
-          <a:bodyPr xmlns:a="http://schemas.openxmlformats.org/drawingml/2006/main" anchor="t"/>
-          <a:lstStyle xmlns:a="http://schemas.openxmlformats.org/drawingml/2006/main">
+          <a:bodyPr anchor="t"/>
+          <a:lstStyle>
             <a:defPPr>
               <a:defRPr sz="2025" b="0">
                 <a:solidFill>
@@ -6119,7 +5291,7 @@
               </a:defRPr>
             </a:lvl9pPr>
           </a:lstStyle>
-          <a:p xmlns:a="http://schemas.openxmlformats.org/drawingml/2006/main">
+          <a:p>
             <a:pPr>
               <a:defRPr sz="2025" b="0">
                 <a:solidFill>
@@ -6131,7 +5303,7 @@
               </a:defRPr>
             </a:pPr>
             <a:r>
-              <a:rPr sz="2025" b="0">
+              <a:rPr sz="2025" b="0" dirty="0">
                 <a:solidFill>
                   <a:srgbClr val="342E25"/>
                 </a:solidFill>
@@ -6146,34 +5318,34 @@
       </p:sp>
       <p:sp>
         <p:nvSpPr>
-          <p:cNvPr id="4" name="">
-            <a:extLst xmlns:a="http://schemas.openxmlformats.org/drawingml/2006/main">
+          <p:cNvPr id="4" name="Rectangle 3">
+            <a:extLst>
               <a:ext uri="{FF2B5EF4-FFF2-40B4-BE49-F238E27FC236}">
                 <a16:creationId xmlns:a16="http://schemas.microsoft.com/office/drawing/2014/main" id="{0C86947C-593B-4F3F-9B6F-A4490A8A1362}"/>
               </a:ext>
             </a:extLst>
           </p:cNvPr>
           <p:cNvSpPr>
-            <a:spLocks xmlns:a="http://schemas.openxmlformats.org/drawingml/2006/main" noGrp="1"/>
+            <a:spLocks noGrp="1"/>
           </p:cNvSpPr>
           <p:nvPr/>
         </p:nvSpPr>
         <p:spPr>
-          <a:xfrm xmlns:a="http://schemas.openxmlformats.org/drawingml/2006/main">
+          <a:xfrm>
             <a:off x="609600" y="4143375"/>
             <a:ext cx="3905250" cy="1200150"/>
           </a:xfrm>
-          <a:prstGeom xmlns:a="http://schemas.openxmlformats.org/drawingml/2006/main" prst="rect">
+          <a:prstGeom prst="rect">
             <a:avLst/>
           </a:prstGeom>
-          <a:noFill xmlns:a="http://schemas.openxmlformats.org/drawingml/2006/main"/>
-          <a:ln xmlns:a="http://schemas.openxmlformats.org/drawingml/2006/main" w="0">
+          <a:noFill/>
+          <a:ln w="0">
             <a:noFill/>
           </a:ln>
         </p:spPr>
         <p:txBody>
-          <a:bodyPr xmlns:a="http://schemas.openxmlformats.org/drawingml/2006/main" anchor="t"/>
-          <a:lstStyle xmlns:a="http://schemas.openxmlformats.org/drawingml/2006/main">
+          <a:bodyPr anchor="t"/>
+          <a:lstStyle>
             <a:defPPr>
               <a:defRPr sz="2025" b="0">
                 <a:solidFill>
@@ -6275,7 +5447,7 @@
               </a:defRPr>
             </a:lvl9pPr>
           </a:lstStyle>
-          <a:p xmlns:a="http://schemas.openxmlformats.org/drawingml/2006/main">
+          <a:p>
             <a:pPr>
               <a:defRPr sz="2025" b="0">
                 <a:solidFill>
@@ -6302,29 +5474,29 @@
       </p:sp>
       <p:pic>
         <p:nvPicPr>
-          <p:cNvPr id="5" name="">
-            <a:extLst xmlns:a="http://schemas.openxmlformats.org/drawingml/2006/main">
+          <p:cNvPr id="5" name="Picture 4">
+            <a:extLst>
               <a:ext uri="{FF2B5EF4-FFF2-40B4-BE49-F238E27FC236}">
                 <a16:creationId xmlns:a16="http://schemas.microsoft.com/office/drawing/2014/main" id="{21E69E15-DA58-4E2A-B2D3-411B4B3C282F}"/>
               </a:ext>
             </a:extLst>
           </p:cNvPr>
           <p:cNvPicPr>
-            <a:picLocks xmlns:a="http://schemas.openxmlformats.org/drawingml/2006/main" noChangeAspect="1"/>
+            <a:picLocks noChangeAspect="1"/>
           </p:cNvPicPr>
           <p:nvPr/>
         </p:nvPicPr>
         <p:blipFill>
-          <a:blip xmlns:r="http://schemas.openxmlformats.org/officeDocument/2006/relationships" xmlns:a="http://schemas.openxmlformats.org/drawingml/2006/main" r:embed="Rde2d46c187ea4ab3"/>
-          <a:srcRect xmlns:a="http://schemas.openxmlformats.org/drawingml/2006/main" l="19618" t="6481" r="19618" b="6481"/>
-          <a:stretch xmlns:a="http://schemas.openxmlformats.org/drawingml/2006/main"/>
+          <a:blip r:embed="rId3"/>
+          <a:srcRect l="19618" t="6481" r="19618" b="6481"/>
+          <a:stretch/>
         </p:blipFill>
         <p:spPr>
-          <a:xfrm xmlns:a="http://schemas.openxmlformats.org/drawingml/2006/main">
+          <a:xfrm>
             <a:off x="5010150" y="1352550"/>
             <a:ext cx="6572250" cy="5286375"/>
           </a:xfrm>
-          <a:prstGeom xmlns:a="http://schemas.openxmlformats.org/drawingml/2006/main" prst="rect">
+          <a:prstGeom prst="rect">
             <a:avLst/>
           </a:prstGeom>
         </p:spPr>
@@ -6336,17 +5508,21 @@
       </p:ext>
     </p:extLst>
   </p:cSld>
+  <p:clrMapOvr>
+    <a:masterClrMapping/>
+  </p:clrMapOvr>
 </p:sld>
 </file>
 
 <file path=ppt/slides/slide4.xml><?xml version="1.0" encoding="utf-8"?>
-<p:sld xmlns:p="http://schemas.openxmlformats.org/presentationml/2006/main">
+<p:sld xmlns:a="http://schemas.openxmlformats.org/drawingml/2006/main" xmlns:r="http://schemas.openxmlformats.org/officeDocument/2006/relationships" xmlns:p="http://schemas.openxmlformats.org/presentationml/2006/main">
   <p:cSld>
     <p:bg>
       <p:bgPr>
-        <a:solidFill xmlns:a="http://schemas.openxmlformats.org/drawingml/2006/main">
+        <a:solidFill>
           <a:srgbClr val="F0E9D7"/>
         </a:solidFill>
+        <a:effectLst/>
       </p:bgPr>
     </p:bg>
     <p:spTree>
@@ -6356,38 +5532,43 @@
         <p:nvPr/>
       </p:nvGrpSpPr>
       <p:grpSpPr>
-        <a:xfrm xmlns:a="http://schemas.openxmlformats.org/drawingml/2006/main"/>
+        <a:xfrm>
+          <a:off x="0" y="0"/>
+          <a:ext cx="0" cy="0"/>
+          <a:chOff x="0" y="0"/>
+          <a:chExt cx="0" cy="0"/>
+        </a:xfrm>
       </p:grpSpPr>
       <p:sp>
         <p:nvSpPr>
-          <p:cNvPr id="6" name="">
-            <a:extLst xmlns:a="http://schemas.openxmlformats.org/drawingml/2006/main">
+          <p:cNvPr id="6" name="Rectangle 5">
+            <a:extLst>
               <a:ext uri="{FF2B5EF4-FFF2-40B4-BE49-F238E27FC236}">
                 <a16:creationId xmlns:a16="http://schemas.microsoft.com/office/drawing/2014/main" id="{960CB9F9-5DAB-4513-890D-6CD14D60A6E1}"/>
               </a:ext>
             </a:extLst>
           </p:cNvPr>
           <p:cNvSpPr>
-            <a:spLocks xmlns:a="http://schemas.openxmlformats.org/drawingml/2006/main" noGrp="1"/>
+            <a:spLocks noGrp="1"/>
           </p:cNvSpPr>
           <p:nvPr/>
         </p:nvSpPr>
         <p:spPr>
-          <a:xfrm xmlns:a="http://schemas.openxmlformats.org/drawingml/2006/main">
+          <a:xfrm>
             <a:off x="609600" y="438150"/>
             <a:ext cx="10972800" cy="685800"/>
           </a:xfrm>
-          <a:prstGeom xmlns:a="http://schemas.openxmlformats.org/drawingml/2006/main" prst="rect">
+          <a:prstGeom prst="rect">
             <a:avLst/>
           </a:prstGeom>
-          <a:noFill xmlns:a="http://schemas.openxmlformats.org/drawingml/2006/main"/>
-          <a:ln xmlns:a="http://schemas.openxmlformats.org/drawingml/2006/main" w="0">
+          <a:noFill/>
+          <a:ln w="0">
             <a:noFill/>
           </a:ln>
         </p:spPr>
         <p:txBody>
-          <a:bodyPr xmlns:a="http://schemas.openxmlformats.org/drawingml/2006/main" anchor="t"/>
-          <a:lstStyle xmlns:a="http://schemas.openxmlformats.org/drawingml/2006/main">
+          <a:bodyPr anchor="t"/>
+          <a:lstStyle>
             <a:defPPr>
               <a:defRPr sz="3300" b="1">
                 <a:solidFill>
@@ -6489,7 +5670,7 @@
               </a:defRPr>
             </a:lvl9pPr>
           </a:lstStyle>
-          <a:p xmlns:a="http://schemas.openxmlformats.org/drawingml/2006/main">
+          <a:p>
             <a:pPr>
               <a:defRPr sz="3300" b="1">
                 <a:solidFill>
@@ -6516,34 +5697,34 @@
       </p:sp>
       <p:sp>
         <p:nvSpPr>
-          <p:cNvPr id="2" name="">
-            <a:extLst xmlns:a="http://schemas.openxmlformats.org/drawingml/2006/main">
+          <p:cNvPr id="2" name="Rectangle 1">
+            <a:extLst>
               <a:ext uri="{FF2B5EF4-FFF2-40B4-BE49-F238E27FC236}">
                 <a16:creationId xmlns:a16="http://schemas.microsoft.com/office/drawing/2014/main" id="{FEC5E536-FD3F-4017-B581-BBA92A78E403}"/>
               </a:ext>
             </a:extLst>
           </p:cNvPr>
           <p:cNvSpPr>
-            <a:spLocks xmlns:a="http://schemas.openxmlformats.org/drawingml/2006/main" noGrp="1"/>
+            <a:spLocks noGrp="1"/>
           </p:cNvSpPr>
           <p:nvPr/>
         </p:nvSpPr>
         <p:spPr>
-          <a:xfrm xmlns:a="http://schemas.openxmlformats.org/drawingml/2006/main">
+          <a:xfrm>
             <a:off x="609600" y="1476375"/>
             <a:ext cx="3905250" cy="1200150"/>
           </a:xfrm>
-          <a:prstGeom xmlns:a="http://schemas.openxmlformats.org/drawingml/2006/main" prst="rect">
+          <a:prstGeom prst="rect">
             <a:avLst/>
           </a:prstGeom>
-          <a:noFill xmlns:a="http://schemas.openxmlformats.org/drawingml/2006/main"/>
-          <a:ln xmlns:a="http://schemas.openxmlformats.org/drawingml/2006/main" w="0">
+          <a:noFill/>
+          <a:ln w="0">
             <a:noFill/>
           </a:ln>
         </p:spPr>
         <p:txBody>
-          <a:bodyPr xmlns:a="http://schemas.openxmlformats.org/drawingml/2006/main" anchor="t"/>
-          <a:lstStyle xmlns:a="http://schemas.openxmlformats.org/drawingml/2006/main">
+          <a:bodyPr anchor="t"/>
+          <a:lstStyle>
             <a:defPPr>
               <a:defRPr sz="1875" b="0">
                 <a:solidFill>
@@ -6645,7 +5826,7 @@
               </a:defRPr>
             </a:lvl9pPr>
           </a:lstStyle>
-          <a:p xmlns:a="http://schemas.openxmlformats.org/drawingml/2006/main">
+          <a:p>
             <a:pPr>
               <a:defRPr sz="1875" b="0">
                 <a:solidFill>
@@ -6672,34 +5853,34 @@
       </p:sp>
       <p:sp>
         <p:nvSpPr>
-          <p:cNvPr id="3" name="">
-            <a:extLst xmlns:a="http://schemas.openxmlformats.org/drawingml/2006/main">
+          <p:cNvPr id="3" name="Rectangle 2">
+            <a:extLst>
               <a:ext uri="{FF2B5EF4-FFF2-40B4-BE49-F238E27FC236}">
                 <a16:creationId xmlns:a16="http://schemas.microsoft.com/office/drawing/2014/main" id="{B060537A-2073-4BE3-A92F-04C31EEA824D}"/>
               </a:ext>
             </a:extLst>
           </p:cNvPr>
           <p:cNvSpPr>
-            <a:spLocks xmlns:a="http://schemas.openxmlformats.org/drawingml/2006/main" noGrp="1"/>
+            <a:spLocks noGrp="1"/>
           </p:cNvSpPr>
           <p:nvPr/>
         </p:nvSpPr>
         <p:spPr>
-          <a:xfrm xmlns:a="http://schemas.openxmlformats.org/drawingml/2006/main">
+          <a:xfrm>
             <a:off x="609600" y="2809875"/>
             <a:ext cx="3905250" cy="1200150"/>
           </a:xfrm>
-          <a:prstGeom xmlns:a="http://schemas.openxmlformats.org/drawingml/2006/main" prst="rect">
+          <a:prstGeom prst="rect">
             <a:avLst/>
           </a:prstGeom>
-          <a:noFill xmlns:a="http://schemas.openxmlformats.org/drawingml/2006/main"/>
-          <a:ln xmlns:a="http://schemas.openxmlformats.org/drawingml/2006/main" w="0">
+          <a:noFill/>
+          <a:ln w="0">
             <a:noFill/>
           </a:ln>
         </p:spPr>
         <p:txBody>
-          <a:bodyPr xmlns:a="http://schemas.openxmlformats.org/drawingml/2006/main" anchor="t"/>
-          <a:lstStyle xmlns:a="http://schemas.openxmlformats.org/drawingml/2006/main">
+          <a:bodyPr anchor="t"/>
+          <a:lstStyle>
             <a:defPPr>
               <a:defRPr sz="1875" b="0">
                 <a:solidFill>
@@ -6801,7 +5982,7 @@
               </a:defRPr>
             </a:lvl9pPr>
           </a:lstStyle>
-          <a:p xmlns:a="http://schemas.openxmlformats.org/drawingml/2006/main">
+          <a:p>
             <a:pPr>
               <a:defRPr sz="1875" b="0">
                 <a:solidFill>
@@ -6828,34 +6009,34 @@
       </p:sp>
       <p:sp>
         <p:nvSpPr>
-          <p:cNvPr id="4" name="">
-            <a:extLst xmlns:a="http://schemas.openxmlformats.org/drawingml/2006/main">
+          <p:cNvPr id="4" name="Rectangle 3">
+            <a:extLst>
               <a:ext uri="{FF2B5EF4-FFF2-40B4-BE49-F238E27FC236}">
                 <a16:creationId xmlns:a16="http://schemas.microsoft.com/office/drawing/2014/main" id="{97DB904D-4EE4-435D-8744-18D8A5E17093}"/>
               </a:ext>
             </a:extLst>
           </p:cNvPr>
           <p:cNvSpPr>
-            <a:spLocks xmlns:a="http://schemas.openxmlformats.org/drawingml/2006/main" noGrp="1"/>
+            <a:spLocks noGrp="1"/>
           </p:cNvSpPr>
           <p:nvPr/>
         </p:nvSpPr>
         <p:spPr>
-          <a:xfrm xmlns:a="http://schemas.openxmlformats.org/drawingml/2006/main">
+          <a:xfrm>
             <a:off x="609600" y="4143375"/>
             <a:ext cx="3905250" cy="1200150"/>
           </a:xfrm>
-          <a:prstGeom xmlns:a="http://schemas.openxmlformats.org/drawingml/2006/main" prst="rect">
+          <a:prstGeom prst="rect">
             <a:avLst/>
           </a:prstGeom>
-          <a:noFill xmlns:a="http://schemas.openxmlformats.org/drawingml/2006/main"/>
-          <a:ln xmlns:a="http://schemas.openxmlformats.org/drawingml/2006/main" w="0">
+          <a:noFill/>
+          <a:ln w="0">
             <a:noFill/>
           </a:ln>
         </p:spPr>
         <p:txBody>
-          <a:bodyPr xmlns:a="http://schemas.openxmlformats.org/drawingml/2006/main" anchor="t"/>
-          <a:lstStyle xmlns:a="http://schemas.openxmlformats.org/drawingml/2006/main">
+          <a:bodyPr anchor="t"/>
+          <a:lstStyle>
             <a:defPPr>
               <a:defRPr sz="1875" b="0">
                 <a:solidFill>
@@ -6957,7 +6138,7 @@
               </a:defRPr>
             </a:lvl9pPr>
           </a:lstStyle>
-          <a:p xmlns:a="http://schemas.openxmlformats.org/drawingml/2006/main">
+          <a:p>
             <a:pPr>
               <a:defRPr sz="1875" b="0">
                 <a:solidFill>
@@ -6984,29 +6165,29 @@
       </p:sp>
       <p:pic>
         <p:nvPicPr>
-          <p:cNvPr id="5" name="">
-            <a:extLst xmlns:a="http://schemas.openxmlformats.org/drawingml/2006/main">
+          <p:cNvPr id="5" name="Picture 4">
+            <a:extLst>
               <a:ext uri="{FF2B5EF4-FFF2-40B4-BE49-F238E27FC236}">
                 <a16:creationId xmlns:a16="http://schemas.microsoft.com/office/drawing/2014/main" id="{E8C8BB8A-DC1A-4075-A81D-C6D8E33A7DD7}"/>
               </a:ext>
             </a:extLst>
           </p:cNvPr>
           <p:cNvPicPr>
-            <a:picLocks xmlns:a="http://schemas.openxmlformats.org/drawingml/2006/main" noChangeAspect="1"/>
+            <a:picLocks noChangeAspect="1"/>
           </p:cNvPicPr>
           <p:nvPr/>
         </p:nvPicPr>
         <p:blipFill>
-          <a:blip xmlns:r="http://schemas.openxmlformats.org/officeDocument/2006/relationships" xmlns:a="http://schemas.openxmlformats.org/drawingml/2006/main" r:embed="R75d7b0efec304e12"/>
-          <a:srcRect xmlns:a="http://schemas.openxmlformats.org/drawingml/2006/main" l="19618" t="6481" r="19618" b="6481"/>
-          <a:stretch xmlns:a="http://schemas.openxmlformats.org/drawingml/2006/main"/>
+          <a:blip r:embed="rId3"/>
+          <a:srcRect l="19618" t="6481" r="19618" b="6481"/>
+          <a:stretch/>
         </p:blipFill>
         <p:spPr>
-          <a:xfrm xmlns:a="http://schemas.openxmlformats.org/drawingml/2006/main">
+          <a:xfrm>
             <a:off x="5010150" y="1352550"/>
             <a:ext cx="6572250" cy="5286375"/>
           </a:xfrm>
-          <a:prstGeom xmlns:a="http://schemas.openxmlformats.org/drawingml/2006/main" prst="rect">
+          <a:prstGeom prst="rect">
             <a:avLst/>
           </a:prstGeom>
         </p:spPr>
@@ -7018,17 +6199,21 @@
       </p:ext>
     </p:extLst>
   </p:cSld>
+  <p:clrMapOvr>
+    <a:masterClrMapping/>
+  </p:clrMapOvr>
 </p:sld>
 </file>
 
 <file path=ppt/slides/slide5.xml><?xml version="1.0" encoding="utf-8"?>
-<p:sld xmlns:p="http://schemas.openxmlformats.org/presentationml/2006/main">
+<p:sld xmlns:a="http://schemas.openxmlformats.org/drawingml/2006/main" xmlns:r="http://schemas.openxmlformats.org/officeDocument/2006/relationships" xmlns:p="http://schemas.openxmlformats.org/presentationml/2006/main">
   <p:cSld>
     <p:bg>
       <p:bgPr>
-        <a:solidFill xmlns:a="http://schemas.openxmlformats.org/drawingml/2006/main">
+        <a:solidFill>
           <a:srgbClr val="F0E9D7"/>
         </a:solidFill>
+        <a:effectLst/>
       </p:bgPr>
     </p:bg>
     <p:spTree>
@@ -7038,38 +6223,43 @@
         <p:nvPr/>
       </p:nvGrpSpPr>
       <p:grpSpPr>
-        <a:xfrm xmlns:a="http://schemas.openxmlformats.org/drawingml/2006/main"/>
+        <a:xfrm>
+          <a:off x="0" y="0"/>
+          <a:ext cx="0" cy="0"/>
+          <a:chOff x="0" y="0"/>
+          <a:chExt cx="0" cy="0"/>
+        </a:xfrm>
       </p:grpSpPr>
       <p:sp>
         <p:nvSpPr>
-          <p:cNvPr id="6" name="">
-            <a:extLst xmlns:a="http://schemas.openxmlformats.org/drawingml/2006/main">
+          <p:cNvPr id="6" name="Rectangle 5">
+            <a:extLst>
               <a:ext uri="{FF2B5EF4-FFF2-40B4-BE49-F238E27FC236}">
                 <a16:creationId xmlns:a16="http://schemas.microsoft.com/office/drawing/2014/main" id="{9A20F115-A731-4D53-AE2B-16090076C379}"/>
               </a:ext>
             </a:extLst>
           </p:cNvPr>
           <p:cNvSpPr>
-            <a:spLocks xmlns:a="http://schemas.openxmlformats.org/drawingml/2006/main" noGrp="1"/>
+            <a:spLocks noGrp="1"/>
           </p:cNvSpPr>
           <p:nvPr/>
         </p:nvSpPr>
         <p:spPr>
-          <a:xfrm xmlns:a="http://schemas.openxmlformats.org/drawingml/2006/main">
+          <a:xfrm>
             <a:off x="609600" y="438150"/>
             <a:ext cx="10972800" cy="685800"/>
           </a:xfrm>
-          <a:prstGeom xmlns:a="http://schemas.openxmlformats.org/drawingml/2006/main" prst="rect">
+          <a:prstGeom prst="rect">
             <a:avLst/>
           </a:prstGeom>
-          <a:noFill xmlns:a="http://schemas.openxmlformats.org/drawingml/2006/main"/>
-          <a:ln xmlns:a="http://schemas.openxmlformats.org/drawingml/2006/main" w="0">
+          <a:noFill/>
+          <a:ln w="0">
             <a:noFill/>
           </a:ln>
         </p:spPr>
         <p:txBody>
-          <a:bodyPr xmlns:a="http://schemas.openxmlformats.org/drawingml/2006/main" anchor="t"/>
-          <a:lstStyle xmlns:a="http://schemas.openxmlformats.org/drawingml/2006/main">
+          <a:bodyPr anchor="t"/>
+          <a:lstStyle>
             <a:defPPr>
               <a:defRPr sz="3300" b="1">
                 <a:solidFill>
@@ -7171,7 +6361,7 @@
               </a:defRPr>
             </a:lvl9pPr>
           </a:lstStyle>
-          <a:p xmlns:a="http://schemas.openxmlformats.org/drawingml/2006/main">
+          <a:p>
             <a:pPr>
               <a:defRPr sz="3300" b="1">
                 <a:solidFill>
@@ -7198,34 +6388,34 @@
       </p:sp>
       <p:sp>
         <p:nvSpPr>
-          <p:cNvPr id="2" name="">
-            <a:extLst xmlns:a="http://schemas.openxmlformats.org/drawingml/2006/main">
+          <p:cNvPr id="2" name="Rectangle 1">
+            <a:extLst>
               <a:ext uri="{FF2B5EF4-FFF2-40B4-BE49-F238E27FC236}">
                 <a16:creationId xmlns:a16="http://schemas.microsoft.com/office/drawing/2014/main" id="{076E258F-EB04-432C-8CBA-7939946C8D40}"/>
               </a:ext>
             </a:extLst>
           </p:cNvPr>
           <p:cNvSpPr>
-            <a:spLocks xmlns:a="http://schemas.openxmlformats.org/drawingml/2006/main" noGrp="1"/>
+            <a:spLocks noGrp="1"/>
           </p:cNvSpPr>
           <p:nvPr/>
         </p:nvSpPr>
         <p:spPr>
-          <a:xfrm xmlns:a="http://schemas.openxmlformats.org/drawingml/2006/main">
+          <a:xfrm>
             <a:off x="609600" y="1438275"/>
             <a:ext cx="3905250" cy="1247775"/>
           </a:xfrm>
-          <a:prstGeom xmlns:a="http://schemas.openxmlformats.org/drawingml/2006/main" prst="rect">
+          <a:prstGeom prst="rect">
             <a:avLst/>
           </a:prstGeom>
-          <a:noFill xmlns:a="http://schemas.openxmlformats.org/drawingml/2006/main"/>
-          <a:ln xmlns:a="http://schemas.openxmlformats.org/drawingml/2006/main" w="0">
+          <a:noFill/>
+          <a:ln w="0">
             <a:noFill/>
           </a:ln>
         </p:spPr>
         <p:txBody>
-          <a:bodyPr xmlns:a="http://schemas.openxmlformats.org/drawingml/2006/main" anchor="t"/>
-          <a:lstStyle xmlns:a="http://schemas.openxmlformats.org/drawingml/2006/main">
+          <a:bodyPr anchor="t"/>
+          <a:lstStyle>
             <a:defPPr>
               <a:defRPr sz="1875" b="0">
                 <a:solidFill>
@@ -7327,7 +6517,7 @@
               </a:defRPr>
             </a:lvl9pPr>
           </a:lstStyle>
-          <a:p xmlns:a="http://schemas.openxmlformats.org/drawingml/2006/main">
+          <a:p>
             <a:pPr>
               <a:defRPr sz="1875" b="0">
                 <a:solidFill>
@@ -7350,7 +6540,7 @@
               <a:t>SDG 7: efficient electricity use</a:t>
             </a:r>
           </a:p>
-          <a:p xmlns:a="http://schemas.openxmlformats.org/drawingml/2006/main">
+          <a:p>
             <a:pPr>
               <a:defRPr sz="1875" b="0">
                 <a:solidFill>
@@ -7377,34 +6567,34 @@
       </p:sp>
       <p:sp>
         <p:nvSpPr>
-          <p:cNvPr id="3" name="">
-            <a:extLst xmlns:a="http://schemas.openxmlformats.org/drawingml/2006/main">
+          <p:cNvPr id="3" name="Rectangle 2">
+            <a:extLst>
               <a:ext uri="{FF2B5EF4-FFF2-40B4-BE49-F238E27FC236}">
                 <a16:creationId xmlns:a16="http://schemas.microsoft.com/office/drawing/2014/main" id="{AEDF78F7-B5CF-460F-A4E6-3F12D6A9A974}"/>
               </a:ext>
             </a:extLst>
           </p:cNvPr>
           <p:cNvSpPr>
-            <a:spLocks xmlns:a="http://schemas.openxmlformats.org/drawingml/2006/main" noGrp="1"/>
+            <a:spLocks noGrp="1"/>
           </p:cNvSpPr>
           <p:nvPr/>
         </p:nvSpPr>
         <p:spPr>
-          <a:xfrm xmlns:a="http://schemas.openxmlformats.org/drawingml/2006/main">
+          <a:xfrm>
             <a:off x="609600" y="2819400"/>
             <a:ext cx="3905250" cy="1247775"/>
           </a:xfrm>
-          <a:prstGeom xmlns:a="http://schemas.openxmlformats.org/drawingml/2006/main" prst="rect">
+          <a:prstGeom prst="rect">
             <a:avLst/>
           </a:prstGeom>
-          <a:noFill xmlns:a="http://schemas.openxmlformats.org/drawingml/2006/main"/>
-          <a:ln xmlns:a="http://schemas.openxmlformats.org/drawingml/2006/main" w="0">
+          <a:noFill/>
+          <a:ln w="0">
             <a:noFill/>
           </a:ln>
         </p:spPr>
         <p:txBody>
-          <a:bodyPr xmlns:a="http://schemas.openxmlformats.org/drawingml/2006/main" anchor="t"/>
-          <a:lstStyle xmlns:a="http://schemas.openxmlformats.org/drawingml/2006/main">
+          <a:bodyPr anchor="t"/>
+          <a:lstStyle>
             <a:defPPr>
               <a:defRPr sz="1875" b="0">
                 <a:solidFill>
@@ -7506,7 +6696,7 @@
               </a:defRPr>
             </a:lvl9pPr>
           </a:lstStyle>
-          <a:p xmlns:a="http://schemas.openxmlformats.org/drawingml/2006/main">
+          <a:p>
             <a:pPr>
               <a:defRPr sz="1875" b="0">
                 <a:solidFill>
@@ -7529,7 +6719,7 @@
               <a:t>SDG 13: climate action</a:t>
             </a:r>
           </a:p>
-          <a:p xmlns:a="http://schemas.openxmlformats.org/drawingml/2006/main">
+          <a:p>
             <a:pPr>
               <a:defRPr sz="1875" b="0">
                 <a:solidFill>
@@ -7556,34 +6746,34 @@
       </p:sp>
       <p:sp>
         <p:nvSpPr>
-          <p:cNvPr id="4" name="">
-            <a:extLst xmlns:a="http://schemas.openxmlformats.org/drawingml/2006/main">
+          <p:cNvPr id="4" name="Rectangle 3">
+            <a:extLst>
               <a:ext uri="{FF2B5EF4-FFF2-40B4-BE49-F238E27FC236}">
                 <a16:creationId xmlns:a16="http://schemas.microsoft.com/office/drawing/2014/main" id="{A5CBE070-85EE-4ED7-A1E4-992FED5FCAFC}"/>
               </a:ext>
             </a:extLst>
           </p:cNvPr>
           <p:cNvSpPr>
-            <a:spLocks xmlns:a="http://schemas.openxmlformats.org/drawingml/2006/main" noGrp="1"/>
+            <a:spLocks noGrp="1"/>
           </p:cNvSpPr>
           <p:nvPr/>
         </p:nvSpPr>
         <p:spPr>
-          <a:xfrm xmlns:a="http://schemas.openxmlformats.org/drawingml/2006/main">
+          <a:xfrm>
             <a:off x="609600" y="4200525"/>
             <a:ext cx="3905250" cy="1247775"/>
           </a:xfrm>
-          <a:prstGeom xmlns:a="http://schemas.openxmlformats.org/drawingml/2006/main" prst="rect">
+          <a:prstGeom prst="rect">
             <a:avLst/>
           </a:prstGeom>
-          <a:noFill xmlns:a="http://schemas.openxmlformats.org/drawingml/2006/main"/>
-          <a:ln xmlns:a="http://schemas.openxmlformats.org/drawingml/2006/main" w="0">
+          <a:noFill/>
+          <a:ln w="0">
             <a:noFill/>
           </a:ln>
         </p:spPr>
         <p:txBody>
-          <a:bodyPr xmlns:a="http://schemas.openxmlformats.org/drawingml/2006/main" anchor="t"/>
-          <a:lstStyle xmlns:a="http://schemas.openxmlformats.org/drawingml/2006/main">
+          <a:bodyPr anchor="t"/>
+          <a:lstStyle>
             <a:defPPr>
               <a:defRPr sz="1875" b="0">
                 <a:solidFill>
@@ -7685,7 +6875,7 @@
               </a:defRPr>
             </a:lvl9pPr>
           </a:lstStyle>
-          <a:p xmlns:a="http://schemas.openxmlformats.org/drawingml/2006/main">
+          <a:p>
             <a:pPr>
               <a:defRPr sz="1875" b="0">
                 <a:solidFill>
@@ -7712,29 +6902,29 @@
       </p:sp>
       <p:pic>
         <p:nvPicPr>
-          <p:cNvPr id="5" name="">
-            <a:extLst xmlns:a="http://schemas.openxmlformats.org/drawingml/2006/main">
+          <p:cNvPr id="5" name="Picture 4">
+            <a:extLst>
               <a:ext uri="{FF2B5EF4-FFF2-40B4-BE49-F238E27FC236}">
                 <a16:creationId xmlns:a16="http://schemas.microsoft.com/office/drawing/2014/main" id="{7F9036E4-0F47-461B-8B97-26F78E2BDC21}"/>
               </a:ext>
             </a:extLst>
           </p:cNvPr>
           <p:cNvPicPr>
-            <a:picLocks xmlns:a="http://schemas.openxmlformats.org/drawingml/2006/main" noChangeAspect="1"/>
+            <a:picLocks noChangeAspect="1"/>
           </p:cNvPicPr>
           <p:nvPr/>
         </p:nvPicPr>
         <p:blipFill>
-          <a:blip xmlns:r="http://schemas.openxmlformats.org/officeDocument/2006/relationships" xmlns:a="http://schemas.openxmlformats.org/drawingml/2006/main" r:embed="R68510fab55084813"/>
-          <a:srcRect xmlns:a="http://schemas.openxmlformats.org/drawingml/2006/main" l="19618" t="6481" r="19618" b="6481"/>
-          <a:stretch xmlns:a="http://schemas.openxmlformats.org/drawingml/2006/main"/>
+          <a:blip r:embed="rId3"/>
+          <a:srcRect l="19618" t="6481" r="19618" b="6481"/>
+          <a:stretch/>
         </p:blipFill>
         <p:spPr>
-          <a:xfrm xmlns:a="http://schemas.openxmlformats.org/drawingml/2006/main">
+          <a:xfrm>
             <a:off x="5010150" y="1352550"/>
             <a:ext cx="6572250" cy="5286375"/>
           </a:xfrm>
-          <a:prstGeom xmlns:a="http://schemas.openxmlformats.org/drawingml/2006/main" prst="rect">
+          <a:prstGeom prst="rect">
             <a:avLst/>
           </a:prstGeom>
         </p:spPr>
@@ -7746,17 +6936,21 @@
       </p:ext>
     </p:extLst>
   </p:cSld>
+  <p:clrMapOvr>
+    <a:masterClrMapping/>
+  </p:clrMapOvr>
 </p:sld>
 </file>
 
 <file path=ppt/slides/slide6.xml><?xml version="1.0" encoding="utf-8"?>
-<p:sld xmlns:p="http://schemas.openxmlformats.org/presentationml/2006/main">
+<p:sld xmlns:a="http://schemas.openxmlformats.org/drawingml/2006/main" xmlns:r="http://schemas.openxmlformats.org/officeDocument/2006/relationships" xmlns:p="http://schemas.openxmlformats.org/presentationml/2006/main">
   <p:cSld>
     <p:bg>
       <p:bgPr>
-        <a:solidFill xmlns:a="http://schemas.openxmlformats.org/drawingml/2006/main">
+        <a:solidFill>
           <a:srgbClr val="F0E9D7"/>
         </a:solidFill>
+        <a:effectLst/>
       </p:bgPr>
     </p:bg>
     <p:spTree>
@@ -7766,38 +6960,43 @@
         <p:nvPr/>
       </p:nvGrpSpPr>
       <p:grpSpPr>
-        <a:xfrm xmlns:a="http://schemas.openxmlformats.org/drawingml/2006/main"/>
+        <a:xfrm>
+          <a:off x="0" y="0"/>
+          <a:ext cx="0" cy="0"/>
+          <a:chOff x="0" y="0"/>
+          <a:chExt cx="0" cy="0"/>
+        </a:xfrm>
       </p:grpSpPr>
       <p:sp>
         <p:nvSpPr>
-          <p:cNvPr id="10" name="">
-            <a:extLst xmlns:a="http://schemas.openxmlformats.org/drawingml/2006/main">
+          <p:cNvPr id="10" name="Rectangle 9">
+            <a:extLst>
               <a:ext uri="{FF2B5EF4-FFF2-40B4-BE49-F238E27FC236}">
                 <a16:creationId xmlns:a16="http://schemas.microsoft.com/office/drawing/2014/main" id="{FE9D33A3-4DBF-4B2C-A328-2D9F8ED39F19}"/>
               </a:ext>
             </a:extLst>
           </p:cNvPr>
           <p:cNvSpPr>
-            <a:spLocks xmlns:a="http://schemas.openxmlformats.org/drawingml/2006/main" noGrp="1"/>
+            <a:spLocks noGrp="1"/>
           </p:cNvSpPr>
           <p:nvPr/>
         </p:nvSpPr>
         <p:spPr>
-          <a:xfrm xmlns:a="http://schemas.openxmlformats.org/drawingml/2006/main">
+          <a:xfrm>
             <a:off x="609600" y="438150"/>
             <a:ext cx="10972800" cy="685800"/>
           </a:xfrm>
-          <a:prstGeom xmlns:a="http://schemas.openxmlformats.org/drawingml/2006/main" prst="rect">
+          <a:prstGeom prst="rect">
             <a:avLst/>
           </a:prstGeom>
-          <a:noFill xmlns:a="http://schemas.openxmlformats.org/drawingml/2006/main"/>
-          <a:ln xmlns:a="http://schemas.openxmlformats.org/drawingml/2006/main" w="0">
+          <a:noFill/>
+          <a:ln w="0">
             <a:noFill/>
           </a:ln>
         </p:spPr>
         <p:txBody>
-          <a:bodyPr xmlns:a="http://schemas.openxmlformats.org/drawingml/2006/main" anchor="t"/>
-          <a:lstStyle xmlns:a="http://schemas.openxmlformats.org/drawingml/2006/main">
+          <a:bodyPr anchor="t"/>
+          <a:lstStyle>
             <a:defPPr>
               <a:defRPr sz="3300" b="1">
                 <a:solidFill>
@@ -7899,7 +7098,7 @@
               </a:defRPr>
             </a:lvl9pPr>
           </a:lstStyle>
-          <a:p xmlns:a="http://schemas.openxmlformats.org/drawingml/2006/main">
+          <a:p>
             <a:pPr>
               <a:defRPr sz="3300" b="1">
                 <a:solidFill>
@@ -7926,658 +7125,34 @@
       </p:sp>
       <p:sp>
         <p:nvSpPr>
-          <p:cNvPr id="2" name="">
-            <a:extLst xmlns:a="http://schemas.openxmlformats.org/drawingml/2006/main">
-              <a:ext uri="{FF2B5EF4-FFF2-40B4-BE49-F238E27FC236}">
-                <a16:creationId xmlns:a16="http://schemas.microsoft.com/office/drawing/2014/main" id="{21DC23E0-563F-41A3-A5A3-E3BD4677941B}"/>
-              </a:ext>
-            </a:extLst>
-          </p:cNvPr>
-          <p:cNvSpPr>
-            <a:spLocks xmlns:a="http://schemas.openxmlformats.org/drawingml/2006/main" noGrp="1"/>
-          </p:cNvSpPr>
-          <p:nvPr/>
-        </p:nvSpPr>
-        <p:spPr>
-          <a:xfrm xmlns:a="http://schemas.openxmlformats.org/drawingml/2006/main">
-            <a:off x="609600" y="1438275"/>
-            <a:ext cx="4857750" cy="476250"/>
-          </a:xfrm>
-          <a:prstGeom xmlns:a="http://schemas.openxmlformats.org/drawingml/2006/main" prst="rect">
-            <a:avLst/>
-          </a:prstGeom>
-          <a:noFill xmlns:a="http://schemas.openxmlformats.org/drawingml/2006/main"/>
-          <a:ln xmlns:a="http://schemas.openxmlformats.org/drawingml/2006/main" w="0">
-            <a:noFill/>
-          </a:ln>
-        </p:spPr>
-        <p:txBody>
-          <a:bodyPr xmlns:a="http://schemas.openxmlformats.org/drawingml/2006/main" anchor="t"/>
-          <a:lstStyle xmlns:a="http://schemas.openxmlformats.org/drawingml/2006/main">
-            <a:defPPr>
-              <a:defRPr sz="2250" b="1">
-                <a:solidFill>
-                  <a:srgbClr val="342E25"/>
-                </a:solidFill>
-                <a:latin typeface="Arial"/>
-                <a:ea typeface="Arial"/>
-                <a:cs typeface="Arial"/>
-              </a:defRPr>
-            </a:defPPr>
-            <a:lvl1pPr>
-              <a:defRPr sz="2250" b="1">
-                <a:solidFill>
-                  <a:srgbClr val="342E25"/>
-                </a:solidFill>
-                <a:latin typeface="Arial"/>
-                <a:ea typeface="Arial"/>
-                <a:cs typeface="Arial"/>
-              </a:defRPr>
-            </a:lvl1pPr>
-            <a:lvl2pPr>
-              <a:defRPr sz="2250" b="1">
-                <a:solidFill>
-                  <a:srgbClr val="342E25"/>
-                </a:solidFill>
-                <a:latin typeface="Arial"/>
-                <a:ea typeface="Arial"/>
-                <a:cs typeface="Arial"/>
-              </a:defRPr>
-            </a:lvl2pPr>
-            <a:lvl3pPr>
-              <a:defRPr sz="2250" b="1">
-                <a:solidFill>
-                  <a:srgbClr val="342E25"/>
-                </a:solidFill>
-                <a:latin typeface="Arial"/>
-                <a:ea typeface="Arial"/>
-                <a:cs typeface="Arial"/>
-              </a:defRPr>
-            </a:lvl3pPr>
-            <a:lvl4pPr>
-              <a:defRPr sz="2250" b="1">
-                <a:solidFill>
-                  <a:srgbClr val="342E25"/>
-                </a:solidFill>
-                <a:latin typeface="Arial"/>
-                <a:ea typeface="Arial"/>
-                <a:cs typeface="Arial"/>
-              </a:defRPr>
-            </a:lvl4pPr>
-            <a:lvl5pPr>
-              <a:defRPr sz="2250" b="1">
-                <a:solidFill>
-                  <a:srgbClr val="342E25"/>
-                </a:solidFill>
-                <a:latin typeface="Arial"/>
-                <a:ea typeface="Arial"/>
-                <a:cs typeface="Arial"/>
-              </a:defRPr>
-            </a:lvl5pPr>
-            <a:lvl6pPr>
-              <a:defRPr sz="2250" b="1">
-                <a:solidFill>
-                  <a:srgbClr val="342E25"/>
-                </a:solidFill>
-                <a:latin typeface="Arial"/>
-                <a:ea typeface="Arial"/>
-                <a:cs typeface="Arial"/>
-              </a:defRPr>
-            </a:lvl6pPr>
-            <a:lvl7pPr>
-              <a:defRPr sz="2250" b="1">
-                <a:solidFill>
-                  <a:srgbClr val="342E25"/>
-                </a:solidFill>
-                <a:latin typeface="Arial"/>
-                <a:ea typeface="Arial"/>
-                <a:cs typeface="Arial"/>
-              </a:defRPr>
-            </a:lvl7pPr>
-            <a:lvl8pPr>
-              <a:defRPr sz="2250" b="1">
-                <a:solidFill>
-                  <a:srgbClr val="342E25"/>
-                </a:solidFill>
-                <a:latin typeface="Arial"/>
-                <a:ea typeface="Arial"/>
-                <a:cs typeface="Arial"/>
-              </a:defRPr>
-            </a:lvl8pPr>
-            <a:lvl9pPr>
-              <a:defRPr sz="2250" b="1">
-                <a:solidFill>
-                  <a:srgbClr val="342E25"/>
-                </a:solidFill>
-                <a:latin typeface="Arial"/>
-                <a:ea typeface="Arial"/>
-                <a:cs typeface="Arial"/>
-              </a:defRPr>
-            </a:lvl9pPr>
-          </a:lstStyle>
-          <a:p xmlns:a="http://schemas.openxmlformats.org/drawingml/2006/main">
-            <a:pPr>
-              <a:defRPr sz="2250" b="1">
-                <a:solidFill>
-                  <a:srgbClr val="342E25"/>
-                </a:solidFill>
-                <a:latin typeface="Arial"/>
-                <a:ea typeface="Arial"/>
-                <a:cs typeface="Arial"/>
-              </a:defRPr>
-            </a:pPr>
-            <a:r>
-              <a:rPr sz="2250" b="1">
-                <a:solidFill>
-                  <a:srgbClr val="342E25"/>
-                </a:solidFill>
-                <a:latin typeface="Arial"/>
-                <a:ea typeface="Arial"/>
-                <a:cs typeface="Arial"/>
-              </a:rPr>
-              <a:t>Current limits</a:t>
-            </a:r>
-          </a:p>
-        </p:txBody>
-      </p:sp>
-      <p:sp>
-        <p:nvSpPr>
-          <p:cNvPr id="3" name="">
-            <a:extLst xmlns:a="http://schemas.openxmlformats.org/drawingml/2006/main">
-              <a:ext uri="{FF2B5EF4-FFF2-40B4-BE49-F238E27FC236}">
-                <a16:creationId xmlns:a16="http://schemas.microsoft.com/office/drawing/2014/main" id="{A7151ECD-1641-40CE-8091-88FB31759684}"/>
-              </a:ext>
-            </a:extLst>
-          </p:cNvPr>
-          <p:cNvSpPr>
-            <a:spLocks xmlns:a="http://schemas.openxmlformats.org/drawingml/2006/main" noGrp="1"/>
-          </p:cNvSpPr>
-          <p:nvPr/>
-        </p:nvSpPr>
-        <p:spPr>
-          <a:xfrm xmlns:a="http://schemas.openxmlformats.org/drawingml/2006/main">
-            <a:off x="609600" y="2143125"/>
-            <a:ext cx="4857750" cy="933450"/>
-          </a:xfrm>
-          <a:prstGeom xmlns:a="http://schemas.openxmlformats.org/drawingml/2006/main" prst="rect">
-            <a:avLst/>
-          </a:prstGeom>
-          <a:noFill xmlns:a="http://schemas.openxmlformats.org/drawingml/2006/main"/>
-          <a:ln xmlns:a="http://schemas.openxmlformats.org/drawingml/2006/main" w="0">
-            <a:noFill/>
-          </a:ln>
-        </p:spPr>
-        <p:txBody>
-          <a:bodyPr xmlns:a="http://schemas.openxmlformats.org/drawingml/2006/main" anchor="t"/>
-          <a:lstStyle xmlns:a="http://schemas.openxmlformats.org/drawingml/2006/main">
-            <a:defPPr>
-              <a:defRPr sz="2025" b="0">
-                <a:solidFill>
-                  <a:srgbClr val="342E25"/>
-                </a:solidFill>
-                <a:latin typeface="Arial"/>
-                <a:ea typeface="Arial"/>
-                <a:cs typeface="Arial"/>
-              </a:defRPr>
-            </a:defPPr>
-            <a:lvl1pPr>
-              <a:defRPr sz="2025" b="0">
-                <a:solidFill>
-                  <a:srgbClr val="342E25"/>
-                </a:solidFill>
-                <a:latin typeface="Arial"/>
-                <a:ea typeface="Arial"/>
-                <a:cs typeface="Arial"/>
-              </a:defRPr>
-            </a:lvl1pPr>
-            <a:lvl2pPr>
-              <a:defRPr sz="2025" b="0">
-                <a:solidFill>
-                  <a:srgbClr val="342E25"/>
-                </a:solidFill>
-                <a:latin typeface="Arial"/>
-                <a:ea typeface="Arial"/>
-                <a:cs typeface="Arial"/>
-              </a:defRPr>
-            </a:lvl2pPr>
-            <a:lvl3pPr>
-              <a:defRPr sz="2025" b="0">
-                <a:solidFill>
-                  <a:srgbClr val="342E25"/>
-                </a:solidFill>
-                <a:latin typeface="Arial"/>
-                <a:ea typeface="Arial"/>
-                <a:cs typeface="Arial"/>
-              </a:defRPr>
-            </a:lvl3pPr>
-            <a:lvl4pPr>
-              <a:defRPr sz="2025" b="0">
-                <a:solidFill>
-                  <a:srgbClr val="342E25"/>
-                </a:solidFill>
-                <a:latin typeface="Arial"/>
-                <a:ea typeface="Arial"/>
-                <a:cs typeface="Arial"/>
-              </a:defRPr>
-            </a:lvl4pPr>
-            <a:lvl5pPr>
-              <a:defRPr sz="2025" b="0">
-                <a:solidFill>
-                  <a:srgbClr val="342E25"/>
-                </a:solidFill>
-                <a:latin typeface="Arial"/>
-                <a:ea typeface="Arial"/>
-                <a:cs typeface="Arial"/>
-              </a:defRPr>
-            </a:lvl5pPr>
-            <a:lvl6pPr>
-              <a:defRPr sz="2025" b="0">
-                <a:solidFill>
-                  <a:srgbClr val="342E25"/>
-                </a:solidFill>
-                <a:latin typeface="Arial"/>
-                <a:ea typeface="Arial"/>
-                <a:cs typeface="Arial"/>
-              </a:defRPr>
-            </a:lvl6pPr>
-            <a:lvl7pPr>
-              <a:defRPr sz="2025" b="0">
-                <a:solidFill>
-                  <a:srgbClr val="342E25"/>
-                </a:solidFill>
-                <a:latin typeface="Arial"/>
-                <a:ea typeface="Arial"/>
-                <a:cs typeface="Arial"/>
-              </a:defRPr>
-            </a:lvl7pPr>
-            <a:lvl8pPr>
-              <a:defRPr sz="2025" b="0">
-                <a:solidFill>
-                  <a:srgbClr val="342E25"/>
-                </a:solidFill>
-                <a:latin typeface="Arial"/>
-                <a:ea typeface="Arial"/>
-                <a:cs typeface="Arial"/>
-              </a:defRPr>
-            </a:lvl8pPr>
-            <a:lvl9pPr>
-              <a:defRPr sz="2025" b="0">
-                <a:solidFill>
-                  <a:srgbClr val="342E25"/>
-                </a:solidFill>
-                <a:latin typeface="Arial"/>
-                <a:ea typeface="Arial"/>
-                <a:cs typeface="Arial"/>
-              </a:defRPr>
-            </a:lvl9pPr>
-          </a:lstStyle>
-          <a:p xmlns:a="http://schemas.openxmlformats.org/drawingml/2006/main">
-            <a:pPr>
-              <a:defRPr sz="2025" b="0">
-                <a:solidFill>
-                  <a:srgbClr val="342E25"/>
-                </a:solidFill>
-                <a:latin typeface="Arial"/>
-                <a:ea typeface="Arial"/>
-                <a:cs typeface="Arial"/>
-              </a:defRPr>
-            </a:pPr>
-            <a:r>
-              <a:rPr sz="2025" b="0">
-                <a:solidFill>
-                  <a:srgbClr val="342E25"/>
-                </a:solidFill>
-                <a:latin typeface="Arial"/>
-                <a:ea typeface="Arial"/>
-                <a:cs typeface="Arial"/>
-              </a:rPr>
-              <a:t>One house layout and three authored cases.</a:t>
-            </a:r>
-          </a:p>
-        </p:txBody>
-      </p:sp>
-      <p:sp>
-        <p:nvSpPr>
-          <p:cNvPr id="4" name="">
-            <a:extLst xmlns:a="http://schemas.openxmlformats.org/drawingml/2006/main">
-              <a:ext uri="{FF2B5EF4-FFF2-40B4-BE49-F238E27FC236}">
-                <a16:creationId xmlns:a16="http://schemas.microsoft.com/office/drawing/2014/main" id="{3D2FE0B8-4DB9-4504-ABC8-8485B0273882}"/>
-              </a:ext>
-            </a:extLst>
-          </p:cNvPr>
-          <p:cNvSpPr>
-            <a:spLocks xmlns:a="http://schemas.openxmlformats.org/drawingml/2006/main" noGrp="1"/>
-          </p:cNvSpPr>
-          <p:nvPr/>
-        </p:nvSpPr>
-        <p:spPr>
-          <a:xfrm xmlns:a="http://schemas.openxmlformats.org/drawingml/2006/main">
-            <a:off x="609600" y="3209925"/>
-            <a:ext cx="4857750" cy="933450"/>
-          </a:xfrm>
-          <a:prstGeom xmlns:a="http://schemas.openxmlformats.org/drawingml/2006/main" prst="rect">
-            <a:avLst/>
-          </a:prstGeom>
-          <a:noFill xmlns:a="http://schemas.openxmlformats.org/drawingml/2006/main"/>
-          <a:ln xmlns:a="http://schemas.openxmlformats.org/drawingml/2006/main" w="0">
-            <a:noFill/>
-          </a:ln>
-        </p:spPr>
-        <p:txBody>
-          <a:bodyPr xmlns:a="http://schemas.openxmlformats.org/drawingml/2006/main" anchor="t"/>
-          <a:lstStyle xmlns:a="http://schemas.openxmlformats.org/drawingml/2006/main">
-            <a:defPPr>
-              <a:defRPr sz="2025" b="0">
-                <a:solidFill>
-                  <a:srgbClr val="342E25"/>
-                </a:solidFill>
-                <a:latin typeface="Arial"/>
-                <a:ea typeface="Arial"/>
-                <a:cs typeface="Arial"/>
-              </a:defRPr>
-            </a:defPPr>
-            <a:lvl1pPr>
-              <a:defRPr sz="2025" b="0">
-                <a:solidFill>
-                  <a:srgbClr val="342E25"/>
-                </a:solidFill>
-                <a:latin typeface="Arial"/>
-                <a:ea typeface="Arial"/>
-                <a:cs typeface="Arial"/>
-              </a:defRPr>
-            </a:lvl1pPr>
-            <a:lvl2pPr>
-              <a:defRPr sz="2025" b="0">
-                <a:solidFill>
-                  <a:srgbClr val="342E25"/>
-                </a:solidFill>
-                <a:latin typeface="Arial"/>
-                <a:ea typeface="Arial"/>
-                <a:cs typeface="Arial"/>
-              </a:defRPr>
-            </a:lvl2pPr>
-            <a:lvl3pPr>
-              <a:defRPr sz="2025" b="0">
-                <a:solidFill>
-                  <a:srgbClr val="342E25"/>
-                </a:solidFill>
-                <a:latin typeface="Arial"/>
-                <a:ea typeface="Arial"/>
-                <a:cs typeface="Arial"/>
-              </a:defRPr>
-            </a:lvl3pPr>
-            <a:lvl4pPr>
-              <a:defRPr sz="2025" b="0">
-                <a:solidFill>
-                  <a:srgbClr val="342E25"/>
-                </a:solidFill>
-                <a:latin typeface="Arial"/>
-                <a:ea typeface="Arial"/>
-                <a:cs typeface="Arial"/>
-              </a:defRPr>
-            </a:lvl4pPr>
-            <a:lvl5pPr>
-              <a:defRPr sz="2025" b="0">
-                <a:solidFill>
-                  <a:srgbClr val="342E25"/>
-                </a:solidFill>
-                <a:latin typeface="Arial"/>
-                <a:ea typeface="Arial"/>
-                <a:cs typeface="Arial"/>
-              </a:defRPr>
-            </a:lvl5pPr>
-            <a:lvl6pPr>
-              <a:defRPr sz="2025" b="0">
-                <a:solidFill>
-                  <a:srgbClr val="342E25"/>
-                </a:solidFill>
-                <a:latin typeface="Arial"/>
-                <a:ea typeface="Arial"/>
-                <a:cs typeface="Arial"/>
-              </a:defRPr>
-            </a:lvl6pPr>
-            <a:lvl7pPr>
-              <a:defRPr sz="2025" b="0">
-                <a:solidFill>
-                  <a:srgbClr val="342E25"/>
-                </a:solidFill>
-                <a:latin typeface="Arial"/>
-                <a:ea typeface="Arial"/>
-                <a:cs typeface="Arial"/>
-              </a:defRPr>
-            </a:lvl7pPr>
-            <a:lvl8pPr>
-              <a:defRPr sz="2025" b="0">
-                <a:solidFill>
-                  <a:srgbClr val="342E25"/>
-                </a:solidFill>
-                <a:latin typeface="Arial"/>
-                <a:ea typeface="Arial"/>
-                <a:cs typeface="Arial"/>
-              </a:defRPr>
-            </a:lvl8pPr>
-            <a:lvl9pPr>
-              <a:defRPr sz="2025" b="0">
-                <a:solidFill>
-                  <a:srgbClr val="342E25"/>
-                </a:solidFill>
-                <a:latin typeface="Arial"/>
-                <a:ea typeface="Arial"/>
-                <a:cs typeface="Arial"/>
-              </a:defRPr>
-            </a:lvl9pPr>
-          </a:lstStyle>
-          <a:p xmlns:a="http://schemas.openxmlformats.org/drawingml/2006/main">
-            <a:pPr>
-              <a:defRPr sz="2025" b="0">
-                <a:solidFill>
-                  <a:srgbClr val="342E25"/>
-                </a:solidFill>
-                <a:latin typeface="Arial"/>
-                <a:ea typeface="Arial"/>
-                <a:cs typeface="Arial"/>
-              </a:defRPr>
-            </a:pPr>
-            <a:r>
-              <a:rPr sz="2025" b="0">
-                <a:solidFill>
-                  <a:srgbClr val="342E25"/>
-                </a:solidFill>
-                <a:latin typeface="Arial"/>
-                <a:ea typeface="Arial"/>
-                <a:cs typeface="Arial"/>
-              </a:rPr>
-              <a:t>Basic appliance feedback and a small evidence set.</a:t>
-            </a:r>
-          </a:p>
-        </p:txBody>
-      </p:sp>
-      <p:sp>
-        <p:nvSpPr>
-          <p:cNvPr id="5" name="">
-            <a:extLst xmlns:a="http://schemas.openxmlformats.org/drawingml/2006/main">
-              <a:ext uri="{FF2B5EF4-FFF2-40B4-BE49-F238E27FC236}">
-                <a16:creationId xmlns:a16="http://schemas.microsoft.com/office/drawing/2014/main" id="{C3C4ABAF-9451-4C58-B4E4-C6DE7010C6F8}"/>
-              </a:ext>
-            </a:extLst>
-          </p:cNvPr>
-          <p:cNvSpPr>
-            <a:spLocks xmlns:a="http://schemas.openxmlformats.org/drawingml/2006/main" noGrp="1"/>
-          </p:cNvSpPr>
-          <p:nvPr/>
-        </p:nvSpPr>
-        <p:spPr>
-          <a:xfrm xmlns:a="http://schemas.openxmlformats.org/drawingml/2006/main">
-            <a:off x="609600" y="4276725"/>
-            <a:ext cx="4857750" cy="933450"/>
-          </a:xfrm>
-          <a:prstGeom xmlns:a="http://schemas.openxmlformats.org/drawingml/2006/main" prst="rect">
-            <a:avLst/>
-          </a:prstGeom>
-          <a:noFill xmlns:a="http://schemas.openxmlformats.org/drawingml/2006/main"/>
-          <a:ln xmlns:a="http://schemas.openxmlformats.org/drawingml/2006/main" w="0">
-            <a:noFill/>
-          </a:ln>
-        </p:spPr>
-        <p:txBody>
-          <a:bodyPr xmlns:a="http://schemas.openxmlformats.org/drawingml/2006/main" anchor="t"/>
-          <a:lstStyle xmlns:a="http://schemas.openxmlformats.org/drawingml/2006/main">
-            <a:defPPr>
-              <a:defRPr sz="2025" b="0">
-                <a:solidFill>
-                  <a:srgbClr val="342E25"/>
-                </a:solidFill>
-                <a:latin typeface="Arial"/>
-                <a:ea typeface="Arial"/>
-                <a:cs typeface="Arial"/>
-              </a:defRPr>
-            </a:defPPr>
-            <a:lvl1pPr>
-              <a:defRPr sz="2025" b="0">
-                <a:solidFill>
-                  <a:srgbClr val="342E25"/>
-                </a:solidFill>
-                <a:latin typeface="Arial"/>
-                <a:ea typeface="Arial"/>
-                <a:cs typeface="Arial"/>
-              </a:defRPr>
-            </a:lvl1pPr>
-            <a:lvl2pPr>
-              <a:defRPr sz="2025" b="0">
-                <a:solidFill>
-                  <a:srgbClr val="342E25"/>
-                </a:solidFill>
-                <a:latin typeface="Arial"/>
-                <a:ea typeface="Arial"/>
-                <a:cs typeface="Arial"/>
-              </a:defRPr>
-            </a:lvl2pPr>
-            <a:lvl3pPr>
-              <a:defRPr sz="2025" b="0">
-                <a:solidFill>
-                  <a:srgbClr val="342E25"/>
-                </a:solidFill>
-                <a:latin typeface="Arial"/>
-                <a:ea typeface="Arial"/>
-                <a:cs typeface="Arial"/>
-              </a:defRPr>
-            </a:lvl3pPr>
-            <a:lvl4pPr>
-              <a:defRPr sz="2025" b="0">
-                <a:solidFill>
-                  <a:srgbClr val="342E25"/>
-                </a:solidFill>
-                <a:latin typeface="Arial"/>
-                <a:ea typeface="Arial"/>
-                <a:cs typeface="Arial"/>
-              </a:defRPr>
-            </a:lvl4pPr>
-            <a:lvl5pPr>
-              <a:defRPr sz="2025" b="0">
-                <a:solidFill>
-                  <a:srgbClr val="342E25"/>
-                </a:solidFill>
-                <a:latin typeface="Arial"/>
-                <a:ea typeface="Arial"/>
-                <a:cs typeface="Arial"/>
-              </a:defRPr>
-            </a:lvl5pPr>
-            <a:lvl6pPr>
-              <a:defRPr sz="2025" b="0">
-                <a:solidFill>
-                  <a:srgbClr val="342E25"/>
-                </a:solidFill>
-                <a:latin typeface="Arial"/>
-                <a:ea typeface="Arial"/>
-                <a:cs typeface="Arial"/>
-              </a:defRPr>
-            </a:lvl6pPr>
-            <a:lvl7pPr>
-              <a:defRPr sz="2025" b="0">
-                <a:solidFill>
-                  <a:srgbClr val="342E25"/>
-                </a:solidFill>
-                <a:latin typeface="Arial"/>
-                <a:ea typeface="Arial"/>
-                <a:cs typeface="Arial"/>
-              </a:defRPr>
-            </a:lvl7pPr>
-            <a:lvl8pPr>
-              <a:defRPr sz="2025" b="0">
-                <a:solidFill>
-                  <a:srgbClr val="342E25"/>
-                </a:solidFill>
-                <a:latin typeface="Arial"/>
-                <a:ea typeface="Arial"/>
-                <a:cs typeface="Arial"/>
-              </a:defRPr>
-            </a:lvl8pPr>
-            <a:lvl9pPr>
-              <a:defRPr sz="2025" b="0">
-                <a:solidFill>
-                  <a:srgbClr val="342E25"/>
-                </a:solidFill>
-                <a:latin typeface="Arial"/>
-                <a:ea typeface="Arial"/>
-                <a:cs typeface="Arial"/>
-              </a:defRPr>
-            </a:lvl9pPr>
-          </a:lstStyle>
-          <a:p xmlns:a="http://schemas.openxmlformats.org/drawingml/2006/main">
-            <a:pPr>
-              <a:defRPr sz="2025" b="0">
-                <a:solidFill>
-                  <a:srgbClr val="342E25"/>
-                </a:solidFill>
-                <a:latin typeface="Arial"/>
-                <a:ea typeface="Arial"/>
-                <a:cs typeface="Arial"/>
-              </a:defRPr>
-            </a:pPr>
-            <a:r>
-              <a:rPr sz="2025" b="0">
-                <a:solidFill>
-                  <a:srgbClr val="342E25"/>
-                </a:solidFill>
-                <a:latin typeface="Arial"/>
-                <a:ea typeface="Arial"/>
-                <a:cs typeface="Arial"/>
-              </a:rPr>
-              <a:t>No saved progression between sessions.</a:t>
-            </a:r>
-          </a:p>
-        </p:txBody>
-      </p:sp>
-      <p:sp>
-        <p:nvSpPr>
-          <p:cNvPr id="6" name="">
-            <a:extLst xmlns:a="http://schemas.openxmlformats.org/drawingml/2006/main">
+          <p:cNvPr id="6" name="Rectangle 5">
+            <a:extLst>
               <a:ext uri="{FF2B5EF4-FFF2-40B4-BE49-F238E27FC236}">
                 <a16:creationId xmlns:a16="http://schemas.microsoft.com/office/drawing/2014/main" id="{3BD8C399-07D1-45F4-8273-9AD28A1C11CB}"/>
               </a:ext>
             </a:extLst>
           </p:cNvPr>
           <p:cNvSpPr>
-            <a:spLocks xmlns:a="http://schemas.openxmlformats.org/drawingml/2006/main" noGrp="1"/>
+            <a:spLocks noGrp="1"/>
           </p:cNvSpPr>
           <p:nvPr/>
         </p:nvSpPr>
         <p:spPr>
-          <a:xfrm xmlns:a="http://schemas.openxmlformats.org/drawingml/2006/main">
-            <a:off x="6477000" y="1438275"/>
+          <a:xfrm>
+            <a:off x="609600" y="1495940"/>
             <a:ext cx="5048250" cy="476250"/>
           </a:xfrm>
-          <a:prstGeom xmlns:a="http://schemas.openxmlformats.org/drawingml/2006/main" prst="rect">
+          <a:prstGeom prst="rect">
             <a:avLst/>
           </a:prstGeom>
-          <a:noFill xmlns:a="http://schemas.openxmlformats.org/drawingml/2006/main"/>
-          <a:ln xmlns:a="http://schemas.openxmlformats.org/drawingml/2006/main" w="0">
+          <a:noFill/>
+          <a:ln w="0">
             <a:noFill/>
           </a:ln>
         </p:spPr>
         <p:txBody>
-          <a:bodyPr xmlns:a="http://schemas.openxmlformats.org/drawingml/2006/main" anchor="t"/>
-          <a:lstStyle xmlns:a="http://schemas.openxmlformats.org/drawingml/2006/main">
+          <a:bodyPr anchor="t"/>
+          <a:lstStyle>
             <a:defPPr>
               <a:defRPr sz="2250" b="1">
                 <a:solidFill>
@@ -8679,7 +7254,7 @@
               </a:defRPr>
             </a:lvl9pPr>
           </a:lstStyle>
-          <a:p xmlns:a="http://schemas.openxmlformats.org/drawingml/2006/main">
+          <a:p>
             <a:pPr>
               <a:defRPr sz="2250" b="1">
                 <a:solidFill>
@@ -8691,7 +7266,7 @@
               </a:defRPr>
             </a:pPr>
             <a:r>
-              <a:rPr sz="2250" b="1">
+              <a:rPr sz="2250" b="1" dirty="0">
                 <a:solidFill>
                   <a:srgbClr val="342E25"/>
                 </a:solidFill>
@@ -8706,190 +7281,34 @@
       </p:sp>
       <p:sp>
         <p:nvSpPr>
-          <p:cNvPr id="7" name="">
-            <a:extLst xmlns:a="http://schemas.openxmlformats.org/drawingml/2006/main">
-              <a:ext uri="{FF2B5EF4-FFF2-40B4-BE49-F238E27FC236}">
-                <a16:creationId xmlns:a16="http://schemas.microsoft.com/office/drawing/2014/main" id="{E039CAB7-D609-4B48-A894-A9802066B2B1}"/>
-              </a:ext>
-            </a:extLst>
-          </p:cNvPr>
-          <p:cNvSpPr>
-            <a:spLocks xmlns:a="http://schemas.openxmlformats.org/drawingml/2006/main" noGrp="1"/>
-          </p:cNvSpPr>
-          <p:nvPr/>
-        </p:nvSpPr>
-        <p:spPr>
-          <a:xfrm xmlns:a="http://schemas.openxmlformats.org/drawingml/2006/main">
-            <a:off x="6477000" y="2143125"/>
-            <a:ext cx="5048250" cy="1057275"/>
-          </a:xfrm>
-          <a:prstGeom xmlns:a="http://schemas.openxmlformats.org/drawingml/2006/main" prst="rect">
-            <a:avLst/>
-          </a:prstGeom>
-          <a:noFill xmlns:a="http://schemas.openxmlformats.org/drawingml/2006/main"/>
-          <a:ln xmlns:a="http://schemas.openxmlformats.org/drawingml/2006/main" w="0">
-            <a:noFill/>
-          </a:ln>
-        </p:spPr>
-        <p:txBody>
-          <a:bodyPr xmlns:a="http://schemas.openxmlformats.org/drawingml/2006/main" anchor="t"/>
-          <a:lstStyle xmlns:a="http://schemas.openxmlformats.org/drawingml/2006/main">
-            <a:defPPr>
-              <a:defRPr sz="2025" b="0">
-                <a:solidFill>
-                  <a:srgbClr val="342E25"/>
-                </a:solidFill>
-                <a:latin typeface="Arial"/>
-                <a:ea typeface="Arial"/>
-                <a:cs typeface="Arial"/>
-              </a:defRPr>
-            </a:defPPr>
-            <a:lvl1pPr>
-              <a:defRPr sz="2025" b="0">
-                <a:solidFill>
-                  <a:srgbClr val="342E25"/>
-                </a:solidFill>
-                <a:latin typeface="Arial"/>
-                <a:ea typeface="Arial"/>
-                <a:cs typeface="Arial"/>
-              </a:defRPr>
-            </a:lvl1pPr>
-            <a:lvl2pPr>
-              <a:defRPr sz="2025" b="0">
-                <a:solidFill>
-                  <a:srgbClr val="342E25"/>
-                </a:solidFill>
-                <a:latin typeface="Arial"/>
-                <a:ea typeface="Arial"/>
-                <a:cs typeface="Arial"/>
-              </a:defRPr>
-            </a:lvl2pPr>
-            <a:lvl3pPr>
-              <a:defRPr sz="2025" b="0">
-                <a:solidFill>
-                  <a:srgbClr val="342E25"/>
-                </a:solidFill>
-                <a:latin typeface="Arial"/>
-                <a:ea typeface="Arial"/>
-                <a:cs typeface="Arial"/>
-              </a:defRPr>
-            </a:lvl3pPr>
-            <a:lvl4pPr>
-              <a:defRPr sz="2025" b="0">
-                <a:solidFill>
-                  <a:srgbClr val="342E25"/>
-                </a:solidFill>
-                <a:latin typeface="Arial"/>
-                <a:ea typeface="Arial"/>
-                <a:cs typeface="Arial"/>
-              </a:defRPr>
-            </a:lvl4pPr>
-            <a:lvl5pPr>
-              <a:defRPr sz="2025" b="0">
-                <a:solidFill>
-                  <a:srgbClr val="342E25"/>
-                </a:solidFill>
-                <a:latin typeface="Arial"/>
-                <a:ea typeface="Arial"/>
-                <a:cs typeface="Arial"/>
-              </a:defRPr>
-            </a:lvl5pPr>
-            <a:lvl6pPr>
-              <a:defRPr sz="2025" b="0">
-                <a:solidFill>
-                  <a:srgbClr val="342E25"/>
-                </a:solidFill>
-                <a:latin typeface="Arial"/>
-                <a:ea typeface="Arial"/>
-                <a:cs typeface="Arial"/>
-              </a:defRPr>
-            </a:lvl6pPr>
-            <a:lvl7pPr>
-              <a:defRPr sz="2025" b="0">
-                <a:solidFill>
-                  <a:srgbClr val="342E25"/>
-                </a:solidFill>
-                <a:latin typeface="Arial"/>
-                <a:ea typeface="Arial"/>
-                <a:cs typeface="Arial"/>
-              </a:defRPr>
-            </a:lvl7pPr>
-            <a:lvl8pPr>
-              <a:defRPr sz="2025" b="0">
-                <a:solidFill>
-                  <a:srgbClr val="342E25"/>
-                </a:solidFill>
-                <a:latin typeface="Arial"/>
-                <a:ea typeface="Arial"/>
-                <a:cs typeface="Arial"/>
-              </a:defRPr>
-            </a:lvl8pPr>
-            <a:lvl9pPr>
-              <a:defRPr sz="2025" b="0">
-                <a:solidFill>
-                  <a:srgbClr val="342E25"/>
-                </a:solidFill>
-                <a:latin typeface="Arial"/>
-                <a:ea typeface="Arial"/>
-                <a:cs typeface="Arial"/>
-              </a:defRPr>
-            </a:lvl9pPr>
-          </a:lstStyle>
-          <a:p xmlns:a="http://schemas.openxmlformats.org/drawingml/2006/main">
-            <a:pPr>
-              <a:defRPr sz="2025" b="0">
-                <a:solidFill>
-                  <a:srgbClr val="342E25"/>
-                </a:solidFill>
-                <a:latin typeface="Arial"/>
-                <a:ea typeface="Arial"/>
-                <a:cs typeface="Arial"/>
-              </a:defRPr>
-            </a:pPr>
-            <a:r>
-              <a:rPr sz="2025" b="0">
-                <a:solidFill>
-                  <a:srgbClr val="342E25"/>
-                </a:solidFill>
-                <a:latin typeface="Arial"/>
-                <a:ea typeface="Arial"/>
-                <a:cs typeface="Arial"/>
-              </a:rPr>
-              <a:t>Playtest the clues and inspection budget, then tune difficulty.</a:t>
-            </a:r>
-          </a:p>
-        </p:txBody>
-      </p:sp>
-      <p:sp>
-        <p:nvSpPr>
-          <p:cNvPr id="8" name="">
-            <a:extLst xmlns:a="http://schemas.openxmlformats.org/drawingml/2006/main">
+          <p:cNvPr id="8" name="Rectangle 7">
+            <a:extLst>
               <a:ext uri="{FF2B5EF4-FFF2-40B4-BE49-F238E27FC236}">
                 <a16:creationId xmlns:a16="http://schemas.microsoft.com/office/drawing/2014/main" id="{62940D55-036B-4350-A697-0C6E9F610008}"/>
               </a:ext>
             </a:extLst>
           </p:cNvPr>
           <p:cNvSpPr>
-            <a:spLocks xmlns:a="http://schemas.openxmlformats.org/drawingml/2006/main" noGrp="1"/>
+            <a:spLocks noGrp="1"/>
           </p:cNvSpPr>
           <p:nvPr/>
         </p:nvSpPr>
         <p:spPr>
-          <a:xfrm xmlns:a="http://schemas.openxmlformats.org/drawingml/2006/main">
-            <a:off x="6477000" y="3333750"/>
+          <a:xfrm>
+            <a:off x="609600" y="2362715"/>
             <a:ext cx="5048250" cy="1057275"/>
           </a:xfrm>
-          <a:prstGeom xmlns:a="http://schemas.openxmlformats.org/drawingml/2006/main" prst="rect">
+          <a:prstGeom prst="rect">
             <a:avLst/>
           </a:prstGeom>
-          <a:noFill xmlns:a="http://schemas.openxmlformats.org/drawingml/2006/main"/>
-          <a:ln xmlns:a="http://schemas.openxmlformats.org/drawingml/2006/main" w="0">
+          <a:noFill/>
+          <a:ln w="0">
             <a:noFill/>
           </a:ln>
         </p:spPr>
         <p:txBody>
-          <a:bodyPr xmlns:a="http://schemas.openxmlformats.org/drawingml/2006/main" anchor="t"/>
-          <a:lstStyle xmlns:a="http://schemas.openxmlformats.org/drawingml/2006/main">
+          <a:bodyPr anchor="t"/>
+          <a:lstStyle>
             <a:defPPr>
               <a:defRPr sz="2025" b="0">
                 <a:solidFill>
@@ -8991,7 +7410,7 @@
               </a:defRPr>
             </a:lvl9pPr>
           </a:lstStyle>
-          <a:p xmlns:a="http://schemas.openxmlformats.org/drawingml/2006/main">
+          <a:p>
             <a:pPr>
               <a:defRPr sz="2025" b="0">
                 <a:solidFill>
@@ -9003,7 +7422,7 @@
               </a:defRPr>
             </a:pPr>
             <a:r>
-              <a:rPr sz="2025" b="0">
+              <a:rPr sz="2025" b="0" dirty="0">
                 <a:solidFill>
                   <a:srgbClr val="342E25"/>
                 </a:solidFill>
@@ -9018,34 +7437,34 @@
       </p:sp>
       <p:sp>
         <p:nvSpPr>
-          <p:cNvPr id="9" name="">
-            <a:extLst xmlns:a="http://schemas.openxmlformats.org/drawingml/2006/main">
+          <p:cNvPr id="9" name="Rectangle 8">
+            <a:extLst>
               <a:ext uri="{FF2B5EF4-FFF2-40B4-BE49-F238E27FC236}">
                 <a16:creationId xmlns:a16="http://schemas.microsoft.com/office/drawing/2014/main" id="{9CAC2DAF-B868-443A-9BE1-212BB7004004}"/>
               </a:ext>
             </a:extLst>
           </p:cNvPr>
           <p:cNvSpPr>
-            <a:spLocks xmlns:a="http://schemas.openxmlformats.org/drawingml/2006/main" noGrp="1"/>
+            <a:spLocks noGrp="1"/>
           </p:cNvSpPr>
           <p:nvPr/>
         </p:nvSpPr>
         <p:spPr>
-          <a:xfrm xmlns:a="http://schemas.openxmlformats.org/drawingml/2006/main">
-            <a:off x="6477000" y="4524375"/>
+          <a:xfrm>
+            <a:off x="609600" y="3429000"/>
             <a:ext cx="5048250" cy="1057275"/>
           </a:xfrm>
-          <a:prstGeom xmlns:a="http://schemas.openxmlformats.org/drawingml/2006/main" prst="rect">
+          <a:prstGeom prst="rect">
             <a:avLst/>
           </a:prstGeom>
-          <a:noFill xmlns:a="http://schemas.openxmlformats.org/drawingml/2006/main"/>
-          <a:ln xmlns:a="http://schemas.openxmlformats.org/drawingml/2006/main" w="0">
+          <a:noFill/>
+          <a:ln w="0">
             <a:noFill/>
           </a:ln>
         </p:spPr>
         <p:txBody>
-          <a:bodyPr xmlns:a="http://schemas.openxmlformats.org/drawingml/2006/main" anchor="t"/>
-          <a:lstStyle xmlns:a="http://schemas.openxmlformats.org/drawingml/2006/main">
+          <a:bodyPr anchor="t"/>
+          <a:lstStyle>
             <a:defPPr>
               <a:defRPr sz="2025" b="0">
                 <a:solidFill>
@@ -9147,7 +7566,7 @@
               </a:defRPr>
             </a:lvl9pPr>
           </a:lstStyle>
-          <a:p xmlns:a="http://schemas.openxmlformats.org/drawingml/2006/main">
+          <a:p>
             <a:pPr>
               <a:defRPr sz="2025" b="0">
                 <a:solidFill>
@@ -9159,7 +7578,7 @@
               </a:defRPr>
             </a:pPr>
             <a:r>
-              <a:rPr sz="2025" b="0">
+              <a:rPr sz="2025" b="0" dirty="0">
                 <a:solidFill>
                   <a:srgbClr val="342E25"/>
                 </a:solidFill>
@@ -9169,6 +7588,170 @@
               </a:rPr>
               <a:t>Show clearer changes after a fix and add saved case progress.</a:t>
             </a:r>
+          </a:p>
+        </p:txBody>
+      </p:sp>
+      <p:sp>
+        <p:nvSpPr>
+          <p:cNvPr id="12" name="Rectangle 11">
+            <a:extLst>
+              <a:ext uri="{FF2B5EF4-FFF2-40B4-BE49-F238E27FC236}">
+                <a16:creationId xmlns:a16="http://schemas.microsoft.com/office/drawing/2014/main" id="{532EFA12-BC4F-7C84-38A5-41B69ECA3D2B}"/>
+              </a:ext>
+            </a:extLst>
+          </p:cNvPr>
+          <p:cNvSpPr>
+            <a:spLocks noGrp="1"/>
+          </p:cNvSpPr>
+          <p:nvPr/>
+        </p:nvSpPr>
+        <p:spPr>
+          <a:xfrm>
+            <a:off x="609600" y="4495285"/>
+            <a:ext cx="5048250" cy="1057275"/>
+          </a:xfrm>
+          <a:prstGeom prst="rect">
+            <a:avLst/>
+          </a:prstGeom>
+          <a:noFill/>
+          <a:ln w="0">
+            <a:noFill/>
+          </a:ln>
+        </p:spPr>
+        <p:txBody>
+          <a:bodyPr anchor="t"/>
+          <a:lstStyle>
+            <a:defPPr>
+              <a:defRPr sz="2025" b="0">
+                <a:solidFill>
+                  <a:srgbClr val="342E25"/>
+                </a:solidFill>
+                <a:latin typeface="Arial"/>
+                <a:ea typeface="Arial"/>
+                <a:cs typeface="Arial"/>
+              </a:defRPr>
+            </a:defPPr>
+            <a:lvl1pPr>
+              <a:defRPr sz="2025" b="0">
+                <a:solidFill>
+                  <a:srgbClr val="342E25"/>
+                </a:solidFill>
+                <a:latin typeface="Arial"/>
+                <a:ea typeface="Arial"/>
+                <a:cs typeface="Arial"/>
+              </a:defRPr>
+            </a:lvl1pPr>
+            <a:lvl2pPr>
+              <a:defRPr sz="2025" b="0">
+                <a:solidFill>
+                  <a:srgbClr val="342E25"/>
+                </a:solidFill>
+                <a:latin typeface="Arial"/>
+                <a:ea typeface="Arial"/>
+                <a:cs typeface="Arial"/>
+              </a:defRPr>
+            </a:lvl2pPr>
+            <a:lvl3pPr>
+              <a:defRPr sz="2025" b="0">
+                <a:solidFill>
+                  <a:srgbClr val="342E25"/>
+                </a:solidFill>
+                <a:latin typeface="Arial"/>
+                <a:ea typeface="Arial"/>
+                <a:cs typeface="Arial"/>
+              </a:defRPr>
+            </a:lvl3pPr>
+            <a:lvl4pPr>
+              <a:defRPr sz="2025" b="0">
+                <a:solidFill>
+                  <a:srgbClr val="342E25"/>
+                </a:solidFill>
+                <a:latin typeface="Arial"/>
+                <a:ea typeface="Arial"/>
+                <a:cs typeface="Arial"/>
+              </a:defRPr>
+            </a:lvl4pPr>
+            <a:lvl5pPr>
+              <a:defRPr sz="2025" b="0">
+                <a:solidFill>
+                  <a:srgbClr val="342E25"/>
+                </a:solidFill>
+                <a:latin typeface="Arial"/>
+                <a:ea typeface="Arial"/>
+                <a:cs typeface="Arial"/>
+              </a:defRPr>
+            </a:lvl5pPr>
+            <a:lvl6pPr>
+              <a:defRPr sz="2025" b="0">
+                <a:solidFill>
+                  <a:srgbClr val="342E25"/>
+                </a:solidFill>
+                <a:latin typeface="Arial"/>
+                <a:ea typeface="Arial"/>
+                <a:cs typeface="Arial"/>
+              </a:defRPr>
+            </a:lvl6pPr>
+            <a:lvl7pPr>
+              <a:defRPr sz="2025" b="0">
+                <a:solidFill>
+                  <a:srgbClr val="342E25"/>
+                </a:solidFill>
+                <a:latin typeface="Arial"/>
+                <a:ea typeface="Arial"/>
+                <a:cs typeface="Arial"/>
+              </a:defRPr>
+            </a:lvl7pPr>
+            <a:lvl8pPr>
+              <a:defRPr sz="2025" b="0">
+                <a:solidFill>
+                  <a:srgbClr val="342E25"/>
+                </a:solidFill>
+                <a:latin typeface="Arial"/>
+                <a:ea typeface="Arial"/>
+                <a:cs typeface="Arial"/>
+              </a:defRPr>
+            </a:lvl8pPr>
+            <a:lvl9pPr>
+              <a:defRPr sz="2025" b="0">
+                <a:solidFill>
+                  <a:srgbClr val="342E25"/>
+                </a:solidFill>
+                <a:latin typeface="Arial"/>
+                <a:ea typeface="Arial"/>
+                <a:cs typeface="Arial"/>
+              </a:defRPr>
+            </a:lvl9pPr>
+          </a:lstStyle>
+          <a:p>
+            <a:pPr>
+              <a:defRPr sz="2025" b="0">
+                <a:solidFill>
+                  <a:srgbClr val="342E25"/>
+                </a:solidFill>
+                <a:latin typeface="Arial"/>
+                <a:ea typeface="Arial"/>
+                <a:cs typeface="Arial"/>
+              </a:defRPr>
+            </a:pPr>
+            <a:r>
+              <a:rPr lang="en-US" sz="2025" b="0" dirty="0">
+                <a:solidFill>
+                  <a:srgbClr val="342E25"/>
+                </a:solidFill>
+                <a:latin typeface="Arial"/>
+                <a:ea typeface="Arial"/>
+                <a:cs typeface="Arial"/>
+              </a:rPr>
+              <a:t>UI improvements</a:t>
+            </a:r>
+            <a:endParaRPr sz="2025" b="0" dirty="0">
+              <a:solidFill>
+                <a:srgbClr val="342E25"/>
+              </a:solidFill>
+              <a:latin typeface="Arial"/>
+              <a:ea typeface="Arial"/>
+              <a:cs typeface="Arial"/>
+            </a:endParaRPr>
           </a:p>
         </p:txBody>
       </p:sp>
@@ -9179,17 +7762,21 @@
       </p:ext>
     </p:extLst>
   </p:cSld>
+  <p:clrMapOvr>
+    <a:masterClrMapping/>
+  </p:clrMapOvr>
 </p:sld>
 </file>
 
 <file path=ppt/slides/slide7.xml><?xml version="1.0" encoding="utf-8"?>
-<p:sld xmlns:p="http://schemas.openxmlformats.org/presentationml/2006/main">
+<p:sld xmlns:a="http://schemas.openxmlformats.org/drawingml/2006/main" xmlns:r="http://schemas.openxmlformats.org/officeDocument/2006/relationships" xmlns:p="http://schemas.openxmlformats.org/presentationml/2006/main">
   <p:cSld>
     <p:bg>
       <p:bgPr>
-        <a:solidFill xmlns:a="http://schemas.openxmlformats.org/drawingml/2006/main">
+        <a:solidFill>
           <a:srgbClr val="F0E9D7"/>
         </a:solidFill>
+        <a:effectLst/>
       </p:bgPr>
     </p:bg>
     <p:spTree>
@@ -9199,38 +7786,43 @@
         <p:nvPr/>
       </p:nvGrpSpPr>
       <p:grpSpPr>
-        <a:xfrm xmlns:a="http://schemas.openxmlformats.org/drawingml/2006/main"/>
+        <a:xfrm>
+          <a:off x="0" y="0"/>
+          <a:ext cx="0" cy="0"/>
+          <a:chOff x="0" y="0"/>
+          <a:chExt cx="0" cy="0"/>
+        </a:xfrm>
       </p:grpSpPr>
       <p:sp>
         <p:nvSpPr>
-          <p:cNvPr id="11" name="">
-            <a:extLst xmlns:a="http://schemas.openxmlformats.org/drawingml/2006/main">
+          <p:cNvPr id="11" name="Rectangle 10">
+            <a:extLst>
               <a:ext uri="{FF2B5EF4-FFF2-40B4-BE49-F238E27FC236}">
                 <a16:creationId xmlns:a16="http://schemas.microsoft.com/office/drawing/2014/main" id="{D1AC9840-3941-4A26-B746-DCB29DC4B41A}"/>
               </a:ext>
             </a:extLst>
           </p:cNvPr>
           <p:cNvSpPr>
-            <a:spLocks xmlns:a="http://schemas.openxmlformats.org/drawingml/2006/main" noGrp="1"/>
+            <a:spLocks noGrp="1"/>
           </p:cNvSpPr>
           <p:nvPr/>
         </p:nvSpPr>
         <p:spPr>
-          <a:xfrm xmlns:a="http://schemas.openxmlformats.org/drawingml/2006/main">
+          <a:xfrm>
             <a:off x="609600" y="438150"/>
             <a:ext cx="10972800" cy="685800"/>
           </a:xfrm>
-          <a:prstGeom xmlns:a="http://schemas.openxmlformats.org/drawingml/2006/main" prst="rect">
+          <a:prstGeom prst="rect">
             <a:avLst/>
           </a:prstGeom>
-          <a:noFill xmlns:a="http://schemas.openxmlformats.org/drawingml/2006/main"/>
-          <a:ln xmlns:a="http://schemas.openxmlformats.org/drawingml/2006/main" w="0">
+          <a:noFill/>
+          <a:ln w="0">
             <a:noFill/>
           </a:ln>
         </p:spPr>
         <p:txBody>
-          <a:bodyPr xmlns:a="http://schemas.openxmlformats.org/drawingml/2006/main" anchor="t"/>
-          <a:lstStyle xmlns:a="http://schemas.openxmlformats.org/drawingml/2006/main">
+          <a:bodyPr anchor="t"/>
+          <a:lstStyle>
             <a:defPPr>
               <a:defRPr sz="3300" b="1">
                 <a:solidFill>
@@ -9332,7 +7924,7 @@
               </a:defRPr>
             </a:lvl9pPr>
           </a:lstStyle>
-          <a:p xmlns:a="http://schemas.openxmlformats.org/drawingml/2006/main">
+          <a:p>
             <a:pPr>
               <a:defRPr sz="3300" b="1">
                 <a:solidFill>
@@ -9344,7 +7936,7 @@
               </a:defRPr>
             </a:pPr>
             <a:r>
-              <a:rPr sz="3300" b="1">
+              <a:rPr sz="3300" b="1" dirty="0">
                 <a:solidFill>
                   <a:srgbClr val="342E25"/>
                 </a:solidFill>
@@ -9352,665 +7944,41 @@
                 <a:ea typeface="Arial"/>
                 <a:cs typeface="Arial"/>
               </a:rPr>
-              <a:t>Developer contribution and AI usage</a:t>
+              <a:t>AI usage</a:t>
             </a:r>
           </a:p>
         </p:txBody>
       </p:sp>
       <p:sp>
         <p:nvSpPr>
-          <p:cNvPr id="2" name="">
-            <a:extLst xmlns:a="http://schemas.openxmlformats.org/drawingml/2006/main">
-              <a:ext uri="{FF2B5EF4-FFF2-40B4-BE49-F238E27FC236}">
-                <a16:creationId xmlns:a16="http://schemas.microsoft.com/office/drawing/2014/main" id="{6F05D278-8B37-4CD5-A7C6-AC80A874365E}"/>
-              </a:ext>
-            </a:extLst>
-          </p:cNvPr>
-          <p:cNvSpPr>
-            <a:spLocks xmlns:a="http://schemas.openxmlformats.org/drawingml/2006/main" noGrp="1"/>
-          </p:cNvSpPr>
-          <p:nvPr/>
-        </p:nvSpPr>
-        <p:spPr>
-          <a:xfrm xmlns:a="http://schemas.openxmlformats.org/drawingml/2006/main">
-            <a:off x="609600" y="1438275"/>
-            <a:ext cx="5048250" cy="476250"/>
-          </a:xfrm>
-          <a:prstGeom xmlns:a="http://schemas.openxmlformats.org/drawingml/2006/main" prst="rect">
-            <a:avLst/>
-          </a:prstGeom>
-          <a:noFill xmlns:a="http://schemas.openxmlformats.org/drawingml/2006/main"/>
-          <a:ln xmlns:a="http://schemas.openxmlformats.org/drawingml/2006/main" w="0">
-            <a:noFill/>
-          </a:ln>
-        </p:spPr>
-        <p:txBody>
-          <a:bodyPr xmlns:a="http://schemas.openxmlformats.org/drawingml/2006/main" anchor="t"/>
-          <a:lstStyle xmlns:a="http://schemas.openxmlformats.org/drawingml/2006/main">
-            <a:defPPr>
-              <a:defRPr sz="2250" b="1">
-                <a:solidFill>
-                  <a:srgbClr val="342E25"/>
-                </a:solidFill>
-                <a:latin typeface="Arial"/>
-                <a:ea typeface="Arial"/>
-                <a:cs typeface="Arial"/>
-              </a:defRPr>
-            </a:defPPr>
-            <a:lvl1pPr>
-              <a:defRPr sz="2250" b="1">
-                <a:solidFill>
-                  <a:srgbClr val="342E25"/>
-                </a:solidFill>
-                <a:latin typeface="Arial"/>
-                <a:ea typeface="Arial"/>
-                <a:cs typeface="Arial"/>
-              </a:defRPr>
-            </a:lvl1pPr>
-            <a:lvl2pPr>
-              <a:defRPr sz="2250" b="1">
-                <a:solidFill>
-                  <a:srgbClr val="342E25"/>
-                </a:solidFill>
-                <a:latin typeface="Arial"/>
-                <a:ea typeface="Arial"/>
-                <a:cs typeface="Arial"/>
-              </a:defRPr>
-            </a:lvl2pPr>
-            <a:lvl3pPr>
-              <a:defRPr sz="2250" b="1">
-                <a:solidFill>
-                  <a:srgbClr val="342E25"/>
-                </a:solidFill>
-                <a:latin typeface="Arial"/>
-                <a:ea typeface="Arial"/>
-                <a:cs typeface="Arial"/>
-              </a:defRPr>
-            </a:lvl3pPr>
-            <a:lvl4pPr>
-              <a:defRPr sz="2250" b="1">
-                <a:solidFill>
-                  <a:srgbClr val="342E25"/>
-                </a:solidFill>
-                <a:latin typeface="Arial"/>
-                <a:ea typeface="Arial"/>
-                <a:cs typeface="Arial"/>
-              </a:defRPr>
-            </a:lvl4pPr>
-            <a:lvl5pPr>
-              <a:defRPr sz="2250" b="1">
-                <a:solidFill>
-                  <a:srgbClr val="342E25"/>
-                </a:solidFill>
-                <a:latin typeface="Arial"/>
-                <a:ea typeface="Arial"/>
-                <a:cs typeface="Arial"/>
-              </a:defRPr>
-            </a:lvl5pPr>
-            <a:lvl6pPr>
-              <a:defRPr sz="2250" b="1">
-                <a:solidFill>
-                  <a:srgbClr val="342E25"/>
-                </a:solidFill>
-                <a:latin typeface="Arial"/>
-                <a:ea typeface="Arial"/>
-                <a:cs typeface="Arial"/>
-              </a:defRPr>
-            </a:lvl6pPr>
-            <a:lvl7pPr>
-              <a:defRPr sz="2250" b="1">
-                <a:solidFill>
-                  <a:srgbClr val="342E25"/>
-                </a:solidFill>
-                <a:latin typeface="Arial"/>
-                <a:ea typeface="Arial"/>
-                <a:cs typeface="Arial"/>
-              </a:defRPr>
-            </a:lvl7pPr>
-            <a:lvl8pPr>
-              <a:defRPr sz="2250" b="1">
-                <a:solidFill>
-                  <a:srgbClr val="342E25"/>
-                </a:solidFill>
-                <a:latin typeface="Arial"/>
-                <a:ea typeface="Arial"/>
-                <a:cs typeface="Arial"/>
-              </a:defRPr>
-            </a:lvl8pPr>
-            <a:lvl9pPr>
-              <a:defRPr sz="2250" b="1">
-                <a:solidFill>
-                  <a:srgbClr val="342E25"/>
-                </a:solidFill>
-                <a:latin typeface="Arial"/>
-                <a:ea typeface="Arial"/>
-                <a:cs typeface="Arial"/>
-              </a:defRPr>
-            </a:lvl9pPr>
-          </a:lstStyle>
-          <a:p xmlns:a="http://schemas.openxmlformats.org/drawingml/2006/main">
-            <a:pPr>
-              <a:defRPr sz="2250" b="1">
-                <a:solidFill>
-                  <a:srgbClr val="342E25"/>
-                </a:solidFill>
-                <a:latin typeface="Arial"/>
-                <a:ea typeface="Arial"/>
-                <a:cs typeface="Arial"/>
-              </a:defRPr>
-            </a:pPr>
-            <a:r>
-              <a:rPr sz="2250" b="1">
-                <a:solidFill>
-                  <a:srgbClr val="342E25"/>
-                </a:solidFill>
-                <a:latin typeface="Arial"/>
-                <a:ea typeface="Arial"/>
-                <a:cs typeface="Arial"/>
-              </a:rPr>
-              <a:t>Rolands Leja</a:t>
-            </a:r>
-          </a:p>
-        </p:txBody>
-      </p:sp>
-      <p:sp>
-        <p:nvSpPr>
-          <p:cNvPr id="3" name="">
-            <a:extLst xmlns:a="http://schemas.openxmlformats.org/drawingml/2006/main">
-              <a:ext uri="{FF2B5EF4-FFF2-40B4-BE49-F238E27FC236}">
-                <a16:creationId xmlns:a16="http://schemas.microsoft.com/office/drawing/2014/main" id="{2184BBFA-B5DC-4F17-94CE-5C1E5A02EB5B}"/>
-              </a:ext>
-            </a:extLst>
-          </p:cNvPr>
-          <p:cNvSpPr>
-            <a:spLocks xmlns:a="http://schemas.openxmlformats.org/drawingml/2006/main" noGrp="1"/>
-          </p:cNvSpPr>
-          <p:nvPr/>
-        </p:nvSpPr>
-        <p:spPr>
-          <a:xfrm xmlns:a="http://schemas.openxmlformats.org/drawingml/2006/main">
-            <a:off x="609600" y="2143125"/>
-            <a:ext cx="4857750" cy="923925"/>
-          </a:xfrm>
-          <a:prstGeom xmlns:a="http://schemas.openxmlformats.org/drawingml/2006/main" prst="rect">
-            <a:avLst/>
-          </a:prstGeom>
-          <a:noFill xmlns:a="http://schemas.openxmlformats.org/drawingml/2006/main"/>
-          <a:ln xmlns:a="http://schemas.openxmlformats.org/drawingml/2006/main" w="0">
-            <a:noFill/>
-          </a:ln>
-        </p:spPr>
-        <p:txBody>
-          <a:bodyPr xmlns:a="http://schemas.openxmlformats.org/drawingml/2006/main" anchor="t"/>
-          <a:lstStyle xmlns:a="http://schemas.openxmlformats.org/drawingml/2006/main">
-            <a:defPPr>
-              <a:defRPr sz="1950" b="0">
-                <a:solidFill>
-                  <a:srgbClr val="342E25"/>
-                </a:solidFill>
-                <a:latin typeface="Arial"/>
-                <a:ea typeface="Arial"/>
-                <a:cs typeface="Arial"/>
-              </a:defRPr>
-            </a:defPPr>
-            <a:lvl1pPr>
-              <a:defRPr sz="1950" b="0">
-                <a:solidFill>
-                  <a:srgbClr val="342E25"/>
-                </a:solidFill>
-                <a:latin typeface="Arial"/>
-                <a:ea typeface="Arial"/>
-                <a:cs typeface="Arial"/>
-              </a:defRPr>
-            </a:lvl1pPr>
-            <a:lvl2pPr>
-              <a:defRPr sz="1950" b="0">
-                <a:solidFill>
-                  <a:srgbClr val="342E25"/>
-                </a:solidFill>
-                <a:latin typeface="Arial"/>
-                <a:ea typeface="Arial"/>
-                <a:cs typeface="Arial"/>
-              </a:defRPr>
-            </a:lvl2pPr>
-            <a:lvl3pPr>
-              <a:defRPr sz="1950" b="0">
-                <a:solidFill>
-                  <a:srgbClr val="342E25"/>
-                </a:solidFill>
-                <a:latin typeface="Arial"/>
-                <a:ea typeface="Arial"/>
-                <a:cs typeface="Arial"/>
-              </a:defRPr>
-            </a:lvl3pPr>
-            <a:lvl4pPr>
-              <a:defRPr sz="1950" b="0">
-                <a:solidFill>
-                  <a:srgbClr val="342E25"/>
-                </a:solidFill>
-                <a:latin typeface="Arial"/>
-                <a:ea typeface="Arial"/>
-                <a:cs typeface="Arial"/>
-              </a:defRPr>
-            </a:lvl4pPr>
-            <a:lvl5pPr>
-              <a:defRPr sz="1950" b="0">
-                <a:solidFill>
-                  <a:srgbClr val="342E25"/>
-                </a:solidFill>
-                <a:latin typeface="Arial"/>
-                <a:ea typeface="Arial"/>
-                <a:cs typeface="Arial"/>
-              </a:defRPr>
-            </a:lvl5pPr>
-            <a:lvl6pPr>
-              <a:defRPr sz="1950" b="0">
-                <a:solidFill>
-                  <a:srgbClr val="342E25"/>
-                </a:solidFill>
-                <a:latin typeface="Arial"/>
-                <a:ea typeface="Arial"/>
-                <a:cs typeface="Arial"/>
-              </a:defRPr>
-            </a:lvl6pPr>
-            <a:lvl7pPr>
-              <a:defRPr sz="1950" b="0">
-                <a:solidFill>
-                  <a:srgbClr val="342E25"/>
-                </a:solidFill>
-                <a:latin typeface="Arial"/>
-                <a:ea typeface="Arial"/>
-                <a:cs typeface="Arial"/>
-              </a:defRPr>
-            </a:lvl7pPr>
-            <a:lvl8pPr>
-              <a:defRPr sz="1950" b="0">
-                <a:solidFill>
-                  <a:srgbClr val="342E25"/>
-                </a:solidFill>
-                <a:latin typeface="Arial"/>
-                <a:ea typeface="Arial"/>
-                <a:cs typeface="Arial"/>
-              </a:defRPr>
-            </a:lvl8pPr>
-            <a:lvl9pPr>
-              <a:defRPr sz="1950" b="0">
-                <a:solidFill>
-                  <a:srgbClr val="342E25"/>
-                </a:solidFill>
-                <a:latin typeface="Arial"/>
-                <a:ea typeface="Arial"/>
-                <a:cs typeface="Arial"/>
-              </a:defRPr>
-            </a:lvl9pPr>
-          </a:lstStyle>
-          <a:p xmlns:a="http://schemas.openxmlformats.org/drawingml/2006/main">
-            <a:pPr>
-              <a:defRPr sz="1950" b="0">
-                <a:solidFill>
-                  <a:srgbClr val="342E25"/>
-                </a:solidFill>
-                <a:latin typeface="Arial"/>
-                <a:ea typeface="Arial"/>
-                <a:cs typeface="Arial"/>
-              </a:defRPr>
-            </a:pPr>
-            <a:r>
-              <a:rPr sz="1950" b="0">
-                <a:solidFill>
-                  <a:srgbClr val="342E25"/>
-                </a:solidFill>
-                <a:latin typeface="Arial"/>
-                <a:ea typeface="Arial"/>
-                <a:cs typeface="Arial"/>
-              </a:rPr>
-              <a:t>Game concept and social good focus.</a:t>
-            </a:r>
-          </a:p>
-        </p:txBody>
-      </p:sp>
-      <p:sp>
-        <p:nvSpPr>
-          <p:cNvPr id="4" name="">
-            <a:extLst xmlns:a="http://schemas.openxmlformats.org/drawingml/2006/main">
-              <a:ext uri="{FF2B5EF4-FFF2-40B4-BE49-F238E27FC236}">
-                <a16:creationId xmlns:a16="http://schemas.microsoft.com/office/drawing/2014/main" id="{47130F15-3C91-4CB6-A4C4-19E7791213DC}"/>
-              </a:ext>
-            </a:extLst>
-          </p:cNvPr>
-          <p:cNvSpPr>
-            <a:spLocks xmlns:a="http://schemas.openxmlformats.org/drawingml/2006/main" noGrp="1"/>
-          </p:cNvSpPr>
-          <p:nvPr/>
-        </p:nvSpPr>
-        <p:spPr>
-          <a:xfrm xmlns:a="http://schemas.openxmlformats.org/drawingml/2006/main">
-            <a:off x="609600" y="3200400"/>
-            <a:ext cx="4857750" cy="923925"/>
-          </a:xfrm>
-          <a:prstGeom xmlns:a="http://schemas.openxmlformats.org/drawingml/2006/main" prst="rect">
-            <a:avLst/>
-          </a:prstGeom>
-          <a:noFill xmlns:a="http://schemas.openxmlformats.org/drawingml/2006/main"/>
-          <a:ln xmlns:a="http://schemas.openxmlformats.org/drawingml/2006/main" w="0">
-            <a:noFill/>
-          </a:ln>
-        </p:spPr>
-        <p:txBody>
-          <a:bodyPr xmlns:a="http://schemas.openxmlformats.org/drawingml/2006/main" anchor="t"/>
-          <a:lstStyle xmlns:a="http://schemas.openxmlformats.org/drawingml/2006/main">
-            <a:defPPr>
-              <a:defRPr sz="1950" b="0">
-                <a:solidFill>
-                  <a:srgbClr val="342E25"/>
-                </a:solidFill>
-                <a:latin typeface="Arial"/>
-                <a:ea typeface="Arial"/>
-                <a:cs typeface="Arial"/>
-              </a:defRPr>
-            </a:defPPr>
-            <a:lvl1pPr>
-              <a:defRPr sz="1950" b="0">
-                <a:solidFill>
-                  <a:srgbClr val="342E25"/>
-                </a:solidFill>
-                <a:latin typeface="Arial"/>
-                <a:ea typeface="Arial"/>
-                <a:cs typeface="Arial"/>
-              </a:defRPr>
-            </a:lvl1pPr>
-            <a:lvl2pPr>
-              <a:defRPr sz="1950" b="0">
-                <a:solidFill>
-                  <a:srgbClr val="342E25"/>
-                </a:solidFill>
-                <a:latin typeface="Arial"/>
-                <a:ea typeface="Arial"/>
-                <a:cs typeface="Arial"/>
-              </a:defRPr>
-            </a:lvl2pPr>
-            <a:lvl3pPr>
-              <a:defRPr sz="1950" b="0">
-                <a:solidFill>
-                  <a:srgbClr val="342E25"/>
-                </a:solidFill>
-                <a:latin typeface="Arial"/>
-                <a:ea typeface="Arial"/>
-                <a:cs typeface="Arial"/>
-              </a:defRPr>
-            </a:lvl3pPr>
-            <a:lvl4pPr>
-              <a:defRPr sz="1950" b="0">
-                <a:solidFill>
-                  <a:srgbClr val="342E25"/>
-                </a:solidFill>
-                <a:latin typeface="Arial"/>
-                <a:ea typeface="Arial"/>
-                <a:cs typeface="Arial"/>
-              </a:defRPr>
-            </a:lvl4pPr>
-            <a:lvl5pPr>
-              <a:defRPr sz="1950" b="0">
-                <a:solidFill>
-                  <a:srgbClr val="342E25"/>
-                </a:solidFill>
-                <a:latin typeface="Arial"/>
-                <a:ea typeface="Arial"/>
-                <a:cs typeface="Arial"/>
-              </a:defRPr>
-            </a:lvl5pPr>
-            <a:lvl6pPr>
-              <a:defRPr sz="1950" b="0">
-                <a:solidFill>
-                  <a:srgbClr val="342E25"/>
-                </a:solidFill>
-                <a:latin typeface="Arial"/>
-                <a:ea typeface="Arial"/>
-                <a:cs typeface="Arial"/>
-              </a:defRPr>
-            </a:lvl6pPr>
-            <a:lvl7pPr>
-              <a:defRPr sz="1950" b="0">
-                <a:solidFill>
-                  <a:srgbClr val="342E25"/>
-                </a:solidFill>
-                <a:latin typeface="Arial"/>
-                <a:ea typeface="Arial"/>
-                <a:cs typeface="Arial"/>
-              </a:defRPr>
-            </a:lvl7pPr>
-            <a:lvl8pPr>
-              <a:defRPr sz="1950" b="0">
-                <a:solidFill>
-                  <a:srgbClr val="342E25"/>
-                </a:solidFill>
-                <a:latin typeface="Arial"/>
-                <a:ea typeface="Arial"/>
-                <a:cs typeface="Arial"/>
-              </a:defRPr>
-            </a:lvl8pPr>
-            <a:lvl9pPr>
-              <a:defRPr sz="1950" b="0">
-                <a:solidFill>
-                  <a:srgbClr val="342E25"/>
-                </a:solidFill>
-                <a:latin typeface="Arial"/>
-                <a:ea typeface="Arial"/>
-                <a:cs typeface="Arial"/>
-              </a:defRPr>
-            </a:lvl9pPr>
-          </a:lstStyle>
-          <a:p xmlns:a="http://schemas.openxmlformats.org/drawingml/2006/main">
-            <a:pPr>
-              <a:defRPr sz="1950" b="0">
-                <a:solidFill>
-                  <a:srgbClr val="342E25"/>
-                </a:solidFill>
-                <a:latin typeface="Arial"/>
-                <a:ea typeface="Arial"/>
-                <a:cs typeface="Arial"/>
-              </a:defRPr>
-            </a:pPr>
-            <a:r>
-              <a:rPr sz="1950" b="0">
-                <a:solidFill>
-                  <a:srgbClr val="342E25"/>
-                </a:solidFill>
-                <a:latin typeface="Arial"/>
-                <a:ea typeface="Arial"/>
-                <a:cs typeface="Arial"/>
-              </a:rPr>
-              <a:t>Design decisions, scene editing, asset placement and playtesting.</a:t>
-            </a:r>
-          </a:p>
-        </p:txBody>
-      </p:sp>
-      <p:sp>
-        <p:nvSpPr>
-          <p:cNvPr id="5" name="">
-            <a:extLst xmlns:a="http://schemas.openxmlformats.org/drawingml/2006/main">
-              <a:ext uri="{FF2B5EF4-FFF2-40B4-BE49-F238E27FC236}">
-                <a16:creationId xmlns:a16="http://schemas.microsoft.com/office/drawing/2014/main" id="{502ED3A6-52DD-4D74-A21F-3AA8E556B613}"/>
-              </a:ext>
-            </a:extLst>
-          </p:cNvPr>
-          <p:cNvSpPr>
-            <a:spLocks xmlns:a="http://schemas.openxmlformats.org/drawingml/2006/main" noGrp="1"/>
-          </p:cNvSpPr>
-          <p:nvPr/>
-        </p:nvSpPr>
-        <p:spPr>
-          <a:xfrm xmlns:a="http://schemas.openxmlformats.org/drawingml/2006/main">
-            <a:off x="609600" y="4257675"/>
-            <a:ext cx="4857750" cy="923925"/>
-          </a:xfrm>
-          <a:prstGeom xmlns:a="http://schemas.openxmlformats.org/drawingml/2006/main" prst="rect">
-            <a:avLst/>
-          </a:prstGeom>
-          <a:noFill xmlns:a="http://schemas.openxmlformats.org/drawingml/2006/main"/>
-          <a:ln xmlns:a="http://schemas.openxmlformats.org/drawingml/2006/main" w="0">
-            <a:noFill/>
-          </a:ln>
-        </p:spPr>
-        <p:txBody>
-          <a:bodyPr xmlns:a="http://schemas.openxmlformats.org/drawingml/2006/main" anchor="t"/>
-          <a:lstStyle xmlns:a="http://schemas.openxmlformats.org/drawingml/2006/main">
-            <a:defPPr>
-              <a:defRPr sz="1950" b="0">
-                <a:solidFill>
-                  <a:srgbClr val="342E25"/>
-                </a:solidFill>
-                <a:latin typeface="Arial"/>
-                <a:ea typeface="Arial"/>
-                <a:cs typeface="Arial"/>
-              </a:defRPr>
-            </a:defPPr>
-            <a:lvl1pPr>
-              <a:defRPr sz="1950" b="0">
-                <a:solidFill>
-                  <a:srgbClr val="342E25"/>
-                </a:solidFill>
-                <a:latin typeface="Arial"/>
-                <a:ea typeface="Arial"/>
-                <a:cs typeface="Arial"/>
-              </a:defRPr>
-            </a:lvl1pPr>
-            <a:lvl2pPr>
-              <a:defRPr sz="1950" b="0">
-                <a:solidFill>
-                  <a:srgbClr val="342E25"/>
-                </a:solidFill>
-                <a:latin typeface="Arial"/>
-                <a:ea typeface="Arial"/>
-                <a:cs typeface="Arial"/>
-              </a:defRPr>
-            </a:lvl2pPr>
-            <a:lvl3pPr>
-              <a:defRPr sz="1950" b="0">
-                <a:solidFill>
-                  <a:srgbClr val="342E25"/>
-                </a:solidFill>
-                <a:latin typeface="Arial"/>
-                <a:ea typeface="Arial"/>
-                <a:cs typeface="Arial"/>
-              </a:defRPr>
-            </a:lvl3pPr>
-            <a:lvl4pPr>
-              <a:defRPr sz="1950" b="0">
-                <a:solidFill>
-                  <a:srgbClr val="342E25"/>
-                </a:solidFill>
-                <a:latin typeface="Arial"/>
-                <a:ea typeface="Arial"/>
-                <a:cs typeface="Arial"/>
-              </a:defRPr>
-            </a:lvl4pPr>
-            <a:lvl5pPr>
-              <a:defRPr sz="1950" b="0">
-                <a:solidFill>
-                  <a:srgbClr val="342E25"/>
-                </a:solidFill>
-                <a:latin typeface="Arial"/>
-                <a:ea typeface="Arial"/>
-                <a:cs typeface="Arial"/>
-              </a:defRPr>
-            </a:lvl5pPr>
-            <a:lvl6pPr>
-              <a:defRPr sz="1950" b="0">
-                <a:solidFill>
-                  <a:srgbClr val="342E25"/>
-                </a:solidFill>
-                <a:latin typeface="Arial"/>
-                <a:ea typeface="Arial"/>
-                <a:cs typeface="Arial"/>
-              </a:defRPr>
-            </a:lvl6pPr>
-            <a:lvl7pPr>
-              <a:defRPr sz="1950" b="0">
-                <a:solidFill>
-                  <a:srgbClr val="342E25"/>
-                </a:solidFill>
-                <a:latin typeface="Arial"/>
-                <a:ea typeface="Arial"/>
-                <a:cs typeface="Arial"/>
-              </a:defRPr>
-            </a:lvl7pPr>
-            <a:lvl8pPr>
-              <a:defRPr sz="1950" b="0">
-                <a:solidFill>
-                  <a:srgbClr val="342E25"/>
-                </a:solidFill>
-                <a:latin typeface="Arial"/>
-                <a:ea typeface="Arial"/>
-                <a:cs typeface="Arial"/>
-              </a:defRPr>
-            </a:lvl8pPr>
-            <a:lvl9pPr>
-              <a:defRPr sz="1950" b="0">
-                <a:solidFill>
-                  <a:srgbClr val="342E25"/>
-                </a:solidFill>
-                <a:latin typeface="Arial"/>
-                <a:ea typeface="Arial"/>
-                <a:cs typeface="Arial"/>
-              </a:defRPr>
-            </a:lvl9pPr>
-          </a:lstStyle>
-          <a:p xmlns:a="http://schemas.openxmlformats.org/drawingml/2006/main">
-            <a:pPr>
-              <a:defRPr sz="1950" b="0">
-                <a:solidFill>
-                  <a:srgbClr val="342E25"/>
-                </a:solidFill>
-                <a:latin typeface="Arial"/>
-                <a:ea typeface="Arial"/>
-                <a:cs typeface="Arial"/>
-              </a:defRPr>
-            </a:pPr>
-            <a:r>
-              <a:rPr sz="1950" b="0">
-                <a:solidFill>
-                  <a:srgbClr val="342E25"/>
-                </a:solidFill>
-                <a:latin typeface="Arial"/>
-                <a:ea typeface="Arial"/>
-                <a:cs typeface="Arial"/>
-              </a:rPr>
-              <a:t>Solo project. No group responsibilities to divide.</a:t>
-            </a:r>
-          </a:p>
-        </p:txBody>
-      </p:sp>
-      <p:sp>
-        <p:nvSpPr>
-          <p:cNvPr id="6" name="">
-            <a:extLst xmlns:a="http://schemas.openxmlformats.org/drawingml/2006/main">
+          <p:cNvPr id="6" name="Rectangle 5">
+            <a:extLst>
               <a:ext uri="{FF2B5EF4-FFF2-40B4-BE49-F238E27FC236}">
                 <a16:creationId xmlns:a16="http://schemas.microsoft.com/office/drawing/2014/main" id="{7F7890FD-F66E-4F3F-BCC5-D89BDB1273AD}"/>
               </a:ext>
             </a:extLst>
           </p:cNvPr>
           <p:cNvSpPr>
-            <a:spLocks xmlns:a="http://schemas.openxmlformats.org/drawingml/2006/main" noGrp="1"/>
+            <a:spLocks noGrp="1"/>
           </p:cNvSpPr>
           <p:nvPr/>
         </p:nvSpPr>
         <p:spPr>
-          <a:xfrm xmlns:a="http://schemas.openxmlformats.org/drawingml/2006/main">
-            <a:off x="6477000" y="1438275"/>
+          <a:xfrm>
+            <a:off x="661100" y="1438275"/>
             <a:ext cx="5048250" cy="476250"/>
           </a:xfrm>
-          <a:prstGeom xmlns:a="http://schemas.openxmlformats.org/drawingml/2006/main" prst="rect">
+          <a:prstGeom prst="rect">
             <a:avLst/>
           </a:prstGeom>
-          <a:noFill xmlns:a="http://schemas.openxmlformats.org/drawingml/2006/main"/>
-          <a:ln xmlns:a="http://schemas.openxmlformats.org/drawingml/2006/main" w="0">
+          <a:noFill/>
+          <a:ln w="0">
             <a:noFill/>
           </a:ln>
         </p:spPr>
         <p:txBody>
-          <a:bodyPr xmlns:a="http://schemas.openxmlformats.org/drawingml/2006/main" anchor="t"/>
-          <a:lstStyle xmlns:a="http://schemas.openxmlformats.org/drawingml/2006/main">
+          <a:bodyPr anchor="t"/>
+          <a:lstStyle>
             <a:defPPr>
               <a:defRPr sz="2250" b="1">
                 <a:solidFill>
@@ -10112,7 +8080,7 @@
               </a:defRPr>
             </a:lvl9pPr>
           </a:lstStyle>
-          <a:p xmlns:a="http://schemas.openxmlformats.org/drawingml/2006/main">
+          <a:p>
             <a:pPr>
               <a:defRPr sz="2250" b="1">
                 <a:solidFill>
@@ -10139,34 +8107,34 @@
       </p:sp>
       <p:sp>
         <p:nvSpPr>
-          <p:cNvPr id="7" name="">
-            <a:extLst xmlns:a="http://schemas.openxmlformats.org/drawingml/2006/main">
+          <p:cNvPr id="7" name="Rectangle 6">
+            <a:extLst>
               <a:ext uri="{FF2B5EF4-FFF2-40B4-BE49-F238E27FC236}">
                 <a16:creationId xmlns:a16="http://schemas.microsoft.com/office/drawing/2014/main" id="{8C4C6A8F-BD4C-45CC-873B-24AB0E86C556}"/>
               </a:ext>
             </a:extLst>
           </p:cNvPr>
           <p:cNvSpPr>
-            <a:spLocks xmlns:a="http://schemas.openxmlformats.org/drawingml/2006/main" noGrp="1"/>
+            <a:spLocks noGrp="1"/>
           </p:cNvSpPr>
           <p:nvPr/>
         </p:nvSpPr>
         <p:spPr>
-          <a:xfrm xmlns:a="http://schemas.openxmlformats.org/drawingml/2006/main">
-            <a:off x="6477000" y="2143125"/>
-            <a:ext cx="5048250" cy="923925"/>
+          <a:xfrm>
+            <a:off x="661100" y="2143125"/>
+            <a:ext cx="6860046" cy="923925"/>
           </a:xfrm>
-          <a:prstGeom xmlns:a="http://schemas.openxmlformats.org/drawingml/2006/main" prst="rect">
+          <a:prstGeom prst="rect">
             <a:avLst/>
           </a:prstGeom>
-          <a:noFill xmlns:a="http://schemas.openxmlformats.org/drawingml/2006/main"/>
-          <a:ln xmlns:a="http://schemas.openxmlformats.org/drawingml/2006/main" w="0">
+          <a:noFill/>
+          <a:ln w="0">
             <a:noFill/>
           </a:ln>
         </p:spPr>
         <p:txBody>
-          <a:bodyPr xmlns:a="http://schemas.openxmlformats.org/drawingml/2006/main" anchor="t"/>
-          <a:lstStyle xmlns:a="http://schemas.openxmlformats.org/drawingml/2006/main">
+          <a:bodyPr anchor="t"/>
+          <a:lstStyle>
             <a:defPPr>
               <a:defRPr sz="1950" b="0">
                 <a:solidFill>
@@ -10268,7 +8236,7 @@
               </a:defRPr>
             </a:lvl9pPr>
           </a:lstStyle>
-          <a:p xmlns:a="http://schemas.openxmlformats.org/drawingml/2006/main">
+          <a:p>
             <a:pPr>
               <a:defRPr sz="1950" b="0">
                 <a:solidFill>
@@ -10280,49 +8248,50 @@
               </a:defRPr>
             </a:pPr>
             <a:r>
-              <a:rPr sz="1950" b="0">
-                <a:solidFill>
-                  <a:srgbClr val="342E25"/>
-                </a:solidFill>
-                <a:latin typeface="Arial"/>
-                <a:ea typeface="Arial"/>
-                <a:cs typeface="Arial"/>
-              </a:rPr>
-              <a:t>Assisted with C# implementation, debugging and script cleanup.</a:t>
+              <a:rPr lang="en-US" dirty="0"/>
+              <a:t>Assisted with C# scripting, debugging, and code refactoring</a:t>
             </a:r>
+            <a:endParaRPr sz="1950" b="0" dirty="0">
+              <a:solidFill>
+                <a:srgbClr val="342E25"/>
+              </a:solidFill>
+              <a:latin typeface="Arial"/>
+              <a:ea typeface="Arial"/>
+              <a:cs typeface="Arial"/>
+            </a:endParaRPr>
           </a:p>
         </p:txBody>
       </p:sp>
       <p:sp>
         <p:nvSpPr>
-          <p:cNvPr id="8" name="">
-            <a:extLst xmlns:a="http://schemas.openxmlformats.org/drawingml/2006/main">
+          <p:cNvPr id="8" name="Rectangle 7">
+            <a:extLst>
               <a:ext uri="{FF2B5EF4-FFF2-40B4-BE49-F238E27FC236}">
                 <a16:creationId xmlns:a16="http://schemas.microsoft.com/office/drawing/2014/main" id="{D8775DE6-0B0E-4EA0-B7AC-0B2FAEF28CA3}"/>
               </a:ext>
             </a:extLst>
           </p:cNvPr>
           <p:cNvSpPr>
-            <a:spLocks xmlns:a="http://schemas.openxmlformats.org/drawingml/2006/main" noGrp="1"/>
+            <a:spLocks noGrp="1"/>
           </p:cNvSpPr>
           <p:nvPr/>
         </p:nvSpPr>
         <p:spPr>
-          <a:xfrm xmlns:a="http://schemas.openxmlformats.org/drawingml/2006/main">
-            <a:off x="6477000" y="3200400"/>
-            <a:ext cx="5048250" cy="923925"/>
+          <a:xfrm>
+            <a:off x="661099" y="3200400"/>
+            <a:ext cx="6522295" cy="923925"/>
           </a:xfrm>
-          <a:prstGeom xmlns:a="http://schemas.openxmlformats.org/drawingml/2006/main" prst="rect">
+          <a:prstGeom prst="rect">
             <a:avLst/>
           </a:prstGeom>
-          <a:noFill xmlns:a="http://schemas.openxmlformats.org/drawingml/2006/main"/>
-          <a:ln xmlns:a="http://schemas.openxmlformats.org/drawingml/2006/main" w="0">
+          <a:noFill/>
+          <a:ln w="0">
             <a:noFill/>
           </a:ln>
         </p:spPr>
         <p:txBody>
-          <a:bodyPr xmlns:a="http://schemas.openxmlformats.org/drawingml/2006/main" anchor="t"/>
-          <a:lstStyle xmlns:a="http://schemas.openxmlformats.org/drawingml/2006/main">
+          <a:bodyPr anchor="t"/>
+          <a:lstStyle>
             <a:defPPr>
               <a:defRPr sz="1950" b="0">
                 <a:solidFill>
@@ -10424,7 +8393,7 @@
               </a:defRPr>
             </a:lvl9pPr>
           </a:lstStyle>
-          <a:p xmlns:a="http://schemas.openxmlformats.org/drawingml/2006/main">
+          <a:p>
             <a:pPr>
               <a:defRPr sz="1950" b="0">
                 <a:solidFill>
@@ -10436,49 +8405,50 @@
               </a:defRPr>
             </a:pPr>
             <a:r>
-              <a:rPr sz="1950" b="0">
-                <a:solidFill>
-                  <a:srgbClr val="342E25"/>
-                </a:solidFill>
-                <a:latin typeface="Arial"/>
-                <a:ea typeface="Arial"/>
-                <a:cs typeface="Arial"/>
-              </a:rPr>
-              <a:t>Helped write JSON cases, device clues and UI text.</a:t>
+              <a:rPr lang="en-US" dirty="0"/>
+              <a:t>Generated scenarios, device clues, and case data.</a:t>
             </a:r>
+            <a:endParaRPr sz="1950" b="0" dirty="0">
+              <a:solidFill>
+                <a:srgbClr val="342E25"/>
+              </a:solidFill>
+              <a:latin typeface="Arial"/>
+              <a:ea typeface="Arial"/>
+              <a:cs typeface="Arial"/>
+            </a:endParaRPr>
           </a:p>
         </p:txBody>
       </p:sp>
       <p:sp>
         <p:nvSpPr>
-          <p:cNvPr id="9" name="">
-            <a:extLst xmlns:a="http://schemas.openxmlformats.org/drawingml/2006/main">
+          <p:cNvPr id="9" name="Rectangle 8">
+            <a:extLst>
               <a:ext uri="{FF2B5EF4-FFF2-40B4-BE49-F238E27FC236}">
                 <a16:creationId xmlns:a16="http://schemas.microsoft.com/office/drawing/2014/main" id="{62863F89-D50F-4EB7-A460-178FA54A6572}"/>
               </a:ext>
             </a:extLst>
           </p:cNvPr>
           <p:cNvSpPr>
-            <a:spLocks xmlns:a="http://schemas.openxmlformats.org/drawingml/2006/main" noGrp="1"/>
+            <a:spLocks noGrp="1"/>
           </p:cNvSpPr>
           <p:nvPr/>
         </p:nvSpPr>
         <p:spPr>
-          <a:xfrm xmlns:a="http://schemas.openxmlformats.org/drawingml/2006/main">
-            <a:off x="6477000" y="4257675"/>
+          <a:xfrm>
+            <a:off x="661100" y="4257675"/>
             <a:ext cx="5048250" cy="923925"/>
           </a:xfrm>
-          <a:prstGeom xmlns:a="http://schemas.openxmlformats.org/drawingml/2006/main" prst="rect">
+          <a:prstGeom prst="rect">
             <a:avLst/>
           </a:prstGeom>
-          <a:noFill xmlns:a="http://schemas.openxmlformats.org/drawingml/2006/main"/>
-          <a:ln xmlns:a="http://schemas.openxmlformats.org/drawingml/2006/main" w="0">
+          <a:noFill/>
+          <a:ln w="0">
             <a:noFill/>
           </a:ln>
         </p:spPr>
         <p:txBody>
-          <a:bodyPr xmlns:a="http://schemas.openxmlformats.org/drawingml/2006/main" anchor="t"/>
-          <a:lstStyle xmlns:a="http://schemas.openxmlformats.org/drawingml/2006/main">
+          <a:bodyPr anchor="t"/>
+          <a:lstStyle>
             <a:defPPr>
               <a:defRPr sz="1950" b="0">
                 <a:solidFill>
@@ -10580,7 +8550,7 @@
               </a:defRPr>
             </a:lvl9pPr>
           </a:lstStyle>
-          <a:p xmlns:a="http://schemas.openxmlformats.org/drawingml/2006/main">
+          <a:p>
             <a:pPr>
               <a:defRPr sz="1950" b="0">
                 <a:solidFill>
@@ -10592,53 +8562,54 @@
               </a:defRPr>
             </a:pPr>
             <a:r>
-              <a:rPr sz="1950" b="0">
-                <a:solidFill>
-                  <a:srgbClr val="342E25"/>
-                </a:solidFill>
-                <a:latin typeface="Arial"/>
-                <a:ea typeface="Arial"/>
-                <a:cs typeface="Arial"/>
-              </a:rPr>
-              <a:t>Prepared documentation and this presentation with AI assistance.</a:t>
+              <a:rPr lang="en-US" dirty="0"/>
+              <a:t>Documentation (README.md)</a:t>
             </a:r>
+            <a:endParaRPr sz="1950" b="0" dirty="0">
+              <a:solidFill>
+                <a:srgbClr val="342E25"/>
+              </a:solidFill>
+              <a:latin typeface="Arial"/>
+              <a:ea typeface="Arial"/>
+              <a:cs typeface="Arial"/>
+            </a:endParaRPr>
           </a:p>
         </p:txBody>
       </p:sp>
       <p:sp>
         <p:nvSpPr>
-          <p:cNvPr id="10" name="">
-            <a:extLst xmlns:a="http://schemas.openxmlformats.org/drawingml/2006/main">
+          <p:cNvPr id="15" name="Rectangle 14">
+            <a:extLst>
               <a:ext uri="{FF2B5EF4-FFF2-40B4-BE49-F238E27FC236}">
-                <a16:creationId xmlns:a16="http://schemas.microsoft.com/office/drawing/2014/main" id="{D89CBFE2-79B6-4A06-BC67-B20C9FBC8E82}"/>
+                <a16:creationId xmlns:a16="http://schemas.microsoft.com/office/drawing/2014/main" id="{64B18879-44D2-CE3A-75F5-A114A62FD467}"/>
               </a:ext>
             </a:extLst>
           </p:cNvPr>
           <p:cNvSpPr>
-            <a:spLocks xmlns:a="http://schemas.openxmlformats.org/drawingml/2006/main" noGrp="1"/>
+            <a:spLocks noGrp="1"/>
           </p:cNvSpPr>
           <p:nvPr/>
         </p:nvSpPr>
         <p:spPr>
-          <a:xfrm xmlns:a="http://schemas.openxmlformats.org/drawingml/2006/main">
-            <a:off x="609600" y="6019800"/>
-            <a:ext cx="10953750" cy="428625"/>
+          <a:xfrm>
+            <a:off x="661100" y="5143500"/>
+            <a:ext cx="5048250" cy="1057275"/>
           </a:xfrm>
-          <a:prstGeom xmlns:a="http://schemas.openxmlformats.org/drawingml/2006/main" prst="rect">
+          <a:prstGeom prst="rect">
             <a:avLst/>
           </a:prstGeom>
-          <a:noFill xmlns:a="http://schemas.openxmlformats.org/drawingml/2006/main"/>
-          <a:ln xmlns:a="http://schemas.openxmlformats.org/drawingml/2006/main" w="0">
+          <a:noFill/>
+          <a:ln w="0">
             <a:noFill/>
           </a:ln>
         </p:spPr>
         <p:txBody>
-          <a:bodyPr xmlns:a="http://schemas.openxmlformats.org/drawingml/2006/main" anchor="t"/>
-          <a:lstStyle xmlns:a="http://schemas.openxmlformats.org/drawingml/2006/main">
+          <a:bodyPr anchor="t"/>
+          <a:lstStyle>
             <a:defPPr>
-              <a:defRPr sz="1650" b="0">
-                <a:solidFill>
-                  <a:srgbClr val="756D5D"/>
+              <a:defRPr sz="2025" b="0">
+                <a:solidFill>
+                  <a:srgbClr val="342E25"/>
                 </a:solidFill>
                 <a:latin typeface="Arial"/>
                 <a:ea typeface="Arial"/>
@@ -10646,9 +8617,9 @@
               </a:defRPr>
             </a:defPPr>
             <a:lvl1pPr>
-              <a:defRPr sz="1650" b="0">
-                <a:solidFill>
-                  <a:srgbClr val="756D5D"/>
+              <a:defRPr sz="2025" b="0">
+                <a:solidFill>
+                  <a:srgbClr val="342E25"/>
                 </a:solidFill>
                 <a:latin typeface="Arial"/>
                 <a:ea typeface="Arial"/>
@@ -10656,9 +8627,9 @@
               </a:defRPr>
             </a:lvl1pPr>
             <a:lvl2pPr>
-              <a:defRPr sz="1650" b="0">
-                <a:solidFill>
-                  <a:srgbClr val="756D5D"/>
+              <a:defRPr sz="2025" b="0">
+                <a:solidFill>
+                  <a:srgbClr val="342E25"/>
                 </a:solidFill>
                 <a:latin typeface="Arial"/>
                 <a:ea typeface="Arial"/>
@@ -10666,9 +8637,9 @@
               </a:defRPr>
             </a:lvl2pPr>
             <a:lvl3pPr>
-              <a:defRPr sz="1650" b="0">
-                <a:solidFill>
-                  <a:srgbClr val="756D5D"/>
+              <a:defRPr sz="2025" b="0">
+                <a:solidFill>
+                  <a:srgbClr val="342E25"/>
                 </a:solidFill>
                 <a:latin typeface="Arial"/>
                 <a:ea typeface="Arial"/>
@@ -10676,9 +8647,9 @@
               </a:defRPr>
             </a:lvl3pPr>
             <a:lvl4pPr>
-              <a:defRPr sz="1650" b="0">
-                <a:solidFill>
-                  <a:srgbClr val="756D5D"/>
+              <a:defRPr sz="2025" b="0">
+                <a:solidFill>
+                  <a:srgbClr val="342E25"/>
                 </a:solidFill>
                 <a:latin typeface="Arial"/>
                 <a:ea typeface="Arial"/>
@@ -10686,9 +8657,9 @@
               </a:defRPr>
             </a:lvl4pPr>
             <a:lvl5pPr>
-              <a:defRPr sz="1650" b="0">
-                <a:solidFill>
-                  <a:srgbClr val="756D5D"/>
+              <a:defRPr sz="2025" b="0">
+                <a:solidFill>
+                  <a:srgbClr val="342E25"/>
                 </a:solidFill>
                 <a:latin typeface="Arial"/>
                 <a:ea typeface="Arial"/>
@@ -10696,9 +8667,9 @@
               </a:defRPr>
             </a:lvl5pPr>
             <a:lvl6pPr>
-              <a:defRPr sz="1650" b="0">
-                <a:solidFill>
-                  <a:srgbClr val="756D5D"/>
+              <a:defRPr sz="2025" b="0">
+                <a:solidFill>
+                  <a:srgbClr val="342E25"/>
                 </a:solidFill>
                 <a:latin typeface="Arial"/>
                 <a:ea typeface="Arial"/>
@@ -10706,9 +8677,9 @@
               </a:defRPr>
             </a:lvl6pPr>
             <a:lvl7pPr>
-              <a:defRPr sz="1650" b="0">
-                <a:solidFill>
-                  <a:srgbClr val="756D5D"/>
+              <a:defRPr sz="2025" b="0">
+                <a:solidFill>
+                  <a:srgbClr val="342E25"/>
                 </a:solidFill>
                 <a:latin typeface="Arial"/>
                 <a:ea typeface="Arial"/>
@@ -10716,9 +8687,9 @@
               </a:defRPr>
             </a:lvl7pPr>
             <a:lvl8pPr>
-              <a:defRPr sz="1650" b="0">
-                <a:solidFill>
-                  <a:srgbClr val="756D5D"/>
+              <a:defRPr sz="2025" b="0">
+                <a:solidFill>
+                  <a:srgbClr val="342E25"/>
                 </a:solidFill>
                 <a:latin typeface="Arial"/>
                 <a:ea typeface="Arial"/>
@@ -10726,9 +8697,9 @@
               </a:defRPr>
             </a:lvl8pPr>
             <a:lvl9pPr>
-              <a:defRPr sz="1650" b="0">
-                <a:solidFill>
-                  <a:srgbClr val="756D5D"/>
+              <a:defRPr sz="2025" b="0">
+                <a:solidFill>
+                  <a:srgbClr val="342E25"/>
                 </a:solidFill>
                 <a:latin typeface="Arial"/>
                 <a:ea typeface="Arial"/>
@@ -10736,11 +8707,11 @@
               </a:defRPr>
             </a:lvl9pPr>
           </a:lstStyle>
-          <a:p xmlns:a="http://schemas.openxmlformats.org/drawingml/2006/main">
+          <a:p>
             <a:pPr>
-              <a:defRPr sz="1650" b="0">
-                <a:solidFill>
-                  <a:srgbClr val="756D5D"/>
+              <a:defRPr sz="2025" b="0">
+                <a:solidFill>
+                  <a:srgbClr val="342E25"/>
                 </a:solidFill>
                 <a:latin typeface="Arial"/>
                 <a:ea typeface="Arial"/>
@@ -10748,16 +8719,17 @@
               </a:defRPr>
             </a:pPr>
             <a:r>
-              <a:rPr sz="1650" b="0">
-                <a:solidFill>
-                  <a:srgbClr val="756D5D"/>
-                </a:solidFill>
-                <a:latin typeface="Arial"/>
-                <a:ea typeface="Arial"/>
-                <a:cs typeface="Arial"/>
-              </a:rPr>
-              <a:t>The game uses authored data. It does not call a generative AI service during play.</a:t>
+              <a:rPr lang="en-US" dirty="0"/>
+              <a:t>HUD</a:t>
             </a:r>
+            <a:endParaRPr sz="2025" b="0" dirty="0">
+              <a:solidFill>
+                <a:srgbClr val="342E25"/>
+              </a:solidFill>
+              <a:latin typeface="Arial"/>
+              <a:ea typeface="Arial"/>
+              <a:cs typeface="Arial"/>
+            </a:endParaRPr>
           </a:p>
         </p:txBody>
       </p:sp>
@@ -10768,1127 +8740,9 @@
       </p:ext>
     </p:extLst>
   </p:cSld>
-</p:sld>
-</file>
-
-<file path=ppt/slides/slide8.xml><?xml version="1.0" encoding="utf-8"?>
-<p:sld xmlns:p="http://schemas.openxmlformats.org/presentationml/2006/main">
-  <p:cSld>
-    <p:bg>
-      <p:bgPr>
-        <a:solidFill xmlns:a="http://schemas.openxmlformats.org/drawingml/2006/main">
-          <a:srgbClr val="F0E9D7"/>
-        </a:solidFill>
-      </p:bgPr>
-    </p:bg>
-    <p:spTree>
-      <p:nvGrpSpPr>
-        <p:cNvPr id="1" name=""/>
-        <p:cNvGrpSpPr/>
-        <p:nvPr/>
-      </p:nvGrpSpPr>
-      <p:grpSpPr>
-        <a:xfrm xmlns:a="http://schemas.openxmlformats.org/drawingml/2006/main"/>
-      </p:grpSpPr>
-      <p:sp>
-        <p:nvSpPr>
-          <p:cNvPr id="8" name="">
-            <a:extLst xmlns:a="http://schemas.openxmlformats.org/drawingml/2006/main">
-              <a:ext uri="{FF2B5EF4-FFF2-40B4-BE49-F238E27FC236}">
-                <a16:creationId xmlns:a16="http://schemas.microsoft.com/office/drawing/2014/main" id="{64ABE960-ABEB-4887-B015-63B03AF01588}"/>
-              </a:ext>
-            </a:extLst>
-          </p:cNvPr>
-          <p:cNvSpPr>
-            <a:spLocks xmlns:a="http://schemas.openxmlformats.org/drawingml/2006/main" noGrp="1"/>
-          </p:cNvSpPr>
-          <p:nvPr/>
-        </p:nvSpPr>
-        <p:spPr>
-          <a:xfrm xmlns:a="http://schemas.openxmlformats.org/drawingml/2006/main">
-            <a:off x="609600" y="438150"/>
-            <a:ext cx="10972800" cy="685800"/>
-          </a:xfrm>
-          <a:prstGeom xmlns:a="http://schemas.openxmlformats.org/drawingml/2006/main" prst="rect">
-            <a:avLst/>
-          </a:prstGeom>
-          <a:noFill xmlns:a="http://schemas.openxmlformats.org/drawingml/2006/main"/>
-          <a:ln xmlns:a="http://schemas.openxmlformats.org/drawingml/2006/main" w="0">
-            <a:noFill/>
-          </a:ln>
-        </p:spPr>
-        <p:txBody>
-          <a:bodyPr xmlns:a="http://schemas.openxmlformats.org/drawingml/2006/main" anchor="t"/>
-          <a:lstStyle xmlns:a="http://schemas.openxmlformats.org/drawingml/2006/main">
-            <a:defPPr>
-              <a:defRPr sz="3300" b="1">
-                <a:solidFill>
-                  <a:srgbClr val="342E25"/>
-                </a:solidFill>
-                <a:latin typeface="Arial"/>
-                <a:ea typeface="Arial"/>
-                <a:cs typeface="Arial"/>
-              </a:defRPr>
-            </a:defPPr>
-            <a:lvl1pPr>
-              <a:defRPr sz="3300" b="1">
-                <a:solidFill>
-                  <a:srgbClr val="342E25"/>
-                </a:solidFill>
-                <a:latin typeface="Arial"/>
-                <a:ea typeface="Arial"/>
-                <a:cs typeface="Arial"/>
-              </a:defRPr>
-            </a:lvl1pPr>
-            <a:lvl2pPr>
-              <a:defRPr sz="3300" b="1">
-                <a:solidFill>
-                  <a:srgbClr val="342E25"/>
-                </a:solidFill>
-                <a:latin typeface="Arial"/>
-                <a:ea typeface="Arial"/>
-                <a:cs typeface="Arial"/>
-              </a:defRPr>
-            </a:lvl2pPr>
-            <a:lvl3pPr>
-              <a:defRPr sz="3300" b="1">
-                <a:solidFill>
-                  <a:srgbClr val="342E25"/>
-                </a:solidFill>
-                <a:latin typeface="Arial"/>
-                <a:ea typeface="Arial"/>
-                <a:cs typeface="Arial"/>
-              </a:defRPr>
-            </a:lvl3pPr>
-            <a:lvl4pPr>
-              <a:defRPr sz="3300" b="1">
-                <a:solidFill>
-                  <a:srgbClr val="342E25"/>
-                </a:solidFill>
-                <a:latin typeface="Arial"/>
-                <a:ea typeface="Arial"/>
-                <a:cs typeface="Arial"/>
-              </a:defRPr>
-            </a:lvl4pPr>
-            <a:lvl5pPr>
-              <a:defRPr sz="3300" b="1">
-                <a:solidFill>
-                  <a:srgbClr val="342E25"/>
-                </a:solidFill>
-                <a:latin typeface="Arial"/>
-                <a:ea typeface="Arial"/>
-                <a:cs typeface="Arial"/>
-              </a:defRPr>
-            </a:lvl5pPr>
-            <a:lvl6pPr>
-              <a:defRPr sz="3300" b="1">
-                <a:solidFill>
-                  <a:srgbClr val="342E25"/>
-                </a:solidFill>
-                <a:latin typeface="Arial"/>
-                <a:ea typeface="Arial"/>
-                <a:cs typeface="Arial"/>
-              </a:defRPr>
-            </a:lvl6pPr>
-            <a:lvl7pPr>
-              <a:defRPr sz="3300" b="1">
-                <a:solidFill>
-                  <a:srgbClr val="342E25"/>
-                </a:solidFill>
-                <a:latin typeface="Arial"/>
-                <a:ea typeface="Arial"/>
-                <a:cs typeface="Arial"/>
-              </a:defRPr>
-            </a:lvl7pPr>
-            <a:lvl8pPr>
-              <a:defRPr sz="3300" b="1">
-                <a:solidFill>
-                  <a:srgbClr val="342E25"/>
-                </a:solidFill>
-                <a:latin typeface="Arial"/>
-                <a:ea typeface="Arial"/>
-                <a:cs typeface="Arial"/>
-              </a:defRPr>
-            </a:lvl8pPr>
-            <a:lvl9pPr>
-              <a:defRPr sz="3300" b="1">
-                <a:solidFill>
-                  <a:srgbClr val="342E25"/>
-                </a:solidFill>
-                <a:latin typeface="Arial"/>
-                <a:ea typeface="Arial"/>
-                <a:cs typeface="Arial"/>
-              </a:defRPr>
-            </a:lvl9pPr>
-          </a:lstStyle>
-          <a:p xmlns:a="http://schemas.openxmlformats.org/drawingml/2006/main">
-            <a:pPr>
-              <a:defRPr sz="3300" b="1">
-                <a:solidFill>
-                  <a:srgbClr val="342E25"/>
-                </a:solidFill>
-                <a:latin typeface="Arial"/>
-                <a:ea typeface="Arial"/>
-                <a:cs typeface="Arial"/>
-              </a:defRPr>
-            </a:pPr>
-            <a:r>
-              <a:rPr sz="3300" b="1">
-                <a:solidFill>
-                  <a:srgbClr val="342E25"/>
-                </a:solidFill>
-                <a:latin typeface="Arial"/>
-                <a:ea typeface="Arial"/>
-                <a:cs typeface="Arial"/>
-              </a:rPr>
-              <a:t>Running the prototype</a:t>
-            </a:r>
-          </a:p>
-        </p:txBody>
-      </p:sp>
-      <p:sp>
-        <p:nvSpPr>
-          <p:cNvPr id="2" name="">
-            <a:extLst xmlns:a="http://schemas.openxmlformats.org/drawingml/2006/main">
-              <a:ext uri="{FF2B5EF4-FFF2-40B4-BE49-F238E27FC236}">
-                <a16:creationId xmlns:a16="http://schemas.microsoft.com/office/drawing/2014/main" id="{AE55E582-386C-4EC5-84F3-0FD992D9B589}"/>
-              </a:ext>
-            </a:extLst>
-          </p:cNvPr>
-          <p:cNvSpPr>
-            <a:spLocks xmlns:a="http://schemas.openxmlformats.org/drawingml/2006/main" noGrp="1"/>
-          </p:cNvSpPr>
-          <p:nvPr/>
-        </p:nvSpPr>
-        <p:spPr>
-          <a:xfrm xmlns:a="http://schemas.openxmlformats.org/drawingml/2006/main">
-            <a:off x="609600" y="1352550"/>
-            <a:ext cx="10953750" cy="590550"/>
-          </a:xfrm>
-          <a:prstGeom xmlns:a="http://schemas.openxmlformats.org/drawingml/2006/main" prst="rect">
-            <a:avLst/>
-          </a:prstGeom>
-          <a:noFill xmlns:a="http://schemas.openxmlformats.org/drawingml/2006/main"/>
-          <a:ln xmlns:a="http://schemas.openxmlformats.org/drawingml/2006/main" w="0">
-            <a:noFill/>
-          </a:ln>
-        </p:spPr>
-        <p:txBody>
-          <a:bodyPr xmlns:a="http://schemas.openxmlformats.org/drawingml/2006/main" anchor="t"/>
-          <a:lstStyle xmlns:a="http://schemas.openxmlformats.org/drawingml/2006/main">
-            <a:defPPr>
-              <a:defRPr sz="2550" b="1">
-                <a:solidFill>
-                  <a:srgbClr val="514A35"/>
-                </a:solidFill>
-                <a:latin typeface="Arial"/>
-                <a:ea typeface="Arial"/>
-                <a:cs typeface="Arial"/>
-              </a:defRPr>
-            </a:defPPr>
-            <a:lvl1pPr>
-              <a:defRPr sz="2550" b="1">
-                <a:solidFill>
-                  <a:srgbClr val="514A35"/>
-                </a:solidFill>
-                <a:latin typeface="Arial"/>
-                <a:ea typeface="Arial"/>
-                <a:cs typeface="Arial"/>
-              </a:defRPr>
-            </a:lvl1pPr>
-            <a:lvl2pPr>
-              <a:defRPr sz="2550" b="1">
-                <a:solidFill>
-                  <a:srgbClr val="514A35"/>
-                </a:solidFill>
-                <a:latin typeface="Arial"/>
-                <a:ea typeface="Arial"/>
-                <a:cs typeface="Arial"/>
-              </a:defRPr>
-            </a:lvl2pPr>
-            <a:lvl3pPr>
-              <a:defRPr sz="2550" b="1">
-                <a:solidFill>
-                  <a:srgbClr val="514A35"/>
-                </a:solidFill>
-                <a:latin typeface="Arial"/>
-                <a:ea typeface="Arial"/>
-                <a:cs typeface="Arial"/>
-              </a:defRPr>
-            </a:lvl3pPr>
-            <a:lvl4pPr>
-              <a:defRPr sz="2550" b="1">
-                <a:solidFill>
-                  <a:srgbClr val="514A35"/>
-                </a:solidFill>
-                <a:latin typeface="Arial"/>
-                <a:ea typeface="Arial"/>
-                <a:cs typeface="Arial"/>
-              </a:defRPr>
-            </a:lvl4pPr>
-            <a:lvl5pPr>
-              <a:defRPr sz="2550" b="1">
-                <a:solidFill>
-                  <a:srgbClr val="514A35"/>
-                </a:solidFill>
-                <a:latin typeface="Arial"/>
-                <a:ea typeface="Arial"/>
-                <a:cs typeface="Arial"/>
-              </a:defRPr>
-            </a:lvl5pPr>
-            <a:lvl6pPr>
-              <a:defRPr sz="2550" b="1">
-                <a:solidFill>
-                  <a:srgbClr val="514A35"/>
-                </a:solidFill>
-                <a:latin typeface="Arial"/>
-                <a:ea typeface="Arial"/>
-                <a:cs typeface="Arial"/>
-              </a:defRPr>
-            </a:lvl6pPr>
-            <a:lvl7pPr>
-              <a:defRPr sz="2550" b="1">
-                <a:solidFill>
-                  <a:srgbClr val="514A35"/>
-                </a:solidFill>
-                <a:latin typeface="Arial"/>
-                <a:ea typeface="Arial"/>
-                <a:cs typeface="Arial"/>
-              </a:defRPr>
-            </a:lvl7pPr>
-            <a:lvl8pPr>
-              <a:defRPr sz="2550" b="1">
-                <a:solidFill>
-                  <a:srgbClr val="514A35"/>
-                </a:solidFill>
-                <a:latin typeface="Arial"/>
-                <a:ea typeface="Arial"/>
-                <a:cs typeface="Arial"/>
-              </a:defRPr>
-            </a:lvl8pPr>
-            <a:lvl9pPr>
-              <a:defRPr sz="2550" b="1">
-                <a:solidFill>
-                  <a:srgbClr val="514A35"/>
-                </a:solidFill>
-                <a:latin typeface="Arial"/>
-                <a:ea typeface="Arial"/>
-                <a:cs typeface="Arial"/>
-              </a:defRPr>
-            </a:lvl9pPr>
-          </a:lstStyle>
-          <a:p xmlns:a="http://schemas.openxmlformats.org/drawingml/2006/main">
-            <a:pPr>
-              <a:defRPr sz="2550" b="1">
-                <a:solidFill>
-                  <a:srgbClr val="514A35"/>
-                </a:solidFill>
-                <a:latin typeface="Arial"/>
-                <a:ea typeface="Arial"/>
-                <a:cs typeface="Arial"/>
-              </a:defRPr>
-            </a:pPr>
-            <a:r>
-              <a:rPr sz="2550" b="1">
-                <a:solidFill>
-                  <a:srgbClr val="514A35"/>
-                </a:solidFill>
-                <a:latin typeface="Arial"/>
-                <a:ea typeface="Arial"/>
-                <a:cs typeface="Arial"/>
-              </a:rPr>
-              <a:t>github.com/RLeja/HiddenWatts</a:t>
-            </a:r>
-          </a:p>
-        </p:txBody>
-      </p:sp>
-      <p:sp>
-        <p:nvSpPr>
-          <p:cNvPr id="3" name="">
-            <a:extLst xmlns:a="http://schemas.openxmlformats.org/drawingml/2006/main">
-              <a:ext uri="{FF2B5EF4-FFF2-40B4-BE49-F238E27FC236}">
-                <a16:creationId xmlns:a16="http://schemas.microsoft.com/office/drawing/2014/main" id="{2F2914D3-E9B3-47E3-B573-64609524307B}"/>
-              </a:ext>
-            </a:extLst>
-          </p:cNvPr>
-          <p:cNvSpPr>
-            <a:spLocks xmlns:a="http://schemas.openxmlformats.org/drawingml/2006/main" noGrp="1"/>
-          </p:cNvSpPr>
-          <p:nvPr/>
-        </p:nvSpPr>
-        <p:spPr>
-          <a:xfrm xmlns:a="http://schemas.openxmlformats.org/drawingml/2006/main">
-            <a:off x="609600" y="2343150"/>
-            <a:ext cx="10668000" cy="676275"/>
-          </a:xfrm>
-          <a:prstGeom xmlns:a="http://schemas.openxmlformats.org/drawingml/2006/main" prst="rect">
-            <a:avLst/>
-          </a:prstGeom>
-          <a:noFill xmlns:a="http://schemas.openxmlformats.org/drawingml/2006/main"/>
-          <a:ln xmlns:a="http://schemas.openxmlformats.org/drawingml/2006/main" w="0">
-            <a:noFill/>
-          </a:ln>
-        </p:spPr>
-        <p:txBody>
-          <a:bodyPr xmlns:a="http://schemas.openxmlformats.org/drawingml/2006/main" anchor="t"/>
-          <a:lstStyle xmlns:a="http://schemas.openxmlformats.org/drawingml/2006/main">
-            <a:defPPr>
-              <a:defRPr sz="2100" b="0">
-                <a:solidFill>
-                  <a:srgbClr val="342E25"/>
-                </a:solidFill>
-                <a:latin typeface="Arial"/>
-                <a:ea typeface="Arial"/>
-                <a:cs typeface="Arial"/>
-              </a:defRPr>
-            </a:defPPr>
-            <a:lvl1pPr>
-              <a:defRPr sz="2100" b="0">
-                <a:solidFill>
-                  <a:srgbClr val="342E25"/>
-                </a:solidFill>
-                <a:latin typeface="Arial"/>
-                <a:ea typeface="Arial"/>
-                <a:cs typeface="Arial"/>
-              </a:defRPr>
-            </a:lvl1pPr>
-            <a:lvl2pPr>
-              <a:defRPr sz="2100" b="0">
-                <a:solidFill>
-                  <a:srgbClr val="342E25"/>
-                </a:solidFill>
-                <a:latin typeface="Arial"/>
-                <a:ea typeface="Arial"/>
-                <a:cs typeface="Arial"/>
-              </a:defRPr>
-            </a:lvl2pPr>
-            <a:lvl3pPr>
-              <a:defRPr sz="2100" b="0">
-                <a:solidFill>
-                  <a:srgbClr val="342E25"/>
-                </a:solidFill>
-                <a:latin typeface="Arial"/>
-                <a:ea typeface="Arial"/>
-                <a:cs typeface="Arial"/>
-              </a:defRPr>
-            </a:lvl3pPr>
-            <a:lvl4pPr>
-              <a:defRPr sz="2100" b="0">
-                <a:solidFill>
-                  <a:srgbClr val="342E25"/>
-                </a:solidFill>
-                <a:latin typeface="Arial"/>
-                <a:ea typeface="Arial"/>
-                <a:cs typeface="Arial"/>
-              </a:defRPr>
-            </a:lvl4pPr>
-            <a:lvl5pPr>
-              <a:defRPr sz="2100" b="0">
-                <a:solidFill>
-                  <a:srgbClr val="342E25"/>
-                </a:solidFill>
-                <a:latin typeface="Arial"/>
-                <a:ea typeface="Arial"/>
-                <a:cs typeface="Arial"/>
-              </a:defRPr>
-            </a:lvl5pPr>
-            <a:lvl6pPr>
-              <a:defRPr sz="2100" b="0">
-                <a:solidFill>
-                  <a:srgbClr val="342E25"/>
-                </a:solidFill>
-                <a:latin typeface="Arial"/>
-                <a:ea typeface="Arial"/>
-                <a:cs typeface="Arial"/>
-              </a:defRPr>
-            </a:lvl6pPr>
-            <a:lvl7pPr>
-              <a:defRPr sz="2100" b="0">
-                <a:solidFill>
-                  <a:srgbClr val="342E25"/>
-                </a:solidFill>
-                <a:latin typeface="Arial"/>
-                <a:ea typeface="Arial"/>
-                <a:cs typeface="Arial"/>
-              </a:defRPr>
-            </a:lvl7pPr>
-            <a:lvl8pPr>
-              <a:defRPr sz="2100" b="0">
-                <a:solidFill>
-                  <a:srgbClr val="342E25"/>
-                </a:solidFill>
-                <a:latin typeface="Arial"/>
-                <a:ea typeface="Arial"/>
-                <a:cs typeface="Arial"/>
-              </a:defRPr>
-            </a:lvl8pPr>
-            <a:lvl9pPr>
-              <a:defRPr sz="2100" b="0">
-                <a:solidFill>
-                  <a:srgbClr val="342E25"/>
-                </a:solidFill>
-                <a:latin typeface="Arial"/>
-                <a:ea typeface="Arial"/>
-                <a:cs typeface="Arial"/>
-              </a:defRPr>
-            </a:lvl9pPr>
-          </a:lstStyle>
-          <a:p xmlns:a="http://schemas.openxmlformats.org/drawingml/2006/main">
-            <a:pPr>
-              <a:defRPr sz="2100" b="0">
-                <a:solidFill>
-                  <a:srgbClr val="342E25"/>
-                </a:solidFill>
-                <a:latin typeface="Arial"/>
-                <a:ea typeface="Arial"/>
-                <a:cs typeface="Arial"/>
-              </a:defRPr>
-            </a:pPr>
-            <a:r>
-              <a:rPr sz="2100" b="0">
-                <a:solidFill>
-                  <a:srgbClr val="342E25"/>
-                </a:solidFill>
-                <a:latin typeface="Arial"/>
-                <a:ea typeface="Arial"/>
-                <a:cs typeface="Arial"/>
-              </a:rPr>
-              <a:t>1. Open Releases and download the Windows x64 ZIP.</a:t>
-            </a:r>
-          </a:p>
-        </p:txBody>
-      </p:sp>
-      <p:sp>
-        <p:nvSpPr>
-          <p:cNvPr id="4" name="">
-            <a:extLst xmlns:a="http://schemas.openxmlformats.org/drawingml/2006/main">
-              <a:ext uri="{FF2B5EF4-FFF2-40B4-BE49-F238E27FC236}">
-                <a16:creationId xmlns:a16="http://schemas.microsoft.com/office/drawing/2014/main" id="{9643013C-1785-440B-BD1A-AB36EBE34314}"/>
-              </a:ext>
-            </a:extLst>
-          </p:cNvPr>
-          <p:cNvSpPr>
-            <a:spLocks xmlns:a="http://schemas.openxmlformats.org/drawingml/2006/main" noGrp="1"/>
-          </p:cNvSpPr>
-          <p:nvPr/>
-        </p:nvSpPr>
-        <p:spPr>
-          <a:xfrm xmlns:a="http://schemas.openxmlformats.org/drawingml/2006/main">
-            <a:off x="609600" y="3152775"/>
-            <a:ext cx="10668000" cy="676275"/>
-          </a:xfrm>
-          <a:prstGeom xmlns:a="http://schemas.openxmlformats.org/drawingml/2006/main" prst="rect">
-            <a:avLst/>
-          </a:prstGeom>
-          <a:noFill xmlns:a="http://schemas.openxmlformats.org/drawingml/2006/main"/>
-          <a:ln xmlns:a="http://schemas.openxmlformats.org/drawingml/2006/main" w="0">
-            <a:noFill/>
-          </a:ln>
-        </p:spPr>
-        <p:txBody>
-          <a:bodyPr xmlns:a="http://schemas.openxmlformats.org/drawingml/2006/main" anchor="t"/>
-          <a:lstStyle xmlns:a="http://schemas.openxmlformats.org/drawingml/2006/main">
-            <a:defPPr>
-              <a:defRPr sz="2100" b="0">
-                <a:solidFill>
-                  <a:srgbClr val="342E25"/>
-                </a:solidFill>
-                <a:latin typeface="Arial"/>
-                <a:ea typeface="Arial"/>
-                <a:cs typeface="Arial"/>
-              </a:defRPr>
-            </a:defPPr>
-            <a:lvl1pPr>
-              <a:defRPr sz="2100" b="0">
-                <a:solidFill>
-                  <a:srgbClr val="342E25"/>
-                </a:solidFill>
-                <a:latin typeface="Arial"/>
-                <a:ea typeface="Arial"/>
-                <a:cs typeface="Arial"/>
-              </a:defRPr>
-            </a:lvl1pPr>
-            <a:lvl2pPr>
-              <a:defRPr sz="2100" b="0">
-                <a:solidFill>
-                  <a:srgbClr val="342E25"/>
-                </a:solidFill>
-                <a:latin typeface="Arial"/>
-                <a:ea typeface="Arial"/>
-                <a:cs typeface="Arial"/>
-              </a:defRPr>
-            </a:lvl2pPr>
-            <a:lvl3pPr>
-              <a:defRPr sz="2100" b="0">
-                <a:solidFill>
-                  <a:srgbClr val="342E25"/>
-                </a:solidFill>
-                <a:latin typeface="Arial"/>
-                <a:ea typeface="Arial"/>
-                <a:cs typeface="Arial"/>
-              </a:defRPr>
-            </a:lvl3pPr>
-            <a:lvl4pPr>
-              <a:defRPr sz="2100" b="0">
-                <a:solidFill>
-                  <a:srgbClr val="342E25"/>
-                </a:solidFill>
-                <a:latin typeface="Arial"/>
-                <a:ea typeface="Arial"/>
-                <a:cs typeface="Arial"/>
-              </a:defRPr>
-            </a:lvl4pPr>
-            <a:lvl5pPr>
-              <a:defRPr sz="2100" b="0">
-                <a:solidFill>
-                  <a:srgbClr val="342E25"/>
-                </a:solidFill>
-                <a:latin typeface="Arial"/>
-                <a:ea typeface="Arial"/>
-                <a:cs typeface="Arial"/>
-              </a:defRPr>
-            </a:lvl5pPr>
-            <a:lvl6pPr>
-              <a:defRPr sz="2100" b="0">
-                <a:solidFill>
-                  <a:srgbClr val="342E25"/>
-                </a:solidFill>
-                <a:latin typeface="Arial"/>
-                <a:ea typeface="Arial"/>
-                <a:cs typeface="Arial"/>
-              </a:defRPr>
-            </a:lvl6pPr>
-            <a:lvl7pPr>
-              <a:defRPr sz="2100" b="0">
-                <a:solidFill>
-                  <a:srgbClr val="342E25"/>
-                </a:solidFill>
-                <a:latin typeface="Arial"/>
-                <a:ea typeface="Arial"/>
-                <a:cs typeface="Arial"/>
-              </a:defRPr>
-            </a:lvl7pPr>
-            <a:lvl8pPr>
-              <a:defRPr sz="2100" b="0">
-                <a:solidFill>
-                  <a:srgbClr val="342E25"/>
-                </a:solidFill>
-                <a:latin typeface="Arial"/>
-                <a:ea typeface="Arial"/>
-                <a:cs typeface="Arial"/>
-              </a:defRPr>
-            </a:lvl8pPr>
-            <a:lvl9pPr>
-              <a:defRPr sz="2100" b="0">
-                <a:solidFill>
-                  <a:srgbClr val="342E25"/>
-                </a:solidFill>
-                <a:latin typeface="Arial"/>
-                <a:ea typeface="Arial"/>
-                <a:cs typeface="Arial"/>
-              </a:defRPr>
-            </a:lvl9pPr>
-          </a:lstStyle>
-          <a:p xmlns:a="http://schemas.openxmlformats.org/drawingml/2006/main">
-            <a:pPr>
-              <a:defRPr sz="2100" b="0">
-                <a:solidFill>
-                  <a:srgbClr val="342E25"/>
-                </a:solidFill>
-                <a:latin typeface="Arial"/>
-                <a:ea typeface="Arial"/>
-                <a:cs typeface="Arial"/>
-              </a:defRPr>
-            </a:pPr>
-            <a:r>
-              <a:rPr sz="2100" b="0">
-                <a:solidFill>
-                  <a:srgbClr val="342E25"/>
-                </a:solidFill>
-                <a:latin typeface="Arial"/>
-                <a:ea typeface="Arial"/>
-                <a:cs typeface="Arial"/>
-              </a:rPr>
-              <a:t>2. Extract the whole ZIP into a folder.</a:t>
-            </a:r>
-          </a:p>
-        </p:txBody>
-      </p:sp>
-      <p:sp>
-        <p:nvSpPr>
-          <p:cNvPr id="5" name="">
-            <a:extLst xmlns:a="http://schemas.openxmlformats.org/drawingml/2006/main">
-              <a:ext uri="{FF2B5EF4-FFF2-40B4-BE49-F238E27FC236}">
-                <a16:creationId xmlns:a16="http://schemas.microsoft.com/office/drawing/2014/main" id="{030A7BBE-8D91-4540-B379-99788903FA34}"/>
-              </a:ext>
-            </a:extLst>
-          </p:cNvPr>
-          <p:cNvSpPr>
-            <a:spLocks xmlns:a="http://schemas.openxmlformats.org/drawingml/2006/main" noGrp="1"/>
-          </p:cNvSpPr>
-          <p:nvPr/>
-        </p:nvSpPr>
-        <p:spPr>
-          <a:xfrm xmlns:a="http://schemas.openxmlformats.org/drawingml/2006/main">
-            <a:off x="609600" y="3962400"/>
-            <a:ext cx="10668000" cy="676275"/>
-          </a:xfrm>
-          <a:prstGeom xmlns:a="http://schemas.openxmlformats.org/drawingml/2006/main" prst="rect">
-            <a:avLst/>
-          </a:prstGeom>
-          <a:noFill xmlns:a="http://schemas.openxmlformats.org/drawingml/2006/main"/>
-          <a:ln xmlns:a="http://schemas.openxmlformats.org/drawingml/2006/main" w="0">
-            <a:noFill/>
-          </a:ln>
-        </p:spPr>
-        <p:txBody>
-          <a:bodyPr xmlns:a="http://schemas.openxmlformats.org/drawingml/2006/main" anchor="t"/>
-          <a:lstStyle xmlns:a="http://schemas.openxmlformats.org/drawingml/2006/main">
-            <a:defPPr>
-              <a:defRPr sz="2100" b="0">
-                <a:solidFill>
-                  <a:srgbClr val="342E25"/>
-                </a:solidFill>
-                <a:latin typeface="Arial"/>
-                <a:ea typeface="Arial"/>
-                <a:cs typeface="Arial"/>
-              </a:defRPr>
-            </a:defPPr>
-            <a:lvl1pPr>
-              <a:defRPr sz="2100" b="0">
-                <a:solidFill>
-                  <a:srgbClr val="342E25"/>
-                </a:solidFill>
-                <a:latin typeface="Arial"/>
-                <a:ea typeface="Arial"/>
-                <a:cs typeface="Arial"/>
-              </a:defRPr>
-            </a:lvl1pPr>
-            <a:lvl2pPr>
-              <a:defRPr sz="2100" b="0">
-                <a:solidFill>
-                  <a:srgbClr val="342E25"/>
-                </a:solidFill>
-                <a:latin typeface="Arial"/>
-                <a:ea typeface="Arial"/>
-                <a:cs typeface="Arial"/>
-              </a:defRPr>
-            </a:lvl2pPr>
-            <a:lvl3pPr>
-              <a:defRPr sz="2100" b="0">
-                <a:solidFill>
-                  <a:srgbClr val="342E25"/>
-                </a:solidFill>
-                <a:latin typeface="Arial"/>
-                <a:ea typeface="Arial"/>
-                <a:cs typeface="Arial"/>
-              </a:defRPr>
-            </a:lvl3pPr>
-            <a:lvl4pPr>
-              <a:defRPr sz="2100" b="0">
-                <a:solidFill>
-                  <a:srgbClr val="342E25"/>
-                </a:solidFill>
-                <a:latin typeface="Arial"/>
-                <a:ea typeface="Arial"/>
-                <a:cs typeface="Arial"/>
-              </a:defRPr>
-            </a:lvl4pPr>
-            <a:lvl5pPr>
-              <a:defRPr sz="2100" b="0">
-                <a:solidFill>
-                  <a:srgbClr val="342E25"/>
-                </a:solidFill>
-                <a:latin typeface="Arial"/>
-                <a:ea typeface="Arial"/>
-                <a:cs typeface="Arial"/>
-              </a:defRPr>
-            </a:lvl5pPr>
-            <a:lvl6pPr>
-              <a:defRPr sz="2100" b="0">
-                <a:solidFill>
-                  <a:srgbClr val="342E25"/>
-                </a:solidFill>
-                <a:latin typeface="Arial"/>
-                <a:ea typeface="Arial"/>
-                <a:cs typeface="Arial"/>
-              </a:defRPr>
-            </a:lvl6pPr>
-            <a:lvl7pPr>
-              <a:defRPr sz="2100" b="0">
-                <a:solidFill>
-                  <a:srgbClr val="342E25"/>
-                </a:solidFill>
-                <a:latin typeface="Arial"/>
-                <a:ea typeface="Arial"/>
-                <a:cs typeface="Arial"/>
-              </a:defRPr>
-            </a:lvl7pPr>
-            <a:lvl8pPr>
-              <a:defRPr sz="2100" b="0">
-                <a:solidFill>
-                  <a:srgbClr val="342E25"/>
-                </a:solidFill>
-                <a:latin typeface="Arial"/>
-                <a:ea typeface="Arial"/>
-                <a:cs typeface="Arial"/>
-              </a:defRPr>
-            </a:lvl8pPr>
-            <a:lvl9pPr>
-              <a:defRPr sz="2100" b="0">
-                <a:solidFill>
-                  <a:srgbClr val="342E25"/>
-                </a:solidFill>
-                <a:latin typeface="Arial"/>
-                <a:ea typeface="Arial"/>
-                <a:cs typeface="Arial"/>
-              </a:defRPr>
-            </a:lvl9pPr>
-          </a:lstStyle>
-          <a:p xmlns:a="http://schemas.openxmlformats.org/drawingml/2006/main">
-            <a:pPr>
-              <a:defRPr sz="2100" b="0">
-                <a:solidFill>
-                  <a:srgbClr val="342E25"/>
-                </a:solidFill>
-                <a:latin typeface="Arial"/>
-                <a:ea typeface="Arial"/>
-                <a:cs typeface="Arial"/>
-              </a:defRPr>
-            </a:pPr>
-            <a:r>
-              <a:rPr sz="2100" b="0">
-                <a:solidFill>
-                  <a:srgbClr val="342E25"/>
-                </a:solidFill>
-                <a:latin typeface="Arial"/>
-                <a:ea typeface="Arial"/>
-                <a:cs typeface="Arial"/>
-              </a:rPr>
-              <a:t>3. Launch HiddenWatts.exe and choose Begin investigation.</a:t>
-            </a:r>
-          </a:p>
-        </p:txBody>
-      </p:sp>
-      <p:sp>
-        <p:nvSpPr>
-          <p:cNvPr id="6" name="">
-            <a:extLst xmlns:a="http://schemas.openxmlformats.org/drawingml/2006/main">
-              <a:ext uri="{FF2B5EF4-FFF2-40B4-BE49-F238E27FC236}">
-                <a16:creationId xmlns:a16="http://schemas.microsoft.com/office/drawing/2014/main" id="{2E8E86BE-609F-4935-8422-5A3505C1BFB2}"/>
-              </a:ext>
-            </a:extLst>
-          </p:cNvPr>
-          <p:cNvSpPr>
-            <a:spLocks xmlns:a="http://schemas.openxmlformats.org/drawingml/2006/main" noGrp="1"/>
-          </p:cNvSpPr>
-          <p:nvPr/>
-        </p:nvSpPr>
-        <p:spPr>
-          <a:xfrm xmlns:a="http://schemas.openxmlformats.org/drawingml/2006/main">
-            <a:off x="609600" y="4772025"/>
-            <a:ext cx="10668000" cy="676275"/>
-          </a:xfrm>
-          <a:prstGeom xmlns:a="http://schemas.openxmlformats.org/drawingml/2006/main" prst="rect">
-            <a:avLst/>
-          </a:prstGeom>
-          <a:noFill xmlns:a="http://schemas.openxmlformats.org/drawingml/2006/main"/>
-          <a:ln xmlns:a="http://schemas.openxmlformats.org/drawingml/2006/main" w="0">
-            <a:noFill/>
-          </a:ln>
-        </p:spPr>
-        <p:txBody>
-          <a:bodyPr xmlns:a="http://schemas.openxmlformats.org/drawingml/2006/main" anchor="t"/>
-          <a:lstStyle xmlns:a="http://schemas.openxmlformats.org/drawingml/2006/main">
-            <a:defPPr>
-              <a:defRPr sz="2100" b="0">
-                <a:solidFill>
-                  <a:srgbClr val="342E25"/>
-                </a:solidFill>
-                <a:latin typeface="Arial"/>
-                <a:ea typeface="Arial"/>
-                <a:cs typeface="Arial"/>
-              </a:defRPr>
-            </a:defPPr>
-            <a:lvl1pPr>
-              <a:defRPr sz="2100" b="0">
-                <a:solidFill>
-                  <a:srgbClr val="342E25"/>
-                </a:solidFill>
-                <a:latin typeface="Arial"/>
-                <a:ea typeface="Arial"/>
-                <a:cs typeface="Arial"/>
-              </a:defRPr>
-            </a:lvl1pPr>
-            <a:lvl2pPr>
-              <a:defRPr sz="2100" b="0">
-                <a:solidFill>
-                  <a:srgbClr val="342E25"/>
-                </a:solidFill>
-                <a:latin typeface="Arial"/>
-                <a:ea typeface="Arial"/>
-                <a:cs typeface="Arial"/>
-              </a:defRPr>
-            </a:lvl2pPr>
-            <a:lvl3pPr>
-              <a:defRPr sz="2100" b="0">
-                <a:solidFill>
-                  <a:srgbClr val="342E25"/>
-                </a:solidFill>
-                <a:latin typeface="Arial"/>
-                <a:ea typeface="Arial"/>
-                <a:cs typeface="Arial"/>
-              </a:defRPr>
-            </a:lvl3pPr>
-            <a:lvl4pPr>
-              <a:defRPr sz="2100" b="0">
-                <a:solidFill>
-                  <a:srgbClr val="342E25"/>
-                </a:solidFill>
-                <a:latin typeface="Arial"/>
-                <a:ea typeface="Arial"/>
-                <a:cs typeface="Arial"/>
-              </a:defRPr>
-            </a:lvl4pPr>
-            <a:lvl5pPr>
-              <a:defRPr sz="2100" b="0">
-                <a:solidFill>
-                  <a:srgbClr val="342E25"/>
-                </a:solidFill>
-                <a:latin typeface="Arial"/>
-                <a:ea typeface="Arial"/>
-                <a:cs typeface="Arial"/>
-              </a:defRPr>
-            </a:lvl5pPr>
-            <a:lvl6pPr>
-              <a:defRPr sz="2100" b="0">
-                <a:solidFill>
-                  <a:srgbClr val="342E25"/>
-                </a:solidFill>
-                <a:latin typeface="Arial"/>
-                <a:ea typeface="Arial"/>
-                <a:cs typeface="Arial"/>
-              </a:defRPr>
-            </a:lvl6pPr>
-            <a:lvl7pPr>
-              <a:defRPr sz="2100" b="0">
-                <a:solidFill>
-                  <a:srgbClr val="342E25"/>
-                </a:solidFill>
-                <a:latin typeface="Arial"/>
-                <a:ea typeface="Arial"/>
-                <a:cs typeface="Arial"/>
-              </a:defRPr>
-            </a:lvl7pPr>
-            <a:lvl8pPr>
-              <a:defRPr sz="2100" b="0">
-                <a:solidFill>
-                  <a:srgbClr val="342E25"/>
-                </a:solidFill>
-                <a:latin typeface="Arial"/>
-                <a:ea typeface="Arial"/>
-                <a:cs typeface="Arial"/>
-              </a:defRPr>
-            </a:lvl8pPr>
-            <a:lvl9pPr>
-              <a:defRPr sz="2100" b="0">
-                <a:solidFill>
-                  <a:srgbClr val="342E25"/>
-                </a:solidFill>
-                <a:latin typeface="Arial"/>
-                <a:ea typeface="Arial"/>
-                <a:cs typeface="Arial"/>
-              </a:defRPr>
-            </a:lvl9pPr>
-          </a:lstStyle>
-          <a:p xmlns:a="http://schemas.openxmlformats.org/drawingml/2006/main">
-            <a:pPr>
-              <a:defRPr sz="2100" b="0">
-                <a:solidFill>
-                  <a:srgbClr val="342E25"/>
-                </a:solidFill>
-                <a:latin typeface="Arial"/>
-                <a:ea typeface="Arial"/>
-                <a:cs typeface="Arial"/>
-              </a:defRPr>
-            </a:pPr>
-            <a:r>
-              <a:rPr sz="2100" b="0">
-                <a:solidFill>
-                  <a:srgbClr val="342E25"/>
-                </a:solidFill>
-                <a:latin typeface="Arial"/>
-                <a:ea typeface="Arial"/>
-                <a:cs typeface="Arial"/>
-              </a:rPr>
-              <a:t>4. Keep the executable, PCK and data folder together.</a:t>
-            </a:r>
-          </a:p>
-        </p:txBody>
-      </p:sp>
-      <p:sp>
-        <p:nvSpPr>
-          <p:cNvPr id="7" name="">
-            <a:extLst xmlns:a="http://schemas.openxmlformats.org/drawingml/2006/main">
-              <a:ext uri="{FF2B5EF4-FFF2-40B4-BE49-F238E27FC236}">
-                <a16:creationId xmlns:a16="http://schemas.microsoft.com/office/drawing/2014/main" id="{47DD91B1-DD5D-4EC8-91FD-A8EDA5032038}"/>
-              </a:ext>
-            </a:extLst>
-          </p:cNvPr>
-          <p:cNvSpPr>
-            <a:spLocks xmlns:a="http://schemas.openxmlformats.org/drawingml/2006/main" noGrp="1"/>
-          </p:cNvSpPr>
-          <p:nvPr/>
-        </p:nvSpPr>
-        <p:spPr>
-          <a:xfrm xmlns:a="http://schemas.openxmlformats.org/drawingml/2006/main">
-            <a:off x="609600" y="5848350"/>
-            <a:ext cx="10858500" cy="571500"/>
-          </a:xfrm>
-          <a:prstGeom xmlns:a="http://schemas.openxmlformats.org/drawingml/2006/main" prst="rect">
-            <a:avLst/>
-          </a:prstGeom>
-          <a:noFill xmlns:a="http://schemas.openxmlformats.org/drawingml/2006/main"/>
-          <a:ln xmlns:a="http://schemas.openxmlformats.org/drawingml/2006/main" w="0">
-            <a:noFill/>
-          </a:ln>
-        </p:spPr>
-        <p:txBody>
-          <a:bodyPr xmlns:a="http://schemas.openxmlformats.org/drawingml/2006/main" anchor="t"/>
-          <a:lstStyle xmlns:a="http://schemas.openxmlformats.org/drawingml/2006/main">
-            <a:defPPr>
-              <a:defRPr sz="1800" b="0">
-                <a:solidFill>
-                  <a:srgbClr val="756D5D"/>
-                </a:solidFill>
-                <a:latin typeface="Arial"/>
-                <a:ea typeface="Arial"/>
-                <a:cs typeface="Arial"/>
-              </a:defRPr>
-            </a:defPPr>
-            <a:lvl1pPr>
-              <a:defRPr sz="1800" b="0">
-                <a:solidFill>
-                  <a:srgbClr val="756D5D"/>
-                </a:solidFill>
-                <a:latin typeface="Arial"/>
-                <a:ea typeface="Arial"/>
-                <a:cs typeface="Arial"/>
-              </a:defRPr>
-            </a:lvl1pPr>
-            <a:lvl2pPr>
-              <a:defRPr sz="1800" b="0">
-                <a:solidFill>
-                  <a:srgbClr val="756D5D"/>
-                </a:solidFill>
-                <a:latin typeface="Arial"/>
-                <a:ea typeface="Arial"/>
-                <a:cs typeface="Arial"/>
-              </a:defRPr>
-            </a:lvl2pPr>
-            <a:lvl3pPr>
-              <a:defRPr sz="1800" b="0">
-                <a:solidFill>
-                  <a:srgbClr val="756D5D"/>
-                </a:solidFill>
-                <a:latin typeface="Arial"/>
-                <a:ea typeface="Arial"/>
-                <a:cs typeface="Arial"/>
-              </a:defRPr>
-            </a:lvl3pPr>
-            <a:lvl4pPr>
-              <a:defRPr sz="1800" b="0">
-                <a:solidFill>
-                  <a:srgbClr val="756D5D"/>
-                </a:solidFill>
-                <a:latin typeface="Arial"/>
-                <a:ea typeface="Arial"/>
-                <a:cs typeface="Arial"/>
-              </a:defRPr>
-            </a:lvl4pPr>
-            <a:lvl5pPr>
-              <a:defRPr sz="1800" b="0">
-                <a:solidFill>
-                  <a:srgbClr val="756D5D"/>
-                </a:solidFill>
-                <a:latin typeface="Arial"/>
-                <a:ea typeface="Arial"/>
-                <a:cs typeface="Arial"/>
-              </a:defRPr>
-            </a:lvl5pPr>
-            <a:lvl6pPr>
-              <a:defRPr sz="1800" b="0">
-                <a:solidFill>
-                  <a:srgbClr val="756D5D"/>
-                </a:solidFill>
-                <a:latin typeface="Arial"/>
-                <a:ea typeface="Arial"/>
-                <a:cs typeface="Arial"/>
-              </a:defRPr>
-            </a:lvl6pPr>
-            <a:lvl7pPr>
-              <a:defRPr sz="1800" b="0">
-                <a:solidFill>
-                  <a:srgbClr val="756D5D"/>
-                </a:solidFill>
-                <a:latin typeface="Arial"/>
-                <a:ea typeface="Arial"/>
-                <a:cs typeface="Arial"/>
-              </a:defRPr>
-            </a:lvl7pPr>
-            <a:lvl8pPr>
-              <a:defRPr sz="1800" b="0">
-                <a:solidFill>
-                  <a:srgbClr val="756D5D"/>
-                </a:solidFill>
-                <a:latin typeface="Arial"/>
-                <a:ea typeface="Arial"/>
-                <a:cs typeface="Arial"/>
-              </a:defRPr>
-            </a:lvl8pPr>
-            <a:lvl9pPr>
-              <a:defRPr sz="1800" b="0">
-                <a:solidFill>
-                  <a:srgbClr val="756D5D"/>
-                </a:solidFill>
-                <a:latin typeface="Arial"/>
-                <a:ea typeface="Arial"/>
-                <a:cs typeface="Arial"/>
-              </a:defRPr>
-            </a:lvl9pPr>
-          </a:lstStyle>
-          <a:p xmlns:a="http://schemas.openxmlformats.org/drawingml/2006/main">
-            <a:pPr>
-              <a:defRPr sz="1800" b="0">
-                <a:solidFill>
-                  <a:srgbClr val="756D5D"/>
-                </a:solidFill>
-                <a:latin typeface="Arial"/>
-                <a:ea typeface="Arial"/>
-                <a:cs typeface="Arial"/>
-              </a:defRPr>
-            </a:pPr>
-            <a:r>
-              <a:rPr sz="1800" b="0">
-                <a:solidFill>
-                  <a:srgbClr val="756D5D"/>
-                </a:solidFill>
-                <a:latin typeface="Arial"/>
-                <a:ea typeface="Arial"/>
-                <a:cs typeface="Arial"/>
-              </a:rPr>
-              <a:t>No Godot or .NET installation needed. The download includes the runtime.</a:t>
-            </a:r>
-          </a:p>
-        </p:txBody>
-      </p:sp>
-    </p:spTree>
-    <p:extLst>
-      <p:ext uri="{BB962C8B-B14F-4D97-AF65-F5344CB8AC3E}">
-        <p14:creationId xmlns:p14="http://schemas.microsoft.com/office/powerpoint/2010/main" val="1182762445"/>
-      </p:ext>
-    </p:extLst>
-  </p:cSld>
+  <p:clrMapOvr>
+    <a:masterClrMapping/>
+  </p:clrMapOvr>
 </p:sld>
 </file>
 
@@ -12134,5 +8988,254 @@
       </a:bgFillStyleLst>
     </a:fmtScheme>
   </a:themeElements>
+  <a:objectDefaults/>
+  <a:extraClrSchemeLst/>
+</a:theme>
+</file>
+
+<file path=ppt/theme/theme2.xml><?xml version="1.0" encoding="utf-8"?>
+<a:theme xmlns:a="http://schemas.openxmlformats.org/drawingml/2006/main" name="ChatGPT">
+  <a:themeElements>
+    <a:clrScheme name="ChatGPT">
+      <a:dk1>
+        <a:srgbClr val="000000"/>
+      </a:dk1>
+      <a:lt1>
+        <a:srgbClr val="FFFFFF"/>
+      </a:lt1>
+      <a:dk2>
+        <a:srgbClr val="0E2841"/>
+      </a:dk2>
+      <a:lt2>
+        <a:srgbClr val="E8E8E8"/>
+      </a:lt2>
+      <a:accent1>
+        <a:srgbClr val="156082"/>
+      </a:accent1>
+      <a:accent2>
+        <a:srgbClr val="E97132"/>
+      </a:accent2>
+      <a:accent3>
+        <a:srgbClr val="196B24"/>
+      </a:accent3>
+      <a:accent4>
+        <a:srgbClr val="0F9ED5"/>
+      </a:accent4>
+      <a:accent5>
+        <a:srgbClr val="A02B93"/>
+      </a:accent5>
+      <a:accent6>
+        <a:srgbClr val="4EA72E"/>
+      </a:accent6>
+      <a:hlink>
+        <a:srgbClr val="467886"/>
+      </a:hlink>
+      <a:folHlink>
+        <a:srgbClr val="96607D"/>
+      </a:folHlink>
+    </a:clrScheme>
+    <a:fontScheme name="">
+      <a:majorFont>
+        <a:latin typeface="Aptos"/>
+        <a:ea typeface=""/>
+        <a:cs typeface=""/>
+      </a:majorFont>
+      <a:minorFont>
+        <a:latin typeface="Aptos"/>
+        <a:ea typeface=""/>
+        <a:cs typeface=""/>
+      </a:minorFont>
+    </a:fontScheme>
+    <a:fmtScheme name="ChatGPT">
+      <a:fillStyleLst>
+        <a:solidFill>
+          <a:schemeClr val="phClr"/>
+        </a:solidFill>
+        <a:gradFill>
+          <a:gsLst>
+            <a:gs pos="0">
+              <a:schemeClr val="phClr">
+                <a:tint val="67000"/>
+                <a:lumMod val="110000"/>
+                <a:satMod val="105000"/>
+              </a:schemeClr>
+            </a:gs>
+            <a:gs pos="50000">
+              <a:schemeClr val="phClr">
+                <a:tint val="73000"/>
+                <a:lumMod val="105000"/>
+                <a:satMod val="103000"/>
+              </a:schemeClr>
+            </a:gs>
+            <a:gs pos="100000">
+              <a:schemeClr val="phClr">
+                <a:tint val="81000"/>
+                <a:lumMod val="105000"/>
+                <a:satMod val="109000"/>
+              </a:schemeClr>
+            </a:gs>
+          </a:gsLst>
+          <a:lin ang="5400000" scaled="0"/>
+        </a:gradFill>
+        <a:gradFill>
+          <a:gsLst>
+            <a:gs pos="0">
+              <a:schemeClr val="phClr">
+                <a:tint val="94000"/>
+                <a:lumMod val="102000"/>
+                <a:satMod val="103000"/>
+              </a:schemeClr>
+            </a:gs>
+            <a:gs pos="50000">
+              <a:schemeClr val="phClr">
+                <a:shade val="100000"/>
+                <a:lumMod val="100000"/>
+                <a:satMod val="110000"/>
+              </a:schemeClr>
+            </a:gs>
+            <a:gs pos="100000">
+              <a:schemeClr val="phClr">
+                <a:shade val="78000"/>
+                <a:lumMod val="99000"/>
+                <a:satMod val="120000"/>
+              </a:schemeClr>
+            </a:gs>
+          </a:gsLst>
+          <a:lin ang="5400000" scaled="0"/>
+        </a:gradFill>
+      </a:fillStyleLst>
+      <a:lnStyleLst>
+        <a:ln w="12700">
+          <a:solidFill>
+            <a:schemeClr val="phClr"/>
+          </a:solidFill>
+          <a:prstDash val="solid"/>
+        </a:ln>
+        <a:ln w="19050">
+          <a:solidFill>
+            <a:schemeClr val="phClr"/>
+          </a:solidFill>
+          <a:prstDash val="solid"/>
+        </a:ln>
+        <a:ln w="25400">
+          <a:solidFill>
+            <a:schemeClr val="phClr"/>
+          </a:solidFill>
+          <a:prstDash val="solid"/>
+        </a:ln>
+      </a:lnStyleLst>
+      <a:effectStyleLst>
+        <a:effectStyle>
+          <a:effectLst/>
+        </a:effectStyle>
+        <a:effectStyle>
+          <a:effectLst/>
+        </a:effectStyle>
+        <a:effectStyle>
+          <a:effectLst>
+            <a:outerShdw blurRad="57150" dist="19050" dir="5400000">
+              <a:srgbClr val="000000">
+                <a:alpha val="16000"/>
+              </a:srgbClr>
+            </a:outerShdw>
+          </a:effectLst>
+        </a:effectStyle>
+        <a:effectStyle>
+          <a:effectLst>
+            <a:outerShdw blurRad="19050" dist="9525" dir="5400000">
+              <a:srgbClr val="000000">
+                <a:alpha val="6000"/>
+              </a:srgbClr>
+            </a:outerShdw>
+          </a:effectLst>
+        </a:effectStyle>
+        <a:effectStyle>
+          <a:effectLst>
+            <a:outerShdw blurRad="28575" dist="9525" dir="5400000">
+              <a:srgbClr val="000000">
+                <a:alpha val="8000"/>
+              </a:srgbClr>
+            </a:outerShdw>
+          </a:effectLst>
+        </a:effectStyle>
+        <a:effectStyle>
+          <a:effectLst>
+            <a:outerShdw blurRad="57150" dist="19050" dir="5400000">
+              <a:srgbClr val="000000">
+                <a:alpha val="10000"/>
+              </a:srgbClr>
+            </a:outerShdw>
+          </a:effectLst>
+        </a:effectStyle>
+        <a:effectStyle>
+          <a:effectLst>
+            <a:outerShdw blurRad="114300" dist="38100" dir="5400000">
+              <a:srgbClr val="000000">
+                <a:alpha val="12000"/>
+              </a:srgbClr>
+            </a:outerShdw>
+          </a:effectLst>
+        </a:effectStyle>
+        <a:effectStyle>
+          <a:effectLst>
+            <a:outerShdw blurRad="171450" dist="57150" dir="5400000">
+              <a:srgbClr val="000000">
+                <a:alpha val="16000"/>
+              </a:srgbClr>
+            </a:outerShdw>
+          </a:effectLst>
+        </a:effectStyle>
+        <a:effectStyle>
+          <a:effectLst>
+            <a:outerShdw blurRad="266700" dist="95250" dir="5400000">
+              <a:srgbClr val="000000">
+                <a:alpha val="24000"/>
+              </a:srgbClr>
+            </a:outerShdw>
+          </a:effectLst>
+        </a:effectStyle>
+      </a:effectStyleLst>
+      <a:bgFillStyleLst>
+        <a:solidFill>
+          <a:schemeClr val="phClr"/>
+        </a:solidFill>
+        <a:solidFill>
+          <a:schemeClr val="phClr">
+            <a:tint val="95000"/>
+            <a:satMod val="170000"/>
+          </a:schemeClr>
+        </a:solidFill>
+        <a:gradFill>
+          <a:gsLst>
+            <a:gs pos="0">
+              <a:schemeClr val="phClr">
+                <a:tint val="93000"/>
+                <a:shade val="98000"/>
+                <a:lumMod val="102000"/>
+                <a:satMod val="150000"/>
+              </a:schemeClr>
+            </a:gs>
+            <a:gs pos="50000">
+              <a:schemeClr val="phClr">
+                <a:tint val="98000"/>
+                <a:shade val="90000"/>
+                <a:lumMod val="103000"/>
+                <a:satMod val="130000"/>
+              </a:schemeClr>
+            </a:gs>
+            <a:gs pos="100000">
+              <a:schemeClr val="phClr">
+                <a:shade val="63000"/>
+                <a:satMod val="120000"/>
+              </a:schemeClr>
+            </a:gs>
+          </a:gsLst>
+          <a:lin ang="5400000" scaled="0"/>
+        </a:gradFill>
+      </a:bgFillStyleLst>
+    </a:fmtScheme>
+  </a:themeElements>
+  <a:objectDefaults/>
+  <a:extraClrSchemeLst/>
 </a:theme>
 </file>